--- a/EGT307 PRESENTATION.pptx
+++ b/EGT307 PRESENTATION.pptx
@@ -33361,7 +33361,25 @@
           <a:p>
             <a:r>
               <a:rPr lang="en-US" dirty="0"/>
-              <a:t>BY: </a:t>
+              <a:t>BY: TEAM BACON</a:t>
+            </a:r>
+          </a:p>
+          <a:p>
+            <a:r>
+              <a:rPr lang="en-US" dirty="0"/>
+              <a:t>WEI GUAN</a:t>
+            </a:r>
+          </a:p>
+          <a:p>
+            <a:r>
+              <a:rPr lang="en-US" dirty="0"/>
+              <a:t>SHUN WEI </a:t>
+            </a:r>
+          </a:p>
+          <a:p>
+            <a:r>
+              <a:rPr lang="en-US" dirty="0"/>
+              <a:t>DEREK</a:t>
             </a:r>
           </a:p>
         </p:txBody>
@@ -34211,6 +34229,35 @@
 </file>
 
 <file path=customXml/item1.xml><?xml version="1.0" encoding="utf-8"?>
+<?mso-contentType ?>
+<FormTemplates xmlns="http://schemas.microsoft.com/sharepoint/v3/contenttype/forms">
+  <Display>DocumentLibraryForm</Display>
+  <Edit>DocumentLibraryForm</Edit>
+  <New>DocumentLibraryForm</New>
+</FormTemplates>
+</file>
+
+<file path=customXml/item2.xml><?xml version="1.0" encoding="utf-8"?>
+<p:properties xmlns:p="http://schemas.microsoft.com/office/2006/metadata/properties" xmlns:xsi="http://www.w3.org/2001/XMLSchema-instance" xmlns:pc="http://schemas.microsoft.com/office/infopath/2007/PartnerControls">
+  <documentManagement>
+    <_ip_UnifiedCompliancePolicyUIAction xmlns="http://schemas.microsoft.com/sharepoint/v3" xsi:nil="true"/>
+    <Image xmlns="71af3243-3dd4-4a8d-8c0d-dd76da1f02a5">
+      <Url xsi:nil="true"/>
+      <Description xsi:nil="true"/>
+    </Image>
+    <Status xmlns="71af3243-3dd4-4a8d-8c0d-dd76da1f02a5">Not started</Status>
+    <Background xmlns="71af3243-3dd4-4a8d-8c0d-dd76da1f02a5">false</Background>
+    <_ip_UnifiedCompliancePolicyProperties xmlns="http://schemas.microsoft.com/sharepoint/v3" xsi:nil="true"/>
+    <ImageTagsTaxHTField xmlns="71af3243-3dd4-4a8d-8c0d-dd76da1f02a5">
+      <Terms xmlns="http://schemas.microsoft.com/office/infopath/2007/PartnerControls"/>
+    </ImageTagsTaxHTField>
+    <TaxCatchAll xmlns="230e9df3-be65-4c73-a93b-d1236ebd677e" xsi:nil="true"/>
+    <MediaServiceKeyPoints xmlns="71af3243-3dd4-4a8d-8c0d-dd76da1f02a5" xsi:nil="true"/>
+  </documentManagement>
+</p:properties>
+</file>
+
+<file path=customXml/item3.xml><?xml version="1.0" encoding="utf-8"?>
 <ct:contentTypeSchema xmlns:ct="http://schemas.microsoft.com/office/2006/metadata/contentType" xmlns:ma="http://schemas.microsoft.com/office/2006/metadata/properties/metaAttributes" ct:_="" ma:_="" ma:contentTypeName="Document" ma:contentTypeID="0x01010079F111ED35F8CC479449609E8A0923A6" ma:contentTypeVersion="30" ma:contentTypeDescription="Create a new document." ma:contentTypeScope="" ma:versionID="cec0622158e8f13124e9e8fd4de31bd1">
   <xsd:schema xmlns:xsd="http://www.w3.org/2001/XMLSchema" xmlns:xs="http://www.w3.org/2001/XMLSchema" xmlns:p="http://schemas.microsoft.com/office/2006/metadata/properties" xmlns:ns1="http://schemas.microsoft.com/sharepoint/v3" xmlns:ns2="71af3243-3dd4-4a8d-8c0d-dd76da1f02a5" xmlns:ns3="16c05727-aa75-4e4a-9b5f-8a80a1165891" xmlns:ns4="230e9df3-be65-4c73-a93b-d1236ebd677e" targetNamespace="http://schemas.microsoft.com/office/2006/metadata/properties" ma:root="true" ma:fieldsID="3b52f30ab005d15df08657af532e6e38" ns1:_="" ns2:_="" ns3:_="" ns4:_="">
     <xsd:import namespace="http://schemas.microsoft.com/sharepoint/v3"/>
@@ -34528,52 +34575,10 @@
 </ct:contentTypeSchema>
 </file>
 
-<file path=customXml/item2.xml><?xml version="1.0" encoding="utf-8"?>
-<p:properties xmlns:p="http://schemas.microsoft.com/office/2006/metadata/properties" xmlns:xsi="http://www.w3.org/2001/XMLSchema-instance" xmlns:pc="http://schemas.microsoft.com/office/infopath/2007/PartnerControls">
-  <documentManagement>
-    <_ip_UnifiedCompliancePolicyUIAction xmlns="http://schemas.microsoft.com/sharepoint/v3" xsi:nil="true"/>
-    <Image xmlns="71af3243-3dd4-4a8d-8c0d-dd76da1f02a5">
-      <Url xsi:nil="true"/>
-      <Description xsi:nil="true"/>
-    </Image>
-    <Status xmlns="71af3243-3dd4-4a8d-8c0d-dd76da1f02a5">Not started</Status>
-    <Background xmlns="71af3243-3dd4-4a8d-8c0d-dd76da1f02a5">false</Background>
-    <_ip_UnifiedCompliancePolicyProperties xmlns="http://schemas.microsoft.com/sharepoint/v3" xsi:nil="true"/>
-    <ImageTagsTaxHTField xmlns="71af3243-3dd4-4a8d-8c0d-dd76da1f02a5">
-      <Terms xmlns="http://schemas.microsoft.com/office/infopath/2007/PartnerControls"/>
-    </ImageTagsTaxHTField>
-    <TaxCatchAll xmlns="230e9df3-be65-4c73-a93b-d1236ebd677e" xsi:nil="true"/>
-    <MediaServiceKeyPoints xmlns="71af3243-3dd4-4a8d-8c0d-dd76da1f02a5" xsi:nil="true"/>
-  </documentManagement>
-</p:properties>
-</file>
-
-<file path=customXml/item3.xml><?xml version="1.0" encoding="utf-8"?>
-<?mso-contentType ?>
-<FormTemplates xmlns="http://schemas.microsoft.com/sharepoint/v3/contenttype/forms">
-  <Display>DocumentLibraryForm</Display>
-  <Edit>DocumentLibraryForm</Edit>
-  <New>DocumentLibraryForm</New>
-</FormTemplates>
-</file>
-
 <file path=customXml/itemProps1.xml><?xml version="1.0" encoding="utf-8"?>
-<ds:datastoreItem xmlns:ds="http://schemas.openxmlformats.org/officeDocument/2006/customXml" ds:itemID="{9EEC3793-C1BC-496C-A03C-202DFFC513D6}">
+<ds:datastoreItem xmlns:ds="http://schemas.openxmlformats.org/officeDocument/2006/customXml" ds:itemID="{D3301439-688F-4D19-B908-B48B62C56078}">
   <ds:schemaRefs>
-    <ds:schemaRef ds:uri="http://schemas.microsoft.com/office/2006/metadata/contentType"/>
-    <ds:schemaRef ds:uri="http://schemas.microsoft.com/office/2006/metadata/properties/metaAttributes"/>
-    <ds:schemaRef ds:uri="http://www.w3.org/2001/XMLSchema"/>
-    <ds:schemaRef ds:uri="http://schemas.microsoft.com/office/2006/metadata/properties"/>
-    <ds:schemaRef ds:uri="http://schemas.microsoft.com/sharepoint/v3"/>
-    <ds:schemaRef ds:uri="71af3243-3dd4-4a8d-8c0d-dd76da1f02a5"/>
-    <ds:schemaRef ds:uri="16c05727-aa75-4e4a-9b5f-8a80a1165891"/>
-    <ds:schemaRef ds:uri="230e9df3-be65-4c73-a93b-d1236ebd677e"/>
-    <ds:schemaRef ds:uri="http://schemas.microsoft.com/office/2006/documentManagement/types"/>
-    <ds:schemaRef ds:uri="http://schemas.microsoft.com/office/infopath/2007/PartnerControls"/>
-    <ds:schemaRef ds:uri="http://schemas.openxmlformats.org/package/2006/metadata/core-properties"/>
-    <ds:schemaRef ds:uri="http://purl.org/dc/elements/1.1/"/>
-    <ds:schemaRef ds:uri="http://purl.org/dc/terms/"/>
-    <ds:schemaRef ds:uri="http://schemas.microsoft.com/internal/obd"/>
+    <ds:schemaRef ds:uri="http://schemas.microsoft.com/sharepoint/v3/contenttype/forms"/>
   </ds:schemaRefs>
 </ds:datastoreItem>
 </file>
@@ -34598,9 +34603,22 @@
 </file>
 
 <file path=customXml/itemProps3.xml><?xml version="1.0" encoding="utf-8"?>
-<ds:datastoreItem xmlns:ds="http://schemas.openxmlformats.org/officeDocument/2006/customXml" ds:itemID="{D3301439-688F-4D19-B908-B48B62C56078}">
+<ds:datastoreItem xmlns:ds="http://schemas.openxmlformats.org/officeDocument/2006/customXml" ds:itemID="{9EEC3793-C1BC-496C-A03C-202DFFC513D6}">
   <ds:schemaRefs>
-    <ds:schemaRef ds:uri="http://schemas.microsoft.com/sharepoint/v3/contenttype/forms"/>
+    <ds:schemaRef ds:uri="http://schemas.microsoft.com/office/2006/metadata/contentType"/>
+    <ds:schemaRef ds:uri="http://schemas.microsoft.com/office/2006/metadata/properties/metaAttributes"/>
+    <ds:schemaRef ds:uri="http://www.w3.org/2001/XMLSchema"/>
+    <ds:schemaRef ds:uri="http://schemas.microsoft.com/office/2006/metadata/properties"/>
+    <ds:schemaRef ds:uri="http://schemas.microsoft.com/sharepoint/v3"/>
+    <ds:schemaRef ds:uri="71af3243-3dd4-4a8d-8c0d-dd76da1f02a5"/>
+    <ds:schemaRef ds:uri="16c05727-aa75-4e4a-9b5f-8a80a1165891"/>
+    <ds:schemaRef ds:uri="230e9df3-be65-4c73-a93b-d1236ebd677e"/>
+    <ds:schemaRef ds:uri="http://schemas.microsoft.com/office/2006/documentManagement/types"/>
+    <ds:schemaRef ds:uri="http://schemas.microsoft.com/office/infopath/2007/PartnerControls"/>
+    <ds:schemaRef ds:uri="http://schemas.openxmlformats.org/package/2006/metadata/core-properties"/>
+    <ds:schemaRef ds:uri="http://purl.org/dc/elements/1.1/"/>
+    <ds:schemaRef ds:uri="http://purl.org/dc/terms/"/>
+    <ds:schemaRef ds:uri="http://schemas.microsoft.com/internal/obd"/>
   </ds:schemaRefs>
 </ds:datastoreItem>
 </file>

--- a/EGT307 PRESENTATION.pptx
+++ b/EGT307 PRESENTATION.pptx
@@ -5,13 +5,22 @@
     <p:sldMasterId id="2147483917" r:id="rId4"/>
   </p:sldMasterIdLst>
   <p:notesMasterIdLst>
-    <p:notesMasterId r:id="rId6"/>
+    <p:notesMasterId r:id="rId15"/>
   </p:notesMasterIdLst>
   <p:handoutMasterIdLst>
-    <p:handoutMasterId r:id="rId7"/>
+    <p:handoutMasterId r:id="rId16"/>
   </p:handoutMasterIdLst>
   <p:sldIdLst>
     <p:sldId id="264" r:id="rId5"/>
+    <p:sldId id="265" r:id="rId6"/>
+    <p:sldId id="272" r:id="rId7"/>
+    <p:sldId id="266" r:id="rId8"/>
+    <p:sldId id="267" r:id="rId9"/>
+    <p:sldId id="268" r:id="rId10"/>
+    <p:sldId id="269" r:id="rId11"/>
+    <p:sldId id="270" r:id="rId12"/>
+    <p:sldId id="271" r:id="rId13"/>
+    <p:sldId id="274" r:id="rId14"/>
   </p:sldIdLst>
   <p:sldSz cx="12192000" cy="6858000"/>
   <p:notesSz cx="6858000" cy="9144000"/>
@@ -33388,6 +33397,1264 @@
     <p:extLst>
       <p:ext uri="{BB962C8B-B14F-4D97-AF65-F5344CB8AC3E}">
         <p14:creationId xmlns:p14="http://schemas.microsoft.com/office/powerpoint/2010/main" val="2699954944"/>
+      </p:ext>
+    </p:extLst>
+  </p:cSld>
+  <p:clrMapOvr>
+    <a:masterClrMapping/>
+  </p:clrMapOvr>
+</p:sld>
+</file>
+
+<file path=ppt/slides/slide10.xml><?xml version="1.0" encoding="utf-8"?>
+<p:sld xmlns:a="http://schemas.openxmlformats.org/drawingml/2006/main" xmlns:r="http://schemas.openxmlformats.org/officeDocument/2006/relationships" xmlns:p="http://schemas.openxmlformats.org/presentationml/2006/main">
+  <p:cSld>
+    <p:spTree>
+      <p:nvGrpSpPr>
+        <p:cNvPr id="1" name=""/>
+        <p:cNvGrpSpPr/>
+        <p:nvPr/>
+      </p:nvGrpSpPr>
+      <p:grpSpPr>
+        <a:xfrm>
+          <a:off x="0" y="0"/>
+          <a:ext cx="0" cy="0"/>
+          <a:chOff x="0" y="0"/>
+          <a:chExt cx="0" cy="0"/>
+        </a:xfrm>
+      </p:grpSpPr>
+      <p:sp>
+        <p:nvSpPr>
+          <p:cNvPr id="2" name="Title 1">
+            <a:extLst>
+              <a:ext uri="{FF2B5EF4-FFF2-40B4-BE49-F238E27FC236}">
+                <a16:creationId xmlns:a16="http://schemas.microsoft.com/office/drawing/2014/main" id="{CE8F8DD1-7479-764A-DF22-CB34F7461435}"/>
+              </a:ext>
+            </a:extLst>
+          </p:cNvPr>
+          <p:cNvSpPr>
+            <a:spLocks noGrp="1"/>
+          </p:cNvSpPr>
+          <p:nvPr>
+            <p:ph type="ctrTitle"/>
+          </p:nvPr>
+        </p:nvSpPr>
+        <p:spPr>
+          <a:xfrm>
+            <a:off x="3855719" y="1605914"/>
+            <a:ext cx="4609407" cy="2252577"/>
+          </a:xfrm>
+        </p:spPr>
+        <p:txBody>
+          <a:bodyPr/>
+          <a:lstStyle/>
+          <a:p>
+            <a:r>
+              <a:rPr lang="en-SG" dirty="0"/>
+              <a:t>THANK YOU</a:t>
+            </a:r>
+          </a:p>
+        </p:txBody>
+      </p:sp>
+    </p:spTree>
+    <p:extLst>
+      <p:ext uri="{BB962C8B-B14F-4D97-AF65-F5344CB8AC3E}">
+        <p14:creationId xmlns:p14="http://schemas.microsoft.com/office/powerpoint/2010/main" val="1247991930"/>
+      </p:ext>
+    </p:extLst>
+  </p:cSld>
+  <p:clrMapOvr>
+    <a:masterClrMapping/>
+  </p:clrMapOvr>
+</p:sld>
+</file>
+
+<file path=ppt/slides/slide2.xml><?xml version="1.0" encoding="utf-8"?>
+<p:sld xmlns:a="http://schemas.openxmlformats.org/drawingml/2006/main" xmlns:r="http://schemas.openxmlformats.org/officeDocument/2006/relationships" xmlns:p="http://schemas.openxmlformats.org/presentationml/2006/main">
+  <p:cSld>
+    <p:spTree>
+      <p:nvGrpSpPr>
+        <p:cNvPr id="1" name=""/>
+        <p:cNvGrpSpPr/>
+        <p:nvPr/>
+      </p:nvGrpSpPr>
+      <p:grpSpPr>
+        <a:xfrm>
+          <a:off x="0" y="0"/>
+          <a:ext cx="0" cy="0"/>
+          <a:chOff x="0" y="0"/>
+          <a:chExt cx="0" cy="0"/>
+        </a:xfrm>
+      </p:grpSpPr>
+      <p:sp>
+        <p:nvSpPr>
+          <p:cNvPr id="2" name="Title 1">
+            <a:extLst>
+              <a:ext uri="{FF2B5EF4-FFF2-40B4-BE49-F238E27FC236}">
+                <a16:creationId xmlns:a16="http://schemas.microsoft.com/office/drawing/2014/main" id="{D7795239-9BBD-01A8-B192-6B72EB6F89DF}"/>
+              </a:ext>
+            </a:extLst>
+          </p:cNvPr>
+          <p:cNvSpPr>
+            <a:spLocks noGrp="1"/>
+          </p:cNvSpPr>
+          <p:nvPr>
+            <p:ph type="ctrTitle"/>
+          </p:nvPr>
+        </p:nvSpPr>
+        <p:spPr/>
+        <p:txBody>
+          <a:bodyPr/>
+          <a:lstStyle/>
+          <a:p>
+            <a:r>
+              <a:rPr lang="en-SG" dirty="0"/>
+              <a:t>Problem statement</a:t>
+            </a:r>
+          </a:p>
+        </p:txBody>
+      </p:sp>
+      <p:sp>
+        <p:nvSpPr>
+          <p:cNvPr id="3" name="Footer Placeholder 2">
+            <a:extLst>
+              <a:ext uri="{FF2B5EF4-FFF2-40B4-BE49-F238E27FC236}">
+                <a16:creationId xmlns:a16="http://schemas.microsoft.com/office/drawing/2014/main" id="{FB484B56-B94D-6D6D-F0E1-26A03E022FF6}"/>
+              </a:ext>
+            </a:extLst>
+          </p:cNvPr>
+          <p:cNvSpPr>
+            <a:spLocks noGrp="1"/>
+          </p:cNvSpPr>
+          <p:nvPr>
+            <p:ph type="ftr" sz="quarter" idx="11"/>
+          </p:nvPr>
+        </p:nvSpPr>
+        <p:spPr/>
+        <p:txBody>
+          <a:bodyPr/>
+          <a:lstStyle/>
+          <a:p>
+            <a:r>
+              <a:rPr lang="en-US"/>
+              <a:t>SAMPLE FOOTER TEXT</a:t>
+            </a:r>
+            <a:endParaRPr lang="en-US" dirty="0"/>
+          </a:p>
+        </p:txBody>
+      </p:sp>
+      <p:sp>
+        <p:nvSpPr>
+          <p:cNvPr id="4" name="Date Placeholder 3">
+            <a:extLst>
+              <a:ext uri="{FF2B5EF4-FFF2-40B4-BE49-F238E27FC236}">
+                <a16:creationId xmlns:a16="http://schemas.microsoft.com/office/drawing/2014/main" id="{FB73928D-F822-872E-AEB2-898C26A51BBC}"/>
+              </a:ext>
+            </a:extLst>
+          </p:cNvPr>
+          <p:cNvSpPr>
+            <a:spLocks noGrp="1"/>
+          </p:cNvSpPr>
+          <p:nvPr>
+            <p:ph type="dt" sz="half" idx="10"/>
+          </p:nvPr>
+        </p:nvSpPr>
+        <p:spPr/>
+        <p:txBody>
+          <a:bodyPr/>
+          <a:lstStyle/>
+          <a:p>
+            <a:fld id="{010D0AB2-23BC-3043-AC30-5928E542C0CE}" type="datetime1">
+              <a:rPr lang="en-US" smtClean="0"/>
+              <a:t>7/6/2026</a:t>
+            </a:fld>
+            <a:endParaRPr lang="en-US" dirty="0"/>
+          </a:p>
+        </p:txBody>
+      </p:sp>
+      <p:sp>
+        <p:nvSpPr>
+          <p:cNvPr id="5" name="Slide Number Placeholder 4">
+            <a:extLst>
+              <a:ext uri="{FF2B5EF4-FFF2-40B4-BE49-F238E27FC236}">
+                <a16:creationId xmlns:a16="http://schemas.microsoft.com/office/drawing/2014/main" id="{D5722563-0A53-48A7-6503-2538BC40FD39}"/>
+              </a:ext>
+            </a:extLst>
+          </p:cNvPr>
+          <p:cNvSpPr>
+            <a:spLocks noGrp="1"/>
+          </p:cNvSpPr>
+          <p:nvPr>
+            <p:ph type="sldNum" sz="quarter" idx="12"/>
+          </p:nvPr>
+        </p:nvSpPr>
+        <p:spPr/>
+        <p:txBody>
+          <a:bodyPr/>
+          <a:lstStyle/>
+          <a:p>
+            <a:fld id="{CC057153-B650-4DEB-B370-79DDCFDCE934}" type="slidenum">
+              <a:rPr lang="en-US" smtClean="0"/>
+              <a:pPr/>
+              <a:t>2</a:t>
+            </a:fld>
+            <a:endParaRPr lang="en-US" dirty="0"/>
+          </a:p>
+        </p:txBody>
+      </p:sp>
+    </p:spTree>
+    <p:extLst>
+      <p:ext uri="{BB962C8B-B14F-4D97-AF65-F5344CB8AC3E}">
+        <p14:creationId xmlns:p14="http://schemas.microsoft.com/office/powerpoint/2010/main" val="2823699821"/>
+      </p:ext>
+    </p:extLst>
+  </p:cSld>
+  <p:clrMapOvr>
+    <a:masterClrMapping/>
+  </p:clrMapOvr>
+</p:sld>
+</file>
+
+<file path=ppt/slides/slide3.xml><?xml version="1.0" encoding="utf-8"?>
+<p:sld xmlns:a="http://schemas.openxmlformats.org/drawingml/2006/main" xmlns:r="http://schemas.openxmlformats.org/officeDocument/2006/relationships" xmlns:p="http://schemas.openxmlformats.org/presentationml/2006/main">
+  <p:cSld>
+    <p:spTree>
+      <p:nvGrpSpPr>
+        <p:cNvPr id="1" name=""/>
+        <p:cNvGrpSpPr/>
+        <p:nvPr/>
+      </p:nvGrpSpPr>
+      <p:grpSpPr>
+        <a:xfrm>
+          <a:off x="0" y="0"/>
+          <a:ext cx="0" cy="0"/>
+          <a:chOff x="0" y="0"/>
+          <a:chExt cx="0" cy="0"/>
+        </a:xfrm>
+      </p:grpSpPr>
+      <p:sp>
+        <p:nvSpPr>
+          <p:cNvPr id="2" name="Title 1">
+            <a:extLst>
+              <a:ext uri="{FF2B5EF4-FFF2-40B4-BE49-F238E27FC236}">
+                <a16:creationId xmlns:a16="http://schemas.microsoft.com/office/drawing/2014/main" id="{C6F9A5B3-D1E4-D0C2-F83A-1FA0DFF13296}"/>
+              </a:ext>
+            </a:extLst>
+          </p:cNvPr>
+          <p:cNvSpPr>
+            <a:spLocks noGrp="1"/>
+          </p:cNvSpPr>
+          <p:nvPr>
+            <p:ph type="title"/>
+          </p:nvPr>
+        </p:nvSpPr>
+        <p:spPr/>
+        <p:txBody>
+          <a:bodyPr/>
+          <a:lstStyle/>
+          <a:p>
+            <a:endParaRPr lang="en-SG"/>
+          </a:p>
+        </p:txBody>
+      </p:sp>
+      <p:sp>
+        <p:nvSpPr>
+          <p:cNvPr id="3" name="Footer Placeholder 2">
+            <a:extLst>
+              <a:ext uri="{FF2B5EF4-FFF2-40B4-BE49-F238E27FC236}">
+                <a16:creationId xmlns:a16="http://schemas.microsoft.com/office/drawing/2014/main" id="{0EE80E97-6251-AC91-6D35-87EF2A034F80}"/>
+              </a:ext>
+            </a:extLst>
+          </p:cNvPr>
+          <p:cNvSpPr>
+            <a:spLocks noGrp="1"/>
+          </p:cNvSpPr>
+          <p:nvPr>
+            <p:ph type="ftr" sz="quarter" idx="11"/>
+          </p:nvPr>
+        </p:nvSpPr>
+        <p:spPr/>
+        <p:txBody>
+          <a:bodyPr/>
+          <a:lstStyle/>
+          <a:p>
+            <a:r>
+              <a:rPr lang="en-US"/>
+              <a:t>SAMPLE FOOTER TEXT</a:t>
+            </a:r>
+            <a:endParaRPr lang="en-US" dirty="0"/>
+          </a:p>
+        </p:txBody>
+      </p:sp>
+      <p:sp>
+        <p:nvSpPr>
+          <p:cNvPr id="4" name="Content Placeholder 3">
+            <a:extLst>
+              <a:ext uri="{FF2B5EF4-FFF2-40B4-BE49-F238E27FC236}">
+                <a16:creationId xmlns:a16="http://schemas.microsoft.com/office/drawing/2014/main" id="{7D2A119A-9A1B-4BDC-333B-C4F2A646A21F}"/>
+              </a:ext>
+            </a:extLst>
+          </p:cNvPr>
+          <p:cNvSpPr>
+            <a:spLocks noGrp="1"/>
+          </p:cNvSpPr>
+          <p:nvPr>
+            <p:ph sz="quarter" idx="13"/>
+          </p:nvPr>
+        </p:nvSpPr>
+        <p:spPr/>
+        <p:txBody>
+          <a:bodyPr/>
+          <a:lstStyle/>
+          <a:p>
+            <a:endParaRPr lang="en-SG" dirty="0"/>
+          </a:p>
+        </p:txBody>
+      </p:sp>
+      <p:sp>
+        <p:nvSpPr>
+          <p:cNvPr id="5" name="Date Placeholder 4">
+            <a:extLst>
+              <a:ext uri="{FF2B5EF4-FFF2-40B4-BE49-F238E27FC236}">
+                <a16:creationId xmlns:a16="http://schemas.microsoft.com/office/drawing/2014/main" id="{A0D81173-2692-1EC8-9E30-62838359A5A5}"/>
+              </a:ext>
+            </a:extLst>
+          </p:cNvPr>
+          <p:cNvSpPr>
+            <a:spLocks noGrp="1"/>
+          </p:cNvSpPr>
+          <p:nvPr>
+            <p:ph type="dt" sz="half" idx="10"/>
+          </p:nvPr>
+        </p:nvSpPr>
+        <p:spPr/>
+        <p:txBody>
+          <a:bodyPr/>
+          <a:lstStyle/>
+          <a:p>
+            <a:fld id="{927C0DEB-4AE1-EA4D-826D-E3C22802B942}" type="datetime1">
+              <a:rPr lang="en-US" smtClean="0"/>
+              <a:t>7/6/2026</a:t>
+            </a:fld>
+            <a:endParaRPr lang="en-US" dirty="0"/>
+          </a:p>
+        </p:txBody>
+      </p:sp>
+      <p:sp>
+        <p:nvSpPr>
+          <p:cNvPr id="6" name="Slide Number Placeholder 5">
+            <a:extLst>
+              <a:ext uri="{FF2B5EF4-FFF2-40B4-BE49-F238E27FC236}">
+                <a16:creationId xmlns:a16="http://schemas.microsoft.com/office/drawing/2014/main" id="{ABB406EC-D35C-8A52-7BBB-EB512633B053}"/>
+              </a:ext>
+            </a:extLst>
+          </p:cNvPr>
+          <p:cNvSpPr>
+            <a:spLocks noGrp="1"/>
+          </p:cNvSpPr>
+          <p:nvPr>
+            <p:ph type="sldNum" sz="quarter" idx="12"/>
+          </p:nvPr>
+        </p:nvSpPr>
+        <p:spPr/>
+        <p:txBody>
+          <a:bodyPr/>
+          <a:lstStyle/>
+          <a:p>
+            <a:fld id="{CC057153-B650-4DEB-B370-79DDCFDCE934}" type="slidenum">
+              <a:rPr lang="en-US" smtClean="0"/>
+              <a:pPr/>
+              <a:t>3</a:t>
+            </a:fld>
+            <a:endParaRPr lang="en-US" dirty="0"/>
+          </a:p>
+        </p:txBody>
+      </p:sp>
+    </p:spTree>
+    <p:extLst>
+      <p:ext uri="{BB962C8B-B14F-4D97-AF65-F5344CB8AC3E}">
+        <p14:creationId xmlns:p14="http://schemas.microsoft.com/office/powerpoint/2010/main" val="703768538"/>
+      </p:ext>
+    </p:extLst>
+  </p:cSld>
+  <p:clrMapOvr>
+    <a:masterClrMapping/>
+  </p:clrMapOvr>
+</p:sld>
+</file>
+
+<file path=ppt/slides/slide4.xml><?xml version="1.0" encoding="utf-8"?>
+<p:sld xmlns:a="http://schemas.openxmlformats.org/drawingml/2006/main" xmlns:r="http://schemas.openxmlformats.org/officeDocument/2006/relationships" xmlns:p="http://schemas.openxmlformats.org/presentationml/2006/main">
+  <p:cSld>
+    <p:spTree>
+      <p:nvGrpSpPr>
+        <p:cNvPr id="1" name=""/>
+        <p:cNvGrpSpPr/>
+        <p:nvPr/>
+      </p:nvGrpSpPr>
+      <p:grpSpPr>
+        <a:xfrm>
+          <a:off x="0" y="0"/>
+          <a:ext cx="0" cy="0"/>
+          <a:chOff x="0" y="0"/>
+          <a:chExt cx="0" cy="0"/>
+        </a:xfrm>
+      </p:grpSpPr>
+      <p:sp>
+        <p:nvSpPr>
+          <p:cNvPr id="2" name="Title 1">
+            <a:extLst>
+              <a:ext uri="{FF2B5EF4-FFF2-40B4-BE49-F238E27FC236}">
+                <a16:creationId xmlns:a16="http://schemas.microsoft.com/office/drawing/2014/main" id="{54A8FB65-E92A-9D55-F7E1-938891E8A248}"/>
+              </a:ext>
+            </a:extLst>
+          </p:cNvPr>
+          <p:cNvSpPr>
+            <a:spLocks noGrp="1"/>
+          </p:cNvSpPr>
+          <p:nvPr>
+            <p:ph type="ctrTitle"/>
+          </p:nvPr>
+        </p:nvSpPr>
+        <p:spPr/>
+        <p:txBody>
+          <a:bodyPr/>
+          <a:lstStyle/>
+          <a:p>
+            <a:r>
+              <a:rPr lang="en-SG" dirty="0"/>
+              <a:t>Objectives</a:t>
+            </a:r>
+          </a:p>
+        </p:txBody>
+      </p:sp>
+      <p:sp>
+        <p:nvSpPr>
+          <p:cNvPr id="3" name="Footer Placeholder 2">
+            <a:extLst>
+              <a:ext uri="{FF2B5EF4-FFF2-40B4-BE49-F238E27FC236}">
+                <a16:creationId xmlns:a16="http://schemas.microsoft.com/office/drawing/2014/main" id="{DA4EFA38-3F70-0F7D-636F-755C34F032F7}"/>
+              </a:ext>
+            </a:extLst>
+          </p:cNvPr>
+          <p:cNvSpPr>
+            <a:spLocks noGrp="1"/>
+          </p:cNvSpPr>
+          <p:nvPr>
+            <p:ph type="ftr" sz="quarter" idx="11"/>
+          </p:nvPr>
+        </p:nvSpPr>
+        <p:spPr/>
+        <p:txBody>
+          <a:bodyPr/>
+          <a:lstStyle/>
+          <a:p>
+            <a:r>
+              <a:rPr lang="en-US"/>
+              <a:t>SAMPLE FOOTER TEXT</a:t>
+            </a:r>
+            <a:endParaRPr lang="en-US" dirty="0"/>
+          </a:p>
+        </p:txBody>
+      </p:sp>
+      <p:sp>
+        <p:nvSpPr>
+          <p:cNvPr id="4" name="Date Placeholder 3">
+            <a:extLst>
+              <a:ext uri="{FF2B5EF4-FFF2-40B4-BE49-F238E27FC236}">
+                <a16:creationId xmlns:a16="http://schemas.microsoft.com/office/drawing/2014/main" id="{49E71233-6318-9E50-6D27-72BFB585494C}"/>
+              </a:ext>
+            </a:extLst>
+          </p:cNvPr>
+          <p:cNvSpPr>
+            <a:spLocks noGrp="1"/>
+          </p:cNvSpPr>
+          <p:nvPr>
+            <p:ph type="dt" sz="half" idx="10"/>
+          </p:nvPr>
+        </p:nvSpPr>
+        <p:spPr/>
+        <p:txBody>
+          <a:bodyPr/>
+          <a:lstStyle/>
+          <a:p>
+            <a:fld id="{010D0AB2-23BC-3043-AC30-5928E542C0CE}" type="datetime1">
+              <a:rPr lang="en-US" smtClean="0"/>
+              <a:t>7/6/2026</a:t>
+            </a:fld>
+            <a:endParaRPr lang="en-US" dirty="0"/>
+          </a:p>
+        </p:txBody>
+      </p:sp>
+      <p:sp>
+        <p:nvSpPr>
+          <p:cNvPr id="5" name="Slide Number Placeholder 4">
+            <a:extLst>
+              <a:ext uri="{FF2B5EF4-FFF2-40B4-BE49-F238E27FC236}">
+                <a16:creationId xmlns:a16="http://schemas.microsoft.com/office/drawing/2014/main" id="{0143C50A-6321-93AA-1E3D-B2D85FEBB0A2}"/>
+              </a:ext>
+            </a:extLst>
+          </p:cNvPr>
+          <p:cNvSpPr>
+            <a:spLocks noGrp="1"/>
+          </p:cNvSpPr>
+          <p:nvPr>
+            <p:ph type="sldNum" sz="quarter" idx="12"/>
+          </p:nvPr>
+        </p:nvSpPr>
+        <p:spPr/>
+        <p:txBody>
+          <a:bodyPr/>
+          <a:lstStyle/>
+          <a:p>
+            <a:fld id="{CC057153-B650-4DEB-B370-79DDCFDCE934}" type="slidenum">
+              <a:rPr lang="en-US" smtClean="0"/>
+              <a:pPr/>
+              <a:t>4</a:t>
+            </a:fld>
+            <a:endParaRPr lang="en-US" dirty="0"/>
+          </a:p>
+        </p:txBody>
+      </p:sp>
+    </p:spTree>
+    <p:extLst>
+      <p:ext uri="{BB962C8B-B14F-4D97-AF65-F5344CB8AC3E}">
+        <p14:creationId xmlns:p14="http://schemas.microsoft.com/office/powerpoint/2010/main" val="169991198"/>
+      </p:ext>
+    </p:extLst>
+  </p:cSld>
+  <p:clrMapOvr>
+    <a:masterClrMapping/>
+  </p:clrMapOvr>
+</p:sld>
+</file>
+
+<file path=ppt/slides/slide5.xml><?xml version="1.0" encoding="utf-8"?>
+<p:sld xmlns:a="http://schemas.openxmlformats.org/drawingml/2006/main" xmlns:r="http://schemas.openxmlformats.org/officeDocument/2006/relationships" xmlns:p="http://schemas.openxmlformats.org/presentationml/2006/main">
+  <p:cSld>
+    <p:spTree>
+      <p:nvGrpSpPr>
+        <p:cNvPr id="1" name=""/>
+        <p:cNvGrpSpPr/>
+        <p:nvPr/>
+      </p:nvGrpSpPr>
+      <p:grpSpPr>
+        <a:xfrm>
+          <a:off x="0" y="0"/>
+          <a:ext cx="0" cy="0"/>
+          <a:chOff x="0" y="0"/>
+          <a:chExt cx="0" cy="0"/>
+        </a:xfrm>
+      </p:grpSpPr>
+      <p:sp>
+        <p:nvSpPr>
+          <p:cNvPr id="2" name="Title 1">
+            <a:extLst>
+              <a:ext uri="{FF2B5EF4-FFF2-40B4-BE49-F238E27FC236}">
+                <a16:creationId xmlns:a16="http://schemas.microsoft.com/office/drawing/2014/main" id="{DEFF6106-7A0A-48DF-A54A-1203136FE872}"/>
+              </a:ext>
+            </a:extLst>
+          </p:cNvPr>
+          <p:cNvSpPr>
+            <a:spLocks noGrp="1"/>
+          </p:cNvSpPr>
+          <p:nvPr>
+            <p:ph type="ctrTitle"/>
+          </p:nvPr>
+        </p:nvSpPr>
+        <p:spPr/>
+        <p:txBody>
+          <a:bodyPr/>
+          <a:lstStyle/>
+          <a:p>
+            <a:r>
+              <a:rPr lang="en-SG" dirty="0"/>
+              <a:t>Docker</a:t>
+            </a:r>
+          </a:p>
+        </p:txBody>
+      </p:sp>
+      <p:sp>
+        <p:nvSpPr>
+          <p:cNvPr id="3" name="Footer Placeholder 2">
+            <a:extLst>
+              <a:ext uri="{FF2B5EF4-FFF2-40B4-BE49-F238E27FC236}">
+                <a16:creationId xmlns:a16="http://schemas.microsoft.com/office/drawing/2014/main" id="{B2BCAD1A-CFBC-A349-DD67-7349B93D3720}"/>
+              </a:ext>
+            </a:extLst>
+          </p:cNvPr>
+          <p:cNvSpPr>
+            <a:spLocks noGrp="1"/>
+          </p:cNvSpPr>
+          <p:nvPr>
+            <p:ph type="ftr" sz="quarter" idx="11"/>
+          </p:nvPr>
+        </p:nvSpPr>
+        <p:spPr/>
+        <p:txBody>
+          <a:bodyPr/>
+          <a:lstStyle/>
+          <a:p>
+            <a:r>
+              <a:rPr lang="en-US"/>
+              <a:t>SAMPLE FOOTER TEXT</a:t>
+            </a:r>
+            <a:endParaRPr lang="en-US" dirty="0"/>
+          </a:p>
+        </p:txBody>
+      </p:sp>
+      <p:sp>
+        <p:nvSpPr>
+          <p:cNvPr id="4" name="Date Placeholder 3">
+            <a:extLst>
+              <a:ext uri="{FF2B5EF4-FFF2-40B4-BE49-F238E27FC236}">
+                <a16:creationId xmlns:a16="http://schemas.microsoft.com/office/drawing/2014/main" id="{3BA4730D-F0FF-B752-323B-BE0157CA02F8}"/>
+              </a:ext>
+            </a:extLst>
+          </p:cNvPr>
+          <p:cNvSpPr>
+            <a:spLocks noGrp="1"/>
+          </p:cNvSpPr>
+          <p:nvPr>
+            <p:ph type="dt" sz="half" idx="10"/>
+          </p:nvPr>
+        </p:nvSpPr>
+        <p:spPr/>
+        <p:txBody>
+          <a:bodyPr/>
+          <a:lstStyle/>
+          <a:p>
+            <a:fld id="{010D0AB2-23BC-3043-AC30-5928E542C0CE}" type="datetime1">
+              <a:rPr lang="en-US" smtClean="0"/>
+              <a:t>7/6/2026</a:t>
+            </a:fld>
+            <a:endParaRPr lang="en-US" dirty="0"/>
+          </a:p>
+        </p:txBody>
+      </p:sp>
+      <p:sp>
+        <p:nvSpPr>
+          <p:cNvPr id="5" name="Slide Number Placeholder 4">
+            <a:extLst>
+              <a:ext uri="{FF2B5EF4-FFF2-40B4-BE49-F238E27FC236}">
+                <a16:creationId xmlns:a16="http://schemas.microsoft.com/office/drawing/2014/main" id="{49E7DB59-C4F8-CDE1-61A4-49E42A74492A}"/>
+              </a:ext>
+            </a:extLst>
+          </p:cNvPr>
+          <p:cNvSpPr>
+            <a:spLocks noGrp="1"/>
+          </p:cNvSpPr>
+          <p:nvPr>
+            <p:ph type="sldNum" sz="quarter" idx="12"/>
+          </p:nvPr>
+        </p:nvSpPr>
+        <p:spPr/>
+        <p:txBody>
+          <a:bodyPr/>
+          <a:lstStyle/>
+          <a:p>
+            <a:fld id="{CC057153-B650-4DEB-B370-79DDCFDCE934}" type="slidenum">
+              <a:rPr lang="en-US" smtClean="0"/>
+              <a:pPr/>
+              <a:t>5</a:t>
+            </a:fld>
+            <a:endParaRPr lang="en-US" dirty="0"/>
+          </a:p>
+        </p:txBody>
+      </p:sp>
+    </p:spTree>
+    <p:extLst>
+      <p:ext uri="{BB962C8B-B14F-4D97-AF65-F5344CB8AC3E}">
+        <p14:creationId xmlns:p14="http://schemas.microsoft.com/office/powerpoint/2010/main" val="1662138044"/>
+      </p:ext>
+    </p:extLst>
+  </p:cSld>
+  <p:clrMapOvr>
+    <a:masterClrMapping/>
+  </p:clrMapOvr>
+</p:sld>
+</file>
+
+<file path=ppt/slides/slide6.xml><?xml version="1.0" encoding="utf-8"?>
+<p:sld xmlns:a="http://schemas.openxmlformats.org/drawingml/2006/main" xmlns:r="http://schemas.openxmlformats.org/officeDocument/2006/relationships" xmlns:p="http://schemas.openxmlformats.org/presentationml/2006/main">
+  <p:cSld>
+    <p:spTree>
+      <p:nvGrpSpPr>
+        <p:cNvPr id="1" name=""/>
+        <p:cNvGrpSpPr/>
+        <p:nvPr/>
+      </p:nvGrpSpPr>
+      <p:grpSpPr>
+        <a:xfrm>
+          <a:off x="0" y="0"/>
+          <a:ext cx="0" cy="0"/>
+          <a:chOff x="0" y="0"/>
+          <a:chExt cx="0" cy="0"/>
+        </a:xfrm>
+      </p:grpSpPr>
+      <p:sp>
+        <p:nvSpPr>
+          <p:cNvPr id="2" name="Title 1">
+            <a:extLst>
+              <a:ext uri="{FF2B5EF4-FFF2-40B4-BE49-F238E27FC236}">
+                <a16:creationId xmlns:a16="http://schemas.microsoft.com/office/drawing/2014/main" id="{F27EEF88-486E-52FF-3AF3-C50D322E6819}"/>
+              </a:ext>
+            </a:extLst>
+          </p:cNvPr>
+          <p:cNvSpPr>
+            <a:spLocks noGrp="1"/>
+          </p:cNvSpPr>
+          <p:nvPr>
+            <p:ph type="ctrTitle"/>
+          </p:nvPr>
+        </p:nvSpPr>
+        <p:spPr/>
+        <p:txBody>
+          <a:bodyPr/>
+          <a:lstStyle/>
+          <a:p>
+            <a:r>
+              <a:rPr lang="en-SG" dirty="0"/>
+              <a:t>KUBERNATES</a:t>
+            </a:r>
+          </a:p>
+        </p:txBody>
+      </p:sp>
+      <p:sp>
+        <p:nvSpPr>
+          <p:cNvPr id="3" name="Footer Placeholder 2">
+            <a:extLst>
+              <a:ext uri="{FF2B5EF4-FFF2-40B4-BE49-F238E27FC236}">
+                <a16:creationId xmlns:a16="http://schemas.microsoft.com/office/drawing/2014/main" id="{D2F62700-C8BC-371F-E4A0-146018195E63}"/>
+              </a:ext>
+            </a:extLst>
+          </p:cNvPr>
+          <p:cNvSpPr>
+            <a:spLocks noGrp="1"/>
+          </p:cNvSpPr>
+          <p:nvPr>
+            <p:ph type="ftr" sz="quarter" idx="11"/>
+          </p:nvPr>
+        </p:nvSpPr>
+        <p:spPr/>
+        <p:txBody>
+          <a:bodyPr/>
+          <a:lstStyle/>
+          <a:p>
+            <a:r>
+              <a:rPr lang="en-US"/>
+              <a:t>SAMPLE FOOTER TEXT</a:t>
+            </a:r>
+            <a:endParaRPr lang="en-US" dirty="0"/>
+          </a:p>
+        </p:txBody>
+      </p:sp>
+      <p:sp>
+        <p:nvSpPr>
+          <p:cNvPr id="4" name="Date Placeholder 3">
+            <a:extLst>
+              <a:ext uri="{FF2B5EF4-FFF2-40B4-BE49-F238E27FC236}">
+                <a16:creationId xmlns:a16="http://schemas.microsoft.com/office/drawing/2014/main" id="{97386FD1-37AC-99FB-025F-EC72261EF737}"/>
+              </a:ext>
+            </a:extLst>
+          </p:cNvPr>
+          <p:cNvSpPr>
+            <a:spLocks noGrp="1"/>
+          </p:cNvSpPr>
+          <p:nvPr>
+            <p:ph type="dt" sz="half" idx="10"/>
+          </p:nvPr>
+        </p:nvSpPr>
+        <p:spPr/>
+        <p:txBody>
+          <a:bodyPr/>
+          <a:lstStyle/>
+          <a:p>
+            <a:fld id="{010D0AB2-23BC-3043-AC30-5928E542C0CE}" type="datetime1">
+              <a:rPr lang="en-US" smtClean="0"/>
+              <a:t>7/6/2026</a:t>
+            </a:fld>
+            <a:endParaRPr lang="en-US" dirty="0"/>
+          </a:p>
+        </p:txBody>
+      </p:sp>
+      <p:sp>
+        <p:nvSpPr>
+          <p:cNvPr id="5" name="Slide Number Placeholder 4">
+            <a:extLst>
+              <a:ext uri="{FF2B5EF4-FFF2-40B4-BE49-F238E27FC236}">
+                <a16:creationId xmlns:a16="http://schemas.microsoft.com/office/drawing/2014/main" id="{D08F73AA-8FFF-4571-C0CF-0F21F722B187}"/>
+              </a:ext>
+            </a:extLst>
+          </p:cNvPr>
+          <p:cNvSpPr>
+            <a:spLocks noGrp="1"/>
+          </p:cNvSpPr>
+          <p:nvPr>
+            <p:ph type="sldNum" sz="quarter" idx="12"/>
+          </p:nvPr>
+        </p:nvSpPr>
+        <p:spPr/>
+        <p:txBody>
+          <a:bodyPr/>
+          <a:lstStyle/>
+          <a:p>
+            <a:fld id="{CC057153-B650-4DEB-B370-79DDCFDCE934}" type="slidenum">
+              <a:rPr lang="en-US" smtClean="0"/>
+              <a:pPr/>
+              <a:t>6</a:t>
+            </a:fld>
+            <a:endParaRPr lang="en-US" dirty="0"/>
+          </a:p>
+        </p:txBody>
+      </p:sp>
+    </p:spTree>
+    <p:extLst>
+      <p:ext uri="{BB962C8B-B14F-4D97-AF65-F5344CB8AC3E}">
+        <p14:creationId xmlns:p14="http://schemas.microsoft.com/office/powerpoint/2010/main" val="2037361668"/>
+      </p:ext>
+    </p:extLst>
+  </p:cSld>
+  <p:clrMapOvr>
+    <a:masterClrMapping/>
+  </p:clrMapOvr>
+</p:sld>
+</file>
+
+<file path=ppt/slides/slide7.xml><?xml version="1.0" encoding="utf-8"?>
+<p:sld xmlns:a="http://schemas.openxmlformats.org/drawingml/2006/main" xmlns:r="http://schemas.openxmlformats.org/officeDocument/2006/relationships" xmlns:p="http://schemas.openxmlformats.org/presentationml/2006/main">
+  <p:cSld>
+    <p:spTree>
+      <p:nvGrpSpPr>
+        <p:cNvPr id="1" name=""/>
+        <p:cNvGrpSpPr/>
+        <p:nvPr/>
+      </p:nvGrpSpPr>
+      <p:grpSpPr>
+        <a:xfrm>
+          <a:off x="0" y="0"/>
+          <a:ext cx="0" cy="0"/>
+          <a:chOff x="0" y="0"/>
+          <a:chExt cx="0" cy="0"/>
+        </a:xfrm>
+      </p:grpSpPr>
+      <p:sp>
+        <p:nvSpPr>
+          <p:cNvPr id="2" name="Title 1">
+            <a:extLst>
+              <a:ext uri="{FF2B5EF4-FFF2-40B4-BE49-F238E27FC236}">
+                <a16:creationId xmlns:a16="http://schemas.microsoft.com/office/drawing/2014/main" id="{5399766A-8D26-6DCE-60BF-703811C9A8AF}"/>
+              </a:ext>
+            </a:extLst>
+          </p:cNvPr>
+          <p:cNvSpPr>
+            <a:spLocks noGrp="1"/>
+          </p:cNvSpPr>
+          <p:nvPr>
+            <p:ph type="ctrTitle"/>
+          </p:nvPr>
+        </p:nvSpPr>
+        <p:spPr>
+          <a:xfrm>
+            <a:off x="3536831" y="1463040"/>
+            <a:ext cx="5210354" cy="3931920"/>
+          </a:xfrm>
+        </p:spPr>
+        <p:txBody>
+          <a:bodyPr/>
+          <a:lstStyle/>
+          <a:p>
+            <a:r>
+              <a:rPr lang="en-SG" dirty="0"/>
+              <a:t>MICROSERVICES</a:t>
+            </a:r>
+          </a:p>
+        </p:txBody>
+      </p:sp>
+      <p:sp>
+        <p:nvSpPr>
+          <p:cNvPr id="3" name="Footer Placeholder 2">
+            <a:extLst>
+              <a:ext uri="{FF2B5EF4-FFF2-40B4-BE49-F238E27FC236}">
+                <a16:creationId xmlns:a16="http://schemas.microsoft.com/office/drawing/2014/main" id="{02CD1AC0-9939-D7DA-C1B5-89896E5490E1}"/>
+              </a:ext>
+            </a:extLst>
+          </p:cNvPr>
+          <p:cNvSpPr>
+            <a:spLocks noGrp="1"/>
+          </p:cNvSpPr>
+          <p:nvPr>
+            <p:ph type="ftr" sz="quarter" idx="11"/>
+          </p:nvPr>
+        </p:nvSpPr>
+        <p:spPr/>
+        <p:txBody>
+          <a:bodyPr/>
+          <a:lstStyle/>
+          <a:p>
+            <a:r>
+              <a:rPr lang="en-US"/>
+              <a:t>SAMPLE FOOTER TEXT</a:t>
+            </a:r>
+            <a:endParaRPr lang="en-US" dirty="0"/>
+          </a:p>
+        </p:txBody>
+      </p:sp>
+      <p:sp>
+        <p:nvSpPr>
+          <p:cNvPr id="4" name="Date Placeholder 3">
+            <a:extLst>
+              <a:ext uri="{FF2B5EF4-FFF2-40B4-BE49-F238E27FC236}">
+                <a16:creationId xmlns:a16="http://schemas.microsoft.com/office/drawing/2014/main" id="{19E5B9C4-A021-AD37-4063-4CD82AEA3362}"/>
+              </a:ext>
+            </a:extLst>
+          </p:cNvPr>
+          <p:cNvSpPr>
+            <a:spLocks noGrp="1"/>
+          </p:cNvSpPr>
+          <p:nvPr>
+            <p:ph type="dt" sz="half" idx="10"/>
+          </p:nvPr>
+        </p:nvSpPr>
+        <p:spPr/>
+        <p:txBody>
+          <a:bodyPr/>
+          <a:lstStyle/>
+          <a:p>
+            <a:fld id="{010D0AB2-23BC-3043-AC30-5928E542C0CE}" type="datetime1">
+              <a:rPr lang="en-US" smtClean="0"/>
+              <a:t>7/6/2026</a:t>
+            </a:fld>
+            <a:endParaRPr lang="en-US" dirty="0"/>
+          </a:p>
+        </p:txBody>
+      </p:sp>
+      <p:sp>
+        <p:nvSpPr>
+          <p:cNvPr id="5" name="Slide Number Placeholder 4">
+            <a:extLst>
+              <a:ext uri="{FF2B5EF4-FFF2-40B4-BE49-F238E27FC236}">
+                <a16:creationId xmlns:a16="http://schemas.microsoft.com/office/drawing/2014/main" id="{D796FA40-EF4F-7414-795C-90E90F514FCC}"/>
+              </a:ext>
+            </a:extLst>
+          </p:cNvPr>
+          <p:cNvSpPr>
+            <a:spLocks noGrp="1"/>
+          </p:cNvSpPr>
+          <p:nvPr>
+            <p:ph type="sldNum" sz="quarter" idx="12"/>
+          </p:nvPr>
+        </p:nvSpPr>
+        <p:spPr/>
+        <p:txBody>
+          <a:bodyPr/>
+          <a:lstStyle/>
+          <a:p>
+            <a:fld id="{CC057153-B650-4DEB-B370-79DDCFDCE934}" type="slidenum">
+              <a:rPr lang="en-US" smtClean="0"/>
+              <a:pPr/>
+              <a:t>7</a:t>
+            </a:fld>
+            <a:endParaRPr lang="en-US" dirty="0"/>
+          </a:p>
+        </p:txBody>
+      </p:sp>
+    </p:spTree>
+    <p:extLst>
+      <p:ext uri="{BB962C8B-B14F-4D97-AF65-F5344CB8AC3E}">
+        <p14:creationId xmlns:p14="http://schemas.microsoft.com/office/powerpoint/2010/main" val="1787156668"/>
+      </p:ext>
+    </p:extLst>
+  </p:cSld>
+  <p:clrMapOvr>
+    <a:masterClrMapping/>
+  </p:clrMapOvr>
+</p:sld>
+</file>
+
+<file path=ppt/slides/slide8.xml><?xml version="1.0" encoding="utf-8"?>
+<p:sld xmlns:a="http://schemas.openxmlformats.org/drawingml/2006/main" xmlns:r="http://schemas.openxmlformats.org/officeDocument/2006/relationships" xmlns:p="http://schemas.openxmlformats.org/presentationml/2006/main">
+  <p:cSld>
+    <p:spTree>
+      <p:nvGrpSpPr>
+        <p:cNvPr id="1" name=""/>
+        <p:cNvGrpSpPr/>
+        <p:nvPr/>
+      </p:nvGrpSpPr>
+      <p:grpSpPr>
+        <a:xfrm>
+          <a:off x="0" y="0"/>
+          <a:ext cx="0" cy="0"/>
+          <a:chOff x="0" y="0"/>
+          <a:chExt cx="0" cy="0"/>
+        </a:xfrm>
+      </p:grpSpPr>
+      <p:sp>
+        <p:nvSpPr>
+          <p:cNvPr id="2" name="Title 1">
+            <a:extLst>
+              <a:ext uri="{FF2B5EF4-FFF2-40B4-BE49-F238E27FC236}">
+                <a16:creationId xmlns:a16="http://schemas.microsoft.com/office/drawing/2014/main" id="{9DEAAF09-CB58-6E0F-3345-27591FA4FF54}"/>
+              </a:ext>
+            </a:extLst>
+          </p:cNvPr>
+          <p:cNvSpPr>
+            <a:spLocks noGrp="1"/>
+          </p:cNvSpPr>
+          <p:nvPr>
+            <p:ph type="ctrTitle"/>
+          </p:nvPr>
+        </p:nvSpPr>
+        <p:spPr/>
+        <p:txBody>
+          <a:bodyPr/>
+          <a:lstStyle/>
+          <a:p>
+            <a:r>
+              <a:rPr lang="en-SG" dirty="0"/>
+              <a:t>DATA SOURCE</a:t>
+            </a:r>
+          </a:p>
+        </p:txBody>
+      </p:sp>
+      <p:sp>
+        <p:nvSpPr>
+          <p:cNvPr id="3" name="Footer Placeholder 2">
+            <a:extLst>
+              <a:ext uri="{FF2B5EF4-FFF2-40B4-BE49-F238E27FC236}">
+                <a16:creationId xmlns:a16="http://schemas.microsoft.com/office/drawing/2014/main" id="{3F6A2061-CB22-D700-DFFA-693366FF7DAC}"/>
+              </a:ext>
+            </a:extLst>
+          </p:cNvPr>
+          <p:cNvSpPr>
+            <a:spLocks noGrp="1"/>
+          </p:cNvSpPr>
+          <p:nvPr>
+            <p:ph type="ftr" sz="quarter" idx="11"/>
+          </p:nvPr>
+        </p:nvSpPr>
+        <p:spPr/>
+        <p:txBody>
+          <a:bodyPr/>
+          <a:lstStyle/>
+          <a:p>
+            <a:r>
+              <a:rPr lang="en-US"/>
+              <a:t>SAMPLE FOOTER TEXT</a:t>
+            </a:r>
+            <a:endParaRPr lang="en-US" dirty="0"/>
+          </a:p>
+        </p:txBody>
+      </p:sp>
+      <p:sp>
+        <p:nvSpPr>
+          <p:cNvPr id="4" name="Date Placeholder 3">
+            <a:extLst>
+              <a:ext uri="{FF2B5EF4-FFF2-40B4-BE49-F238E27FC236}">
+                <a16:creationId xmlns:a16="http://schemas.microsoft.com/office/drawing/2014/main" id="{FB2649DC-6302-6FE7-EB8D-567208A1C78E}"/>
+              </a:ext>
+            </a:extLst>
+          </p:cNvPr>
+          <p:cNvSpPr>
+            <a:spLocks noGrp="1"/>
+          </p:cNvSpPr>
+          <p:nvPr>
+            <p:ph type="dt" sz="half" idx="10"/>
+          </p:nvPr>
+        </p:nvSpPr>
+        <p:spPr/>
+        <p:txBody>
+          <a:bodyPr/>
+          <a:lstStyle/>
+          <a:p>
+            <a:fld id="{010D0AB2-23BC-3043-AC30-5928E542C0CE}" type="datetime1">
+              <a:rPr lang="en-US" smtClean="0"/>
+              <a:t>7/6/2026</a:t>
+            </a:fld>
+            <a:endParaRPr lang="en-US" dirty="0"/>
+          </a:p>
+        </p:txBody>
+      </p:sp>
+      <p:sp>
+        <p:nvSpPr>
+          <p:cNvPr id="5" name="Slide Number Placeholder 4">
+            <a:extLst>
+              <a:ext uri="{FF2B5EF4-FFF2-40B4-BE49-F238E27FC236}">
+                <a16:creationId xmlns:a16="http://schemas.microsoft.com/office/drawing/2014/main" id="{66FF4A67-54EF-04B0-A7D5-1AED7EE1442F}"/>
+              </a:ext>
+            </a:extLst>
+          </p:cNvPr>
+          <p:cNvSpPr>
+            <a:spLocks noGrp="1"/>
+          </p:cNvSpPr>
+          <p:nvPr>
+            <p:ph type="sldNum" sz="quarter" idx="12"/>
+          </p:nvPr>
+        </p:nvSpPr>
+        <p:spPr/>
+        <p:txBody>
+          <a:bodyPr/>
+          <a:lstStyle/>
+          <a:p>
+            <a:fld id="{CC057153-B650-4DEB-B370-79DDCFDCE934}" type="slidenum">
+              <a:rPr lang="en-US" smtClean="0"/>
+              <a:pPr/>
+              <a:t>8</a:t>
+            </a:fld>
+            <a:endParaRPr lang="en-US" dirty="0"/>
+          </a:p>
+        </p:txBody>
+      </p:sp>
+    </p:spTree>
+    <p:extLst>
+      <p:ext uri="{BB962C8B-B14F-4D97-AF65-F5344CB8AC3E}">
+        <p14:creationId xmlns:p14="http://schemas.microsoft.com/office/powerpoint/2010/main" val="1748166942"/>
+      </p:ext>
+    </p:extLst>
+  </p:cSld>
+  <p:clrMapOvr>
+    <a:masterClrMapping/>
+  </p:clrMapOvr>
+</p:sld>
+</file>
+
+<file path=ppt/slides/slide9.xml><?xml version="1.0" encoding="utf-8"?>
+<p:sld xmlns:a="http://schemas.openxmlformats.org/drawingml/2006/main" xmlns:r="http://schemas.openxmlformats.org/officeDocument/2006/relationships" xmlns:p="http://schemas.openxmlformats.org/presentationml/2006/main">
+  <p:cSld>
+    <p:spTree>
+      <p:nvGrpSpPr>
+        <p:cNvPr id="1" name=""/>
+        <p:cNvGrpSpPr/>
+        <p:nvPr/>
+      </p:nvGrpSpPr>
+      <p:grpSpPr>
+        <a:xfrm>
+          <a:off x="0" y="0"/>
+          <a:ext cx="0" cy="0"/>
+          <a:chOff x="0" y="0"/>
+          <a:chExt cx="0" cy="0"/>
+        </a:xfrm>
+      </p:grpSpPr>
+      <p:sp>
+        <p:nvSpPr>
+          <p:cNvPr id="2" name="Title 1">
+            <a:extLst>
+              <a:ext uri="{FF2B5EF4-FFF2-40B4-BE49-F238E27FC236}">
+                <a16:creationId xmlns:a16="http://schemas.microsoft.com/office/drawing/2014/main" id="{EE58C531-7A30-5D0B-55FA-6704B085156E}"/>
+              </a:ext>
+            </a:extLst>
+          </p:cNvPr>
+          <p:cNvSpPr>
+            <a:spLocks noGrp="1"/>
+          </p:cNvSpPr>
+          <p:nvPr>
+            <p:ph type="ctrTitle"/>
+          </p:nvPr>
+        </p:nvSpPr>
+        <p:spPr/>
+        <p:txBody>
+          <a:bodyPr/>
+          <a:lstStyle/>
+          <a:p>
+            <a:r>
+              <a:rPr lang="en-SG" dirty="0"/>
+              <a:t>ISSUES AND LIMITATIONS</a:t>
+            </a:r>
+          </a:p>
+        </p:txBody>
+      </p:sp>
+      <p:sp>
+        <p:nvSpPr>
+          <p:cNvPr id="3" name="Footer Placeholder 2">
+            <a:extLst>
+              <a:ext uri="{FF2B5EF4-FFF2-40B4-BE49-F238E27FC236}">
+                <a16:creationId xmlns:a16="http://schemas.microsoft.com/office/drawing/2014/main" id="{935A7A2C-0E66-E74E-6AAA-46749892E93F}"/>
+              </a:ext>
+            </a:extLst>
+          </p:cNvPr>
+          <p:cNvSpPr>
+            <a:spLocks noGrp="1"/>
+          </p:cNvSpPr>
+          <p:nvPr>
+            <p:ph type="ftr" sz="quarter" idx="11"/>
+          </p:nvPr>
+        </p:nvSpPr>
+        <p:spPr/>
+        <p:txBody>
+          <a:bodyPr/>
+          <a:lstStyle/>
+          <a:p>
+            <a:r>
+              <a:rPr lang="en-US"/>
+              <a:t>SAMPLE FOOTER TEXT</a:t>
+            </a:r>
+            <a:endParaRPr lang="en-US" dirty="0"/>
+          </a:p>
+        </p:txBody>
+      </p:sp>
+      <p:sp>
+        <p:nvSpPr>
+          <p:cNvPr id="4" name="Date Placeholder 3">
+            <a:extLst>
+              <a:ext uri="{FF2B5EF4-FFF2-40B4-BE49-F238E27FC236}">
+                <a16:creationId xmlns:a16="http://schemas.microsoft.com/office/drawing/2014/main" id="{406F36CD-8CAF-F2A3-0961-D2C12A048190}"/>
+              </a:ext>
+            </a:extLst>
+          </p:cNvPr>
+          <p:cNvSpPr>
+            <a:spLocks noGrp="1"/>
+          </p:cNvSpPr>
+          <p:nvPr>
+            <p:ph type="dt" sz="half" idx="10"/>
+          </p:nvPr>
+        </p:nvSpPr>
+        <p:spPr/>
+        <p:txBody>
+          <a:bodyPr/>
+          <a:lstStyle/>
+          <a:p>
+            <a:fld id="{010D0AB2-23BC-3043-AC30-5928E542C0CE}" type="datetime1">
+              <a:rPr lang="en-US" smtClean="0"/>
+              <a:t>7/6/2026</a:t>
+            </a:fld>
+            <a:endParaRPr lang="en-US" dirty="0"/>
+          </a:p>
+        </p:txBody>
+      </p:sp>
+      <p:sp>
+        <p:nvSpPr>
+          <p:cNvPr id="5" name="Slide Number Placeholder 4">
+            <a:extLst>
+              <a:ext uri="{FF2B5EF4-FFF2-40B4-BE49-F238E27FC236}">
+                <a16:creationId xmlns:a16="http://schemas.microsoft.com/office/drawing/2014/main" id="{C01ACBED-585F-43F1-E030-A9F82EDE5DEB}"/>
+              </a:ext>
+            </a:extLst>
+          </p:cNvPr>
+          <p:cNvSpPr>
+            <a:spLocks noGrp="1"/>
+          </p:cNvSpPr>
+          <p:nvPr>
+            <p:ph type="sldNum" sz="quarter" idx="12"/>
+          </p:nvPr>
+        </p:nvSpPr>
+        <p:spPr/>
+        <p:txBody>
+          <a:bodyPr/>
+          <a:lstStyle/>
+          <a:p>
+            <a:fld id="{CC057153-B650-4DEB-B370-79DDCFDCE934}" type="slidenum">
+              <a:rPr lang="en-US" smtClean="0"/>
+              <a:pPr/>
+              <a:t>9</a:t>
+            </a:fld>
+            <a:endParaRPr lang="en-US" dirty="0"/>
+          </a:p>
+        </p:txBody>
+      </p:sp>
+    </p:spTree>
+    <p:extLst>
+      <p:ext uri="{BB962C8B-B14F-4D97-AF65-F5344CB8AC3E}">
+        <p14:creationId xmlns:p14="http://schemas.microsoft.com/office/powerpoint/2010/main" val="3783924705"/>
       </p:ext>
     </p:extLst>
   </p:cSld>
@@ -34229,15 +35496,6 @@
 </file>
 
 <file path=customXml/item1.xml><?xml version="1.0" encoding="utf-8"?>
-<?mso-contentType ?>
-<FormTemplates xmlns="http://schemas.microsoft.com/sharepoint/v3/contenttype/forms">
-  <Display>DocumentLibraryForm</Display>
-  <Edit>DocumentLibraryForm</Edit>
-  <New>DocumentLibraryForm</New>
-</FormTemplates>
-</file>
-
-<file path=customXml/item2.xml><?xml version="1.0" encoding="utf-8"?>
 <p:properties xmlns:p="http://schemas.microsoft.com/office/2006/metadata/properties" xmlns:xsi="http://www.w3.org/2001/XMLSchema-instance" xmlns:pc="http://schemas.microsoft.com/office/infopath/2007/PartnerControls">
   <documentManagement>
     <_ip_UnifiedCompliancePolicyUIAction xmlns="http://schemas.microsoft.com/sharepoint/v3" xsi:nil="true"/>
@@ -34257,7 +35515,7 @@
 </p:properties>
 </file>
 
-<file path=customXml/item3.xml><?xml version="1.0" encoding="utf-8"?>
+<file path=customXml/item2.xml><?xml version="1.0" encoding="utf-8"?>
 <ct:contentTypeSchema xmlns:ct="http://schemas.microsoft.com/office/2006/metadata/contentType" xmlns:ma="http://schemas.microsoft.com/office/2006/metadata/properties/metaAttributes" ct:_="" ma:_="" ma:contentTypeName="Document" ma:contentTypeID="0x01010079F111ED35F8CC479449609E8A0923A6" ma:contentTypeVersion="30" ma:contentTypeDescription="Create a new document." ma:contentTypeScope="" ma:versionID="cec0622158e8f13124e9e8fd4de31bd1">
   <xsd:schema xmlns:xsd="http://www.w3.org/2001/XMLSchema" xmlns:xs="http://www.w3.org/2001/XMLSchema" xmlns:p="http://schemas.microsoft.com/office/2006/metadata/properties" xmlns:ns1="http://schemas.microsoft.com/sharepoint/v3" xmlns:ns2="71af3243-3dd4-4a8d-8c0d-dd76da1f02a5" xmlns:ns3="16c05727-aa75-4e4a-9b5f-8a80a1165891" xmlns:ns4="230e9df3-be65-4c73-a93b-d1236ebd677e" targetNamespace="http://schemas.microsoft.com/office/2006/metadata/properties" ma:root="true" ma:fieldsID="3b52f30ab005d15df08657af532e6e38" ns1:_="" ns2:_="" ns3:_="" ns4:_="">
     <xsd:import namespace="http://schemas.microsoft.com/sharepoint/v3"/>
@@ -34575,15 +35833,16 @@
 </ct:contentTypeSchema>
 </file>
 
-<file path=customXml/itemProps1.xml><?xml version="1.0" encoding="utf-8"?>
-<ds:datastoreItem xmlns:ds="http://schemas.openxmlformats.org/officeDocument/2006/customXml" ds:itemID="{D3301439-688F-4D19-B908-B48B62C56078}">
-  <ds:schemaRefs>
-    <ds:schemaRef ds:uri="http://schemas.microsoft.com/sharepoint/v3/contenttype/forms"/>
-  </ds:schemaRefs>
-</ds:datastoreItem>
+<file path=customXml/item3.xml><?xml version="1.0" encoding="utf-8"?>
+<?mso-contentType ?>
+<FormTemplates xmlns="http://schemas.microsoft.com/sharepoint/v3/contenttype/forms">
+  <Display>DocumentLibraryForm</Display>
+  <Edit>DocumentLibraryForm</Edit>
+  <New>DocumentLibraryForm</New>
+</FormTemplates>
 </file>
 
-<file path=customXml/itemProps2.xml><?xml version="1.0" encoding="utf-8"?>
+<file path=customXml/itemProps1.xml><?xml version="1.0" encoding="utf-8"?>
 <ds:datastoreItem xmlns:ds="http://schemas.openxmlformats.org/officeDocument/2006/customXml" ds:itemID="{D1CEDABF-7176-4A42-8EF9-E5D4DD31FF6C}">
   <ds:schemaRefs>
     <ds:schemaRef ds:uri="http://schemas.microsoft.com/office/infopath/2007/PartnerControls"/>
@@ -34602,7 +35861,7 @@
 </ds:datastoreItem>
 </file>
 
-<file path=customXml/itemProps3.xml><?xml version="1.0" encoding="utf-8"?>
+<file path=customXml/itemProps2.xml><?xml version="1.0" encoding="utf-8"?>
 <ds:datastoreItem xmlns:ds="http://schemas.openxmlformats.org/officeDocument/2006/customXml" ds:itemID="{9EEC3793-C1BC-496C-A03C-202DFFC513D6}">
   <ds:schemaRefs>
     <ds:schemaRef ds:uri="http://schemas.microsoft.com/office/2006/metadata/contentType"/>
@@ -34623,6 +35882,14 @@
 </ds:datastoreItem>
 </file>
 
+<file path=customXml/itemProps3.xml><?xml version="1.0" encoding="utf-8"?>
+<ds:datastoreItem xmlns:ds="http://schemas.openxmlformats.org/officeDocument/2006/customXml" ds:itemID="{D3301439-688F-4D19-B908-B48B62C56078}">
+  <ds:schemaRefs>
+    <ds:schemaRef ds:uri="http://schemas.microsoft.com/sharepoint/v3/contenttype/forms"/>
+  </ds:schemaRefs>
+</ds:datastoreItem>
+</file>
+
 <file path=docMetadata/LabelInfo.xml><?xml version="1.0" encoding="utf-8"?>
 <clbl:labelList xmlns:clbl="http://schemas.microsoft.com/office/2020/mipLabelMetadata"/>
 </file>
--- a/EGT307 PRESENTATION.pptx
+++ b/EGT307 PRESENTATION.pptx
@@ -5,22 +5,24 @@
     <p:sldMasterId id="2147483917" r:id="rId4"/>
   </p:sldMasterIdLst>
   <p:notesMasterIdLst>
-    <p:notesMasterId r:id="rId15"/>
+    <p:notesMasterId r:id="rId17"/>
   </p:notesMasterIdLst>
   <p:handoutMasterIdLst>
-    <p:handoutMasterId r:id="rId16"/>
+    <p:handoutMasterId r:id="rId18"/>
   </p:handoutMasterIdLst>
   <p:sldIdLst>
     <p:sldId id="264" r:id="rId5"/>
     <p:sldId id="265" r:id="rId6"/>
     <p:sldId id="272" r:id="rId7"/>
     <p:sldId id="266" r:id="rId8"/>
-    <p:sldId id="267" r:id="rId9"/>
-    <p:sldId id="268" r:id="rId10"/>
-    <p:sldId id="269" r:id="rId11"/>
-    <p:sldId id="270" r:id="rId12"/>
-    <p:sldId id="271" r:id="rId13"/>
-    <p:sldId id="274" r:id="rId14"/>
+    <p:sldId id="275" r:id="rId9"/>
+    <p:sldId id="276" r:id="rId10"/>
+    <p:sldId id="267" r:id="rId11"/>
+    <p:sldId id="268" r:id="rId12"/>
+    <p:sldId id="269" r:id="rId13"/>
+    <p:sldId id="270" r:id="rId14"/>
+    <p:sldId id="271" r:id="rId15"/>
+    <p:sldId id="274" r:id="rId16"/>
   </p:sldIdLst>
   <p:sldSz cx="12192000" cy="6858000"/>
   <p:notesSz cx="6858000" cy="9144000"/>
@@ -233,7 +235,7 @@
           <a:p>
             <a:fld id="{D5D1EC30-5B0B-48D0-A1A8-66A96720DF24}" type="datetimeFigureOut">
               <a:rPr lang="en-US" smtClean="0"/>
-              <a:t>7/6/2026</a:t>
+              <a:t>7/16/2026</a:t>
             </a:fld>
             <a:endParaRPr lang="en-US" dirty="0"/>
           </a:p>
@@ -410,7 +412,7 @@
           <a:p>
             <a:fld id="{69F68A4D-42A7-45F7-9930-00E8DCB48D7E}" type="datetimeFigureOut">
               <a:rPr lang="en-US" smtClean="0"/>
-              <a:t>7/6/2026</a:t>
+              <a:t>7/16/2026</a:t>
             </a:fld>
             <a:endParaRPr lang="en-US" dirty="0"/>
           </a:p>
@@ -1887,7 +1889,7 @@
           <a:p>
             <a:fld id="{EBC9FF77-C2BC-3842-9757-C2EBADB34099}" type="datetime1">
               <a:rPr lang="en-US" smtClean="0"/>
-              <a:t>7/6/2026</a:t>
+              <a:t>7/16/2026</a:t>
             </a:fld>
             <a:endParaRPr lang="en-US" dirty="0"/>
           </a:p>
@@ -2251,7 +2253,7 @@
           <a:p>
             <a:fld id="{010D0AB2-23BC-3043-AC30-5928E542C0CE}" type="datetime1">
               <a:rPr lang="en-US" smtClean="0"/>
-              <a:t>7/6/2026</a:t>
+              <a:t>7/16/2026</a:t>
             </a:fld>
             <a:endParaRPr lang="en-US" dirty="0"/>
           </a:p>
@@ -2777,7 +2779,7 @@
           <a:p>
             <a:fld id="{3EE24C61-4277-DA47-BF4A-DCEFD7F4C6B4}" type="datetime1">
               <a:rPr lang="en-US" smtClean="0"/>
-              <a:t>7/6/2026</a:t>
+              <a:t>7/16/2026</a:t>
             </a:fld>
             <a:endParaRPr lang="en-US" dirty="0"/>
           </a:p>
@@ -3303,7 +3305,7 @@
           <a:p>
             <a:fld id="{53D1C53B-D534-AA48-85B3-4F5B03DDCBA8}" type="datetime1">
               <a:rPr lang="en-US" smtClean="0"/>
-              <a:t>7/6/2026</a:t>
+              <a:t>7/16/2026</a:t>
             </a:fld>
             <a:endParaRPr lang="en-US" dirty="0"/>
           </a:p>
@@ -3949,7 +3951,7 @@
           <a:p>
             <a:fld id="{B2A7CB4E-BD8C-8E4D-91FF-B1939559C134}" type="datetime1">
               <a:rPr lang="en-US" smtClean="0"/>
-              <a:t>7/6/2026</a:t>
+              <a:t>7/16/2026</a:t>
             </a:fld>
             <a:endParaRPr lang="en-US" dirty="0"/>
           </a:p>
@@ -4558,7 +4560,7 @@
           <a:p>
             <a:fld id="{4142E188-D61A-9842-B8A2-1559B3399613}" type="datetime1">
               <a:rPr lang="en-US" smtClean="0"/>
-              <a:t>7/6/2026</a:t>
+              <a:t>7/16/2026</a:t>
             </a:fld>
             <a:endParaRPr lang="en-US" dirty="0"/>
           </a:p>
@@ -5129,7 +5131,7 @@
           <a:p>
             <a:fld id="{0D0C1909-8EA0-3E44-B1AC-A9EA56584238}" type="datetime1">
               <a:rPr lang="en-US" smtClean="0"/>
-              <a:t>7/6/2026</a:t>
+              <a:t>7/16/2026</a:t>
             </a:fld>
             <a:endParaRPr lang="en-US" dirty="0"/>
           </a:p>
@@ -5668,7 +5670,7 @@
           <a:p>
             <a:fld id="{C752DD5A-B150-8340-8E59-4C8F3F7E3A59}" type="datetime1">
               <a:rPr lang="en-US" smtClean="0"/>
-              <a:t>7/6/2026</a:t>
+              <a:t>7/16/2026</a:t>
             </a:fld>
             <a:endParaRPr lang="en-US" dirty="0"/>
           </a:p>
@@ -6177,7 +6179,7 @@
           <a:p>
             <a:fld id="{0FD936B8-E398-1A41-8DE9-58DDB113FEEA}" type="datetime1">
               <a:rPr lang="en-US" smtClean="0"/>
-              <a:t>7/6/2026</a:t>
+              <a:t>7/16/2026</a:t>
             </a:fld>
             <a:endParaRPr lang="en-US" dirty="0"/>
           </a:p>
@@ -6675,7 +6677,7 @@
           <a:p>
             <a:fld id="{927C0DEB-4AE1-EA4D-826D-E3C22802B942}" type="datetime1">
               <a:rPr lang="en-US" smtClean="0"/>
-              <a:t>7/6/2026</a:t>
+              <a:t>7/16/2026</a:t>
             </a:fld>
             <a:endParaRPr lang="en-US" dirty="0"/>
           </a:p>
@@ -7160,7 +7162,7 @@
           <a:p>
             <a:fld id="{BE2752B3-7BF7-614C-A80A-1256FFE41AD1}" type="datetime1">
               <a:rPr lang="en-US" smtClean="0"/>
-              <a:t>7/6/2026</a:t>
+              <a:t>7/16/2026</a:t>
             </a:fld>
             <a:endParaRPr lang="en-US" dirty="0"/>
           </a:p>
@@ -7614,7 +7616,7 @@
           <a:p>
             <a:fld id="{40482BA7-8406-1C47-9A76-988652CA5787}" type="datetime1">
               <a:rPr lang="en-US" smtClean="0"/>
-              <a:t>7/6/2026</a:t>
+              <a:t>7/16/2026</a:t>
             </a:fld>
             <a:endParaRPr lang="en-US" dirty="0"/>
           </a:p>
@@ -8171,7 +8173,7 @@
           <a:p>
             <a:fld id="{79F03E26-E542-1A4D-AC7A-1E4E95BAEC6A}" type="datetime1">
               <a:rPr lang="en-US" smtClean="0"/>
-              <a:t>7/6/2026</a:t>
+              <a:t>7/16/2026</a:t>
             </a:fld>
             <a:endParaRPr lang="en-US" dirty="0"/>
           </a:p>
@@ -8769,7 +8771,7 @@
           <a:p>
             <a:fld id="{115476B0-E2C7-E147-B9CE-3E274E847A52}" type="datetime1">
               <a:rPr lang="en-US" smtClean="0"/>
-              <a:t>7/6/2026</a:t>
+              <a:t>7/16/2026</a:t>
             </a:fld>
             <a:endParaRPr lang="en-US" dirty="0"/>
           </a:p>
@@ -9367,7 +9369,7 @@
           <a:p>
             <a:fld id="{30D7DCC1-5043-7A46-8443-F8426D5EAB75}" type="datetime1">
               <a:rPr lang="en-US" smtClean="0"/>
-              <a:t>7/6/2026</a:t>
+              <a:t>7/16/2026</a:t>
             </a:fld>
             <a:endParaRPr lang="en-US" dirty="0"/>
           </a:p>
@@ -9967,7 +9969,7 @@
           <a:p>
             <a:fld id="{D1A2963D-70FD-3A42-A53A-2480966C033D}" type="datetime1">
               <a:rPr lang="en-US" smtClean="0"/>
-              <a:t>7/6/2026</a:t>
+              <a:t>7/16/2026</a:t>
             </a:fld>
             <a:endParaRPr lang="en-US" dirty="0"/>
           </a:p>
@@ -10567,7 +10569,7 @@
           <a:p>
             <a:fld id="{F1A8FB16-FCFB-DA44-98E9-136CD51670D6}" type="datetime1">
               <a:rPr lang="en-US" smtClean="0"/>
-              <a:t>7/6/2026</a:t>
+              <a:t>7/16/2026</a:t>
             </a:fld>
             <a:endParaRPr lang="en-US" dirty="0"/>
           </a:p>
@@ -11165,7 +11167,7 @@
           <a:p>
             <a:fld id="{58EFB3A8-11B5-7149-8412-15238624EFFD}" type="datetime1">
               <a:rPr lang="en-US" smtClean="0"/>
-              <a:t>7/6/2026</a:t>
+              <a:t>7/16/2026</a:t>
             </a:fld>
             <a:endParaRPr lang="en-US" dirty="0"/>
           </a:p>
@@ -11763,7 +11765,7 @@
           <a:p>
             <a:fld id="{650FCFAB-53E3-A342-A296-D67E0AB8D0CD}" type="datetime1">
               <a:rPr lang="en-US" smtClean="0"/>
-              <a:t>7/6/2026</a:t>
+              <a:t>7/16/2026</a:t>
             </a:fld>
             <a:endParaRPr lang="en-US" dirty="0"/>
           </a:p>
@@ -12359,7 +12361,7 @@
           <a:p>
             <a:fld id="{8DC46901-11EF-4445-8903-DC36784F331E}" type="datetime1">
               <a:rPr lang="en-US" smtClean="0"/>
-              <a:t>7/6/2026</a:t>
+              <a:t>7/16/2026</a:t>
             </a:fld>
             <a:endParaRPr lang="en-US" dirty="0"/>
           </a:p>
@@ -12888,7 +12890,7 @@
           <a:p>
             <a:fld id="{86A42598-CA8F-5141-9F98-7018240FA786}" type="datetime1">
               <a:rPr lang="en-US" smtClean="0"/>
-              <a:t>7/6/2026</a:t>
+              <a:t>7/16/2026</a:t>
             </a:fld>
             <a:endParaRPr lang="en-US" dirty="0"/>
           </a:p>
@@ -13504,7 +13506,7 @@
           <a:p>
             <a:fld id="{BB5C750C-98D3-2541-9DBA-212130458E4E}" type="datetime1">
               <a:rPr lang="en-US" smtClean="0"/>
-              <a:t>7/6/2026</a:t>
+              <a:t>7/16/2026</a:t>
             </a:fld>
             <a:endParaRPr lang="en-US" dirty="0"/>
           </a:p>
@@ -14104,7 +14106,7 @@
           <a:p>
             <a:fld id="{91C99844-6C9E-BB4D-8B47-7C2CC32AAC02}" type="datetime1">
               <a:rPr lang="en-US" smtClean="0"/>
-              <a:t>7/6/2026</a:t>
+              <a:t>7/16/2026</a:t>
             </a:fld>
             <a:endParaRPr lang="en-US" dirty="0"/>
           </a:p>
@@ -14704,7 +14706,7 @@
           <a:p>
             <a:fld id="{97582611-C0A2-BD42-A8F7-C2F9A013F10C}" type="datetime1">
               <a:rPr lang="en-US" smtClean="0"/>
-              <a:t>7/6/2026</a:t>
+              <a:t>7/16/2026</a:t>
             </a:fld>
             <a:endParaRPr lang="en-US" dirty="0"/>
           </a:p>
@@ -15302,7 +15304,7 @@
           <a:p>
             <a:fld id="{1048417B-2BA9-FC42-993A-F5CAB8ABAB3C}" type="datetime1">
               <a:rPr lang="en-US" smtClean="0"/>
-              <a:t>7/6/2026</a:t>
+              <a:t>7/16/2026</a:t>
             </a:fld>
             <a:endParaRPr lang="en-US" dirty="0"/>
           </a:p>
@@ -15905,7 +15907,7 @@
           <a:p>
             <a:fld id="{B9956DE8-31F3-0C48-AD89-A99E39B5E351}" type="datetime1">
               <a:rPr lang="en-US" smtClean="0"/>
-              <a:t>7/6/2026</a:t>
+              <a:t>7/16/2026</a:t>
             </a:fld>
             <a:endParaRPr lang="en-US" dirty="0"/>
           </a:p>
@@ -16465,7 +16467,7 @@
           <a:p>
             <a:fld id="{1247F170-621E-394E-A3F2-D37D14C6B270}" type="datetime1">
               <a:rPr lang="en-US" smtClean="0"/>
-              <a:t>7/6/2026</a:t>
+              <a:t>7/16/2026</a:t>
             </a:fld>
             <a:endParaRPr lang="en-US" dirty="0"/>
           </a:p>
@@ -17027,7 +17029,7 @@
           <a:p>
             <a:fld id="{3BFEB256-000B-7640-A176-A6ED88FB302B}" type="datetime1">
               <a:rPr lang="en-US" smtClean="0"/>
-              <a:t>7/6/2026</a:t>
+              <a:t>7/16/2026</a:t>
             </a:fld>
             <a:endParaRPr lang="en-US" dirty="0"/>
           </a:p>
@@ -17584,7 +17586,7 @@
           <a:p>
             <a:fld id="{AD187FAD-DCB9-3D4B-B066-9000219F05FB}" type="datetime1">
               <a:rPr lang="en-US" smtClean="0"/>
-              <a:t>7/6/2026</a:t>
+              <a:t>7/16/2026</a:t>
             </a:fld>
             <a:endParaRPr lang="en-US" dirty="0"/>
           </a:p>
@@ -18184,7 +18186,7 @@
           <a:p>
             <a:fld id="{189C5B77-1EC5-224E-B44E-9B7868782731}" type="datetime1">
               <a:rPr lang="en-US" smtClean="0"/>
-              <a:t>7/6/2026</a:t>
+              <a:t>7/16/2026</a:t>
             </a:fld>
             <a:endParaRPr lang="en-US" dirty="0"/>
           </a:p>
@@ -18787,7 +18789,7 @@
           <a:p>
             <a:fld id="{C8F601A6-19D3-EB49-B7F2-A9801AE13DA6}" type="datetime1">
               <a:rPr lang="en-US" smtClean="0"/>
-              <a:t>7/6/2026</a:t>
+              <a:t>7/16/2026</a:t>
             </a:fld>
             <a:endParaRPr lang="en-US" dirty="0"/>
           </a:p>
@@ -19269,7 +19271,7 @@
           <a:p>
             <a:fld id="{FF5D23C8-9820-654D-9C1E-FE1FC23DA807}" type="datetime1">
               <a:rPr lang="en-US" smtClean="0"/>
-              <a:t>7/6/2026</a:t>
+              <a:t>7/16/2026</a:t>
             </a:fld>
             <a:endParaRPr lang="en-US" dirty="0"/>
           </a:p>
@@ -19890,7 +19892,7 @@
           <a:p>
             <a:fld id="{B5DCFA2C-3BE3-964B-9AAF-C20CC59CEE43}" type="datetime1">
               <a:rPr lang="en-US" smtClean="0"/>
-              <a:t>7/6/2026</a:t>
+              <a:t>7/16/2026</a:t>
             </a:fld>
             <a:endParaRPr lang="en-US" dirty="0"/>
           </a:p>
@@ -20328,7 +20330,7 @@
           <a:p>
             <a:fld id="{79A3CDA5-1015-3148-A386-36088AF5334C}" type="datetime1">
               <a:rPr lang="en-US" smtClean="0"/>
-              <a:t>7/6/2026</a:t>
+              <a:t>7/16/2026</a:t>
             </a:fld>
             <a:endParaRPr lang="en-US" dirty="0"/>
           </a:p>
@@ -20763,7 +20765,7 @@
           <a:p>
             <a:fld id="{C112E8AA-E35F-CF44-B5A4-3B5EDD4AC3FC}" type="datetime1">
               <a:rPr lang="en-US" smtClean="0"/>
-              <a:t>7/6/2026</a:t>
+              <a:t>7/16/2026</a:t>
             </a:fld>
             <a:endParaRPr lang="en-US" dirty="0"/>
           </a:p>
@@ -21375,7 +21377,7 @@
           <a:p>
             <a:fld id="{E0FF3B4E-61F2-9C45-A7C9-0649FA3F05AD}" type="datetime1">
               <a:rPr lang="en-US" smtClean="0"/>
-              <a:t>7/6/2026</a:t>
+              <a:t>7/16/2026</a:t>
             </a:fld>
             <a:endParaRPr lang="en-US" dirty="0"/>
           </a:p>
@@ -22000,7 +22002,7 @@
           <a:p>
             <a:fld id="{CC4A289B-0B17-4246-8E33-E89C12A90840}" type="datetime1">
               <a:rPr lang="en-US" smtClean="0"/>
-              <a:t>7/6/2026</a:t>
+              <a:t>7/16/2026</a:t>
             </a:fld>
             <a:endParaRPr lang="en-US" dirty="0"/>
           </a:p>
@@ -22620,7 +22622,7 @@
           <a:p>
             <a:fld id="{C8092CDE-5B88-E044-9012-03F4795B046E}" type="datetime1">
               <a:rPr lang="en-US" smtClean="0"/>
-              <a:t>7/6/2026</a:t>
+              <a:t>7/16/2026</a:t>
             </a:fld>
             <a:endParaRPr lang="en-US" dirty="0"/>
           </a:p>
@@ -23274,7 +23276,7 @@
           <a:p>
             <a:fld id="{EC076D1D-DE21-9B42-8106-8CD72DA85F70}" type="datetime1">
               <a:rPr lang="en-US" smtClean="0"/>
-              <a:t>7/6/2026</a:t>
+              <a:t>7/16/2026</a:t>
             </a:fld>
             <a:endParaRPr lang="en-US" dirty="0"/>
           </a:p>
@@ -23928,7 +23930,7 @@
           <a:p>
             <a:fld id="{57807DC2-592A-C24E-8E32-92959310D82C}" type="datetime1">
               <a:rPr lang="en-US" smtClean="0"/>
-              <a:t>7/6/2026</a:t>
+              <a:t>7/16/2026</a:t>
             </a:fld>
             <a:endParaRPr lang="en-US" dirty="0"/>
           </a:p>
@@ -24615,7 +24617,7 @@
             <a:fld id="{2A17FF52-3D92-5045-83B3-191BF759FA8D}" type="datetime1">
               <a:rPr lang="en-US" smtClean="0"/>
               <a:pPr/>
-              <a:t>7/6/2026</a:t>
+              <a:t>7/16/2026</a:t>
             </a:fld>
             <a:endParaRPr lang="en-US" dirty="0"/>
           </a:p>
@@ -25056,7 +25058,7 @@
             <a:fld id="{17C67708-7A94-8245-80C8-4B4702495DB1}" type="datetime1">
               <a:rPr lang="en-US" smtClean="0"/>
               <a:pPr/>
-              <a:t>7/6/2026</a:t>
+              <a:t>7/16/2026</a:t>
             </a:fld>
             <a:endParaRPr lang="en-US" dirty="0"/>
           </a:p>
@@ -25581,7 +25583,7 @@
           <a:p>
             <a:fld id="{763C345D-F56F-0743-AB88-4EB3E35EF63D}" type="datetime1">
               <a:rPr lang="en-US" smtClean="0"/>
-              <a:t>7/6/2026</a:t>
+              <a:t>7/16/2026</a:t>
             </a:fld>
             <a:endParaRPr lang="en-US" dirty="0"/>
           </a:p>
@@ -26079,7 +26081,7 @@
             <a:fld id="{C3A90753-8D45-EB44-AB23-49A6290D6DA6}" type="datetime1">
               <a:rPr lang="en-US" smtClean="0"/>
               <a:pPr/>
-              <a:t>7/6/2026</a:t>
+              <a:t>7/16/2026</a:t>
             </a:fld>
             <a:endParaRPr lang="en-US" dirty="0"/>
           </a:p>
@@ -26665,7 +26667,7 @@
           <a:p>
             <a:fld id="{C5059AB6-B751-F44D-A28C-E19CFA261A8F}" type="datetime1">
               <a:rPr lang="en-US" smtClean="0"/>
-              <a:t>7/6/2026</a:t>
+              <a:t>7/16/2026</a:t>
             </a:fld>
             <a:endParaRPr lang="en-US" dirty="0"/>
           </a:p>
@@ -27368,7 +27370,7 @@
           <a:p>
             <a:fld id="{F4B7459A-9905-1A4B-AB1A-C91FAC752AC6}" type="datetime1">
               <a:rPr lang="en-US" smtClean="0"/>
-              <a:t>7/6/2026</a:t>
+              <a:t>7/16/2026</a:t>
             </a:fld>
             <a:endParaRPr lang="en-US" dirty="0"/>
           </a:p>
@@ -27751,7 +27753,7 @@
           <a:p>
             <a:fld id="{D255AB00-997D-D540-BC20-37B7E62B26C1}" type="datetime1">
               <a:rPr lang="en-US" smtClean="0"/>
-              <a:t>7/6/2026</a:t>
+              <a:t>7/16/2026</a:t>
             </a:fld>
             <a:endParaRPr lang="en-US" dirty="0"/>
           </a:p>
@@ -28092,7 +28094,7 @@
           <a:p>
             <a:fld id="{69F3ECCF-2CCD-CA4B-8712-AE4484B24AE9}" type="datetime1">
               <a:rPr lang="en-US" smtClean="0"/>
-              <a:t>7/6/2026</a:t>
+              <a:t>7/16/2026</a:t>
             </a:fld>
             <a:endParaRPr lang="en-US" dirty="0"/>
           </a:p>
@@ -28677,7 +28679,7 @@
           <a:p>
             <a:fld id="{22942A74-7D23-DC49-91AA-85B24B3B8A00}" type="datetime1">
               <a:rPr lang="en-US" smtClean="0"/>
-              <a:t>7/6/2026</a:t>
+              <a:t>7/16/2026</a:t>
             </a:fld>
             <a:endParaRPr lang="en-US" dirty="0"/>
           </a:p>
@@ -29230,7 +29232,7 @@
           <a:p>
             <a:fld id="{22A0247B-8639-BE4B-9EB6-99BF33B2FE57}" type="datetime1">
               <a:rPr lang="en-US" smtClean="0"/>
-              <a:t>7/6/2026</a:t>
+              <a:t>7/16/2026</a:t>
             </a:fld>
             <a:endParaRPr lang="en-US" dirty="0"/>
           </a:p>
@@ -29760,7 +29762,7 @@
           <a:p>
             <a:fld id="{162FAA25-3923-0740-83DA-275C59DD4599}" type="datetime1">
               <a:rPr lang="en-US" smtClean="0"/>
-              <a:t>7/6/2026</a:t>
+              <a:t>7/16/2026</a:t>
             </a:fld>
             <a:endParaRPr lang="en-US" dirty="0"/>
           </a:p>
@@ -30251,7 +30253,7 @@
           <a:p>
             <a:fld id="{AB1B52C7-37F9-BD40-8BE5-16C7107F6B2A}" type="datetime1">
               <a:rPr lang="en-US" smtClean="0"/>
-              <a:t>7/6/2026</a:t>
+              <a:t>7/16/2026</a:t>
             </a:fld>
             <a:endParaRPr lang="en-US" dirty="0"/>
           </a:p>
@@ -30968,7 +30970,7 @@
           <a:p>
             <a:fld id="{FF5D23C8-9820-654D-9C1E-FE1FC23DA807}" type="datetime1">
               <a:rPr lang="en-US" smtClean="0"/>
-              <a:t>7/6/2026</a:t>
+              <a:t>7/16/2026</a:t>
             </a:fld>
             <a:endParaRPr lang="en-US" dirty="0"/>
           </a:p>
@@ -31214,7 +31216,7 @@
           <a:p>
             <a:fld id="{5594B28A-4C74-C14A-960D-ABD28BCC0EB4}" type="datetime1">
               <a:rPr lang="en-US" smtClean="0"/>
-              <a:t>7/6/2026</a:t>
+              <a:t>7/16/2026</a:t>
             </a:fld>
             <a:endParaRPr lang="en-US" dirty="0"/>
           </a:p>
@@ -31632,7 +31634,7 @@
           <a:p>
             <a:fld id="{D8CCD23C-B1EB-604C-96F1-0CF64015D152}" type="datetime1">
               <a:rPr lang="en-US" smtClean="0"/>
-              <a:t>7/6/2026</a:t>
+              <a:t>7/16/2026</a:t>
             </a:fld>
             <a:endParaRPr lang="en-US" dirty="0"/>
           </a:p>
@@ -32069,7 +32071,7 @@
           <a:p>
             <a:fld id="{4BE11430-0446-F343-817C-D9D2C78891B0}" type="datetime1">
               <a:rPr lang="en-US" smtClean="0"/>
-              <a:t>7/6/2026</a:t>
+              <a:t>7/16/2026</a:t>
             </a:fld>
             <a:endParaRPr lang="en-US" dirty="0"/>
           </a:p>
@@ -32590,7 +32592,7 @@
             <a:fld id="{6739503E-9C75-484A-A764-D9D8121AAE05}" type="datetime1">
               <a:rPr lang="en-US" smtClean="0"/>
               <a:pPr/>
-              <a:t>7/6/2026</a:t>
+              <a:t>7/16/2026</a:t>
             </a:fld>
             <a:endParaRPr lang="en-US" dirty="0"/>
           </a:p>
@@ -33428,6 +33430,298 @@
           <p:cNvPr id="2" name="Title 1">
             <a:extLst>
               <a:ext uri="{FF2B5EF4-FFF2-40B4-BE49-F238E27FC236}">
+                <a16:creationId xmlns:a16="http://schemas.microsoft.com/office/drawing/2014/main" id="{9DEAAF09-CB58-6E0F-3345-27591FA4FF54}"/>
+              </a:ext>
+            </a:extLst>
+          </p:cNvPr>
+          <p:cNvSpPr>
+            <a:spLocks noGrp="1"/>
+          </p:cNvSpPr>
+          <p:nvPr>
+            <p:ph type="ctrTitle"/>
+          </p:nvPr>
+        </p:nvSpPr>
+        <p:spPr/>
+        <p:txBody>
+          <a:bodyPr/>
+          <a:lstStyle/>
+          <a:p>
+            <a:r>
+              <a:rPr lang="en-SG" dirty="0"/>
+              <a:t>DATA SOURCE</a:t>
+            </a:r>
+          </a:p>
+        </p:txBody>
+      </p:sp>
+      <p:sp>
+        <p:nvSpPr>
+          <p:cNvPr id="3" name="Footer Placeholder 2">
+            <a:extLst>
+              <a:ext uri="{FF2B5EF4-FFF2-40B4-BE49-F238E27FC236}">
+                <a16:creationId xmlns:a16="http://schemas.microsoft.com/office/drawing/2014/main" id="{3F6A2061-CB22-D700-DFFA-693366FF7DAC}"/>
+              </a:ext>
+            </a:extLst>
+          </p:cNvPr>
+          <p:cNvSpPr>
+            <a:spLocks noGrp="1"/>
+          </p:cNvSpPr>
+          <p:nvPr>
+            <p:ph type="ftr" sz="quarter" idx="11"/>
+          </p:nvPr>
+        </p:nvSpPr>
+        <p:spPr/>
+        <p:txBody>
+          <a:bodyPr/>
+          <a:lstStyle/>
+          <a:p>
+            <a:r>
+              <a:rPr lang="en-US"/>
+              <a:t>SAMPLE FOOTER TEXT</a:t>
+            </a:r>
+            <a:endParaRPr lang="en-US" dirty="0"/>
+          </a:p>
+        </p:txBody>
+      </p:sp>
+      <p:sp>
+        <p:nvSpPr>
+          <p:cNvPr id="4" name="Date Placeholder 3">
+            <a:extLst>
+              <a:ext uri="{FF2B5EF4-FFF2-40B4-BE49-F238E27FC236}">
+                <a16:creationId xmlns:a16="http://schemas.microsoft.com/office/drawing/2014/main" id="{FB2649DC-6302-6FE7-EB8D-567208A1C78E}"/>
+              </a:ext>
+            </a:extLst>
+          </p:cNvPr>
+          <p:cNvSpPr>
+            <a:spLocks noGrp="1"/>
+          </p:cNvSpPr>
+          <p:nvPr>
+            <p:ph type="dt" sz="half" idx="10"/>
+          </p:nvPr>
+        </p:nvSpPr>
+        <p:spPr/>
+        <p:txBody>
+          <a:bodyPr/>
+          <a:lstStyle/>
+          <a:p>
+            <a:fld id="{010D0AB2-23BC-3043-AC30-5928E542C0CE}" type="datetime1">
+              <a:rPr lang="en-US" smtClean="0"/>
+              <a:t>7/16/2026</a:t>
+            </a:fld>
+            <a:endParaRPr lang="en-US" dirty="0"/>
+          </a:p>
+        </p:txBody>
+      </p:sp>
+      <p:sp>
+        <p:nvSpPr>
+          <p:cNvPr id="5" name="Slide Number Placeholder 4">
+            <a:extLst>
+              <a:ext uri="{FF2B5EF4-FFF2-40B4-BE49-F238E27FC236}">
+                <a16:creationId xmlns:a16="http://schemas.microsoft.com/office/drawing/2014/main" id="{66FF4A67-54EF-04B0-A7D5-1AED7EE1442F}"/>
+              </a:ext>
+            </a:extLst>
+          </p:cNvPr>
+          <p:cNvSpPr>
+            <a:spLocks noGrp="1"/>
+          </p:cNvSpPr>
+          <p:nvPr>
+            <p:ph type="sldNum" sz="quarter" idx="12"/>
+          </p:nvPr>
+        </p:nvSpPr>
+        <p:spPr/>
+        <p:txBody>
+          <a:bodyPr/>
+          <a:lstStyle/>
+          <a:p>
+            <a:fld id="{CC057153-B650-4DEB-B370-79DDCFDCE934}" type="slidenum">
+              <a:rPr lang="en-US" smtClean="0"/>
+              <a:pPr/>
+              <a:t>10</a:t>
+            </a:fld>
+            <a:endParaRPr lang="en-US" dirty="0"/>
+          </a:p>
+        </p:txBody>
+      </p:sp>
+    </p:spTree>
+    <p:extLst>
+      <p:ext uri="{BB962C8B-B14F-4D97-AF65-F5344CB8AC3E}">
+        <p14:creationId xmlns:p14="http://schemas.microsoft.com/office/powerpoint/2010/main" val="1748166942"/>
+      </p:ext>
+    </p:extLst>
+  </p:cSld>
+  <p:clrMapOvr>
+    <a:masterClrMapping/>
+  </p:clrMapOvr>
+</p:sld>
+</file>
+
+<file path=ppt/slides/slide11.xml><?xml version="1.0" encoding="utf-8"?>
+<p:sld xmlns:a="http://schemas.openxmlformats.org/drawingml/2006/main" xmlns:r="http://schemas.openxmlformats.org/officeDocument/2006/relationships" xmlns:p="http://schemas.openxmlformats.org/presentationml/2006/main">
+  <p:cSld>
+    <p:spTree>
+      <p:nvGrpSpPr>
+        <p:cNvPr id="1" name=""/>
+        <p:cNvGrpSpPr/>
+        <p:nvPr/>
+      </p:nvGrpSpPr>
+      <p:grpSpPr>
+        <a:xfrm>
+          <a:off x="0" y="0"/>
+          <a:ext cx="0" cy="0"/>
+          <a:chOff x="0" y="0"/>
+          <a:chExt cx="0" cy="0"/>
+        </a:xfrm>
+      </p:grpSpPr>
+      <p:sp>
+        <p:nvSpPr>
+          <p:cNvPr id="2" name="Title 1">
+            <a:extLst>
+              <a:ext uri="{FF2B5EF4-FFF2-40B4-BE49-F238E27FC236}">
+                <a16:creationId xmlns:a16="http://schemas.microsoft.com/office/drawing/2014/main" id="{EE58C531-7A30-5D0B-55FA-6704B085156E}"/>
+              </a:ext>
+            </a:extLst>
+          </p:cNvPr>
+          <p:cNvSpPr>
+            <a:spLocks noGrp="1"/>
+          </p:cNvSpPr>
+          <p:nvPr>
+            <p:ph type="ctrTitle"/>
+          </p:nvPr>
+        </p:nvSpPr>
+        <p:spPr/>
+        <p:txBody>
+          <a:bodyPr/>
+          <a:lstStyle/>
+          <a:p>
+            <a:r>
+              <a:rPr lang="en-SG" dirty="0"/>
+              <a:t>ISSUES AND LIMITATIONS</a:t>
+            </a:r>
+          </a:p>
+        </p:txBody>
+      </p:sp>
+      <p:sp>
+        <p:nvSpPr>
+          <p:cNvPr id="3" name="Footer Placeholder 2">
+            <a:extLst>
+              <a:ext uri="{FF2B5EF4-FFF2-40B4-BE49-F238E27FC236}">
+                <a16:creationId xmlns:a16="http://schemas.microsoft.com/office/drawing/2014/main" id="{935A7A2C-0E66-E74E-6AAA-46749892E93F}"/>
+              </a:ext>
+            </a:extLst>
+          </p:cNvPr>
+          <p:cNvSpPr>
+            <a:spLocks noGrp="1"/>
+          </p:cNvSpPr>
+          <p:nvPr>
+            <p:ph type="ftr" sz="quarter" idx="11"/>
+          </p:nvPr>
+        </p:nvSpPr>
+        <p:spPr/>
+        <p:txBody>
+          <a:bodyPr/>
+          <a:lstStyle/>
+          <a:p>
+            <a:r>
+              <a:rPr lang="en-US"/>
+              <a:t>SAMPLE FOOTER TEXT</a:t>
+            </a:r>
+            <a:endParaRPr lang="en-US" dirty="0"/>
+          </a:p>
+        </p:txBody>
+      </p:sp>
+      <p:sp>
+        <p:nvSpPr>
+          <p:cNvPr id="4" name="Date Placeholder 3">
+            <a:extLst>
+              <a:ext uri="{FF2B5EF4-FFF2-40B4-BE49-F238E27FC236}">
+                <a16:creationId xmlns:a16="http://schemas.microsoft.com/office/drawing/2014/main" id="{406F36CD-8CAF-F2A3-0961-D2C12A048190}"/>
+              </a:ext>
+            </a:extLst>
+          </p:cNvPr>
+          <p:cNvSpPr>
+            <a:spLocks noGrp="1"/>
+          </p:cNvSpPr>
+          <p:nvPr>
+            <p:ph type="dt" sz="half" idx="10"/>
+          </p:nvPr>
+        </p:nvSpPr>
+        <p:spPr/>
+        <p:txBody>
+          <a:bodyPr/>
+          <a:lstStyle/>
+          <a:p>
+            <a:fld id="{010D0AB2-23BC-3043-AC30-5928E542C0CE}" type="datetime1">
+              <a:rPr lang="en-US" smtClean="0"/>
+              <a:t>7/16/2026</a:t>
+            </a:fld>
+            <a:endParaRPr lang="en-US" dirty="0"/>
+          </a:p>
+        </p:txBody>
+      </p:sp>
+      <p:sp>
+        <p:nvSpPr>
+          <p:cNvPr id="5" name="Slide Number Placeholder 4">
+            <a:extLst>
+              <a:ext uri="{FF2B5EF4-FFF2-40B4-BE49-F238E27FC236}">
+                <a16:creationId xmlns:a16="http://schemas.microsoft.com/office/drawing/2014/main" id="{C01ACBED-585F-43F1-E030-A9F82EDE5DEB}"/>
+              </a:ext>
+            </a:extLst>
+          </p:cNvPr>
+          <p:cNvSpPr>
+            <a:spLocks noGrp="1"/>
+          </p:cNvSpPr>
+          <p:nvPr>
+            <p:ph type="sldNum" sz="quarter" idx="12"/>
+          </p:nvPr>
+        </p:nvSpPr>
+        <p:spPr/>
+        <p:txBody>
+          <a:bodyPr/>
+          <a:lstStyle/>
+          <a:p>
+            <a:fld id="{CC057153-B650-4DEB-B370-79DDCFDCE934}" type="slidenum">
+              <a:rPr lang="en-US" smtClean="0"/>
+              <a:pPr/>
+              <a:t>11</a:t>
+            </a:fld>
+            <a:endParaRPr lang="en-US" dirty="0"/>
+          </a:p>
+        </p:txBody>
+      </p:sp>
+    </p:spTree>
+    <p:extLst>
+      <p:ext uri="{BB962C8B-B14F-4D97-AF65-F5344CB8AC3E}">
+        <p14:creationId xmlns:p14="http://schemas.microsoft.com/office/powerpoint/2010/main" val="3783924705"/>
+      </p:ext>
+    </p:extLst>
+  </p:cSld>
+  <p:clrMapOvr>
+    <a:masterClrMapping/>
+  </p:clrMapOvr>
+</p:sld>
+</file>
+
+<file path=ppt/slides/slide12.xml><?xml version="1.0" encoding="utf-8"?>
+<p:sld xmlns:a="http://schemas.openxmlformats.org/drawingml/2006/main" xmlns:r="http://schemas.openxmlformats.org/officeDocument/2006/relationships" xmlns:p="http://schemas.openxmlformats.org/presentationml/2006/main">
+  <p:cSld>
+    <p:spTree>
+      <p:nvGrpSpPr>
+        <p:cNvPr id="1" name=""/>
+        <p:cNvGrpSpPr/>
+        <p:nvPr/>
+      </p:nvGrpSpPr>
+      <p:grpSpPr>
+        <a:xfrm>
+          <a:off x="0" y="0"/>
+          <a:ext cx="0" cy="0"/>
+          <a:chOff x="0" y="0"/>
+          <a:chExt cx="0" cy="0"/>
+        </a:xfrm>
+      </p:grpSpPr>
+      <p:sp>
+        <p:nvSpPr>
+          <p:cNvPr id="2" name="Title 1">
+            <a:extLst>
+              <a:ext uri="{FF2B5EF4-FFF2-40B4-BE49-F238E27FC236}">
                 <a16:creationId xmlns:a16="http://schemas.microsoft.com/office/drawing/2014/main" id="{CE8F8DD1-7479-764A-DF22-CB34F7461435}"/>
               </a:ext>
             </a:extLst>
@@ -33566,7 +33860,7 @@
           <a:p>
             <a:fld id="{010D0AB2-23BC-3043-AC30-5928E542C0CE}" type="datetime1">
               <a:rPr lang="en-US" smtClean="0"/>
-              <a:t>7/6/2026</a:t>
+              <a:t>7/16/2026</a:t>
             </a:fld>
             <a:endParaRPr lang="en-US" dirty="0"/>
           </a:p>
@@ -33734,7 +34028,7 @@
           <a:p>
             <a:fld id="{927C0DEB-4AE1-EA4D-826D-E3C22802B942}" type="datetime1">
               <a:rPr lang="en-US" smtClean="0"/>
-              <a:t>7/6/2026</a:t>
+              <a:t>7/16/2026</a:t>
             </a:fld>
             <a:endParaRPr lang="en-US" dirty="0"/>
           </a:p>
@@ -33880,7 +34174,7 @@
           <a:p>
             <a:fld id="{010D0AB2-23BC-3043-AC30-5928E542C0CE}" type="datetime1">
               <a:rPr lang="en-US" smtClean="0"/>
-              <a:t>7/6/2026</a:t>
+              <a:t>7/16/2026</a:t>
             </a:fld>
             <a:endParaRPr lang="en-US" dirty="0"/>
           </a:p>
@@ -33951,7 +34245,7 @@
           <p:cNvPr id="2" name="Title 1">
             <a:extLst>
               <a:ext uri="{FF2B5EF4-FFF2-40B4-BE49-F238E27FC236}">
-                <a16:creationId xmlns:a16="http://schemas.microsoft.com/office/drawing/2014/main" id="{DEFF6106-7A0A-48DF-A54A-1203136FE872}"/>
+                <a16:creationId xmlns:a16="http://schemas.microsoft.com/office/drawing/2014/main" id="{2DFFA181-16A4-7A9A-470B-6E45C0622691}"/>
               </a:ext>
             </a:extLst>
           </p:cNvPr>
@@ -33968,9 +34262,10 @@
           <a:lstStyle/>
           <a:p>
             <a:r>
-              <a:rPr lang="en-SG" dirty="0"/>
-              <a:t>Docker</a:t>
-            </a:r>
+              <a:rPr lang="en-US" dirty="0"/>
+              <a:t>DATA SOURCES</a:t>
+            </a:r>
+            <a:endParaRPr lang="en-SG" dirty="0"/>
           </a:p>
         </p:txBody>
       </p:sp>
@@ -33979,7 +34274,7 @@
           <p:cNvPr id="3" name="Footer Placeholder 2">
             <a:extLst>
               <a:ext uri="{FF2B5EF4-FFF2-40B4-BE49-F238E27FC236}">
-                <a16:creationId xmlns:a16="http://schemas.microsoft.com/office/drawing/2014/main" id="{B2BCAD1A-CFBC-A349-DD67-7349B93D3720}"/>
+                <a16:creationId xmlns:a16="http://schemas.microsoft.com/office/drawing/2014/main" id="{EDA3C22C-23C6-3AD7-5E8D-02A5C12887BC}"/>
               </a:ext>
             </a:extLst>
           </p:cNvPr>
@@ -34008,7 +34303,7 @@
           <p:cNvPr id="4" name="Date Placeholder 3">
             <a:extLst>
               <a:ext uri="{FF2B5EF4-FFF2-40B4-BE49-F238E27FC236}">
-                <a16:creationId xmlns:a16="http://schemas.microsoft.com/office/drawing/2014/main" id="{3BA4730D-F0FF-B752-323B-BE0157CA02F8}"/>
+                <a16:creationId xmlns:a16="http://schemas.microsoft.com/office/drawing/2014/main" id="{D6152659-5563-EC41-26B2-E75502BC1D6E}"/>
               </a:ext>
             </a:extLst>
           </p:cNvPr>
@@ -34024,9 +34319,9 @@
           <a:bodyPr/>
           <a:lstStyle/>
           <a:p>
-            <a:fld id="{010D0AB2-23BC-3043-AC30-5928E542C0CE}" type="datetime1">
+            <a:fld id="{53D1C53B-D534-AA48-85B3-4F5B03DDCBA8}" type="datetime1">
               <a:rPr lang="en-US" smtClean="0"/>
-              <a:t>7/6/2026</a:t>
+              <a:t>7/16/2026</a:t>
             </a:fld>
             <a:endParaRPr lang="en-US" dirty="0"/>
           </a:p>
@@ -34037,7 +34332,7 @@
           <p:cNvPr id="5" name="Slide Number Placeholder 4">
             <a:extLst>
               <a:ext uri="{FF2B5EF4-FFF2-40B4-BE49-F238E27FC236}">
-                <a16:creationId xmlns:a16="http://schemas.microsoft.com/office/drawing/2014/main" id="{49E7DB59-C4F8-CDE1-61A4-49E42A74492A}"/>
+                <a16:creationId xmlns:a16="http://schemas.microsoft.com/office/drawing/2014/main" id="{1460C55C-E9B4-3D3E-8062-271E6DBDB208}"/>
               </a:ext>
             </a:extLst>
           </p:cNvPr>
@@ -34065,7 +34360,7 @@
     </p:spTree>
     <p:extLst>
       <p:ext uri="{BB962C8B-B14F-4D97-AF65-F5344CB8AC3E}">
-        <p14:creationId xmlns:p14="http://schemas.microsoft.com/office/powerpoint/2010/main" val="1662138044"/>
+        <p14:creationId xmlns:p14="http://schemas.microsoft.com/office/powerpoint/2010/main" val="1755218782"/>
       </p:ext>
     </p:extLst>
   </p:cSld>
@@ -34097,7 +34392,7 @@
           <p:cNvPr id="2" name="Title 1">
             <a:extLst>
               <a:ext uri="{FF2B5EF4-FFF2-40B4-BE49-F238E27FC236}">
-                <a16:creationId xmlns:a16="http://schemas.microsoft.com/office/drawing/2014/main" id="{F27EEF88-486E-52FF-3AF3-C50D322E6819}"/>
+                <a16:creationId xmlns:a16="http://schemas.microsoft.com/office/drawing/2014/main" id="{620370BE-8DE3-A822-3581-32C470E6A7C5}"/>
               </a:ext>
             </a:extLst>
           </p:cNvPr>
@@ -34108,15 +34403,21 @@
             <p:ph type="ctrTitle"/>
           </p:nvPr>
         </p:nvSpPr>
-        <p:spPr/>
+        <p:spPr>
+          <a:xfrm>
+            <a:off x="3525329" y="1463040"/>
+            <a:ext cx="5135592" cy="3931920"/>
+          </a:xfrm>
+        </p:spPr>
         <p:txBody>
           <a:bodyPr/>
           <a:lstStyle/>
           <a:p>
             <a:r>
-              <a:rPr lang="en-SG" dirty="0"/>
-              <a:t>KUBERNATES</a:t>
-            </a:r>
+              <a:rPr lang="en-US" dirty="0"/>
+              <a:t>SYSTEM ARCHITECTURE</a:t>
+            </a:r>
+            <a:endParaRPr lang="en-SG" dirty="0"/>
           </a:p>
         </p:txBody>
       </p:sp>
@@ -34125,7 +34426,7 @@
           <p:cNvPr id="3" name="Footer Placeholder 2">
             <a:extLst>
               <a:ext uri="{FF2B5EF4-FFF2-40B4-BE49-F238E27FC236}">
-                <a16:creationId xmlns:a16="http://schemas.microsoft.com/office/drawing/2014/main" id="{D2F62700-C8BC-371F-E4A0-146018195E63}"/>
+                <a16:creationId xmlns:a16="http://schemas.microsoft.com/office/drawing/2014/main" id="{73069D14-BAC5-3AD0-19AE-5205566A5BF9}"/>
               </a:ext>
             </a:extLst>
           </p:cNvPr>
@@ -34154,7 +34455,7 @@
           <p:cNvPr id="4" name="Date Placeholder 3">
             <a:extLst>
               <a:ext uri="{FF2B5EF4-FFF2-40B4-BE49-F238E27FC236}">
-                <a16:creationId xmlns:a16="http://schemas.microsoft.com/office/drawing/2014/main" id="{97386FD1-37AC-99FB-025F-EC72261EF737}"/>
+                <a16:creationId xmlns:a16="http://schemas.microsoft.com/office/drawing/2014/main" id="{7FF7D1A3-9AE2-A2B4-0F26-15EEA9A91F03}"/>
               </a:ext>
             </a:extLst>
           </p:cNvPr>
@@ -34170,9 +34471,9 @@
           <a:bodyPr/>
           <a:lstStyle/>
           <a:p>
-            <a:fld id="{010D0AB2-23BC-3043-AC30-5928E542C0CE}" type="datetime1">
+            <a:fld id="{53D1C53B-D534-AA48-85B3-4F5B03DDCBA8}" type="datetime1">
               <a:rPr lang="en-US" smtClean="0"/>
-              <a:t>7/6/2026</a:t>
+              <a:t>7/16/2026</a:t>
             </a:fld>
             <a:endParaRPr lang="en-US" dirty="0"/>
           </a:p>
@@ -34183,7 +34484,7 @@
           <p:cNvPr id="5" name="Slide Number Placeholder 4">
             <a:extLst>
               <a:ext uri="{FF2B5EF4-FFF2-40B4-BE49-F238E27FC236}">
-                <a16:creationId xmlns:a16="http://schemas.microsoft.com/office/drawing/2014/main" id="{D08F73AA-8FFF-4571-C0CF-0F21F722B187}"/>
+                <a16:creationId xmlns:a16="http://schemas.microsoft.com/office/drawing/2014/main" id="{31C00A42-6809-D208-69EF-84DEF6850371}"/>
               </a:ext>
             </a:extLst>
           </p:cNvPr>
@@ -34211,7 +34512,7 @@
     </p:spTree>
     <p:extLst>
       <p:ext uri="{BB962C8B-B14F-4D97-AF65-F5344CB8AC3E}">
-        <p14:creationId xmlns:p14="http://schemas.microsoft.com/office/powerpoint/2010/main" val="2037361668"/>
+        <p14:creationId xmlns:p14="http://schemas.microsoft.com/office/powerpoint/2010/main" val="123989611"/>
       </p:ext>
     </p:extLst>
   </p:cSld>
@@ -34243,7 +34544,7 @@
           <p:cNvPr id="2" name="Title 1">
             <a:extLst>
               <a:ext uri="{FF2B5EF4-FFF2-40B4-BE49-F238E27FC236}">
-                <a16:creationId xmlns:a16="http://schemas.microsoft.com/office/drawing/2014/main" id="{5399766A-8D26-6DCE-60BF-703811C9A8AF}"/>
+                <a16:creationId xmlns:a16="http://schemas.microsoft.com/office/drawing/2014/main" id="{DEFF6106-7A0A-48DF-A54A-1203136FE872}"/>
               </a:ext>
             </a:extLst>
           </p:cNvPr>
@@ -34254,19 +34555,14 @@
             <p:ph type="ctrTitle"/>
           </p:nvPr>
         </p:nvSpPr>
-        <p:spPr>
-          <a:xfrm>
-            <a:off x="3536831" y="1463040"/>
-            <a:ext cx="5210354" cy="3931920"/>
-          </a:xfrm>
-        </p:spPr>
+        <p:spPr/>
         <p:txBody>
           <a:bodyPr/>
           <a:lstStyle/>
           <a:p>
             <a:r>
               <a:rPr lang="en-SG" dirty="0"/>
-              <a:t>MICROSERVICES</a:t>
+              <a:t>Docker</a:t>
             </a:r>
           </a:p>
         </p:txBody>
@@ -34276,7 +34572,7 @@
           <p:cNvPr id="3" name="Footer Placeholder 2">
             <a:extLst>
               <a:ext uri="{FF2B5EF4-FFF2-40B4-BE49-F238E27FC236}">
-                <a16:creationId xmlns:a16="http://schemas.microsoft.com/office/drawing/2014/main" id="{02CD1AC0-9939-D7DA-C1B5-89896E5490E1}"/>
+                <a16:creationId xmlns:a16="http://schemas.microsoft.com/office/drawing/2014/main" id="{B2BCAD1A-CFBC-A349-DD67-7349B93D3720}"/>
               </a:ext>
             </a:extLst>
           </p:cNvPr>
@@ -34305,7 +34601,7 @@
           <p:cNvPr id="4" name="Date Placeholder 3">
             <a:extLst>
               <a:ext uri="{FF2B5EF4-FFF2-40B4-BE49-F238E27FC236}">
-                <a16:creationId xmlns:a16="http://schemas.microsoft.com/office/drawing/2014/main" id="{19E5B9C4-A021-AD37-4063-4CD82AEA3362}"/>
+                <a16:creationId xmlns:a16="http://schemas.microsoft.com/office/drawing/2014/main" id="{3BA4730D-F0FF-B752-323B-BE0157CA02F8}"/>
               </a:ext>
             </a:extLst>
           </p:cNvPr>
@@ -34323,7 +34619,7 @@
           <a:p>
             <a:fld id="{010D0AB2-23BC-3043-AC30-5928E542C0CE}" type="datetime1">
               <a:rPr lang="en-US" smtClean="0"/>
-              <a:t>7/6/2026</a:t>
+              <a:t>7/16/2026</a:t>
             </a:fld>
             <a:endParaRPr lang="en-US" dirty="0"/>
           </a:p>
@@ -34334,7 +34630,7 @@
           <p:cNvPr id="5" name="Slide Number Placeholder 4">
             <a:extLst>
               <a:ext uri="{FF2B5EF4-FFF2-40B4-BE49-F238E27FC236}">
-                <a16:creationId xmlns:a16="http://schemas.microsoft.com/office/drawing/2014/main" id="{D796FA40-EF4F-7414-795C-90E90F514FCC}"/>
+                <a16:creationId xmlns:a16="http://schemas.microsoft.com/office/drawing/2014/main" id="{49E7DB59-C4F8-CDE1-61A4-49E42A74492A}"/>
               </a:ext>
             </a:extLst>
           </p:cNvPr>
@@ -34362,7 +34658,7 @@
     </p:spTree>
     <p:extLst>
       <p:ext uri="{BB962C8B-B14F-4D97-AF65-F5344CB8AC3E}">
-        <p14:creationId xmlns:p14="http://schemas.microsoft.com/office/powerpoint/2010/main" val="1787156668"/>
+        <p14:creationId xmlns:p14="http://schemas.microsoft.com/office/powerpoint/2010/main" val="1662138044"/>
       </p:ext>
     </p:extLst>
   </p:cSld>
@@ -34394,7 +34690,7 @@
           <p:cNvPr id="2" name="Title 1">
             <a:extLst>
               <a:ext uri="{FF2B5EF4-FFF2-40B4-BE49-F238E27FC236}">
-                <a16:creationId xmlns:a16="http://schemas.microsoft.com/office/drawing/2014/main" id="{9DEAAF09-CB58-6E0F-3345-27591FA4FF54}"/>
+                <a16:creationId xmlns:a16="http://schemas.microsoft.com/office/drawing/2014/main" id="{F27EEF88-486E-52FF-3AF3-C50D322E6819}"/>
               </a:ext>
             </a:extLst>
           </p:cNvPr>
@@ -34412,7 +34708,7 @@
           <a:p>
             <a:r>
               <a:rPr lang="en-SG" dirty="0"/>
-              <a:t>DATA SOURCE</a:t>
+              <a:t>KUBERNATES</a:t>
             </a:r>
           </a:p>
         </p:txBody>
@@ -34422,7 +34718,7 @@
           <p:cNvPr id="3" name="Footer Placeholder 2">
             <a:extLst>
               <a:ext uri="{FF2B5EF4-FFF2-40B4-BE49-F238E27FC236}">
-                <a16:creationId xmlns:a16="http://schemas.microsoft.com/office/drawing/2014/main" id="{3F6A2061-CB22-D700-DFFA-693366FF7DAC}"/>
+                <a16:creationId xmlns:a16="http://schemas.microsoft.com/office/drawing/2014/main" id="{D2F62700-C8BC-371F-E4A0-146018195E63}"/>
               </a:ext>
             </a:extLst>
           </p:cNvPr>
@@ -34451,7 +34747,7 @@
           <p:cNvPr id="4" name="Date Placeholder 3">
             <a:extLst>
               <a:ext uri="{FF2B5EF4-FFF2-40B4-BE49-F238E27FC236}">
-                <a16:creationId xmlns:a16="http://schemas.microsoft.com/office/drawing/2014/main" id="{FB2649DC-6302-6FE7-EB8D-567208A1C78E}"/>
+                <a16:creationId xmlns:a16="http://schemas.microsoft.com/office/drawing/2014/main" id="{97386FD1-37AC-99FB-025F-EC72261EF737}"/>
               </a:ext>
             </a:extLst>
           </p:cNvPr>
@@ -34469,7 +34765,7 @@
           <a:p>
             <a:fld id="{010D0AB2-23BC-3043-AC30-5928E542C0CE}" type="datetime1">
               <a:rPr lang="en-US" smtClean="0"/>
-              <a:t>7/6/2026</a:t>
+              <a:t>7/16/2026</a:t>
             </a:fld>
             <a:endParaRPr lang="en-US" dirty="0"/>
           </a:p>
@@ -34480,7 +34776,7 @@
           <p:cNvPr id="5" name="Slide Number Placeholder 4">
             <a:extLst>
               <a:ext uri="{FF2B5EF4-FFF2-40B4-BE49-F238E27FC236}">
-                <a16:creationId xmlns:a16="http://schemas.microsoft.com/office/drawing/2014/main" id="{66FF4A67-54EF-04B0-A7D5-1AED7EE1442F}"/>
+                <a16:creationId xmlns:a16="http://schemas.microsoft.com/office/drawing/2014/main" id="{D08F73AA-8FFF-4571-C0CF-0F21F722B187}"/>
               </a:ext>
             </a:extLst>
           </p:cNvPr>
@@ -34508,7 +34804,7 @@
     </p:spTree>
     <p:extLst>
       <p:ext uri="{BB962C8B-B14F-4D97-AF65-F5344CB8AC3E}">
-        <p14:creationId xmlns:p14="http://schemas.microsoft.com/office/powerpoint/2010/main" val="1748166942"/>
+        <p14:creationId xmlns:p14="http://schemas.microsoft.com/office/powerpoint/2010/main" val="2037361668"/>
       </p:ext>
     </p:extLst>
   </p:cSld>
@@ -34540,7 +34836,7 @@
           <p:cNvPr id="2" name="Title 1">
             <a:extLst>
               <a:ext uri="{FF2B5EF4-FFF2-40B4-BE49-F238E27FC236}">
-                <a16:creationId xmlns:a16="http://schemas.microsoft.com/office/drawing/2014/main" id="{EE58C531-7A30-5D0B-55FA-6704B085156E}"/>
+                <a16:creationId xmlns:a16="http://schemas.microsoft.com/office/drawing/2014/main" id="{5399766A-8D26-6DCE-60BF-703811C9A8AF}"/>
               </a:ext>
             </a:extLst>
           </p:cNvPr>
@@ -34551,14 +34847,19 @@
             <p:ph type="ctrTitle"/>
           </p:nvPr>
         </p:nvSpPr>
-        <p:spPr/>
+        <p:spPr>
+          <a:xfrm>
+            <a:off x="3536831" y="1463040"/>
+            <a:ext cx="5210354" cy="3931920"/>
+          </a:xfrm>
+        </p:spPr>
         <p:txBody>
           <a:bodyPr/>
           <a:lstStyle/>
           <a:p>
             <a:r>
               <a:rPr lang="en-SG" dirty="0"/>
-              <a:t>ISSUES AND LIMITATIONS</a:t>
+              <a:t>MICROSERVICES</a:t>
             </a:r>
           </a:p>
         </p:txBody>
@@ -34568,7 +34869,7 @@
           <p:cNvPr id="3" name="Footer Placeholder 2">
             <a:extLst>
               <a:ext uri="{FF2B5EF4-FFF2-40B4-BE49-F238E27FC236}">
-                <a16:creationId xmlns:a16="http://schemas.microsoft.com/office/drawing/2014/main" id="{935A7A2C-0E66-E74E-6AAA-46749892E93F}"/>
+                <a16:creationId xmlns:a16="http://schemas.microsoft.com/office/drawing/2014/main" id="{02CD1AC0-9939-D7DA-C1B5-89896E5490E1}"/>
               </a:ext>
             </a:extLst>
           </p:cNvPr>
@@ -34597,7 +34898,7 @@
           <p:cNvPr id="4" name="Date Placeholder 3">
             <a:extLst>
               <a:ext uri="{FF2B5EF4-FFF2-40B4-BE49-F238E27FC236}">
-                <a16:creationId xmlns:a16="http://schemas.microsoft.com/office/drawing/2014/main" id="{406F36CD-8CAF-F2A3-0961-D2C12A048190}"/>
+                <a16:creationId xmlns:a16="http://schemas.microsoft.com/office/drawing/2014/main" id="{19E5B9C4-A021-AD37-4063-4CD82AEA3362}"/>
               </a:ext>
             </a:extLst>
           </p:cNvPr>
@@ -34615,7 +34916,7 @@
           <a:p>
             <a:fld id="{010D0AB2-23BC-3043-AC30-5928E542C0CE}" type="datetime1">
               <a:rPr lang="en-US" smtClean="0"/>
-              <a:t>7/6/2026</a:t>
+              <a:t>7/16/2026</a:t>
             </a:fld>
             <a:endParaRPr lang="en-US" dirty="0"/>
           </a:p>
@@ -34626,7 +34927,7 @@
           <p:cNvPr id="5" name="Slide Number Placeholder 4">
             <a:extLst>
               <a:ext uri="{FF2B5EF4-FFF2-40B4-BE49-F238E27FC236}">
-                <a16:creationId xmlns:a16="http://schemas.microsoft.com/office/drawing/2014/main" id="{C01ACBED-585F-43F1-E030-A9F82EDE5DEB}"/>
+                <a16:creationId xmlns:a16="http://schemas.microsoft.com/office/drawing/2014/main" id="{D796FA40-EF4F-7414-795C-90E90F514FCC}"/>
               </a:ext>
             </a:extLst>
           </p:cNvPr>
@@ -34654,7 +34955,7 @@
     </p:spTree>
     <p:extLst>
       <p:ext uri="{BB962C8B-B14F-4D97-AF65-F5344CB8AC3E}">
-        <p14:creationId xmlns:p14="http://schemas.microsoft.com/office/powerpoint/2010/main" val="3783924705"/>
+        <p14:creationId xmlns:p14="http://schemas.microsoft.com/office/powerpoint/2010/main" val="1787156668"/>
       </p:ext>
     </p:extLst>
   </p:cSld>
@@ -35496,26 +35797,6 @@
 </file>
 
 <file path=customXml/item1.xml><?xml version="1.0" encoding="utf-8"?>
-<p:properties xmlns:p="http://schemas.microsoft.com/office/2006/metadata/properties" xmlns:xsi="http://www.w3.org/2001/XMLSchema-instance" xmlns:pc="http://schemas.microsoft.com/office/infopath/2007/PartnerControls">
-  <documentManagement>
-    <_ip_UnifiedCompliancePolicyUIAction xmlns="http://schemas.microsoft.com/sharepoint/v3" xsi:nil="true"/>
-    <Image xmlns="71af3243-3dd4-4a8d-8c0d-dd76da1f02a5">
-      <Url xsi:nil="true"/>
-      <Description xsi:nil="true"/>
-    </Image>
-    <Status xmlns="71af3243-3dd4-4a8d-8c0d-dd76da1f02a5">Not started</Status>
-    <Background xmlns="71af3243-3dd4-4a8d-8c0d-dd76da1f02a5">false</Background>
-    <_ip_UnifiedCompliancePolicyProperties xmlns="http://schemas.microsoft.com/sharepoint/v3" xsi:nil="true"/>
-    <ImageTagsTaxHTField xmlns="71af3243-3dd4-4a8d-8c0d-dd76da1f02a5">
-      <Terms xmlns="http://schemas.microsoft.com/office/infopath/2007/PartnerControls"/>
-    </ImageTagsTaxHTField>
-    <TaxCatchAll xmlns="230e9df3-be65-4c73-a93b-d1236ebd677e" xsi:nil="true"/>
-    <MediaServiceKeyPoints xmlns="71af3243-3dd4-4a8d-8c0d-dd76da1f02a5" xsi:nil="true"/>
-  </documentManagement>
-</p:properties>
-</file>
-
-<file path=customXml/item2.xml><?xml version="1.0" encoding="utf-8"?>
 <ct:contentTypeSchema xmlns:ct="http://schemas.microsoft.com/office/2006/metadata/contentType" xmlns:ma="http://schemas.microsoft.com/office/2006/metadata/properties/metaAttributes" ct:_="" ma:_="" ma:contentTypeName="Document" ma:contentTypeID="0x01010079F111ED35F8CC479449609E8A0923A6" ma:contentTypeVersion="30" ma:contentTypeDescription="Create a new document." ma:contentTypeScope="" ma:versionID="cec0622158e8f13124e9e8fd4de31bd1">
   <xsd:schema xmlns:xsd="http://www.w3.org/2001/XMLSchema" xmlns:xs="http://www.w3.org/2001/XMLSchema" xmlns:p="http://schemas.microsoft.com/office/2006/metadata/properties" xmlns:ns1="http://schemas.microsoft.com/sharepoint/v3" xmlns:ns2="71af3243-3dd4-4a8d-8c0d-dd76da1f02a5" xmlns:ns3="16c05727-aa75-4e4a-9b5f-8a80a1165891" xmlns:ns4="230e9df3-be65-4c73-a93b-d1236ebd677e" targetNamespace="http://schemas.microsoft.com/office/2006/metadata/properties" ma:root="true" ma:fieldsID="3b52f30ab005d15df08657af532e6e38" ns1:_="" ns2:_="" ns3:_="" ns4:_="">
     <xsd:import namespace="http://schemas.microsoft.com/sharepoint/v3"/>
@@ -35833,6 +36114,26 @@
 </ct:contentTypeSchema>
 </file>
 
+<file path=customXml/item2.xml><?xml version="1.0" encoding="utf-8"?>
+<p:properties xmlns:p="http://schemas.microsoft.com/office/2006/metadata/properties" xmlns:xsi="http://www.w3.org/2001/XMLSchema-instance" xmlns:pc="http://schemas.microsoft.com/office/infopath/2007/PartnerControls">
+  <documentManagement>
+    <_ip_UnifiedCompliancePolicyUIAction xmlns="http://schemas.microsoft.com/sharepoint/v3" xsi:nil="true"/>
+    <Image xmlns="71af3243-3dd4-4a8d-8c0d-dd76da1f02a5">
+      <Url xsi:nil="true"/>
+      <Description xsi:nil="true"/>
+    </Image>
+    <Status xmlns="71af3243-3dd4-4a8d-8c0d-dd76da1f02a5">Not started</Status>
+    <Background xmlns="71af3243-3dd4-4a8d-8c0d-dd76da1f02a5">false</Background>
+    <_ip_UnifiedCompliancePolicyProperties xmlns="http://schemas.microsoft.com/sharepoint/v3" xsi:nil="true"/>
+    <ImageTagsTaxHTField xmlns="71af3243-3dd4-4a8d-8c0d-dd76da1f02a5">
+      <Terms xmlns="http://schemas.microsoft.com/office/infopath/2007/PartnerControls"/>
+    </ImageTagsTaxHTField>
+    <TaxCatchAll xmlns="230e9df3-be65-4c73-a93b-d1236ebd677e" xsi:nil="true"/>
+    <MediaServiceKeyPoints xmlns="71af3243-3dd4-4a8d-8c0d-dd76da1f02a5" xsi:nil="true"/>
+  </documentManagement>
+</p:properties>
+</file>
+
 <file path=customXml/item3.xml><?xml version="1.0" encoding="utf-8"?>
 <?mso-contentType ?>
 <FormTemplates xmlns="http://schemas.microsoft.com/sharepoint/v3/contenttype/forms">
@@ -35843,25 +36144,6 @@
 </file>
 
 <file path=customXml/itemProps1.xml><?xml version="1.0" encoding="utf-8"?>
-<ds:datastoreItem xmlns:ds="http://schemas.openxmlformats.org/officeDocument/2006/customXml" ds:itemID="{D1CEDABF-7176-4A42-8EF9-E5D4DD31FF6C}">
-  <ds:schemaRefs>
-    <ds:schemaRef ds:uri="http://schemas.microsoft.com/office/infopath/2007/PartnerControls"/>
-    <ds:schemaRef ds:uri="http://purl.org/dc/terms/"/>
-    <ds:schemaRef ds:uri="http://schemas.microsoft.com/office/2006/metadata/properties"/>
-    <ds:schemaRef ds:uri="http://schemas.microsoft.com/office/2006/documentManagement/types"/>
-    <ds:schemaRef ds:uri="http://purl.org/dc/dcmitype/"/>
-    <ds:schemaRef ds:uri="http://schemas.openxmlformats.org/package/2006/metadata/core-properties"/>
-    <ds:schemaRef ds:uri="http://www.w3.org/XML/1998/namespace"/>
-    <ds:schemaRef ds:uri="230e9df3-be65-4c73-a93b-d1236ebd677e"/>
-    <ds:schemaRef ds:uri="http://purl.org/dc/elements/1.1/"/>
-    <ds:schemaRef ds:uri="16c05727-aa75-4e4a-9b5f-8a80a1165891"/>
-    <ds:schemaRef ds:uri="71af3243-3dd4-4a8d-8c0d-dd76da1f02a5"/>
-    <ds:schemaRef ds:uri="http://schemas.microsoft.com/sharepoint/v3"/>
-  </ds:schemaRefs>
-</ds:datastoreItem>
-</file>
-
-<file path=customXml/itemProps2.xml><?xml version="1.0" encoding="utf-8"?>
 <ds:datastoreItem xmlns:ds="http://schemas.openxmlformats.org/officeDocument/2006/customXml" ds:itemID="{9EEC3793-C1BC-496C-A03C-202DFFC513D6}">
   <ds:schemaRefs>
     <ds:schemaRef ds:uri="http://schemas.microsoft.com/office/2006/metadata/contentType"/>
@@ -35882,6 +36164,25 @@
 </ds:datastoreItem>
 </file>
 
+<file path=customXml/itemProps2.xml><?xml version="1.0" encoding="utf-8"?>
+<ds:datastoreItem xmlns:ds="http://schemas.openxmlformats.org/officeDocument/2006/customXml" ds:itemID="{D1CEDABF-7176-4A42-8EF9-E5D4DD31FF6C}">
+  <ds:schemaRefs>
+    <ds:schemaRef ds:uri="http://schemas.microsoft.com/office/infopath/2007/PartnerControls"/>
+    <ds:schemaRef ds:uri="http://purl.org/dc/terms/"/>
+    <ds:schemaRef ds:uri="http://schemas.microsoft.com/office/2006/metadata/properties"/>
+    <ds:schemaRef ds:uri="http://schemas.microsoft.com/office/2006/documentManagement/types"/>
+    <ds:schemaRef ds:uri="http://purl.org/dc/dcmitype/"/>
+    <ds:schemaRef ds:uri="http://schemas.openxmlformats.org/package/2006/metadata/core-properties"/>
+    <ds:schemaRef ds:uri="http://www.w3.org/XML/1998/namespace"/>
+    <ds:schemaRef ds:uri="230e9df3-be65-4c73-a93b-d1236ebd677e"/>
+    <ds:schemaRef ds:uri="http://purl.org/dc/elements/1.1/"/>
+    <ds:schemaRef ds:uri="16c05727-aa75-4e4a-9b5f-8a80a1165891"/>
+    <ds:schemaRef ds:uri="71af3243-3dd4-4a8d-8c0d-dd76da1f02a5"/>
+    <ds:schemaRef ds:uri="http://schemas.microsoft.com/sharepoint/v3"/>
+  </ds:schemaRefs>
+</ds:datastoreItem>
+</file>
+
 <file path=customXml/itemProps3.xml><?xml version="1.0" encoding="utf-8"?>
 <ds:datastoreItem xmlns:ds="http://schemas.openxmlformats.org/officeDocument/2006/customXml" ds:itemID="{D3301439-688F-4D19-B908-B48B62C56078}">
   <ds:schemaRefs>

--- a/EGT307 PRESENTATION.pptx
+++ b/EGT307 PRESENTATION.pptx
@@ -5,24 +5,30 @@
     <p:sldMasterId id="2147483917" r:id="rId4"/>
   </p:sldMasterIdLst>
   <p:notesMasterIdLst>
-    <p:notesMasterId r:id="rId17"/>
+    <p:notesMasterId r:id="rId23"/>
   </p:notesMasterIdLst>
   <p:handoutMasterIdLst>
-    <p:handoutMasterId r:id="rId18"/>
+    <p:handoutMasterId r:id="rId24"/>
   </p:handoutMasterIdLst>
   <p:sldIdLst>
     <p:sldId id="264" r:id="rId5"/>
-    <p:sldId id="265" r:id="rId6"/>
-    <p:sldId id="272" r:id="rId7"/>
-    <p:sldId id="266" r:id="rId8"/>
-    <p:sldId id="275" r:id="rId9"/>
-    <p:sldId id="276" r:id="rId10"/>
-    <p:sldId id="267" r:id="rId11"/>
-    <p:sldId id="268" r:id="rId12"/>
-    <p:sldId id="269" r:id="rId13"/>
-    <p:sldId id="270" r:id="rId14"/>
-    <p:sldId id="271" r:id="rId15"/>
-    <p:sldId id="274" r:id="rId16"/>
+    <p:sldId id="272" r:id="rId6"/>
+    <p:sldId id="278" r:id="rId7"/>
+    <p:sldId id="279" r:id="rId8"/>
+    <p:sldId id="280" r:id="rId9"/>
+    <p:sldId id="275" r:id="rId10"/>
+    <p:sldId id="276" r:id="rId11"/>
+    <p:sldId id="277" r:id="rId12"/>
+    <p:sldId id="281" r:id="rId13"/>
+    <p:sldId id="282" r:id="rId14"/>
+    <p:sldId id="283" r:id="rId15"/>
+    <p:sldId id="284" r:id="rId16"/>
+    <p:sldId id="267" r:id="rId17"/>
+    <p:sldId id="268" r:id="rId18"/>
+    <p:sldId id="269" r:id="rId19"/>
+    <p:sldId id="270" r:id="rId20"/>
+    <p:sldId id="271" r:id="rId21"/>
+    <p:sldId id="274" r:id="rId22"/>
   </p:sldIdLst>
   <p:sldSz cx="12192000" cy="6858000"/>
   <p:notesSz cx="6858000" cy="9144000"/>
@@ -235,7 +241,7 @@
           <a:p>
             <a:fld id="{D5D1EC30-5B0B-48D0-A1A8-66A96720DF24}" type="datetimeFigureOut">
               <a:rPr lang="en-US" smtClean="0"/>
-              <a:t>7/16/2026</a:t>
+              <a:t>7/19/2026</a:t>
             </a:fld>
             <a:endParaRPr lang="en-US" dirty="0"/>
           </a:p>
@@ -412,7 +418,7 @@
           <a:p>
             <a:fld id="{69F68A4D-42A7-45F7-9930-00E8DCB48D7E}" type="datetimeFigureOut">
               <a:rPr lang="en-US" smtClean="0"/>
-              <a:t>7/16/2026</a:t>
+              <a:t>7/19/2026</a:t>
             </a:fld>
             <a:endParaRPr lang="en-US" dirty="0"/>
           </a:p>
@@ -679,6 +685,90 @@
 </p:notesMaster>
 </file>
 
+<file path=ppt/notesSlides/notesSlide1.xml><?xml version="1.0" encoding="utf-8"?>
+<p:notes xmlns:a="http://schemas.openxmlformats.org/drawingml/2006/main" xmlns:r="http://schemas.openxmlformats.org/officeDocument/2006/relationships" xmlns:p="http://schemas.openxmlformats.org/presentationml/2006/main">
+  <p:cSld>
+    <p:spTree>
+      <p:nvGrpSpPr>
+        <p:cNvPr id="1" name=""/>
+        <p:cNvGrpSpPr/>
+        <p:nvPr/>
+      </p:nvGrpSpPr>
+      <p:grpSpPr>
+        <a:xfrm>
+          <a:off x="0" y="0"/>
+          <a:ext cx="0" cy="0"/>
+          <a:chOff x="0" y="0"/>
+          <a:chExt cx="0" cy="0"/>
+        </a:xfrm>
+      </p:grpSpPr>
+      <p:sp>
+        <p:nvSpPr>
+          <p:cNvPr id="2" name="Slide Image Placeholder 1"/>
+          <p:cNvSpPr>
+            <a:spLocks noGrp="1" noRot="1" noChangeAspect="1"/>
+          </p:cNvSpPr>
+          <p:nvPr>
+            <p:ph type="sldImg"/>
+          </p:nvPr>
+        </p:nvSpPr>
+        <p:spPr/>
+      </p:sp>
+      <p:sp>
+        <p:nvSpPr>
+          <p:cNvPr id="3" name="Notes Placeholder 2"/>
+          <p:cNvSpPr>
+            <a:spLocks noGrp="1"/>
+          </p:cNvSpPr>
+          <p:nvPr>
+            <p:ph type="body" idx="1"/>
+          </p:nvPr>
+        </p:nvSpPr>
+        <p:spPr/>
+        <p:txBody>
+          <a:bodyPr/>
+          <a:lstStyle/>
+          <a:p>
+            <a:endParaRPr lang="en-SG" dirty="0"/>
+          </a:p>
+        </p:txBody>
+      </p:sp>
+      <p:sp>
+        <p:nvSpPr>
+          <p:cNvPr id="4" name="Slide Number Placeholder 3"/>
+          <p:cNvSpPr>
+            <a:spLocks noGrp="1"/>
+          </p:cNvSpPr>
+          <p:nvPr>
+            <p:ph type="sldNum" sz="quarter" idx="5"/>
+          </p:nvPr>
+        </p:nvSpPr>
+        <p:spPr/>
+        <p:txBody>
+          <a:bodyPr/>
+          <a:lstStyle/>
+          <a:p>
+            <a:fld id="{BFDD6F49-EBB7-4CCF-97A8-E526BB28BB69}" type="slidenum">
+              <a:rPr lang="en-US" smtClean="0"/>
+              <a:t>4</a:t>
+            </a:fld>
+            <a:endParaRPr lang="en-US" dirty="0"/>
+          </a:p>
+        </p:txBody>
+      </p:sp>
+    </p:spTree>
+    <p:extLst>
+      <p:ext uri="{BB962C8B-B14F-4D97-AF65-F5344CB8AC3E}">
+        <p14:creationId xmlns:p14="http://schemas.microsoft.com/office/powerpoint/2010/main" val="2402005802"/>
+      </p:ext>
+    </p:extLst>
+  </p:cSld>
+  <p:clrMapOvr>
+    <a:masterClrMapping/>
+  </p:clrMapOvr>
+</p:notes>
+</file>
+
 <file path=ppt/slideLayouts/slideLayout1.xml><?xml version="1.0" encoding="utf-8"?>
 <p:sldLayout xmlns:a="http://schemas.openxmlformats.org/drawingml/2006/main" xmlns:r="http://schemas.openxmlformats.org/officeDocument/2006/relationships" xmlns:p="http://schemas.openxmlformats.org/presentationml/2006/main" preserve="1" userDrawn="1">
   <p:cSld name="Title">
@@ -1889,7 +1979,7 @@
           <a:p>
             <a:fld id="{EBC9FF77-C2BC-3842-9757-C2EBADB34099}" type="datetime1">
               <a:rPr lang="en-US" smtClean="0"/>
-              <a:t>7/16/2026</a:t>
+              <a:t>7/19/2026</a:t>
             </a:fld>
             <a:endParaRPr lang="en-US" dirty="0"/>
           </a:p>
@@ -2253,7 +2343,7 @@
           <a:p>
             <a:fld id="{010D0AB2-23BC-3043-AC30-5928E542C0CE}" type="datetime1">
               <a:rPr lang="en-US" smtClean="0"/>
-              <a:t>7/16/2026</a:t>
+              <a:t>7/19/2026</a:t>
             </a:fld>
             <a:endParaRPr lang="en-US" dirty="0"/>
           </a:p>
@@ -2779,7 +2869,7 @@
           <a:p>
             <a:fld id="{3EE24C61-4277-DA47-BF4A-DCEFD7F4C6B4}" type="datetime1">
               <a:rPr lang="en-US" smtClean="0"/>
-              <a:t>7/16/2026</a:t>
+              <a:t>7/19/2026</a:t>
             </a:fld>
             <a:endParaRPr lang="en-US" dirty="0"/>
           </a:p>
@@ -3305,7 +3395,7 @@
           <a:p>
             <a:fld id="{53D1C53B-D534-AA48-85B3-4F5B03DDCBA8}" type="datetime1">
               <a:rPr lang="en-US" smtClean="0"/>
-              <a:t>7/16/2026</a:t>
+              <a:t>7/19/2026</a:t>
             </a:fld>
             <a:endParaRPr lang="en-US" dirty="0"/>
           </a:p>
@@ -3951,7 +4041,7 @@
           <a:p>
             <a:fld id="{B2A7CB4E-BD8C-8E4D-91FF-B1939559C134}" type="datetime1">
               <a:rPr lang="en-US" smtClean="0"/>
-              <a:t>7/16/2026</a:t>
+              <a:t>7/19/2026</a:t>
             </a:fld>
             <a:endParaRPr lang="en-US" dirty="0"/>
           </a:p>
@@ -4560,7 +4650,7 @@
           <a:p>
             <a:fld id="{4142E188-D61A-9842-B8A2-1559B3399613}" type="datetime1">
               <a:rPr lang="en-US" smtClean="0"/>
-              <a:t>7/16/2026</a:t>
+              <a:t>7/19/2026</a:t>
             </a:fld>
             <a:endParaRPr lang="en-US" dirty="0"/>
           </a:p>
@@ -5131,7 +5221,7 @@
           <a:p>
             <a:fld id="{0D0C1909-8EA0-3E44-B1AC-A9EA56584238}" type="datetime1">
               <a:rPr lang="en-US" smtClean="0"/>
-              <a:t>7/16/2026</a:t>
+              <a:t>7/19/2026</a:t>
             </a:fld>
             <a:endParaRPr lang="en-US" dirty="0"/>
           </a:p>
@@ -5670,7 +5760,7 @@
           <a:p>
             <a:fld id="{C752DD5A-B150-8340-8E59-4C8F3F7E3A59}" type="datetime1">
               <a:rPr lang="en-US" smtClean="0"/>
-              <a:t>7/16/2026</a:t>
+              <a:t>7/19/2026</a:t>
             </a:fld>
             <a:endParaRPr lang="en-US" dirty="0"/>
           </a:p>
@@ -6179,7 +6269,7 @@
           <a:p>
             <a:fld id="{0FD936B8-E398-1A41-8DE9-58DDB113FEEA}" type="datetime1">
               <a:rPr lang="en-US" smtClean="0"/>
-              <a:t>7/16/2026</a:t>
+              <a:t>7/19/2026</a:t>
             </a:fld>
             <a:endParaRPr lang="en-US" dirty="0"/>
           </a:p>
@@ -6677,7 +6767,7 @@
           <a:p>
             <a:fld id="{927C0DEB-4AE1-EA4D-826D-E3C22802B942}" type="datetime1">
               <a:rPr lang="en-US" smtClean="0"/>
-              <a:t>7/16/2026</a:t>
+              <a:t>7/19/2026</a:t>
             </a:fld>
             <a:endParaRPr lang="en-US" dirty="0"/>
           </a:p>
@@ -7162,7 +7252,7 @@
           <a:p>
             <a:fld id="{BE2752B3-7BF7-614C-A80A-1256FFE41AD1}" type="datetime1">
               <a:rPr lang="en-US" smtClean="0"/>
-              <a:t>7/16/2026</a:t>
+              <a:t>7/19/2026</a:t>
             </a:fld>
             <a:endParaRPr lang="en-US" dirty="0"/>
           </a:p>
@@ -7616,7 +7706,7 @@
           <a:p>
             <a:fld id="{40482BA7-8406-1C47-9A76-988652CA5787}" type="datetime1">
               <a:rPr lang="en-US" smtClean="0"/>
-              <a:t>7/16/2026</a:t>
+              <a:t>7/19/2026</a:t>
             </a:fld>
             <a:endParaRPr lang="en-US" dirty="0"/>
           </a:p>
@@ -8173,7 +8263,7 @@
           <a:p>
             <a:fld id="{79F03E26-E542-1A4D-AC7A-1E4E95BAEC6A}" type="datetime1">
               <a:rPr lang="en-US" smtClean="0"/>
-              <a:t>7/16/2026</a:t>
+              <a:t>7/19/2026</a:t>
             </a:fld>
             <a:endParaRPr lang="en-US" dirty="0"/>
           </a:p>
@@ -8771,7 +8861,7 @@
           <a:p>
             <a:fld id="{115476B0-E2C7-E147-B9CE-3E274E847A52}" type="datetime1">
               <a:rPr lang="en-US" smtClean="0"/>
-              <a:t>7/16/2026</a:t>
+              <a:t>7/19/2026</a:t>
             </a:fld>
             <a:endParaRPr lang="en-US" dirty="0"/>
           </a:p>
@@ -9369,7 +9459,7 @@
           <a:p>
             <a:fld id="{30D7DCC1-5043-7A46-8443-F8426D5EAB75}" type="datetime1">
               <a:rPr lang="en-US" smtClean="0"/>
-              <a:t>7/16/2026</a:t>
+              <a:t>7/19/2026</a:t>
             </a:fld>
             <a:endParaRPr lang="en-US" dirty="0"/>
           </a:p>
@@ -9969,7 +10059,7 @@
           <a:p>
             <a:fld id="{D1A2963D-70FD-3A42-A53A-2480966C033D}" type="datetime1">
               <a:rPr lang="en-US" smtClean="0"/>
-              <a:t>7/16/2026</a:t>
+              <a:t>7/19/2026</a:t>
             </a:fld>
             <a:endParaRPr lang="en-US" dirty="0"/>
           </a:p>
@@ -10569,7 +10659,7 @@
           <a:p>
             <a:fld id="{F1A8FB16-FCFB-DA44-98E9-136CD51670D6}" type="datetime1">
               <a:rPr lang="en-US" smtClean="0"/>
-              <a:t>7/16/2026</a:t>
+              <a:t>7/19/2026</a:t>
             </a:fld>
             <a:endParaRPr lang="en-US" dirty="0"/>
           </a:p>
@@ -11167,7 +11257,7 @@
           <a:p>
             <a:fld id="{58EFB3A8-11B5-7149-8412-15238624EFFD}" type="datetime1">
               <a:rPr lang="en-US" smtClean="0"/>
-              <a:t>7/16/2026</a:t>
+              <a:t>7/19/2026</a:t>
             </a:fld>
             <a:endParaRPr lang="en-US" dirty="0"/>
           </a:p>
@@ -11765,7 +11855,7 @@
           <a:p>
             <a:fld id="{650FCFAB-53E3-A342-A296-D67E0AB8D0CD}" type="datetime1">
               <a:rPr lang="en-US" smtClean="0"/>
-              <a:t>7/16/2026</a:t>
+              <a:t>7/19/2026</a:t>
             </a:fld>
             <a:endParaRPr lang="en-US" dirty="0"/>
           </a:p>
@@ -12361,7 +12451,7 @@
           <a:p>
             <a:fld id="{8DC46901-11EF-4445-8903-DC36784F331E}" type="datetime1">
               <a:rPr lang="en-US" smtClean="0"/>
-              <a:t>7/16/2026</a:t>
+              <a:t>7/19/2026</a:t>
             </a:fld>
             <a:endParaRPr lang="en-US" dirty="0"/>
           </a:p>
@@ -12890,7 +12980,7 @@
           <a:p>
             <a:fld id="{86A42598-CA8F-5141-9F98-7018240FA786}" type="datetime1">
               <a:rPr lang="en-US" smtClean="0"/>
-              <a:t>7/16/2026</a:t>
+              <a:t>7/19/2026</a:t>
             </a:fld>
             <a:endParaRPr lang="en-US" dirty="0"/>
           </a:p>
@@ -13506,7 +13596,7 @@
           <a:p>
             <a:fld id="{BB5C750C-98D3-2541-9DBA-212130458E4E}" type="datetime1">
               <a:rPr lang="en-US" smtClean="0"/>
-              <a:t>7/16/2026</a:t>
+              <a:t>7/19/2026</a:t>
             </a:fld>
             <a:endParaRPr lang="en-US" dirty="0"/>
           </a:p>
@@ -14106,7 +14196,7 @@
           <a:p>
             <a:fld id="{91C99844-6C9E-BB4D-8B47-7C2CC32AAC02}" type="datetime1">
               <a:rPr lang="en-US" smtClean="0"/>
-              <a:t>7/16/2026</a:t>
+              <a:t>7/19/2026</a:t>
             </a:fld>
             <a:endParaRPr lang="en-US" dirty="0"/>
           </a:p>
@@ -14706,7 +14796,7 @@
           <a:p>
             <a:fld id="{97582611-C0A2-BD42-A8F7-C2F9A013F10C}" type="datetime1">
               <a:rPr lang="en-US" smtClean="0"/>
-              <a:t>7/16/2026</a:t>
+              <a:t>7/19/2026</a:t>
             </a:fld>
             <a:endParaRPr lang="en-US" dirty="0"/>
           </a:p>
@@ -15304,7 +15394,7 @@
           <a:p>
             <a:fld id="{1048417B-2BA9-FC42-993A-F5CAB8ABAB3C}" type="datetime1">
               <a:rPr lang="en-US" smtClean="0"/>
-              <a:t>7/16/2026</a:t>
+              <a:t>7/19/2026</a:t>
             </a:fld>
             <a:endParaRPr lang="en-US" dirty="0"/>
           </a:p>
@@ -15907,7 +15997,7 @@
           <a:p>
             <a:fld id="{B9956DE8-31F3-0C48-AD89-A99E39B5E351}" type="datetime1">
               <a:rPr lang="en-US" smtClean="0"/>
-              <a:t>7/16/2026</a:t>
+              <a:t>7/19/2026</a:t>
             </a:fld>
             <a:endParaRPr lang="en-US" dirty="0"/>
           </a:p>
@@ -16467,7 +16557,7 @@
           <a:p>
             <a:fld id="{1247F170-621E-394E-A3F2-D37D14C6B270}" type="datetime1">
               <a:rPr lang="en-US" smtClean="0"/>
-              <a:t>7/16/2026</a:t>
+              <a:t>7/19/2026</a:t>
             </a:fld>
             <a:endParaRPr lang="en-US" dirty="0"/>
           </a:p>
@@ -17029,7 +17119,7 @@
           <a:p>
             <a:fld id="{3BFEB256-000B-7640-A176-A6ED88FB302B}" type="datetime1">
               <a:rPr lang="en-US" smtClean="0"/>
-              <a:t>7/16/2026</a:t>
+              <a:t>7/19/2026</a:t>
             </a:fld>
             <a:endParaRPr lang="en-US" dirty="0"/>
           </a:p>
@@ -17586,7 +17676,7 @@
           <a:p>
             <a:fld id="{AD187FAD-DCB9-3D4B-B066-9000219F05FB}" type="datetime1">
               <a:rPr lang="en-US" smtClean="0"/>
-              <a:t>7/16/2026</a:t>
+              <a:t>7/19/2026</a:t>
             </a:fld>
             <a:endParaRPr lang="en-US" dirty="0"/>
           </a:p>
@@ -18186,7 +18276,7 @@
           <a:p>
             <a:fld id="{189C5B77-1EC5-224E-B44E-9B7868782731}" type="datetime1">
               <a:rPr lang="en-US" smtClean="0"/>
-              <a:t>7/16/2026</a:t>
+              <a:t>7/19/2026</a:t>
             </a:fld>
             <a:endParaRPr lang="en-US" dirty="0"/>
           </a:p>
@@ -18789,7 +18879,7 @@
           <a:p>
             <a:fld id="{C8F601A6-19D3-EB49-B7F2-A9801AE13DA6}" type="datetime1">
               <a:rPr lang="en-US" smtClean="0"/>
-              <a:t>7/16/2026</a:t>
+              <a:t>7/19/2026</a:t>
             </a:fld>
             <a:endParaRPr lang="en-US" dirty="0"/>
           </a:p>
@@ -19271,7 +19361,7 @@
           <a:p>
             <a:fld id="{FF5D23C8-9820-654D-9C1E-FE1FC23DA807}" type="datetime1">
               <a:rPr lang="en-US" smtClean="0"/>
-              <a:t>7/16/2026</a:t>
+              <a:t>7/19/2026</a:t>
             </a:fld>
             <a:endParaRPr lang="en-US" dirty="0"/>
           </a:p>
@@ -19892,7 +19982,7 @@
           <a:p>
             <a:fld id="{B5DCFA2C-3BE3-964B-9AAF-C20CC59CEE43}" type="datetime1">
               <a:rPr lang="en-US" smtClean="0"/>
-              <a:t>7/16/2026</a:t>
+              <a:t>7/19/2026</a:t>
             </a:fld>
             <a:endParaRPr lang="en-US" dirty="0"/>
           </a:p>
@@ -20330,7 +20420,7 @@
           <a:p>
             <a:fld id="{79A3CDA5-1015-3148-A386-36088AF5334C}" type="datetime1">
               <a:rPr lang="en-US" smtClean="0"/>
-              <a:t>7/16/2026</a:t>
+              <a:t>7/19/2026</a:t>
             </a:fld>
             <a:endParaRPr lang="en-US" dirty="0"/>
           </a:p>
@@ -20765,7 +20855,7 @@
           <a:p>
             <a:fld id="{C112E8AA-E35F-CF44-B5A4-3B5EDD4AC3FC}" type="datetime1">
               <a:rPr lang="en-US" smtClean="0"/>
-              <a:t>7/16/2026</a:t>
+              <a:t>7/19/2026</a:t>
             </a:fld>
             <a:endParaRPr lang="en-US" dirty="0"/>
           </a:p>
@@ -21377,7 +21467,7 @@
           <a:p>
             <a:fld id="{E0FF3B4E-61F2-9C45-A7C9-0649FA3F05AD}" type="datetime1">
               <a:rPr lang="en-US" smtClean="0"/>
-              <a:t>7/16/2026</a:t>
+              <a:t>7/19/2026</a:t>
             </a:fld>
             <a:endParaRPr lang="en-US" dirty="0"/>
           </a:p>
@@ -22002,7 +22092,7 @@
           <a:p>
             <a:fld id="{CC4A289B-0B17-4246-8E33-E89C12A90840}" type="datetime1">
               <a:rPr lang="en-US" smtClean="0"/>
-              <a:t>7/16/2026</a:t>
+              <a:t>7/19/2026</a:t>
             </a:fld>
             <a:endParaRPr lang="en-US" dirty="0"/>
           </a:p>
@@ -22622,7 +22712,7 @@
           <a:p>
             <a:fld id="{C8092CDE-5B88-E044-9012-03F4795B046E}" type="datetime1">
               <a:rPr lang="en-US" smtClean="0"/>
-              <a:t>7/16/2026</a:t>
+              <a:t>7/19/2026</a:t>
             </a:fld>
             <a:endParaRPr lang="en-US" dirty="0"/>
           </a:p>
@@ -23276,7 +23366,7 @@
           <a:p>
             <a:fld id="{EC076D1D-DE21-9B42-8106-8CD72DA85F70}" type="datetime1">
               <a:rPr lang="en-US" smtClean="0"/>
-              <a:t>7/16/2026</a:t>
+              <a:t>7/19/2026</a:t>
             </a:fld>
             <a:endParaRPr lang="en-US" dirty="0"/>
           </a:p>
@@ -23930,7 +24020,7 @@
           <a:p>
             <a:fld id="{57807DC2-592A-C24E-8E32-92959310D82C}" type="datetime1">
               <a:rPr lang="en-US" smtClean="0"/>
-              <a:t>7/16/2026</a:t>
+              <a:t>7/19/2026</a:t>
             </a:fld>
             <a:endParaRPr lang="en-US" dirty="0"/>
           </a:p>
@@ -24617,7 +24707,7 @@
             <a:fld id="{2A17FF52-3D92-5045-83B3-191BF759FA8D}" type="datetime1">
               <a:rPr lang="en-US" smtClean="0"/>
               <a:pPr/>
-              <a:t>7/16/2026</a:t>
+              <a:t>7/19/2026</a:t>
             </a:fld>
             <a:endParaRPr lang="en-US" dirty="0"/>
           </a:p>
@@ -25058,7 +25148,7 @@
             <a:fld id="{17C67708-7A94-8245-80C8-4B4702495DB1}" type="datetime1">
               <a:rPr lang="en-US" smtClean="0"/>
               <a:pPr/>
-              <a:t>7/16/2026</a:t>
+              <a:t>7/19/2026</a:t>
             </a:fld>
             <a:endParaRPr lang="en-US" dirty="0"/>
           </a:p>
@@ -25583,7 +25673,7 @@
           <a:p>
             <a:fld id="{763C345D-F56F-0743-AB88-4EB3E35EF63D}" type="datetime1">
               <a:rPr lang="en-US" smtClean="0"/>
-              <a:t>7/16/2026</a:t>
+              <a:t>7/19/2026</a:t>
             </a:fld>
             <a:endParaRPr lang="en-US" dirty="0"/>
           </a:p>
@@ -26081,7 +26171,7 @@
             <a:fld id="{C3A90753-8D45-EB44-AB23-49A6290D6DA6}" type="datetime1">
               <a:rPr lang="en-US" smtClean="0"/>
               <a:pPr/>
-              <a:t>7/16/2026</a:t>
+              <a:t>7/19/2026</a:t>
             </a:fld>
             <a:endParaRPr lang="en-US" dirty="0"/>
           </a:p>
@@ -26667,7 +26757,7 @@
           <a:p>
             <a:fld id="{C5059AB6-B751-F44D-A28C-E19CFA261A8F}" type="datetime1">
               <a:rPr lang="en-US" smtClean="0"/>
-              <a:t>7/16/2026</a:t>
+              <a:t>7/19/2026</a:t>
             </a:fld>
             <a:endParaRPr lang="en-US" dirty="0"/>
           </a:p>
@@ -27370,7 +27460,7 @@
           <a:p>
             <a:fld id="{F4B7459A-9905-1A4B-AB1A-C91FAC752AC6}" type="datetime1">
               <a:rPr lang="en-US" smtClean="0"/>
-              <a:t>7/16/2026</a:t>
+              <a:t>7/19/2026</a:t>
             </a:fld>
             <a:endParaRPr lang="en-US" dirty="0"/>
           </a:p>
@@ -27753,7 +27843,7 @@
           <a:p>
             <a:fld id="{D255AB00-997D-D540-BC20-37B7E62B26C1}" type="datetime1">
               <a:rPr lang="en-US" smtClean="0"/>
-              <a:t>7/16/2026</a:t>
+              <a:t>7/19/2026</a:t>
             </a:fld>
             <a:endParaRPr lang="en-US" dirty="0"/>
           </a:p>
@@ -28094,7 +28184,7 @@
           <a:p>
             <a:fld id="{69F3ECCF-2CCD-CA4B-8712-AE4484B24AE9}" type="datetime1">
               <a:rPr lang="en-US" smtClean="0"/>
-              <a:t>7/16/2026</a:t>
+              <a:t>7/19/2026</a:t>
             </a:fld>
             <a:endParaRPr lang="en-US" dirty="0"/>
           </a:p>
@@ -28679,7 +28769,7 @@
           <a:p>
             <a:fld id="{22942A74-7D23-DC49-91AA-85B24B3B8A00}" type="datetime1">
               <a:rPr lang="en-US" smtClean="0"/>
-              <a:t>7/16/2026</a:t>
+              <a:t>7/19/2026</a:t>
             </a:fld>
             <a:endParaRPr lang="en-US" dirty="0"/>
           </a:p>
@@ -29232,7 +29322,7 @@
           <a:p>
             <a:fld id="{22A0247B-8639-BE4B-9EB6-99BF33B2FE57}" type="datetime1">
               <a:rPr lang="en-US" smtClean="0"/>
-              <a:t>7/16/2026</a:t>
+              <a:t>7/19/2026</a:t>
             </a:fld>
             <a:endParaRPr lang="en-US" dirty="0"/>
           </a:p>
@@ -29762,7 +29852,7 @@
           <a:p>
             <a:fld id="{162FAA25-3923-0740-83DA-275C59DD4599}" type="datetime1">
               <a:rPr lang="en-US" smtClean="0"/>
-              <a:t>7/16/2026</a:t>
+              <a:t>7/19/2026</a:t>
             </a:fld>
             <a:endParaRPr lang="en-US" dirty="0"/>
           </a:p>
@@ -30253,7 +30343,7 @@
           <a:p>
             <a:fld id="{AB1B52C7-37F9-BD40-8BE5-16C7107F6B2A}" type="datetime1">
               <a:rPr lang="en-US" smtClean="0"/>
-              <a:t>7/16/2026</a:t>
+              <a:t>7/19/2026</a:t>
             </a:fld>
             <a:endParaRPr lang="en-US" dirty="0"/>
           </a:p>
@@ -30970,7 +31060,7 @@
           <a:p>
             <a:fld id="{FF5D23C8-9820-654D-9C1E-FE1FC23DA807}" type="datetime1">
               <a:rPr lang="en-US" smtClean="0"/>
-              <a:t>7/16/2026</a:t>
+              <a:t>7/19/2026</a:t>
             </a:fld>
             <a:endParaRPr lang="en-US" dirty="0"/>
           </a:p>
@@ -31216,7 +31306,7 @@
           <a:p>
             <a:fld id="{5594B28A-4C74-C14A-960D-ABD28BCC0EB4}" type="datetime1">
               <a:rPr lang="en-US" smtClean="0"/>
-              <a:t>7/16/2026</a:t>
+              <a:t>7/19/2026</a:t>
             </a:fld>
             <a:endParaRPr lang="en-US" dirty="0"/>
           </a:p>
@@ -31634,7 +31724,7 @@
           <a:p>
             <a:fld id="{D8CCD23C-B1EB-604C-96F1-0CF64015D152}" type="datetime1">
               <a:rPr lang="en-US" smtClean="0"/>
-              <a:t>7/16/2026</a:t>
+              <a:t>7/19/2026</a:t>
             </a:fld>
             <a:endParaRPr lang="en-US" dirty="0"/>
           </a:p>
@@ -32071,7 +32161,7 @@
           <a:p>
             <a:fld id="{4BE11430-0446-F343-817C-D9D2C78891B0}" type="datetime1">
               <a:rPr lang="en-US" smtClean="0"/>
-              <a:t>7/16/2026</a:t>
+              <a:t>7/19/2026</a:t>
             </a:fld>
             <a:endParaRPr lang="en-US" dirty="0"/>
           </a:p>
@@ -32592,7 +32682,7 @@
             <a:fld id="{6739503E-9C75-484A-A764-D9D8121AAE05}" type="datetime1">
               <a:rPr lang="en-US" smtClean="0"/>
               <a:pPr/>
-              <a:t>7/16/2026</a:t>
+              <a:t>7/19/2026</a:t>
             </a:fld>
             <a:endParaRPr lang="en-US" dirty="0"/>
           </a:p>
@@ -33430,15 +33520,15 @@
           <p:cNvPr id="2" name="Title 1">
             <a:extLst>
               <a:ext uri="{FF2B5EF4-FFF2-40B4-BE49-F238E27FC236}">
-                <a16:creationId xmlns:a16="http://schemas.microsoft.com/office/drawing/2014/main" id="{9DEAAF09-CB58-6E0F-3345-27591FA4FF54}"/>
-              </a:ext>
-            </a:extLst>
-          </p:cNvPr>
-          <p:cNvSpPr>
-            <a:spLocks noGrp="1"/>
-          </p:cNvSpPr>
-          <p:nvPr>
-            <p:ph type="ctrTitle"/>
+                <a16:creationId xmlns:a16="http://schemas.microsoft.com/office/drawing/2014/main" id="{E3CD4FA5-0F16-9080-F2C4-2713CDB98D73}"/>
+              </a:ext>
+            </a:extLst>
+          </p:cNvPr>
+          <p:cNvSpPr>
+            <a:spLocks noGrp="1"/>
+          </p:cNvSpPr>
+          <p:nvPr>
+            <p:ph type="title"/>
           </p:nvPr>
         </p:nvSpPr>
         <p:spPr/>
@@ -33448,7 +33538,7 @@
           <a:p>
             <a:r>
               <a:rPr lang="en-SG" dirty="0"/>
-              <a:t>DATA SOURCE</a:t>
+              <a:t>BACKEND API</a:t>
             </a:r>
           </a:p>
         </p:txBody>
@@ -33458,7 +33548,7 @@
           <p:cNvPr id="3" name="Footer Placeholder 2">
             <a:extLst>
               <a:ext uri="{FF2B5EF4-FFF2-40B4-BE49-F238E27FC236}">
-                <a16:creationId xmlns:a16="http://schemas.microsoft.com/office/drawing/2014/main" id="{3F6A2061-CB22-D700-DFFA-693366FF7DAC}"/>
+                <a16:creationId xmlns:a16="http://schemas.microsoft.com/office/drawing/2014/main" id="{87D4288F-EF10-D916-115B-E02EBF709DBE}"/>
               </a:ext>
             </a:extLst>
           </p:cNvPr>
@@ -33484,18 +33574,18 @@
       </p:sp>
       <p:sp>
         <p:nvSpPr>
-          <p:cNvPr id="4" name="Date Placeholder 3">
-            <a:extLst>
-              <a:ext uri="{FF2B5EF4-FFF2-40B4-BE49-F238E27FC236}">
-                <a16:creationId xmlns:a16="http://schemas.microsoft.com/office/drawing/2014/main" id="{FB2649DC-6302-6FE7-EB8D-567208A1C78E}"/>
-              </a:ext>
-            </a:extLst>
-          </p:cNvPr>
-          <p:cNvSpPr>
-            <a:spLocks noGrp="1"/>
-          </p:cNvSpPr>
-          <p:nvPr>
-            <p:ph type="dt" sz="half" idx="10"/>
+          <p:cNvPr id="4" name="Content Placeholder 3">
+            <a:extLst>
+              <a:ext uri="{FF2B5EF4-FFF2-40B4-BE49-F238E27FC236}">
+                <a16:creationId xmlns:a16="http://schemas.microsoft.com/office/drawing/2014/main" id="{8EBC3E0A-B721-E75C-D747-71415EBBE5BB}"/>
+              </a:ext>
+            </a:extLst>
+          </p:cNvPr>
+          <p:cNvSpPr>
+            <a:spLocks noGrp="1"/>
+          </p:cNvSpPr>
+          <p:nvPr>
+            <p:ph sz="quarter" idx="13"/>
           </p:nvPr>
         </p:nvSpPr>
         <p:spPr/>
@@ -33503,9 +33593,34 @@
           <a:bodyPr/>
           <a:lstStyle/>
           <a:p>
-            <a:fld id="{010D0AB2-23BC-3043-AC30-5928E542C0CE}" type="datetime1">
+            <a:endParaRPr lang="en-SG"/>
+          </a:p>
+        </p:txBody>
+      </p:sp>
+      <p:sp>
+        <p:nvSpPr>
+          <p:cNvPr id="5" name="Date Placeholder 4">
+            <a:extLst>
+              <a:ext uri="{FF2B5EF4-FFF2-40B4-BE49-F238E27FC236}">
+                <a16:creationId xmlns:a16="http://schemas.microsoft.com/office/drawing/2014/main" id="{F346DFDA-D36A-641B-1086-9A4690C23E0E}"/>
+              </a:ext>
+            </a:extLst>
+          </p:cNvPr>
+          <p:cNvSpPr>
+            <a:spLocks noGrp="1"/>
+          </p:cNvSpPr>
+          <p:nvPr>
+            <p:ph type="dt" sz="half" idx="10"/>
+          </p:nvPr>
+        </p:nvSpPr>
+        <p:spPr/>
+        <p:txBody>
+          <a:bodyPr/>
+          <a:lstStyle/>
+          <a:p>
+            <a:fld id="{927C0DEB-4AE1-EA4D-826D-E3C22802B942}" type="datetime1">
               <a:rPr lang="en-US" smtClean="0"/>
-              <a:t>7/16/2026</a:t>
+              <a:t>7/20/2026</a:t>
             </a:fld>
             <a:endParaRPr lang="en-US" dirty="0"/>
           </a:p>
@@ -33513,10 +33628,10 @@
       </p:sp>
       <p:sp>
         <p:nvSpPr>
-          <p:cNvPr id="5" name="Slide Number Placeholder 4">
-            <a:extLst>
-              <a:ext uri="{FF2B5EF4-FFF2-40B4-BE49-F238E27FC236}">
-                <a16:creationId xmlns:a16="http://schemas.microsoft.com/office/drawing/2014/main" id="{66FF4A67-54EF-04B0-A7D5-1AED7EE1442F}"/>
+          <p:cNvPr id="6" name="Slide Number Placeholder 5">
+            <a:extLst>
+              <a:ext uri="{FF2B5EF4-FFF2-40B4-BE49-F238E27FC236}">
+                <a16:creationId xmlns:a16="http://schemas.microsoft.com/office/drawing/2014/main" id="{C127D931-F45C-2EE8-A41C-7C4E0A181684}"/>
               </a:ext>
             </a:extLst>
           </p:cNvPr>
@@ -33544,7 +33659,7 @@
     </p:spTree>
     <p:extLst>
       <p:ext uri="{BB962C8B-B14F-4D97-AF65-F5344CB8AC3E}">
-        <p14:creationId xmlns:p14="http://schemas.microsoft.com/office/powerpoint/2010/main" val="1748166942"/>
+        <p14:creationId xmlns:p14="http://schemas.microsoft.com/office/powerpoint/2010/main" val="2127768817"/>
       </p:ext>
     </p:extLst>
   </p:cSld>
@@ -33576,15 +33691,15 @@
           <p:cNvPr id="2" name="Title 1">
             <a:extLst>
               <a:ext uri="{FF2B5EF4-FFF2-40B4-BE49-F238E27FC236}">
-                <a16:creationId xmlns:a16="http://schemas.microsoft.com/office/drawing/2014/main" id="{EE58C531-7A30-5D0B-55FA-6704B085156E}"/>
-              </a:ext>
-            </a:extLst>
-          </p:cNvPr>
-          <p:cNvSpPr>
-            <a:spLocks noGrp="1"/>
-          </p:cNvSpPr>
-          <p:nvPr>
-            <p:ph type="ctrTitle"/>
+                <a16:creationId xmlns:a16="http://schemas.microsoft.com/office/drawing/2014/main" id="{151996FA-5CDB-38EA-C314-20A7D3B73B1E}"/>
+              </a:ext>
+            </a:extLst>
+          </p:cNvPr>
+          <p:cNvSpPr>
+            <a:spLocks noGrp="1"/>
+          </p:cNvSpPr>
+          <p:nvPr>
+            <p:ph type="title"/>
           </p:nvPr>
         </p:nvSpPr>
         <p:spPr/>
@@ -33594,7 +33709,7 @@
           <a:p>
             <a:r>
               <a:rPr lang="en-SG" dirty="0"/>
-              <a:t>ISSUES AND LIMITATIONS</a:t>
+              <a:t>MACHINE LEARNING</a:t>
             </a:r>
           </a:p>
         </p:txBody>
@@ -33604,7 +33719,7 @@
           <p:cNvPr id="3" name="Footer Placeholder 2">
             <a:extLst>
               <a:ext uri="{FF2B5EF4-FFF2-40B4-BE49-F238E27FC236}">
-                <a16:creationId xmlns:a16="http://schemas.microsoft.com/office/drawing/2014/main" id="{935A7A2C-0E66-E74E-6AAA-46749892E93F}"/>
+                <a16:creationId xmlns:a16="http://schemas.microsoft.com/office/drawing/2014/main" id="{32F2DFD3-85FB-CCD8-8239-D2725E65F67A}"/>
               </a:ext>
             </a:extLst>
           </p:cNvPr>
@@ -33630,18 +33745,18 @@
       </p:sp>
       <p:sp>
         <p:nvSpPr>
-          <p:cNvPr id="4" name="Date Placeholder 3">
-            <a:extLst>
-              <a:ext uri="{FF2B5EF4-FFF2-40B4-BE49-F238E27FC236}">
-                <a16:creationId xmlns:a16="http://schemas.microsoft.com/office/drawing/2014/main" id="{406F36CD-8CAF-F2A3-0961-D2C12A048190}"/>
-              </a:ext>
-            </a:extLst>
-          </p:cNvPr>
-          <p:cNvSpPr>
-            <a:spLocks noGrp="1"/>
-          </p:cNvSpPr>
-          <p:nvPr>
-            <p:ph type="dt" sz="half" idx="10"/>
+          <p:cNvPr id="4" name="Content Placeholder 3">
+            <a:extLst>
+              <a:ext uri="{FF2B5EF4-FFF2-40B4-BE49-F238E27FC236}">
+                <a16:creationId xmlns:a16="http://schemas.microsoft.com/office/drawing/2014/main" id="{711FD2D7-80AB-8915-426E-1B7BB86AD5FA}"/>
+              </a:ext>
+            </a:extLst>
+          </p:cNvPr>
+          <p:cNvSpPr>
+            <a:spLocks noGrp="1"/>
+          </p:cNvSpPr>
+          <p:nvPr>
+            <p:ph sz="quarter" idx="13"/>
           </p:nvPr>
         </p:nvSpPr>
         <p:spPr/>
@@ -33649,9 +33764,34 @@
           <a:bodyPr/>
           <a:lstStyle/>
           <a:p>
-            <a:fld id="{010D0AB2-23BC-3043-AC30-5928E542C0CE}" type="datetime1">
+            <a:endParaRPr lang="en-SG"/>
+          </a:p>
+        </p:txBody>
+      </p:sp>
+      <p:sp>
+        <p:nvSpPr>
+          <p:cNvPr id="5" name="Date Placeholder 4">
+            <a:extLst>
+              <a:ext uri="{FF2B5EF4-FFF2-40B4-BE49-F238E27FC236}">
+                <a16:creationId xmlns:a16="http://schemas.microsoft.com/office/drawing/2014/main" id="{8A36F9D2-4C85-2A4E-4F02-F16819F34517}"/>
+              </a:ext>
+            </a:extLst>
+          </p:cNvPr>
+          <p:cNvSpPr>
+            <a:spLocks noGrp="1"/>
+          </p:cNvSpPr>
+          <p:nvPr>
+            <p:ph type="dt" sz="half" idx="10"/>
+          </p:nvPr>
+        </p:nvSpPr>
+        <p:spPr/>
+        <p:txBody>
+          <a:bodyPr/>
+          <a:lstStyle/>
+          <a:p>
+            <a:fld id="{927C0DEB-4AE1-EA4D-826D-E3C22802B942}" type="datetime1">
               <a:rPr lang="en-US" smtClean="0"/>
-              <a:t>7/16/2026</a:t>
+              <a:t>7/20/2026</a:t>
             </a:fld>
             <a:endParaRPr lang="en-US" dirty="0"/>
           </a:p>
@@ -33659,10 +33799,10 @@
       </p:sp>
       <p:sp>
         <p:nvSpPr>
-          <p:cNvPr id="5" name="Slide Number Placeholder 4">
-            <a:extLst>
-              <a:ext uri="{FF2B5EF4-FFF2-40B4-BE49-F238E27FC236}">
-                <a16:creationId xmlns:a16="http://schemas.microsoft.com/office/drawing/2014/main" id="{C01ACBED-585F-43F1-E030-A9F82EDE5DEB}"/>
+          <p:cNvPr id="6" name="Slide Number Placeholder 5">
+            <a:extLst>
+              <a:ext uri="{FF2B5EF4-FFF2-40B4-BE49-F238E27FC236}">
+                <a16:creationId xmlns:a16="http://schemas.microsoft.com/office/drawing/2014/main" id="{F89C23D6-8443-978E-F5FF-276AD0A7C93F}"/>
               </a:ext>
             </a:extLst>
           </p:cNvPr>
@@ -33682,6 +33822,912 @@
               <a:rPr lang="en-US" smtClean="0"/>
               <a:pPr/>
               <a:t>11</a:t>
+            </a:fld>
+            <a:endParaRPr lang="en-US" dirty="0"/>
+          </a:p>
+        </p:txBody>
+      </p:sp>
+    </p:spTree>
+    <p:extLst>
+      <p:ext uri="{BB962C8B-B14F-4D97-AF65-F5344CB8AC3E}">
+        <p14:creationId xmlns:p14="http://schemas.microsoft.com/office/powerpoint/2010/main" val="308232602"/>
+      </p:ext>
+    </p:extLst>
+  </p:cSld>
+  <p:clrMapOvr>
+    <a:masterClrMapping/>
+  </p:clrMapOvr>
+</p:sld>
+</file>
+
+<file path=ppt/slides/slide12.xml><?xml version="1.0" encoding="utf-8"?>
+<p:sld xmlns:a="http://schemas.openxmlformats.org/drawingml/2006/main" xmlns:r="http://schemas.openxmlformats.org/officeDocument/2006/relationships" xmlns:p="http://schemas.openxmlformats.org/presentationml/2006/main">
+  <p:cSld>
+    <p:spTree>
+      <p:nvGrpSpPr>
+        <p:cNvPr id="1" name=""/>
+        <p:cNvGrpSpPr/>
+        <p:nvPr/>
+      </p:nvGrpSpPr>
+      <p:grpSpPr>
+        <a:xfrm>
+          <a:off x="0" y="0"/>
+          <a:ext cx="0" cy="0"/>
+          <a:chOff x="0" y="0"/>
+          <a:chExt cx="0" cy="0"/>
+        </a:xfrm>
+      </p:grpSpPr>
+      <p:sp>
+        <p:nvSpPr>
+          <p:cNvPr id="2" name="Title 1">
+            <a:extLst>
+              <a:ext uri="{FF2B5EF4-FFF2-40B4-BE49-F238E27FC236}">
+                <a16:creationId xmlns:a16="http://schemas.microsoft.com/office/drawing/2014/main" id="{286B1922-876E-5121-A1B1-09421CD101B6}"/>
+              </a:ext>
+            </a:extLst>
+          </p:cNvPr>
+          <p:cNvSpPr>
+            <a:spLocks noGrp="1"/>
+          </p:cNvSpPr>
+          <p:nvPr>
+            <p:ph type="title"/>
+          </p:nvPr>
+        </p:nvSpPr>
+        <p:spPr/>
+        <p:txBody>
+          <a:bodyPr/>
+          <a:lstStyle/>
+          <a:p>
+            <a:r>
+              <a:rPr lang="en-SG" dirty="0"/>
+              <a:t>DATABASE</a:t>
+            </a:r>
+          </a:p>
+        </p:txBody>
+      </p:sp>
+      <p:sp>
+        <p:nvSpPr>
+          <p:cNvPr id="3" name="Footer Placeholder 2">
+            <a:extLst>
+              <a:ext uri="{FF2B5EF4-FFF2-40B4-BE49-F238E27FC236}">
+                <a16:creationId xmlns:a16="http://schemas.microsoft.com/office/drawing/2014/main" id="{130300D0-5A97-A007-8822-C75A86BC135D}"/>
+              </a:ext>
+            </a:extLst>
+          </p:cNvPr>
+          <p:cNvSpPr>
+            <a:spLocks noGrp="1"/>
+          </p:cNvSpPr>
+          <p:nvPr>
+            <p:ph type="ftr" sz="quarter" idx="11"/>
+          </p:nvPr>
+        </p:nvSpPr>
+        <p:spPr/>
+        <p:txBody>
+          <a:bodyPr/>
+          <a:lstStyle/>
+          <a:p>
+            <a:r>
+              <a:rPr lang="en-US"/>
+              <a:t>SAMPLE FOOTER TEXT</a:t>
+            </a:r>
+            <a:endParaRPr lang="en-US" dirty="0"/>
+          </a:p>
+        </p:txBody>
+      </p:sp>
+      <p:sp>
+        <p:nvSpPr>
+          <p:cNvPr id="4" name="Content Placeholder 3">
+            <a:extLst>
+              <a:ext uri="{FF2B5EF4-FFF2-40B4-BE49-F238E27FC236}">
+                <a16:creationId xmlns:a16="http://schemas.microsoft.com/office/drawing/2014/main" id="{AF3B857A-83E3-2D2A-978B-032EBACA2376}"/>
+              </a:ext>
+            </a:extLst>
+          </p:cNvPr>
+          <p:cNvSpPr>
+            <a:spLocks noGrp="1"/>
+          </p:cNvSpPr>
+          <p:nvPr>
+            <p:ph sz="quarter" idx="13"/>
+          </p:nvPr>
+        </p:nvSpPr>
+        <p:spPr/>
+        <p:txBody>
+          <a:bodyPr/>
+          <a:lstStyle/>
+          <a:p>
+            <a:endParaRPr lang="en-SG"/>
+          </a:p>
+        </p:txBody>
+      </p:sp>
+      <p:sp>
+        <p:nvSpPr>
+          <p:cNvPr id="5" name="Date Placeholder 4">
+            <a:extLst>
+              <a:ext uri="{FF2B5EF4-FFF2-40B4-BE49-F238E27FC236}">
+                <a16:creationId xmlns:a16="http://schemas.microsoft.com/office/drawing/2014/main" id="{84920A6B-C20E-B038-D917-D179D6C31213}"/>
+              </a:ext>
+            </a:extLst>
+          </p:cNvPr>
+          <p:cNvSpPr>
+            <a:spLocks noGrp="1"/>
+          </p:cNvSpPr>
+          <p:nvPr>
+            <p:ph type="dt" sz="half" idx="10"/>
+          </p:nvPr>
+        </p:nvSpPr>
+        <p:spPr/>
+        <p:txBody>
+          <a:bodyPr/>
+          <a:lstStyle/>
+          <a:p>
+            <a:fld id="{927C0DEB-4AE1-EA4D-826D-E3C22802B942}" type="datetime1">
+              <a:rPr lang="en-US" smtClean="0"/>
+              <a:t>7/20/2026</a:t>
+            </a:fld>
+            <a:endParaRPr lang="en-US" dirty="0"/>
+          </a:p>
+        </p:txBody>
+      </p:sp>
+      <p:sp>
+        <p:nvSpPr>
+          <p:cNvPr id="6" name="Slide Number Placeholder 5">
+            <a:extLst>
+              <a:ext uri="{FF2B5EF4-FFF2-40B4-BE49-F238E27FC236}">
+                <a16:creationId xmlns:a16="http://schemas.microsoft.com/office/drawing/2014/main" id="{F5D522DE-ABA7-62B2-AAB9-C272B74D3EC1}"/>
+              </a:ext>
+            </a:extLst>
+          </p:cNvPr>
+          <p:cNvSpPr>
+            <a:spLocks noGrp="1"/>
+          </p:cNvSpPr>
+          <p:nvPr>
+            <p:ph type="sldNum" sz="quarter" idx="12"/>
+          </p:nvPr>
+        </p:nvSpPr>
+        <p:spPr/>
+        <p:txBody>
+          <a:bodyPr/>
+          <a:lstStyle/>
+          <a:p>
+            <a:fld id="{CC057153-B650-4DEB-B370-79DDCFDCE934}" type="slidenum">
+              <a:rPr lang="en-US" smtClean="0"/>
+              <a:pPr/>
+              <a:t>12</a:t>
+            </a:fld>
+            <a:endParaRPr lang="en-US" dirty="0"/>
+          </a:p>
+        </p:txBody>
+      </p:sp>
+    </p:spTree>
+    <p:extLst>
+      <p:ext uri="{BB962C8B-B14F-4D97-AF65-F5344CB8AC3E}">
+        <p14:creationId xmlns:p14="http://schemas.microsoft.com/office/powerpoint/2010/main" val="2133928878"/>
+      </p:ext>
+    </p:extLst>
+  </p:cSld>
+  <p:clrMapOvr>
+    <a:masterClrMapping/>
+  </p:clrMapOvr>
+</p:sld>
+</file>
+
+<file path=ppt/slides/slide13.xml><?xml version="1.0" encoding="utf-8"?>
+<p:sld xmlns:a="http://schemas.openxmlformats.org/drawingml/2006/main" xmlns:r="http://schemas.openxmlformats.org/officeDocument/2006/relationships" xmlns:p="http://schemas.openxmlformats.org/presentationml/2006/main">
+  <p:cSld>
+    <p:spTree>
+      <p:nvGrpSpPr>
+        <p:cNvPr id="1" name=""/>
+        <p:cNvGrpSpPr/>
+        <p:nvPr/>
+      </p:nvGrpSpPr>
+      <p:grpSpPr>
+        <a:xfrm>
+          <a:off x="0" y="0"/>
+          <a:ext cx="0" cy="0"/>
+          <a:chOff x="0" y="0"/>
+          <a:chExt cx="0" cy="0"/>
+        </a:xfrm>
+      </p:grpSpPr>
+      <p:sp>
+        <p:nvSpPr>
+          <p:cNvPr id="2" name="Title 1">
+            <a:extLst>
+              <a:ext uri="{FF2B5EF4-FFF2-40B4-BE49-F238E27FC236}">
+                <a16:creationId xmlns:a16="http://schemas.microsoft.com/office/drawing/2014/main" id="{DEFF6106-7A0A-48DF-A54A-1203136FE872}"/>
+              </a:ext>
+            </a:extLst>
+          </p:cNvPr>
+          <p:cNvSpPr>
+            <a:spLocks noGrp="1"/>
+          </p:cNvSpPr>
+          <p:nvPr>
+            <p:ph type="ctrTitle"/>
+          </p:nvPr>
+        </p:nvSpPr>
+        <p:spPr/>
+        <p:txBody>
+          <a:bodyPr/>
+          <a:lstStyle/>
+          <a:p>
+            <a:r>
+              <a:rPr lang="en-SG" dirty="0"/>
+              <a:t>Docker</a:t>
+            </a:r>
+          </a:p>
+        </p:txBody>
+      </p:sp>
+      <p:sp>
+        <p:nvSpPr>
+          <p:cNvPr id="3" name="Footer Placeholder 2">
+            <a:extLst>
+              <a:ext uri="{FF2B5EF4-FFF2-40B4-BE49-F238E27FC236}">
+                <a16:creationId xmlns:a16="http://schemas.microsoft.com/office/drawing/2014/main" id="{B2BCAD1A-CFBC-A349-DD67-7349B93D3720}"/>
+              </a:ext>
+            </a:extLst>
+          </p:cNvPr>
+          <p:cNvSpPr>
+            <a:spLocks noGrp="1"/>
+          </p:cNvSpPr>
+          <p:nvPr>
+            <p:ph type="ftr" sz="quarter" idx="11"/>
+          </p:nvPr>
+        </p:nvSpPr>
+        <p:spPr/>
+        <p:txBody>
+          <a:bodyPr/>
+          <a:lstStyle/>
+          <a:p>
+            <a:r>
+              <a:rPr lang="en-US"/>
+              <a:t>SAMPLE FOOTER TEXT</a:t>
+            </a:r>
+            <a:endParaRPr lang="en-US" dirty="0"/>
+          </a:p>
+        </p:txBody>
+      </p:sp>
+      <p:sp>
+        <p:nvSpPr>
+          <p:cNvPr id="4" name="Date Placeholder 3">
+            <a:extLst>
+              <a:ext uri="{FF2B5EF4-FFF2-40B4-BE49-F238E27FC236}">
+                <a16:creationId xmlns:a16="http://schemas.microsoft.com/office/drawing/2014/main" id="{3BA4730D-F0FF-B752-323B-BE0157CA02F8}"/>
+              </a:ext>
+            </a:extLst>
+          </p:cNvPr>
+          <p:cNvSpPr>
+            <a:spLocks noGrp="1"/>
+          </p:cNvSpPr>
+          <p:nvPr>
+            <p:ph type="dt" sz="half" idx="10"/>
+          </p:nvPr>
+        </p:nvSpPr>
+        <p:spPr/>
+        <p:txBody>
+          <a:bodyPr/>
+          <a:lstStyle/>
+          <a:p>
+            <a:fld id="{010D0AB2-23BC-3043-AC30-5928E542C0CE}" type="datetime1">
+              <a:rPr lang="en-US" smtClean="0"/>
+              <a:t>7/19/2026</a:t>
+            </a:fld>
+            <a:endParaRPr lang="en-US" dirty="0"/>
+          </a:p>
+        </p:txBody>
+      </p:sp>
+      <p:sp>
+        <p:nvSpPr>
+          <p:cNvPr id="5" name="Slide Number Placeholder 4">
+            <a:extLst>
+              <a:ext uri="{FF2B5EF4-FFF2-40B4-BE49-F238E27FC236}">
+                <a16:creationId xmlns:a16="http://schemas.microsoft.com/office/drawing/2014/main" id="{49E7DB59-C4F8-CDE1-61A4-49E42A74492A}"/>
+              </a:ext>
+            </a:extLst>
+          </p:cNvPr>
+          <p:cNvSpPr>
+            <a:spLocks noGrp="1"/>
+          </p:cNvSpPr>
+          <p:nvPr>
+            <p:ph type="sldNum" sz="quarter" idx="12"/>
+          </p:nvPr>
+        </p:nvSpPr>
+        <p:spPr/>
+        <p:txBody>
+          <a:bodyPr/>
+          <a:lstStyle/>
+          <a:p>
+            <a:fld id="{CC057153-B650-4DEB-B370-79DDCFDCE934}" type="slidenum">
+              <a:rPr lang="en-US" smtClean="0"/>
+              <a:pPr/>
+              <a:t>13</a:t>
+            </a:fld>
+            <a:endParaRPr lang="en-US" dirty="0"/>
+          </a:p>
+        </p:txBody>
+      </p:sp>
+    </p:spTree>
+    <p:extLst>
+      <p:ext uri="{BB962C8B-B14F-4D97-AF65-F5344CB8AC3E}">
+        <p14:creationId xmlns:p14="http://schemas.microsoft.com/office/powerpoint/2010/main" val="1662138044"/>
+      </p:ext>
+    </p:extLst>
+  </p:cSld>
+  <p:clrMapOvr>
+    <a:masterClrMapping/>
+  </p:clrMapOvr>
+</p:sld>
+</file>
+
+<file path=ppt/slides/slide14.xml><?xml version="1.0" encoding="utf-8"?>
+<p:sld xmlns:a="http://schemas.openxmlformats.org/drawingml/2006/main" xmlns:r="http://schemas.openxmlformats.org/officeDocument/2006/relationships" xmlns:p="http://schemas.openxmlformats.org/presentationml/2006/main">
+  <p:cSld>
+    <p:spTree>
+      <p:nvGrpSpPr>
+        <p:cNvPr id="1" name=""/>
+        <p:cNvGrpSpPr/>
+        <p:nvPr/>
+      </p:nvGrpSpPr>
+      <p:grpSpPr>
+        <a:xfrm>
+          <a:off x="0" y="0"/>
+          <a:ext cx="0" cy="0"/>
+          <a:chOff x="0" y="0"/>
+          <a:chExt cx="0" cy="0"/>
+        </a:xfrm>
+      </p:grpSpPr>
+      <p:sp>
+        <p:nvSpPr>
+          <p:cNvPr id="2" name="Title 1">
+            <a:extLst>
+              <a:ext uri="{FF2B5EF4-FFF2-40B4-BE49-F238E27FC236}">
+                <a16:creationId xmlns:a16="http://schemas.microsoft.com/office/drawing/2014/main" id="{F27EEF88-486E-52FF-3AF3-C50D322E6819}"/>
+              </a:ext>
+            </a:extLst>
+          </p:cNvPr>
+          <p:cNvSpPr>
+            <a:spLocks noGrp="1"/>
+          </p:cNvSpPr>
+          <p:nvPr>
+            <p:ph type="ctrTitle"/>
+          </p:nvPr>
+        </p:nvSpPr>
+        <p:spPr/>
+        <p:txBody>
+          <a:bodyPr/>
+          <a:lstStyle/>
+          <a:p>
+            <a:r>
+              <a:rPr lang="en-SG" dirty="0"/>
+              <a:t>KUBERNATES</a:t>
+            </a:r>
+          </a:p>
+        </p:txBody>
+      </p:sp>
+      <p:sp>
+        <p:nvSpPr>
+          <p:cNvPr id="3" name="Footer Placeholder 2">
+            <a:extLst>
+              <a:ext uri="{FF2B5EF4-FFF2-40B4-BE49-F238E27FC236}">
+                <a16:creationId xmlns:a16="http://schemas.microsoft.com/office/drawing/2014/main" id="{D2F62700-C8BC-371F-E4A0-146018195E63}"/>
+              </a:ext>
+            </a:extLst>
+          </p:cNvPr>
+          <p:cNvSpPr>
+            <a:spLocks noGrp="1"/>
+          </p:cNvSpPr>
+          <p:nvPr>
+            <p:ph type="ftr" sz="quarter" idx="11"/>
+          </p:nvPr>
+        </p:nvSpPr>
+        <p:spPr/>
+        <p:txBody>
+          <a:bodyPr/>
+          <a:lstStyle/>
+          <a:p>
+            <a:r>
+              <a:rPr lang="en-US"/>
+              <a:t>SAMPLE FOOTER TEXT</a:t>
+            </a:r>
+            <a:endParaRPr lang="en-US" dirty="0"/>
+          </a:p>
+        </p:txBody>
+      </p:sp>
+      <p:sp>
+        <p:nvSpPr>
+          <p:cNvPr id="4" name="Date Placeholder 3">
+            <a:extLst>
+              <a:ext uri="{FF2B5EF4-FFF2-40B4-BE49-F238E27FC236}">
+                <a16:creationId xmlns:a16="http://schemas.microsoft.com/office/drawing/2014/main" id="{97386FD1-37AC-99FB-025F-EC72261EF737}"/>
+              </a:ext>
+            </a:extLst>
+          </p:cNvPr>
+          <p:cNvSpPr>
+            <a:spLocks noGrp="1"/>
+          </p:cNvSpPr>
+          <p:nvPr>
+            <p:ph type="dt" sz="half" idx="10"/>
+          </p:nvPr>
+        </p:nvSpPr>
+        <p:spPr/>
+        <p:txBody>
+          <a:bodyPr/>
+          <a:lstStyle/>
+          <a:p>
+            <a:fld id="{010D0AB2-23BC-3043-AC30-5928E542C0CE}" type="datetime1">
+              <a:rPr lang="en-US" smtClean="0"/>
+              <a:t>7/19/2026</a:t>
+            </a:fld>
+            <a:endParaRPr lang="en-US" dirty="0"/>
+          </a:p>
+        </p:txBody>
+      </p:sp>
+      <p:sp>
+        <p:nvSpPr>
+          <p:cNvPr id="5" name="Slide Number Placeholder 4">
+            <a:extLst>
+              <a:ext uri="{FF2B5EF4-FFF2-40B4-BE49-F238E27FC236}">
+                <a16:creationId xmlns:a16="http://schemas.microsoft.com/office/drawing/2014/main" id="{D08F73AA-8FFF-4571-C0CF-0F21F722B187}"/>
+              </a:ext>
+            </a:extLst>
+          </p:cNvPr>
+          <p:cNvSpPr>
+            <a:spLocks noGrp="1"/>
+          </p:cNvSpPr>
+          <p:nvPr>
+            <p:ph type="sldNum" sz="quarter" idx="12"/>
+          </p:nvPr>
+        </p:nvSpPr>
+        <p:spPr/>
+        <p:txBody>
+          <a:bodyPr/>
+          <a:lstStyle/>
+          <a:p>
+            <a:fld id="{CC057153-B650-4DEB-B370-79DDCFDCE934}" type="slidenum">
+              <a:rPr lang="en-US" smtClean="0"/>
+              <a:pPr/>
+              <a:t>14</a:t>
+            </a:fld>
+            <a:endParaRPr lang="en-US" dirty="0"/>
+          </a:p>
+        </p:txBody>
+      </p:sp>
+    </p:spTree>
+    <p:extLst>
+      <p:ext uri="{BB962C8B-B14F-4D97-AF65-F5344CB8AC3E}">
+        <p14:creationId xmlns:p14="http://schemas.microsoft.com/office/powerpoint/2010/main" val="2037361668"/>
+      </p:ext>
+    </p:extLst>
+  </p:cSld>
+  <p:clrMapOvr>
+    <a:masterClrMapping/>
+  </p:clrMapOvr>
+</p:sld>
+</file>
+
+<file path=ppt/slides/slide15.xml><?xml version="1.0" encoding="utf-8"?>
+<p:sld xmlns:a="http://schemas.openxmlformats.org/drawingml/2006/main" xmlns:r="http://schemas.openxmlformats.org/officeDocument/2006/relationships" xmlns:p="http://schemas.openxmlformats.org/presentationml/2006/main">
+  <p:cSld>
+    <p:spTree>
+      <p:nvGrpSpPr>
+        <p:cNvPr id="1" name=""/>
+        <p:cNvGrpSpPr/>
+        <p:nvPr/>
+      </p:nvGrpSpPr>
+      <p:grpSpPr>
+        <a:xfrm>
+          <a:off x="0" y="0"/>
+          <a:ext cx="0" cy="0"/>
+          <a:chOff x="0" y="0"/>
+          <a:chExt cx="0" cy="0"/>
+        </a:xfrm>
+      </p:grpSpPr>
+      <p:sp>
+        <p:nvSpPr>
+          <p:cNvPr id="2" name="Title 1">
+            <a:extLst>
+              <a:ext uri="{FF2B5EF4-FFF2-40B4-BE49-F238E27FC236}">
+                <a16:creationId xmlns:a16="http://schemas.microsoft.com/office/drawing/2014/main" id="{5399766A-8D26-6DCE-60BF-703811C9A8AF}"/>
+              </a:ext>
+            </a:extLst>
+          </p:cNvPr>
+          <p:cNvSpPr>
+            <a:spLocks noGrp="1"/>
+          </p:cNvSpPr>
+          <p:nvPr>
+            <p:ph type="ctrTitle"/>
+          </p:nvPr>
+        </p:nvSpPr>
+        <p:spPr>
+          <a:xfrm>
+            <a:off x="3536831" y="1463040"/>
+            <a:ext cx="5210354" cy="3931920"/>
+          </a:xfrm>
+        </p:spPr>
+        <p:txBody>
+          <a:bodyPr/>
+          <a:lstStyle/>
+          <a:p>
+            <a:r>
+              <a:rPr lang="en-SG" dirty="0"/>
+              <a:t>MICROSERVICES</a:t>
+            </a:r>
+          </a:p>
+        </p:txBody>
+      </p:sp>
+      <p:sp>
+        <p:nvSpPr>
+          <p:cNvPr id="3" name="Footer Placeholder 2">
+            <a:extLst>
+              <a:ext uri="{FF2B5EF4-FFF2-40B4-BE49-F238E27FC236}">
+                <a16:creationId xmlns:a16="http://schemas.microsoft.com/office/drawing/2014/main" id="{02CD1AC0-9939-D7DA-C1B5-89896E5490E1}"/>
+              </a:ext>
+            </a:extLst>
+          </p:cNvPr>
+          <p:cNvSpPr>
+            <a:spLocks noGrp="1"/>
+          </p:cNvSpPr>
+          <p:nvPr>
+            <p:ph type="ftr" sz="quarter" idx="11"/>
+          </p:nvPr>
+        </p:nvSpPr>
+        <p:spPr/>
+        <p:txBody>
+          <a:bodyPr/>
+          <a:lstStyle/>
+          <a:p>
+            <a:r>
+              <a:rPr lang="en-US"/>
+              <a:t>SAMPLE FOOTER TEXT</a:t>
+            </a:r>
+            <a:endParaRPr lang="en-US" dirty="0"/>
+          </a:p>
+        </p:txBody>
+      </p:sp>
+      <p:sp>
+        <p:nvSpPr>
+          <p:cNvPr id="4" name="Date Placeholder 3">
+            <a:extLst>
+              <a:ext uri="{FF2B5EF4-FFF2-40B4-BE49-F238E27FC236}">
+                <a16:creationId xmlns:a16="http://schemas.microsoft.com/office/drawing/2014/main" id="{19E5B9C4-A021-AD37-4063-4CD82AEA3362}"/>
+              </a:ext>
+            </a:extLst>
+          </p:cNvPr>
+          <p:cNvSpPr>
+            <a:spLocks noGrp="1"/>
+          </p:cNvSpPr>
+          <p:nvPr>
+            <p:ph type="dt" sz="half" idx="10"/>
+          </p:nvPr>
+        </p:nvSpPr>
+        <p:spPr/>
+        <p:txBody>
+          <a:bodyPr/>
+          <a:lstStyle/>
+          <a:p>
+            <a:fld id="{010D0AB2-23BC-3043-AC30-5928E542C0CE}" type="datetime1">
+              <a:rPr lang="en-US" smtClean="0"/>
+              <a:t>7/19/2026</a:t>
+            </a:fld>
+            <a:endParaRPr lang="en-US" dirty="0"/>
+          </a:p>
+        </p:txBody>
+      </p:sp>
+      <p:sp>
+        <p:nvSpPr>
+          <p:cNvPr id="5" name="Slide Number Placeholder 4">
+            <a:extLst>
+              <a:ext uri="{FF2B5EF4-FFF2-40B4-BE49-F238E27FC236}">
+                <a16:creationId xmlns:a16="http://schemas.microsoft.com/office/drawing/2014/main" id="{D796FA40-EF4F-7414-795C-90E90F514FCC}"/>
+              </a:ext>
+            </a:extLst>
+          </p:cNvPr>
+          <p:cNvSpPr>
+            <a:spLocks noGrp="1"/>
+          </p:cNvSpPr>
+          <p:nvPr>
+            <p:ph type="sldNum" sz="quarter" idx="12"/>
+          </p:nvPr>
+        </p:nvSpPr>
+        <p:spPr/>
+        <p:txBody>
+          <a:bodyPr/>
+          <a:lstStyle/>
+          <a:p>
+            <a:fld id="{CC057153-B650-4DEB-B370-79DDCFDCE934}" type="slidenum">
+              <a:rPr lang="en-US" smtClean="0"/>
+              <a:pPr/>
+              <a:t>15</a:t>
+            </a:fld>
+            <a:endParaRPr lang="en-US" dirty="0"/>
+          </a:p>
+        </p:txBody>
+      </p:sp>
+    </p:spTree>
+    <p:extLst>
+      <p:ext uri="{BB962C8B-B14F-4D97-AF65-F5344CB8AC3E}">
+        <p14:creationId xmlns:p14="http://schemas.microsoft.com/office/powerpoint/2010/main" val="1787156668"/>
+      </p:ext>
+    </p:extLst>
+  </p:cSld>
+  <p:clrMapOvr>
+    <a:masterClrMapping/>
+  </p:clrMapOvr>
+</p:sld>
+</file>
+
+<file path=ppt/slides/slide16.xml><?xml version="1.0" encoding="utf-8"?>
+<p:sld xmlns:a="http://schemas.openxmlformats.org/drawingml/2006/main" xmlns:r="http://schemas.openxmlformats.org/officeDocument/2006/relationships" xmlns:p="http://schemas.openxmlformats.org/presentationml/2006/main">
+  <p:cSld>
+    <p:spTree>
+      <p:nvGrpSpPr>
+        <p:cNvPr id="1" name=""/>
+        <p:cNvGrpSpPr/>
+        <p:nvPr/>
+      </p:nvGrpSpPr>
+      <p:grpSpPr>
+        <a:xfrm>
+          <a:off x="0" y="0"/>
+          <a:ext cx="0" cy="0"/>
+          <a:chOff x="0" y="0"/>
+          <a:chExt cx="0" cy="0"/>
+        </a:xfrm>
+      </p:grpSpPr>
+      <p:sp>
+        <p:nvSpPr>
+          <p:cNvPr id="2" name="Title 1">
+            <a:extLst>
+              <a:ext uri="{FF2B5EF4-FFF2-40B4-BE49-F238E27FC236}">
+                <a16:creationId xmlns:a16="http://schemas.microsoft.com/office/drawing/2014/main" id="{9DEAAF09-CB58-6E0F-3345-27591FA4FF54}"/>
+              </a:ext>
+            </a:extLst>
+          </p:cNvPr>
+          <p:cNvSpPr>
+            <a:spLocks noGrp="1"/>
+          </p:cNvSpPr>
+          <p:nvPr>
+            <p:ph type="ctrTitle"/>
+          </p:nvPr>
+        </p:nvSpPr>
+        <p:spPr/>
+        <p:txBody>
+          <a:bodyPr/>
+          <a:lstStyle/>
+          <a:p>
+            <a:r>
+              <a:rPr lang="en-SG" dirty="0"/>
+              <a:t>DATA SOURCE</a:t>
+            </a:r>
+          </a:p>
+        </p:txBody>
+      </p:sp>
+      <p:sp>
+        <p:nvSpPr>
+          <p:cNvPr id="3" name="Footer Placeholder 2">
+            <a:extLst>
+              <a:ext uri="{FF2B5EF4-FFF2-40B4-BE49-F238E27FC236}">
+                <a16:creationId xmlns:a16="http://schemas.microsoft.com/office/drawing/2014/main" id="{3F6A2061-CB22-D700-DFFA-693366FF7DAC}"/>
+              </a:ext>
+            </a:extLst>
+          </p:cNvPr>
+          <p:cNvSpPr>
+            <a:spLocks noGrp="1"/>
+          </p:cNvSpPr>
+          <p:nvPr>
+            <p:ph type="ftr" sz="quarter" idx="11"/>
+          </p:nvPr>
+        </p:nvSpPr>
+        <p:spPr/>
+        <p:txBody>
+          <a:bodyPr/>
+          <a:lstStyle/>
+          <a:p>
+            <a:r>
+              <a:rPr lang="en-US"/>
+              <a:t>SAMPLE FOOTER TEXT</a:t>
+            </a:r>
+            <a:endParaRPr lang="en-US" dirty="0"/>
+          </a:p>
+        </p:txBody>
+      </p:sp>
+      <p:sp>
+        <p:nvSpPr>
+          <p:cNvPr id="4" name="Date Placeholder 3">
+            <a:extLst>
+              <a:ext uri="{FF2B5EF4-FFF2-40B4-BE49-F238E27FC236}">
+                <a16:creationId xmlns:a16="http://schemas.microsoft.com/office/drawing/2014/main" id="{FB2649DC-6302-6FE7-EB8D-567208A1C78E}"/>
+              </a:ext>
+            </a:extLst>
+          </p:cNvPr>
+          <p:cNvSpPr>
+            <a:spLocks noGrp="1"/>
+          </p:cNvSpPr>
+          <p:nvPr>
+            <p:ph type="dt" sz="half" idx="10"/>
+          </p:nvPr>
+        </p:nvSpPr>
+        <p:spPr/>
+        <p:txBody>
+          <a:bodyPr/>
+          <a:lstStyle/>
+          <a:p>
+            <a:fld id="{010D0AB2-23BC-3043-AC30-5928E542C0CE}" type="datetime1">
+              <a:rPr lang="en-US" smtClean="0"/>
+              <a:t>7/19/2026</a:t>
+            </a:fld>
+            <a:endParaRPr lang="en-US" dirty="0"/>
+          </a:p>
+        </p:txBody>
+      </p:sp>
+      <p:sp>
+        <p:nvSpPr>
+          <p:cNvPr id="5" name="Slide Number Placeholder 4">
+            <a:extLst>
+              <a:ext uri="{FF2B5EF4-FFF2-40B4-BE49-F238E27FC236}">
+                <a16:creationId xmlns:a16="http://schemas.microsoft.com/office/drawing/2014/main" id="{66FF4A67-54EF-04B0-A7D5-1AED7EE1442F}"/>
+              </a:ext>
+            </a:extLst>
+          </p:cNvPr>
+          <p:cNvSpPr>
+            <a:spLocks noGrp="1"/>
+          </p:cNvSpPr>
+          <p:nvPr>
+            <p:ph type="sldNum" sz="quarter" idx="12"/>
+          </p:nvPr>
+        </p:nvSpPr>
+        <p:spPr/>
+        <p:txBody>
+          <a:bodyPr/>
+          <a:lstStyle/>
+          <a:p>
+            <a:fld id="{CC057153-B650-4DEB-B370-79DDCFDCE934}" type="slidenum">
+              <a:rPr lang="en-US" smtClean="0"/>
+              <a:pPr/>
+              <a:t>16</a:t>
+            </a:fld>
+            <a:endParaRPr lang="en-US" dirty="0"/>
+          </a:p>
+        </p:txBody>
+      </p:sp>
+    </p:spTree>
+    <p:extLst>
+      <p:ext uri="{BB962C8B-B14F-4D97-AF65-F5344CB8AC3E}">
+        <p14:creationId xmlns:p14="http://schemas.microsoft.com/office/powerpoint/2010/main" val="1748166942"/>
+      </p:ext>
+    </p:extLst>
+  </p:cSld>
+  <p:clrMapOvr>
+    <a:masterClrMapping/>
+  </p:clrMapOvr>
+</p:sld>
+</file>
+
+<file path=ppt/slides/slide17.xml><?xml version="1.0" encoding="utf-8"?>
+<p:sld xmlns:a="http://schemas.openxmlformats.org/drawingml/2006/main" xmlns:r="http://schemas.openxmlformats.org/officeDocument/2006/relationships" xmlns:p="http://schemas.openxmlformats.org/presentationml/2006/main">
+  <p:cSld>
+    <p:spTree>
+      <p:nvGrpSpPr>
+        <p:cNvPr id="1" name=""/>
+        <p:cNvGrpSpPr/>
+        <p:nvPr/>
+      </p:nvGrpSpPr>
+      <p:grpSpPr>
+        <a:xfrm>
+          <a:off x="0" y="0"/>
+          <a:ext cx="0" cy="0"/>
+          <a:chOff x="0" y="0"/>
+          <a:chExt cx="0" cy="0"/>
+        </a:xfrm>
+      </p:grpSpPr>
+      <p:sp>
+        <p:nvSpPr>
+          <p:cNvPr id="2" name="Title 1">
+            <a:extLst>
+              <a:ext uri="{FF2B5EF4-FFF2-40B4-BE49-F238E27FC236}">
+                <a16:creationId xmlns:a16="http://schemas.microsoft.com/office/drawing/2014/main" id="{EE58C531-7A30-5D0B-55FA-6704B085156E}"/>
+              </a:ext>
+            </a:extLst>
+          </p:cNvPr>
+          <p:cNvSpPr>
+            <a:spLocks noGrp="1"/>
+          </p:cNvSpPr>
+          <p:nvPr>
+            <p:ph type="ctrTitle"/>
+          </p:nvPr>
+        </p:nvSpPr>
+        <p:spPr/>
+        <p:txBody>
+          <a:bodyPr/>
+          <a:lstStyle/>
+          <a:p>
+            <a:r>
+              <a:rPr lang="en-SG" dirty="0"/>
+              <a:t>ISSUES AND LIMITATIONS</a:t>
+            </a:r>
+          </a:p>
+        </p:txBody>
+      </p:sp>
+      <p:sp>
+        <p:nvSpPr>
+          <p:cNvPr id="3" name="Footer Placeholder 2">
+            <a:extLst>
+              <a:ext uri="{FF2B5EF4-FFF2-40B4-BE49-F238E27FC236}">
+                <a16:creationId xmlns:a16="http://schemas.microsoft.com/office/drawing/2014/main" id="{935A7A2C-0E66-E74E-6AAA-46749892E93F}"/>
+              </a:ext>
+            </a:extLst>
+          </p:cNvPr>
+          <p:cNvSpPr>
+            <a:spLocks noGrp="1"/>
+          </p:cNvSpPr>
+          <p:nvPr>
+            <p:ph type="ftr" sz="quarter" idx="11"/>
+          </p:nvPr>
+        </p:nvSpPr>
+        <p:spPr/>
+        <p:txBody>
+          <a:bodyPr/>
+          <a:lstStyle/>
+          <a:p>
+            <a:r>
+              <a:rPr lang="en-US"/>
+              <a:t>SAMPLE FOOTER TEXT</a:t>
+            </a:r>
+            <a:endParaRPr lang="en-US" dirty="0"/>
+          </a:p>
+        </p:txBody>
+      </p:sp>
+      <p:sp>
+        <p:nvSpPr>
+          <p:cNvPr id="4" name="Date Placeholder 3">
+            <a:extLst>
+              <a:ext uri="{FF2B5EF4-FFF2-40B4-BE49-F238E27FC236}">
+                <a16:creationId xmlns:a16="http://schemas.microsoft.com/office/drawing/2014/main" id="{406F36CD-8CAF-F2A3-0961-D2C12A048190}"/>
+              </a:ext>
+            </a:extLst>
+          </p:cNvPr>
+          <p:cNvSpPr>
+            <a:spLocks noGrp="1"/>
+          </p:cNvSpPr>
+          <p:nvPr>
+            <p:ph type="dt" sz="half" idx="10"/>
+          </p:nvPr>
+        </p:nvSpPr>
+        <p:spPr/>
+        <p:txBody>
+          <a:bodyPr/>
+          <a:lstStyle/>
+          <a:p>
+            <a:fld id="{010D0AB2-23BC-3043-AC30-5928E542C0CE}" type="datetime1">
+              <a:rPr lang="en-US" smtClean="0"/>
+              <a:t>7/19/2026</a:t>
+            </a:fld>
+            <a:endParaRPr lang="en-US" dirty="0"/>
+          </a:p>
+        </p:txBody>
+      </p:sp>
+      <p:sp>
+        <p:nvSpPr>
+          <p:cNvPr id="5" name="Slide Number Placeholder 4">
+            <a:extLst>
+              <a:ext uri="{FF2B5EF4-FFF2-40B4-BE49-F238E27FC236}">
+                <a16:creationId xmlns:a16="http://schemas.microsoft.com/office/drawing/2014/main" id="{C01ACBED-585F-43F1-E030-A9F82EDE5DEB}"/>
+              </a:ext>
+            </a:extLst>
+          </p:cNvPr>
+          <p:cNvSpPr>
+            <a:spLocks noGrp="1"/>
+          </p:cNvSpPr>
+          <p:nvPr>
+            <p:ph type="sldNum" sz="quarter" idx="12"/>
+          </p:nvPr>
+        </p:nvSpPr>
+        <p:spPr/>
+        <p:txBody>
+          <a:bodyPr/>
+          <a:lstStyle/>
+          <a:p>
+            <a:fld id="{CC057153-B650-4DEB-B370-79DDCFDCE934}" type="slidenum">
+              <a:rPr lang="en-US" smtClean="0"/>
+              <a:pPr/>
+              <a:t>17</a:t>
             </a:fld>
             <a:endParaRPr lang="en-US" dirty="0"/>
           </a:p>
@@ -33700,7 +34746,7 @@
 </p:sld>
 </file>
 
-<file path=ppt/slides/slide12.xml><?xml version="1.0" encoding="utf-8"?>
+<file path=ppt/slides/slide18.xml><?xml version="1.0" encoding="utf-8"?>
 <p:sld xmlns:a="http://schemas.openxmlformats.org/drawingml/2006/main" xmlns:r="http://schemas.openxmlformats.org/officeDocument/2006/relationships" xmlns:p="http://schemas.openxmlformats.org/presentationml/2006/main">
   <p:cSld>
     <p:spTree>
@@ -33785,25 +34831,32 @@
           <p:cNvPr id="2" name="Title 1">
             <a:extLst>
               <a:ext uri="{FF2B5EF4-FFF2-40B4-BE49-F238E27FC236}">
-                <a16:creationId xmlns:a16="http://schemas.microsoft.com/office/drawing/2014/main" id="{D7795239-9BBD-01A8-B192-6B72EB6F89DF}"/>
-              </a:ext>
-            </a:extLst>
-          </p:cNvPr>
-          <p:cNvSpPr>
-            <a:spLocks noGrp="1"/>
-          </p:cNvSpPr>
-          <p:nvPr>
-            <p:ph type="ctrTitle"/>
-          </p:nvPr>
-        </p:nvSpPr>
-        <p:spPr/>
-        <p:txBody>
-          <a:bodyPr/>
+                <a16:creationId xmlns:a16="http://schemas.microsoft.com/office/drawing/2014/main" id="{C6F9A5B3-D1E4-D0C2-F83A-1FA0DFF13296}"/>
+              </a:ext>
+            </a:extLst>
+          </p:cNvPr>
+          <p:cNvSpPr>
+            <a:spLocks noGrp="1"/>
+          </p:cNvSpPr>
+          <p:nvPr>
+            <p:ph type="title"/>
+          </p:nvPr>
+        </p:nvSpPr>
+        <p:spPr>
+          <a:xfrm>
+            <a:off x="1255032" y="862335"/>
+            <a:ext cx="4389120" cy="5120640"/>
+          </a:xfrm>
+        </p:spPr>
+        <p:txBody>
+          <a:bodyPr anchor="ctr">
+            <a:normAutofit/>
+          </a:bodyPr>
           <a:lstStyle/>
           <a:p>
             <a:r>
               <a:rPr lang="en-SG" dirty="0"/>
-              <a:t>Problem statement</a:t>
+              <a:t>Problem Statement</a:t>
             </a:r>
           </a:p>
         </p:txBody>
@@ -33813,7 +34866,7 @@
           <p:cNvPr id="3" name="Footer Placeholder 2">
             <a:extLst>
               <a:ext uri="{FF2B5EF4-FFF2-40B4-BE49-F238E27FC236}">
-                <a16:creationId xmlns:a16="http://schemas.microsoft.com/office/drawing/2014/main" id="{FB484B56-B94D-6D6D-F0E1-26A03E022FF6}"/>
+                <a16:creationId xmlns:a16="http://schemas.microsoft.com/office/drawing/2014/main" id="{0EE80E97-6251-AC91-6D35-87EF2A034F80}"/>
               </a:ext>
             </a:extLst>
           </p:cNvPr>
@@ -33824,25 +34877,74 @@
             <p:ph type="ftr" sz="quarter" idx="11"/>
           </p:nvPr>
         </p:nvSpPr>
-        <p:spPr/>
-        <p:txBody>
-          <a:bodyPr/>
+        <p:spPr>
+          <a:xfrm rot="16200000">
+            <a:off x="-1005840" y="1525384"/>
+            <a:ext cx="2805405" cy="365125"/>
+          </a:xfrm>
+        </p:spPr>
+        <p:txBody>
+          <a:bodyPr anchor="ctr">
+            <a:normAutofit/>
+          </a:bodyPr>
           <a:lstStyle/>
           <a:p>
+            <a:pPr>
+              <a:spcAft>
+                <a:spcPts val="600"/>
+              </a:spcAft>
+            </a:pPr>
             <a:r>
               <a:rPr lang="en-US"/>
               <a:t>SAMPLE FOOTER TEXT</a:t>
             </a:r>
-            <a:endParaRPr lang="en-US" dirty="0"/>
-          </a:p>
-        </p:txBody>
-      </p:sp>
-      <p:sp>
-        <p:nvSpPr>
-          <p:cNvPr id="4" name="Date Placeholder 3">
-            <a:extLst>
-              <a:ext uri="{FF2B5EF4-FFF2-40B4-BE49-F238E27FC236}">
-                <a16:creationId xmlns:a16="http://schemas.microsoft.com/office/drawing/2014/main" id="{FB73928D-F822-872E-AEB2-898C26A51BBC}"/>
+          </a:p>
+        </p:txBody>
+      </p:sp>
+      <p:sp>
+        <p:nvSpPr>
+          <p:cNvPr id="4" name="Content Placeholder 3">
+            <a:extLst>
+              <a:ext uri="{FF2B5EF4-FFF2-40B4-BE49-F238E27FC236}">
+                <a16:creationId xmlns:a16="http://schemas.microsoft.com/office/drawing/2014/main" id="{7D2A119A-9A1B-4BDC-333B-C4F2A646A21F}"/>
+              </a:ext>
+            </a:extLst>
+          </p:cNvPr>
+          <p:cNvSpPr>
+            <a:spLocks noGrp="1"/>
+          </p:cNvSpPr>
+          <p:nvPr>
+            <p:ph sz="quarter" idx="13"/>
+          </p:nvPr>
+        </p:nvSpPr>
+        <p:spPr>
+          <a:xfrm>
+            <a:off x="6547100" y="816615"/>
+            <a:ext cx="4389120" cy="5212080"/>
+          </a:xfrm>
+        </p:spPr>
+        <p:txBody>
+          <a:bodyPr anchor="ctr">
+            <a:normAutofit/>
+          </a:bodyPr>
+          <a:lstStyle/>
+          <a:p>
+            <a:r>
+              <a:rPr lang="en-SG"/>
+              <a:t>Current environmental monitoring systems rely on manual analysis of sensor data, which is inefficient and prone to delayed responses. This project proposes an AI-powered Smart Environmental Monitoring System that automatically detects anomalies using machine learning and is deployed with Docker and Kubernetes for scalable and reliable operation.</a:t>
+            </a:r>
+          </a:p>
+          <a:p>
+            <a:endParaRPr lang="en-SG" dirty="0"/>
+          </a:p>
+        </p:txBody>
+      </p:sp>
+      <p:sp>
+        <p:nvSpPr>
+          <p:cNvPr id="5" name="Date Placeholder 4">
+            <a:extLst>
+              <a:ext uri="{FF2B5EF4-FFF2-40B4-BE49-F238E27FC236}">
+                <a16:creationId xmlns:a16="http://schemas.microsoft.com/office/drawing/2014/main" id="{A0D81173-2692-1EC8-9E30-62838359A5A5}"/>
               </a:ext>
             </a:extLst>
           </p:cNvPr>
@@ -33853,25 +34955,42 @@
             <p:ph type="dt" sz="half" idx="10"/>
           </p:nvPr>
         </p:nvSpPr>
-        <p:spPr/>
-        <p:txBody>
-          <a:bodyPr/>
+        <p:spPr>
+          <a:xfrm rot="5400000">
+            <a:off x="10040831" y="4206240"/>
+            <a:ext cx="3494314" cy="365125"/>
+          </a:xfrm>
+        </p:spPr>
+        <p:txBody>
+          <a:bodyPr anchor="ctr">
+            <a:normAutofit/>
+          </a:bodyPr>
           <a:lstStyle/>
           <a:p>
-            <a:fld id="{010D0AB2-23BC-3043-AC30-5928E542C0CE}" type="datetime1">
+            <a:pPr>
+              <a:spcAft>
+                <a:spcPts val="600"/>
+              </a:spcAft>
+            </a:pPr>
+            <a:fld id="{927C0DEB-4AE1-EA4D-826D-E3C22802B942}" type="datetime1">
               <a:rPr lang="en-US" smtClean="0"/>
-              <a:t>7/16/2026</a:t>
+              <a:pPr>
+                <a:spcAft>
+                  <a:spcPts val="600"/>
+                </a:spcAft>
+              </a:pPr>
+              <a:t>7/19/2026</a:t>
             </a:fld>
-            <a:endParaRPr lang="en-US" dirty="0"/>
-          </a:p>
-        </p:txBody>
-      </p:sp>
-      <p:sp>
-        <p:nvSpPr>
-          <p:cNvPr id="5" name="Slide Number Placeholder 4">
-            <a:extLst>
-              <a:ext uri="{FF2B5EF4-FFF2-40B4-BE49-F238E27FC236}">
-                <a16:creationId xmlns:a16="http://schemas.microsoft.com/office/drawing/2014/main" id="{D5722563-0A53-48A7-6503-2538BC40FD39}"/>
+            <a:endParaRPr lang="en-US"/>
+          </a:p>
+        </p:txBody>
+      </p:sp>
+      <p:sp>
+        <p:nvSpPr>
+          <p:cNvPr id="6" name="Slide Number Placeholder 5">
+            <a:extLst>
+              <a:ext uri="{FF2B5EF4-FFF2-40B4-BE49-F238E27FC236}">
+                <a16:creationId xmlns:a16="http://schemas.microsoft.com/office/drawing/2014/main" id="{ABB406EC-D35C-8A52-7BBB-EB512633B053}"/>
               </a:ext>
             </a:extLst>
           </p:cNvPr>
@@ -33882,24 +35001,40 @@
             <p:ph type="sldNum" sz="quarter" idx="12"/>
           </p:nvPr>
         </p:nvSpPr>
-        <p:spPr/>
-        <p:txBody>
-          <a:bodyPr/>
+        <p:spPr>
+          <a:xfrm>
+            <a:off x="11573385" y="6229552"/>
+            <a:ext cx="429207" cy="365125"/>
+          </a:xfrm>
+        </p:spPr>
+        <p:txBody>
+          <a:bodyPr anchor="ctr">
+            <a:normAutofit/>
+          </a:bodyPr>
           <a:lstStyle/>
           <a:p>
+            <a:pPr>
+              <a:spcAft>
+                <a:spcPts val="600"/>
+              </a:spcAft>
+            </a:pPr>
             <a:fld id="{CC057153-B650-4DEB-B370-79DDCFDCE934}" type="slidenum">
               <a:rPr lang="en-US" smtClean="0"/>
-              <a:pPr/>
+              <a:pPr>
+                <a:spcAft>
+                  <a:spcPts val="600"/>
+                </a:spcAft>
+              </a:pPr>
               <a:t>2</a:t>
             </a:fld>
-            <a:endParaRPr lang="en-US" dirty="0"/>
+            <a:endParaRPr lang="en-US"/>
           </a:p>
         </p:txBody>
       </p:sp>
     </p:spTree>
     <p:extLst>
       <p:ext uri="{BB962C8B-B14F-4D97-AF65-F5344CB8AC3E}">
-        <p14:creationId xmlns:p14="http://schemas.microsoft.com/office/powerpoint/2010/main" val="2823699821"/>
+        <p14:creationId xmlns:p14="http://schemas.microsoft.com/office/powerpoint/2010/main" val="703768538"/>
       </p:ext>
     </p:extLst>
   </p:cSld>
@@ -33931,7 +35066,7 @@
           <p:cNvPr id="2" name="Title 1">
             <a:extLst>
               <a:ext uri="{FF2B5EF4-FFF2-40B4-BE49-F238E27FC236}">
-                <a16:creationId xmlns:a16="http://schemas.microsoft.com/office/drawing/2014/main" id="{C6F9A5B3-D1E4-D0C2-F83A-1FA0DFF13296}"/>
+                <a16:creationId xmlns:a16="http://schemas.microsoft.com/office/drawing/2014/main" id="{55246322-0B3D-4729-5132-3C4A130943A7}"/>
               </a:ext>
             </a:extLst>
           </p:cNvPr>
@@ -33947,7 +35082,10 @@
           <a:bodyPr/>
           <a:lstStyle/>
           <a:p>
-            <a:endParaRPr lang="en-SG"/>
+            <a:r>
+              <a:rPr lang="en-SG" dirty="0"/>
+              <a:t>Relevance to the real world</a:t>
+            </a:r>
           </a:p>
         </p:txBody>
       </p:sp>
@@ -33956,7 +35094,7 @@
           <p:cNvPr id="3" name="Footer Placeholder 2">
             <a:extLst>
               <a:ext uri="{FF2B5EF4-FFF2-40B4-BE49-F238E27FC236}">
-                <a16:creationId xmlns:a16="http://schemas.microsoft.com/office/drawing/2014/main" id="{0EE80E97-6251-AC91-6D35-87EF2A034F80}"/>
+                <a16:creationId xmlns:a16="http://schemas.microsoft.com/office/drawing/2014/main" id="{0E30E219-9D5F-7F72-FC83-20A688DEAC8D}"/>
               </a:ext>
             </a:extLst>
           </p:cNvPr>
@@ -33985,7 +35123,7 @@
           <p:cNvPr id="4" name="Content Placeholder 3">
             <a:extLst>
               <a:ext uri="{FF2B5EF4-FFF2-40B4-BE49-F238E27FC236}">
-                <a16:creationId xmlns:a16="http://schemas.microsoft.com/office/drawing/2014/main" id="{7D2A119A-9A1B-4BDC-333B-C4F2A646A21F}"/>
+                <a16:creationId xmlns:a16="http://schemas.microsoft.com/office/drawing/2014/main" id="{ACB4BD60-8BD7-8099-D66F-D520E6307C4D}"/>
               </a:ext>
             </a:extLst>
           </p:cNvPr>
@@ -34001,7 +35139,106 @@
           <a:bodyPr/>
           <a:lstStyle/>
           <a:p>
-            <a:endParaRPr lang="en-SG" dirty="0"/>
+            <a:r>
+              <a:rPr lang="en-SG" dirty="0"/>
+              <a:t>Manual monitoring of large volumes of environmental data is </a:t>
+            </a:r>
+            <a:r>
+              <a:rPr lang="en-SG" b="1" dirty="0"/>
+              <a:t>time-consuming</a:t>
+            </a:r>
+            <a:r>
+              <a:rPr lang="en-SG" dirty="0"/>
+              <a:t> and prone to </a:t>
+            </a:r>
+            <a:r>
+              <a:rPr lang="en-SG" b="1" dirty="0"/>
+              <a:t>human error</a:t>
+            </a:r>
+            <a:r>
+              <a:rPr lang="en-SG" dirty="0"/>
+              <a:t>.</a:t>
+            </a:r>
+          </a:p>
+          <a:p>
+            <a:r>
+              <a:rPr lang="en-SG" dirty="0"/>
+              <a:t>Delayed detection of abnormal conditions can lead to </a:t>
+            </a:r>
+            <a:r>
+              <a:rPr lang="en-SG" b="1" dirty="0"/>
+              <a:t>equipment damage</a:t>
+            </a:r>
+            <a:r>
+              <a:rPr lang="en-SG" dirty="0"/>
+              <a:t>, </a:t>
+            </a:r>
+            <a:r>
+              <a:rPr lang="en-SG" b="1" dirty="0"/>
+              <a:t>safety risks</a:t>
+            </a:r>
+            <a:r>
+              <a:rPr lang="en-SG" dirty="0"/>
+              <a:t>, and </a:t>
+            </a:r>
+            <a:r>
+              <a:rPr lang="en-SG" b="1" dirty="0"/>
+              <a:t>operational downtime</a:t>
+            </a:r>
+            <a:r>
+              <a:rPr lang="en-SG" dirty="0"/>
+              <a:t>.</a:t>
+            </a:r>
+          </a:p>
+          <a:p>
+            <a:r>
+              <a:rPr lang="en-SG" b="1" dirty="0"/>
+              <a:t>Machine learning</a:t>
+            </a:r>
+            <a:r>
+              <a:rPr lang="en-SG" dirty="0"/>
+              <a:t> automatically analyses environmental data to detect anomalies early, enabling faster decision-making.</a:t>
+            </a:r>
+          </a:p>
+          <a:p>
+            <a:r>
+              <a:rPr lang="en-SG" b="1" dirty="0"/>
+              <a:t>Docker</a:t>
+            </a:r>
+            <a:r>
+              <a:rPr lang="en-SG" dirty="0"/>
+              <a:t> and </a:t>
+            </a:r>
+            <a:r>
+              <a:rPr lang="en-SG" b="1" dirty="0"/>
+              <a:t>Kubernetes</a:t>
+            </a:r>
+            <a:r>
+              <a:rPr lang="en-SG" dirty="0"/>
+              <a:t> provide a scalable and reliable microservices platform that can support increasing numbers of sensors and users.</a:t>
+            </a:r>
+          </a:p>
+          <a:p>
+            <a:r>
+              <a:rPr lang="en-SG" dirty="0"/>
+              <a:t>The system transforms environmental monitoring from </a:t>
+            </a:r>
+            <a:r>
+              <a:rPr lang="en-SG" b="1" dirty="0"/>
+              <a:t>reactive</a:t>
+            </a:r>
+            <a:r>
+              <a:rPr lang="en-SG" dirty="0"/>
+              <a:t> to </a:t>
+            </a:r>
+            <a:r>
+              <a:rPr lang="en-SG" b="1" dirty="0"/>
+              <a:t>proactive</a:t>
+            </a:r>
+            <a:r>
+              <a:rPr lang="en-SG" dirty="0"/>
+              <a:t>, improving efficiency and reliability.</a:t>
+            </a:r>
           </a:p>
         </p:txBody>
       </p:sp>
@@ -34010,7 +35247,7 @@
           <p:cNvPr id="5" name="Date Placeholder 4">
             <a:extLst>
               <a:ext uri="{FF2B5EF4-FFF2-40B4-BE49-F238E27FC236}">
-                <a16:creationId xmlns:a16="http://schemas.microsoft.com/office/drawing/2014/main" id="{A0D81173-2692-1EC8-9E30-62838359A5A5}"/>
+                <a16:creationId xmlns:a16="http://schemas.microsoft.com/office/drawing/2014/main" id="{B1CFFEBF-A7C8-0A3F-7105-B1C503C1B628}"/>
               </a:ext>
             </a:extLst>
           </p:cNvPr>
@@ -34028,7 +35265,7 @@
           <a:p>
             <a:fld id="{927C0DEB-4AE1-EA4D-826D-E3C22802B942}" type="datetime1">
               <a:rPr lang="en-US" smtClean="0"/>
-              <a:t>7/16/2026</a:t>
+              <a:t>7/20/2026</a:t>
             </a:fld>
             <a:endParaRPr lang="en-US" dirty="0"/>
           </a:p>
@@ -34039,7 +35276,7 @@
           <p:cNvPr id="6" name="Slide Number Placeholder 5">
             <a:extLst>
               <a:ext uri="{FF2B5EF4-FFF2-40B4-BE49-F238E27FC236}">
-                <a16:creationId xmlns:a16="http://schemas.microsoft.com/office/drawing/2014/main" id="{ABB406EC-D35C-8A52-7BBB-EB512633B053}"/>
+                <a16:creationId xmlns:a16="http://schemas.microsoft.com/office/drawing/2014/main" id="{A8BA9DB4-3C1C-F59A-B451-43E2C29B63CD}"/>
               </a:ext>
             </a:extLst>
           </p:cNvPr>
@@ -34067,7 +35304,7 @@
     </p:spTree>
     <p:extLst>
       <p:ext uri="{BB962C8B-B14F-4D97-AF65-F5344CB8AC3E}">
-        <p14:creationId xmlns:p14="http://schemas.microsoft.com/office/powerpoint/2010/main" val="703768538"/>
+        <p14:creationId xmlns:p14="http://schemas.microsoft.com/office/powerpoint/2010/main" val="2964319661"/>
       </p:ext>
     </p:extLst>
   </p:cSld>
@@ -34099,25 +35336,32 @@
           <p:cNvPr id="2" name="Title 1">
             <a:extLst>
               <a:ext uri="{FF2B5EF4-FFF2-40B4-BE49-F238E27FC236}">
-                <a16:creationId xmlns:a16="http://schemas.microsoft.com/office/drawing/2014/main" id="{54A8FB65-E92A-9D55-F7E1-938891E8A248}"/>
-              </a:ext>
-            </a:extLst>
-          </p:cNvPr>
-          <p:cNvSpPr>
-            <a:spLocks noGrp="1"/>
-          </p:cNvSpPr>
-          <p:nvPr>
-            <p:ph type="ctrTitle"/>
-          </p:nvPr>
-        </p:nvSpPr>
-        <p:spPr/>
-        <p:txBody>
-          <a:bodyPr/>
+                <a16:creationId xmlns:a16="http://schemas.microsoft.com/office/drawing/2014/main" id="{E3055C9A-7E3C-6B76-FADF-47C0F26633B7}"/>
+              </a:ext>
+            </a:extLst>
+          </p:cNvPr>
+          <p:cNvSpPr>
+            <a:spLocks noGrp="1"/>
+          </p:cNvSpPr>
+          <p:nvPr>
+            <p:ph type="title"/>
+          </p:nvPr>
+        </p:nvSpPr>
+        <p:spPr>
+          <a:xfrm>
+            <a:off x="1255032" y="862335"/>
+            <a:ext cx="4389120" cy="5120640"/>
+          </a:xfrm>
+        </p:spPr>
+        <p:txBody>
+          <a:bodyPr anchor="ctr">
+            <a:normAutofit/>
+          </a:bodyPr>
           <a:lstStyle/>
           <a:p>
             <a:r>
               <a:rPr lang="en-SG" dirty="0"/>
-              <a:t>Objectives</a:t>
+              <a:t>objectives</a:t>
             </a:r>
           </a:p>
         </p:txBody>
@@ -34127,7 +35371,7 @@
           <p:cNvPr id="3" name="Footer Placeholder 2">
             <a:extLst>
               <a:ext uri="{FF2B5EF4-FFF2-40B4-BE49-F238E27FC236}">
-                <a16:creationId xmlns:a16="http://schemas.microsoft.com/office/drawing/2014/main" id="{DA4EFA38-3F70-0F7D-636F-755C34F032F7}"/>
+                <a16:creationId xmlns:a16="http://schemas.microsoft.com/office/drawing/2014/main" id="{29BC339A-8F50-0784-BA77-D11E3DB36706}"/>
               </a:ext>
             </a:extLst>
           </p:cNvPr>
@@ -34138,25 +35382,92 @@
             <p:ph type="ftr" sz="quarter" idx="11"/>
           </p:nvPr>
         </p:nvSpPr>
-        <p:spPr/>
-        <p:txBody>
-          <a:bodyPr/>
+        <p:spPr>
+          <a:xfrm rot="16200000">
+            <a:off x="-1005840" y="1525384"/>
+            <a:ext cx="2805405" cy="365125"/>
+          </a:xfrm>
+        </p:spPr>
+        <p:txBody>
+          <a:bodyPr anchor="ctr">
+            <a:normAutofit/>
+          </a:bodyPr>
           <a:lstStyle/>
           <a:p>
+            <a:pPr>
+              <a:spcAft>
+                <a:spcPts val="600"/>
+              </a:spcAft>
+            </a:pPr>
             <a:r>
               <a:rPr lang="en-US"/>
               <a:t>SAMPLE FOOTER TEXT</a:t>
             </a:r>
-            <a:endParaRPr lang="en-US" dirty="0"/>
-          </a:p>
-        </p:txBody>
-      </p:sp>
-      <p:sp>
-        <p:nvSpPr>
-          <p:cNvPr id="4" name="Date Placeholder 3">
-            <a:extLst>
-              <a:ext uri="{FF2B5EF4-FFF2-40B4-BE49-F238E27FC236}">
-                <a16:creationId xmlns:a16="http://schemas.microsoft.com/office/drawing/2014/main" id="{49E71233-6318-9E50-6D27-72BFB585494C}"/>
+          </a:p>
+        </p:txBody>
+      </p:sp>
+      <p:sp>
+        <p:nvSpPr>
+          <p:cNvPr id="4" name="Content Placeholder 3">
+            <a:extLst>
+              <a:ext uri="{FF2B5EF4-FFF2-40B4-BE49-F238E27FC236}">
+                <a16:creationId xmlns:a16="http://schemas.microsoft.com/office/drawing/2014/main" id="{2EA954F3-E23B-4AAA-7854-BCF9CAC0B0EB}"/>
+              </a:ext>
+            </a:extLst>
+          </p:cNvPr>
+          <p:cNvSpPr>
+            <a:spLocks noGrp="1"/>
+          </p:cNvSpPr>
+          <p:nvPr>
+            <p:ph sz="quarter" idx="13"/>
+          </p:nvPr>
+        </p:nvSpPr>
+        <p:spPr>
+          <a:xfrm>
+            <a:off x="6547100" y="816615"/>
+            <a:ext cx="4389120" cy="5212080"/>
+          </a:xfrm>
+        </p:spPr>
+        <p:txBody>
+          <a:bodyPr anchor="ctr">
+            <a:normAutofit/>
+          </a:bodyPr>
+          <a:lstStyle/>
+          <a:p>
+            <a:pPr marL="342900" indent="-342900">
+              <a:buFont typeface="+mj-lt"/>
+              <a:buAutoNum type="arabicPeriod"/>
+            </a:pPr>
+            <a:r>
+              <a:rPr lang="en-SG" dirty="0"/>
+              <a:t>Automated Analysis: Use machine learning to interpret sensor data instead of relying solely on raw readings</a:t>
+            </a:r>
+            <a:br>
+              <a:rPr lang="en-SG" dirty="0"/>
+            </a:br>
+            <a:endParaRPr lang="en-SG" dirty="0"/>
+          </a:p>
+          <a:p>
+            <a:pPr marL="342900" indent="-342900">
+              <a:buFont typeface="+mj-lt"/>
+              <a:buAutoNum type="arabicPeriod"/>
+            </a:pPr>
+            <a:r>
+              <a:rPr lang="en-SG" dirty="0"/>
+              <a:t>Early Detection: Identify abnormal environmental conditions (e.g., pollution spikes, temperature anomalies) before they escalate.</a:t>
+            </a:r>
+          </a:p>
+          <a:p>
+            <a:endParaRPr lang="en-SG" dirty="0"/>
+          </a:p>
+        </p:txBody>
+      </p:sp>
+      <p:sp>
+        <p:nvSpPr>
+          <p:cNvPr id="5" name="Date Placeholder 4">
+            <a:extLst>
+              <a:ext uri="{FF2B5EF4-FFF2-40B4-BE49-F238E27FC236}">
+                <a16:creationId xmlns:a16="http://schemas.microsoft.com/office/drawing/2014/main" id="{FB80295A-201E-4C8E-5F1C-78321DECB4E1}"/>
               </a:ext>
             </a:extLst>
           </p:cNvPr>
@@ -34167,25 +35478,42 @@
             <p:ph type="dt" sz="half" idx="10"/>
           </p:nvPr>
         </p:nvSpPr>
-        <p:spPr/>
-        <p:txBody>
-          <a:bodyPr/>
+        <p:spPr>
+          <a:xfrm rot="5400000">
+            <a:off x="10040831" y="4206240"/>
+            <a:ext cx="3494314" cy="365125"/>
+          </a:xfrm>
+        </p:spPr>
+        <p:txBody>
+          <a:bodyPr anchor="ctr">
+            <a:normAutofit/>
+          </a:bodyPr>
           <a:lstStyle/>
           <a:p>
-            <a:fld id="{010D0AB2-23BC-3043-AC30-5928E542C0CE}" type="datetime1">
+            <a:pPr>
+              <a:spcAft>
+                <a:spcPts val="600"/>
+              </a:spcAft>
+            </a:pPr>
+            <a:fld id="{927C0DEB-4AE1-EA4D-826D-E3C22802B942}" type="datetime1">
               <a:rPr lang="en-US" smtClean="0"/>
-              <a:t>7/16/2026</a:t>
+              <a:pPr>
+                <a:spcAft>
+                  <a:spcPts val="600"/>
+                </a:spcAft>
+              </a:pPr>
+              <a:t>7/20/2026</a:t>
             </a:fld>
-            <a:endParaRPr lang="en-US" dirty="0"/>
-          </a:p>
-        </p:txBody>
-      </p:sp>
-      <p:sp>
-        <p:nvSpPr>
-          <p:cNvPr id="5" name="Slide Number Placeholder 4">
-            <a:extLst>
-              <a:ext uri="{FF2B5EF4-FFF2-40B4-BE49-F238E27FC236}">
-                <a16:creationId xmlns:a16="http://schemas.microsoft.com/office/drawing/2014/main" id="{0143C50A-6321-93AA-1E3D-B2D85FEBB0A2}"/>
+            <a:endParaRPr lang="en-US"/>
+          </a:p>
+        </p:txBody>
+      </p:sp>
+      <p:sp>
+        <p:nvSpPr>
+          <p:cNvPr id="6" name="Slide Number Placeholder 5">
+            <a:extLst>
+              <a:ext uri="{FF2B5EF4-FFF2-40B4-BE49-F238E27FC236}">
+                <a16:creationId xmlns:a16="http://schemas.microsoft.com/office/drawing/2014/main" id="{DDF07D2A-8B5E-C403-63AE-D9A0F7900580}"/>
               </a:ext>
             </a:extLst>
           </p:cNvPr>
@@ -34196,24 +35524,40 @@
             <p:ph type="sldNum" sz="quarter" idx="12"/>
           </p:nvPr>
         </p:nvSpPr>
-        <p:spPr/>
-        <p:txBody>
-          <a:bodyPr/>
+        <p:spPr>
+          <a:xfrm>
+            <a:off x="11573385" y="6229552"/>
+            <a:ext cx="429207" cy="365125"/>
+          </a:xfrm>
+        </p:spPr>
+        <p:txBody>
+          <a:bodyPr anchor="ctr">
+            <a:normAutofit/>
+          </a:bodyPr>
           <a:lstStyle/>
           <a:p>
+            <a:pPr>
+              <a:spcAft>
+                <a:spcPts val="600"/>
+              </a:spcAft>
+            </a:pPr>
             <a:fld id="{CC057153-B650-4DEB-B370-79DDCFDCE934}" type="slidenum">
               <a:rPr lang="en-US" smtClean="0"/>
-              <a:pPr/>
+              <a:pPr>
+                <a:spcAft>
+                  <a:spcPts val="600"/>
+                </a:spcAft>
+              </a:pPr>
               <a:t>4</a:t>
             </a:fld>
-            <a:endParaRPr lang="en-US" dirty="0"/>
+            <a:endParaRPr lang="en-US"/>
           </a:p>
         </p:txBody>
       </p:sp>
     </p:spTree>
     <p:extLst>
       <p:ext uri="{BB962C8B-B14F-4D97-AF65-F5344CB8AC3E}">
-        <p14:creationId xmlns:p14="http://schemas.microsoft.com/office/powerpoint/2010/main" val="169991198"/>
+        <p14:creationId xmlns:p14="http://schemas.microsoft.com/office/powerpoint/2010/main" val="4086145406"/>
       </p:ext>
     </p:extLst>
   </p:cSld>
@@ -34245,122 +35589,308 @@
           <p:cNvPr id="2" name="Title 1">
             <a:extLst>
               <a:ext uri="{FF2B5EF4-FFF2-40B4-BE49-F238E27FC236}">
-                <a16:creationId xmlns:a16="http://schemas.microsoft.com/office/drawing/2014/main" id="{2DFFA181-16A4-7A9A-470B-6E45C0622691}"/>
-              </a:ext>
-            </a:extLst>
-          </p:cNvPr>
-          <p:cNvSpPr>
-            <a:spLocks noGrp="1"/>
-          </p:cNvSpPr>
-          <p:nvPr>
-            <p:ph type="ctrTitle"/>
-          </p:nvPr>
-        </p:nvSpPr>
-        <p:spPr/>
+                <a16:creationId xmlns:a16="http://schemas.microsoft.com/office/drawing/2014/main" id="{52CDCD7B-6D14-57C9-31B0-FF2C7F3508F8}"/>
+              </a:ext>
+            </a:extLst>
+          </p:cNvPr>
+          <p:cNvSpPr>
+            <a:spLocks noGrp="1"/>
+          </p:cNvSpPr>
+          <p:nvPr>
+            <p:ph type="title"/>
+          </p:nvPr>
+        </p:nvSpPr>
+        <p:spPr>
+          <a:xfrm>
+            <a:off x="1245108" y="786384"/>
+            <a:ext cx="4023360" cy="1280160"/>
+          </a:xfrm>
+        </p:spPr>
+        <p:txBody>
+          <a:bodyPr anchor="t">
+            <a:normAutofit/>
+          </a:bodyPr>
+          <a:lstStyle/>
+          <a:p>
+            <a:r>
+              <a:rPr lang="en-SG" dirty="0"/>
+              <a:t>Intended benefits</a:t>
+            </a:r>
+          </a:p>
+        </p:txBody>
+      </p:sp>
+      <p:sp>
+        <p:nvSpPr>
+          <p:cNvPr id="3" name="Footer Placeholder 2">
+            <a:extLst>
+              <a:ext uri="{FF2B5EF4-FFF2-40B4-BE49-F238E27FC236}">
+                <a16:creationId xmlns:a16="http://schemas.microsoft.com/office/drawing/2014/main" id="{1A2E9870-B90D-6107-EC7C-F94E7FF3D9B9}"/>
+              </a:ext>
+            </a:extLst>
+          </p:cNvPr>
+          <p:cNvSpPr>
+            <a:spLocks noGrp="1"/>
+          </p:cNvSpPr>
+          <p:nvPr>
+            <p:ph type="ftr" sz="quarter" idx="11"/>
+          </p:nvPr>
+        </p:nvSpPr>
+        <p:spPr>
+          <a:xfrm rot="16200000">
+            <a:off x="-1005840" y="1525384"/>
+            <a:ext cx="2805405" cy="365125"/>
+          </a:xfrm>
+        </p:spPr>
+        <p:txBody>
+          <a:bodyPr anchor="ctr">
+            <a:normAutofit/>
+          </a:bodyPr>
+          <a:lstStyle/>
+          <a:p>
+            <a:pPr>
+              <a:spcAft>
+                <a:spcPts val="600"/>
+              </a:spcAft>
+            </a:pPr>
+            <a:r>
+              <a:rPr lang="en-US"/>
+              <a:t>SAMPLE FOOTER TEXT</a:t>
+            </a:r>
+          </a:p>
+        </p:txBody>
+      </p:sp>
+      <p:sp>
+        <p:nvSpPr>
+          <p:cNvPr id="11" name="Picture Placeholder 3">
+            <a:extLst>
+              <a:ext uri="{FF2B5EF4-FFF2-40B4-BE49-F238E27FC236}">
+                <a16:creationId xmlns:a16="http://schemas.microsoft.com/office/drawing/2014/main" id="{219EA569-FBDF-BD75-F62D-BCFC76D305F0}"/>
+              </a:ext>
+            </a:extLst>
+          </p:cNvPr>
+          <p:cNvSpPr>
+            <a:spLocks noGrp="1"/>
+          </p:cNvSpPr>
+          <p:nvPr>
+            <p:ph type="pic" sz="quarter" idx="13"/>
+          </p:nvPr>
+        </p:nvSpPr>
+        <p:spPr>
+          <a:xfrm>
+            <a:off x="1220455" y="2396086"/>
+            <a:ext cx="4070907" cy="3637825"/>
+          </a:xfrm>
+        </p:spPr>
         <p:txBody>
           <a:bodyPr/>
           <a:lstStyle/>
           <a:p>
-            <a:r>
-              <a:rPr lang="en-US" dirty="0"/>
-              <a:t>DATA SOURCES</a:t>
-            </a:r>
+            <a:endParaRPr lang="en-SG"/>
+          </a:p>
+        </p:txBody>
+      </p:sp>
+      <p:sp>
+        <p:nvSpPr>
+          <p:cNvPr id="4" name="Content Placeholder 3">
+            <a:extLst>
+              <a:ext uri="{FF2B5EF4-FFF2-40B4-BE49-F238E27FC236}">
+                <a16:creationId xmlns:a16="http://schemas.microsoft.com/office/drawing/2014/main" id="{45B5A5C7-4764-9F54-D4E6-F24E40DF50E1}"/>
+              </a:ext>
+            </a:extLst>
+          </p:cNvPr>
+          <p:cNvSpPr>
+            <a:spLocks noGrp="1"/>
+          </p:cNvSpPr>
+          <p:nvPr>
+            <p:ph sz="quarter" idx="14"/>
+          </p:nvPr>
+        </p:nvSpPr>
+        <p:spPr>
+          <a:xfrm>
+            <a:off x="5669280" y="786384"/>
+            <a:ext cx="5303520" cy="5303520"/>
+          </a:xfrm>
+        </p:spPr>
+        <p:txBody>
+          <a:bodyPr>
+            <a:normAutofit/>
+          </a:bodyPr>
+          <a:lstStyle/>
+          <a:p>
+            <a:pPr marL="342900" indent="-342900">
+              <a:buFont typeface="+mj-lt"/>
+              <a:buAutoNum type="arabicPeriod"/>
+            </a:pPr>
+            <a:r>
+              <a:rPr lang="en-SG" dirty="0"/>
+              <a:t>Reduced Manual Monitoring: Eliminates the need for users to constantly track large datasets.</a:t>
+            </a:r>
+          </a:p>
+          <a:p>
+            <a:pPr marL="342900" indent="-342900">
+              <a:buFont typeface="+mj-lt"/>
+              <a:buAutoNum type="arabicPeriod"/>
+            </a:pPr>
+            <a:r>
+              <a:rPr lang="en-SG" dirty="0"/>
+              <a:t>Timely Responses: Early warnings help prevent environmental hazards or mitigate their impact.</a:t>
+            </a:r>
+          </a:p>
+          <a:p>
+            <a:pPr marL="342900" indent="-342900">
+              <a:buFont typeface="+mj-lt"/>
+              <a:buAutoNum type="arabicPeriod"/>
+            </a:pPr>
+            <a:r>
+              <a:rPr lang="en-SG" dirty="0"/>
+              <a:t>Scalability &amp; Reliability: Kubernetes ensures the system can handle growing sensor networks and data streams.</a:t>
+            </a:r>
+          </a:p>
+          <a:p>
+            <a:pPr marL="342900" indent="-342900">
+              <a:buFont typeface="+mj-lt"/>
+              <a:buAutoNum type="arabicPeriod"/>
+            </a:pPr>
+            <a:r>
+              <a:rPr lang="en-SG" dirty="0"/>
+              <a:t>Improved Accuracy: AI models can detect subtle anomalies that humans might miss.</a:t>
+            </a:r>
+          </a:p>
+          <a:p>
+            <a:pPr marL="342900" indent="-342900">
+              <a:buFont typeface="+mj-lt"/>
+              <a:buAutoNum type="arabicPeriod"/>
+            </a:pPr>
+            <a:r>
+              <a:rPr lang="en-SG" dirty="0"/>
+              <a:t>Cross-Domain Applications: Supports monitoring of air quality, water pollution, biodiversity, and climate hazards.</a:t>
+            </a:r>
+          </a:p>
+          <a:p>
+            <a:pPr marL="342900" indent="-342900">
+              <a:buFont typeface="+mj-lt"/>
+              <a:buAutoNum type="arabicPeriod"/>
+            </a:pPr>
+            <a:r>
+              <a:rPr lang="en-SG" dirty="0"/>
+              <a:t>Operational Efficiency: Microservices allow faster updates, easier maintenance, and resilience against failures.</a:t>
+            </a:r>
+          </a:p>
+          <a:p>
+            <a:pPr marL="342900" indent="-342900">
+              <a:buFont typeface="+mj-lt"/>
+              <a:buAutoNum type="arabicPeriod"/>
+            </a:pPr>
+            <a:r>
+              <a:rPr lang="en-SG" dirty="0"/>
+              <a:t>Public Accountability: Provides transparent, scientifically valid insights for policymakers and communities.</a:t>
+            </a:r>
+          </a:p>
+          <a:p>
+            <a:pPr marL="342900" indent="-342900">
+              <a:buFont typeface="+mj-lt"/>
+              <a:buAutoNum type="arabicPeriod"/>
+            </a:pPr>
             <a:endParaRPr lang="en-SG" dirty="0"/>
           </a:p>
         </p:txBody>
       </p:sp>
       <p:sp>
         <p:nvSpPr>
-          <p:cNvPr id="3" name="Footer Placeholder 2">
-            <a:extLst>
-              <a:ext uri="{FF2B5EF4-FFF2-40B4-BE49-F238E27FC236}">
-                <a16:creationId xmlns:a16="http://schemas.microsoft.com/office/drawing/2014/main" id="{EDA3C22C-23C6-3AD7-5E8D-02A5C12887BC}"/>
-              </a:ext>
-            </a:extLst>
-          </p:cNvPr>
-          <p:cNvSpPr>
-            <a:spLocks noGrp="1"/>
-          </p:cNvSpPr>
-          <p:nvPr>
-            <p:ph type="ftr" sz="quarter" idx="11"/>
-          </p:nvPr>
-        </p:nvSpPr>
-        <p:spPr/>
-        <p:txBody>
-          <a:bodyPr/>
+          <p:cNvPr id="5" name="Date Placeholder 4">
+            <a:extLst>
+              <a:ext uri="{FF2B5EF4-FFF2-40B4-BE49-F238E27FC236}">
+                <a16:creationId xmlns:a16="http://schemas.microsoft.com/office/drawing/2014/main" id="{81DD13BB-A229-9E27-75B9-43DFD4F62A99}"/>
+              </a:ext>
+            </a:extLst>
+          </p:cNvPr>
+          <p:cNvSpPr>
+            <a:spLocks noGrp="1"/>
+          </p:cNvSpPr>
+          <p:nvPr>
+            <p:ph type="dt" sz="half" idx="10"/>
+          </p:nvPr>
+        </p:nvSpPr>
+        <p:spPr>
+          <a:xfrm rot="5400000">
+            <a:off x="10040831" y="4206240"/>
+            <a:ext cx="3494314" cy="365125"/>
+          </a:xfrm>
+        </p:spPr>
+        <p:txBody>
+          <a:bodyPr anchor="ctr">
+            <a:normAutofit/>
+          </a:bodyPr>
           <a:lstStyle/>
           <a:p>
-            <a:r>
-              <a:rPr lang="en-US"/>
-              <a:t>SAMPLE FOOTER TEXT</a:t>
-            </a:r>
-            <a:endParaRPr lang="en-US" dirty="0"/>
-          </a:p>
-        </p:txBody>
-      </p:sp>
-      <p:sp>
-        <p:nvSpPr>
-          <p:cNvPr id="4" name="Date Placeholder 3">
-            <a:extLst>
-              <a:ext uri="{FF2B5EF4-FFF2-40B4-BE49-F238E27FC236}">
-                <a16:creationId xmlns:a16="http://schemas.microsoft.com/office/drawing/2014/main" id="{D6152659-5563-EC41-26B2-E75502BC1D6E}"/>
-              </a:ext>
-            </a:extLst>
-          </p:cNvPr>
-          <p:cNvSpPr>
-            <a:spLocks noGrp="1"/>
-          </p:cNvSpPr>
-          <p:nvPr>
-            <p:ph type="dt" sz="half" idx="10"/>
-          </p:nvPr>
-        </p:nvSpPr>
-        <p:spPr/>
-        <p:txBody>
-          <a:bodyPr/>
+            <a:pPr>
+              <a:spcAft>
+                <a:spcPts val="600"/>
+              </a:spcAft>
+            </a:pPr>
+            <a:fld id="{927C0DEB-4AE1-EA4D-826D-E3C22802B942}" type="datetime1">
+              <a:rPr lang="en-US" smtClean="0"/>
+              <a:pPr>
+                <a:spcAft>
+                  <a:spcPts val="600"/>
+                </a:spcAft>
+              </a:pPr>
+              <a:t>7/20/2026</a:t>
+            </a:fld>
+            <a:endParaRPr lang="en-US"/>
+          </a:p>
+        </p:txBody>
+      </p:sp>
+      <p:sp>
+        <p:nvSpPr>
+          <p:cNvPr id="6" name="Slide Number Placeholder 5">
+            <a:extLst>
+              <a:ext uri="{FF2B5EF4-FFF2-40B4-BE49-F238E27FC236}">
+                <a16:creationId xmlns:a16="http://schemas.microsoft.com/office/drawing/2014/main" id="{7DCCAA88-BC96-D2FB-AD61-20AC8FD044C9}"/>
+              </a:ext>
+            </a:extLst>
+          </p:cNvPr>
+          <p:cNvSpPr>
+            <a:spLocks noGrp="1"/>
+          </p:cNvSpPr>
+          <p:nvPr>
+            <p:ph type="sldNum" sz="quarter" idx="12"/>
+          </p:nvPr>
+        </p:nvSpPr>
+        <p:spPr>
+          <a:xfrm>
+            <a:off x="11573385" y="6229552"/>
+            <a:ext cx="429207" cy="365125"/>
+          </a:xfrm>
+        </p:spPr>
+        <p:txBody>
+          <a:bodyPr anchor="ctr">
+            <a:normAutofit/>
+          </a:bodyPr>
           <a:lstStyle/>
           <a:p>
-            <a:fld id="{53D1C53B-D534-AA48-85B3-4F5B03DDCBA8}" type="datetime1">
-              <a:rPr lang="en-US" smtClean="0"/>
-              <a:t>7/16/2026</a:t>
-            </a:fld>
-            <a:endParaRPr lang="en-US" dirty="0"/>
-          </a:p>
-        </p:txBody>
-      </p:sp>
-      <p:sp>
-        <p:nvSpPr>
-          <p:cNvPr id="5" name="Slide Number Placeholder 4">
-            <a:extLst>
-              <a:ext uri="{FF2B5EF4-FFF2-40B4-BE49-F238E27FC236}">
-                <a16:creationId xmlns:a16="http://schemas.microsoft.com/office/drawing/2014/main" id="{1460C55C-E9B4-3D3E-8062-271E6DBDB208}"/>
-              </a:ext>
-            </a:extLst>
-          </p:cNvPr>
-          <p:cNvSpPr>
-            <a:spLocks noGrp="1"/>
-          </p:cNvSpPr>
-          <p:nvPr>
-            <p:ph type="sldNum" sz="quarter" idx="12"/>
-          </p:nvPr>
-        </p:nvSpPr>
-        <p:spPr/>
-        <p:txBody>
-          <a:bodyPr/>
-          <a:lstStyle/>
-          <a:p>
+            <a:pPr>
+              <a:spcAft>
+                <a:spcPts val="600"/>
+              </a:spcAft>
+            </a:pPr>
             <a:fld id="{CC057153-B650-4DEB-B370-79DDCFDCE934}" type="slidenum">
               <a:rPr lang="en-US" smtClean="0"/>
-              <a:pPr/>
+              <a:pPr>
+                <a:spcAft>
+                  <a:spcPts val="600"/>
+                </a:spcAft>
+              </a:pPr>
               <a:t>5</a:t>
             </a:fld>
-            <a:endParaRPr lang="en-US" dirty="0"/>
+            <a:endParaRPr lang="en-US"/>
           </a:p>
         </p:txBody>
       </p:sp>
     </p:spTree>
     <p:extLst>
       <p:ext uri="{BB962C8B-B14F-4D97-AF65-F5344CB8AC3E}">
-        <p14:creationId xmlns:p14="http://schemas.microsoft.com/office/powerpoint/2010/main" val="1755218782"/>
+        <p14:creationId xmlns:p14="http://schemas.microsoft.com/office/powerpoint/2010/main" val="131214016"/>
       </p:ext>
     </p:extLst>
   </p:cSld>
@@ -34392,7 +35922,7 @@
           <p:cNvPr id="2" name="Title 1">
             <a:extLst>
               <a:ext uri="{FF2B5EF4-FFF2-40B4-BE49-F238E27FC236}">
-                <a16:creationId xmlns:a16="http://schemas.microsoft.com/office/drawing/2014/main" id="{620370BE-8DE3-A822-3581-32C470E6A7C5}"/>
+                <a16:creationId xmlns:a16="http://schemas.microsoft.com/office/drawing/2014/main" id="{2DFFA181-16A4-7A9A-470B-6E45C0622691}"/>
               </a:ext>
             </a:extLst>
           </p:cNvPr>
@@ -34403,19 +35933,14 @@
             <p:ph type="ctrTitle"/>
           </p:nvPr>
         </p:nvSpPr>
-        <p:spPr>
-          <a:xfrm>
-            <a:off x="3525329" y="1463040"/>
-            <a:ext cx="5135592" cy="3931920"/>
-          </a:xfrm>
-        </p:spPr>
+        <p:spPr/>
         <p:txBody>
           <a:bodyPr/>
           <a:lstStyle/>
           <a:p>
             <a:r>
               <a:rPr lang="en-US" dirty="0"/>
-              <a:t>SYSTEM ARCHITECTURE</a:t>
+              <a:t>DATA SOURCES</a:t>
             </a:r>
             <a:endParaRPr lang="en-SG" dirty="0"/>
           </a:p>
@@ -34426,7 +35951,7 @@
           <p:cNvPr id="3" name="Footer Placeholder 2">
             <a:extLst>
               <a:ext uri="{FF2B5EF4-FFF2-40B4-BE49-F238E27FC236}">
-                <a16:creationId xmlns:a16="http://schemas.microsoft.com/office/drawing/2014/main" id="{73069D14-BAC5-3AD0-19AE-5205566A5BF9}"/>
+                <a16:creationId xmlns:a16="http://schemas.microsoft.com/office/drawing/2014/main" id="{EDA3C22C-23C6-3AD7-5E8D-02A5C12887BC}"/>
               </a:ext>
             </a:extLst>
           </p:cNvPr>
@@ -34455,7 +35980,7 @@
           <p:cNvPr id="4" name="Date Placeholder 3">
             <a:extLst>
               <a:ext uri="{FF2B5EF4-FFF2-40B4-BE49-F238E27FC236}">
-                <a16:creationId xmlns:a16="http://schemas.microsoft.com/office/drawing/2014/main" id="{7FF7D1A3-9AE2-A2B4-0F26-15EEA9A91F03}"/>
+                <a16:creationId xmlns:a16="http://schemas.microsoft.com/office/drawing/2014/main" id="{D6152659-5563-EC41-26B2-E75502BC1D6E}"/>
               </a:ext>
             </a:extLst>
           </p:cNvPr>
@@ -34473,7 +35998,7 @@
           <a:p>
             <a:fld id="{53D1C53B-D534-AA48-85B3-4F5B03DDCBA8}" type="datetime1">
               <a:rPr lang="en-US" smtClean="0"/>
-              <a:t>7/16/2026</a:t>
+              <a:t>7/19/2026</a:t>
             </a:fld>
             <a:endParaRPr lang="en-US" dirty="0"/>
           </a:p>
@@ -34484,7 +36009,7 @@
           <p:cNvPr id="5" name="Slide Number Placeholder 4">
             <a:extLst>
               <a:ext uri="{FF2B5EF4-FFF2-40B4-BE49-F238E27FC236}">
-                <a16:creationId xmlns:a16="http://schemas.microsoft.com/office/drawing/2014/main" id="{31C00A42-6809-D208-69EF-84DEF6850371}"/>
+                <a16:creationId xmlns:a16="http://schemas.microsoft.com/office/drawing/2014/main" id="{1460C55C-E9B4-3D3E-8062-271E6DBDB208}"/>
               </a:ext>
             </a:extLst>
           </p:cNvPr>
@@ -34512,7 +36037,7 @@
     </p:spTree>
     <p:extLst>
       <p:ext uri="{BB962C8B-B14F-4D97-AF65-F5344CB8AC3E}">
-        <p14:creationId xmlns:p14="http://schemas.microsoft.com/office/powerpoint/2010/main" val="123989611"/>
+        <p14:creationId xmlns:p14="http://schemas.microsoft.com/office/powerpoint/2010/main" val="1755218782"/>
       </p:ext>
     </p:extLst>
   </p:cSld>
@@ -34544,7 +36069,7 @@
           <p:cNvPr id="2" name="Title 1">
             <a:extLst>
               <a:ext uri="{FF2B5EF4-FFF2-40B4-BE49-F238E27FC236}">
-                <a16:creationId xmlns:a16="http://schemas.microsoft.com/office/drawing/2014/main" id="{DEFF6106-7A0A-48DF-A54A-1203136FE872}"/>
+                <a16:creationId xmlns:a16="http://schemas.microsoft.com/office/drawing/2014/main" id="{620370BE-8DE3-A822-3581-32C470E6A7C5}"/>
               </a:ext>
             </a:extLst>
           </p:cNvPr>
@@ -34555,15 +36080,21 @@
             <p:ph type="ctrTitle"/>
           </p:nvPr>
         </p:nvSpPr>
-        <p:spPr/>
+        <p:spPr>
+          <a:xfrm>
+            <a:off x="3525329" y="1463040"/>
+            <a:ext cx="5135592" cy="3931920"/>
+          </a:xfrm>
+        </p:spPr>
         <p:txBody>
           <a:bodyPr/>
           <a:lstStyle/>
           <a:p>
             <a:r>
-              <a:rPr lang="en-SG" dirty="0"/>
-              <a:t>Docker</a:t>
-            </a:r>
+              <a:rPr lang="en-US" dirty="0"/>
+              <a:t>SYSTEM ARCHITECTURE</a:t>
+            </a:r>
+            <a:endParaRPr lang="en-SG" dirty="0"/>
           </a:p>
         </p:txBody>
       </p:sp>
@@ -34572,7 +36103,7 @@
           <p:cNvPr id="3" name="Footer Placeholder 2">
             <a:extLst>
               <a:ext uri="{FF2B5EF4-FFF2-40B4-BE49-F238E27FC236}">
-                <a16:creationId xmlns:a16="http://schemas.microsoft.com/office/drawing/2014/main" id="{B2BCAD1A-CFBC-A349-DD67-7349B93D3720}"/>
+                <a16:creationId xmlns:a16="http://schemas.microsoft.com/office/drawing/2014/main" id="{73069D14-BAC5-3AD0-19AE-5205566A5BF9}"/>
               </a:ext>
             </a:extLst>
           </p:cNvPr>
@@ -34601,7 +36132,7 @@
           <p:cNvPr id="4" name="Date Placeholder 3">
             <a:extLst>
               <a:ext uri="{FF2B5EF4-FFF2-40B4-BE49-F238E27FC236}">
-                <a16:creationId xmlns:a16="http://schemas.microsoft.com/office/drawing/2014/main" id="{3BA4730D-F0FF-B752-323B-BE0157CA02F8}"/>
+                <a16:creationId xmlns:a16="http://schemas.microsoft.com/office/drawing/2014/main" id="{7FF7D1A3-9AE2-A2B4-0F26-15EEA9A91F03}"/>
               </a:ext>
             </a:extLst>
           </p:cNvPr>
@@ -34617,9 +36148,9 @@
           <a:bodyPr/>
           <a:lstStyle/>
           <a:p>
-            <a:fld id="{010D0AB2-23BC-3043-AC30-5928E542C0CE}" type="datetime1">
+            <a:fld id="{53D1C53B-D534-AA48-85B3-4F5B03DDCBA8}" type="datetime1">
               <a:rPr lang="en-US" smtClean="0"/>
-              <a:t>7/16/2026</a:t>
+              <a:t>7/19/2026</a:t>
             </a:fld>
             <a:endParaRPr lang="en-US" dirty="0"/>
           </a:p>
@@ -34630,7 +36161,7 @@
           <p:cNvPr id="5" name="Slide Number Placeholder 4">
             <a:extLst>
               <a:ext uri="{FF2B5EF4-FFF2-40B4-BE49-F238E27FC236}">
-                <a16:creationId xmlns:a16="http://schemas.microsoft.com/office/drawing/2014/main" id="{49E7DB59-C4F8-CDE1-61A4-49E42A74492A}"/>
+                <a16:creationId xmlns:a16="http://schemas.microsoft.com/office/drawing/2014/main" id="{31C00A42-6809-D208-69EF-84DEF6850371}"/>
               </a:ext>
             </a:extLst>
           </p:cNvPr>
@@ -34658,7 +36189,7 @@
     </p:spTree>
     <p:extLst>
       <p:ext uri="{BB962C8B-B14F-4D97-AF65-F5344CB8AC3E}">
-        <p14:creationId xmlns:p14="http://schemas.microsoft.com/office/powerpoint/2010/main" val="1662138044"/>
+        <p14:creationId xmlns:p14="http://schemas.microsoft.com/office/powerpoint/2010/main" val="123989611"/>
       </p:ext>
     </p:extLst>
   </p:cSld>
@@ -34673,7 +36204,13 @@
   <p:cSld>
     <p:spTree>
       <p:nvGrpSpPr>
-        <p:cNvPr id="1" name=""/>
+        <p:cNvPr id="1" name="">
+          <a:extLst>
+            <a:ext uri="{FF2B5EF4-FFF2-40B4-BE49-F238E27FC236}">
+              <a16:creationId xmlns:a16="http://schemas.microsoft.com/office/drawing/2014/main" id="{FC24A24B-A787-5443-C639-97DBBA59FD9C}"/>
+            </a:ext>
+          </a:extLst>
+        </p:cNvPr>
         <p:cNvGrpSpPr/>
         <p:nvPr/>
       </p:nvGrpSpPr>
@@ -34690,15 +36227,15 @@
           <p:cNvPr id="2" name="Title 1">
             <a:extLst>
               <a:ext uri="{FF2B5EF4-FFF2-40B4-BE49-F238E27FC236}">
-                <a16:creationId xmlns:a16="http://schemas.microsoft.com/office/drawing/2014/main" id="{F27EEF88-486E-52FF-3AF3-C50D322E6819}"/>
-              </a:ext>
-            </a:extLst>
-          </p:cNvPr>
-          <p:cNvSpPr>
-            <a:spLocks noGrp="1"/>
-          </p:cNvSpPr>
-          <p:nvPr>
-            <p:ph type="ctrTitle"/>
+                <a16:creationId xmlns:a16="http://schemas.microsoft.com/office/drawing/2014/main" id="{E24BDE2F-EF30-1E71-B29C-168161ABE53C}"/>
+              </a:ext>
+            </a:extLst>
+          </p:cNvPr>
+          <p:cNvSpPr>
+            <a:spLocks noGrp="1"/>
+          </p:cNvSpPr>
+          <p:nvPr>
+            <p:ph type="title"/>
           </p:nvPr>
         </p:nvSpPr>
         <p:spPr/>
@@ -34708,7 +36245,7 @@
           <a:p>
             <a:r>
               <a:rPr lang="en-SG" dirty="0"/>
-              <a:t>KUBERNATES</a:t>
+              <a:t>Diagram</a:t>
             </a:r>
           </a:p>
         </p:txBody>
@@ -34718,7 +36255,7 @@
           <p:cNvPr id="3" name="Footer Placeholder 2">
             <a:extLst>
               <a:ext uri="{FF2B5EF4-FFF2-40B4-BE49-F238E27FC236}">
-                <a16:creationId xmlns:a16="http://schemas.microsoft.com/office/drawing/2014/main" id="{D2F62700-C8BC-371F-E4A0-146018195E63}"/>
+                <a16:creationId xmlns:a16="http://schemas.microsoft.com/office/drawing/2014/main" id="{7EACCE7B-2684-148E-BB6E-33DA03210D84}"/>
               </a:ext>
             </a:extLst>
           </p:cNvPr>
@@ -34744,10 +36281,10 @@
       </p:sp>
       <p:sp>
         <p:nvSpPr>
-          <p:cNvPr id="4" name="Date Placeholder 3">
-            <a:extLst>
-              <a:ext uri="{FF2B5EF4-FFF2-40B4-BE49-F238E27FC236}">
-                <a16:creationId xmlns:a16="http://schemas.microsoft.com/office/drawing/2014/main" id="{97386FD1-37AC-99FB-025F-EC72261EF737}"/>
+          <p:cNvPr id="5" name="Date Placeholder 4">
+            <a:extLst>
+              <a:ext uri="{FF2B5EF4-FFF2-40B4-BE49-F238E27FC236}">
+                <a16:creationId xmlns:a16="http://schemas.microsoft.com/office/drawing/2014/main" id="{EDD1A501-7E82-3D8C-AB0A-B3B0E72B9A3C}"/>
               </a:ext>
             </a:extLst>
           </p:cNvPr>
@@ -34763,9 +36300,9 @@
           <a:bodyPr/>
           <a:lstStyle/>
           <a:p>
-            <a:fld id="{010D0AB2-23BC-3043-AC30-5928E542C0CE}" type="datetime1">
+            <a:fld id="{927C0DEB-4AE1-EA4D-826D-E3C22802B942}" type="datetime1">
               <a:rPr lang="en-US" smtClean="0"/>
-              <a:t>7/16/2026</a:t>
+              <a:t>7/19/2026</a:t>
             </a:fld>
             <a:endParaRPr lang="en-US" dirty="0"/>
           </a:p>
@@ -34773,10 +36310,10 @@
       </p:sp>
       <p:sp>
         <p:nvSpPr>
-          <p:cNvPr id="5" name="Slide Number Placeholder 4">
-            <a:extLst>
-              <a:ext uri="{FF2B5EF4-FFF2-40B4-BE49-F238E27FC236}">
-                <a16:creationId xmlns:a16="http://schemas.microsoft.com/office/drawing/2014/main" id="{D08F73AA-8FFF-4571-C0CF-0F21F722B187}"/>
+          <p:cNvPr id="6" name="Slide Number Placeholder 5">
+            <a:extLst>
+              <a:ext uri="{FF2B5EF4-FFF2-40B4-BE49-F238E27FC236}">
+                <a16:creationId xmlns:a16="http://schemas.microsoft.com/office/drawing/2014/main" id="{6CFB3B95-33D1-EDB4-AD85-91D9821199BB}"/>
               </a:ext>
             </a:extLst>
           </p:cNvPr>
@@ -34801,10 +36338,844 @@
           </a:p>
         </p:txBody>
       </p:sp>
+      <p:sp>
+        <p:nvSpPr>
+          <p:cNvPr id="7" name="Rectangle 6">
+            <a:extLst>
+              <a:ext uri="{FF2B5EF4-FFF2-40B4-BE49-F238E27FC236}">
+                <a16:creationId xmlns:a16="http://schemas.microsoft.com/office/drawing/2014/main" id="{C49624F9-6982-B0C4-38E1-4DF939FAC8AC}"/>
+              </a:ext>
+            </a:extLst>
+          </p:cNvPr>
+          <p:cNvSpPr/>
+          <p:nvPr/>
+        </p:nvSpPr>
+        <p:spPr>
+          <a:xfrm>
+            <a:off x="1066800" y="1736785"/>
+            <a:ext cx="2007080" cy="971910"/>
+          </a:xfrm>
+          <a:prstGeom prst="rect">
+            <a:avLst/>
+          </a:prstGeom>
+        </p:spPr>
+        <p:style>
+          <a:lnRef idx="2">
+            <a:schemeClr val="accent2">
+              <a:shade val="15000"/>
+            </a:schemeClr>
+          </a:lnRef>
+          <a:fillRef idx="1">
+            <a:schemeClr val="accent2"/>
+          </a:fillRef>
+          <a:effectRef idx="0">
+            <a:schemeClr val="accent2"/>
+          </a:effectRef>
+          <a:fontRef idx="minor">
+            <a:schemeClr val="lt1"/>
+          </a:fontRef>
+        </p:style>
+        <p:txBody>
+          <a:bodyPr rtlCol="0" anchor="ctr"/>
+          <a:lstStyle/>
+          <a:p>
+            <a:pPr algn="ctr"/>
+            <a:r>
+              <a:rPr lang="en-SG" b="1" dirty="0"/>
+              <a:t>FRONTEND DASHBOARD</a:t>
+            </a:r>
+          </a:p>
+        </p:txBody>
+      </p:sp>
+      <p:sp>
+        <p:nvSpPr>
+          <p:cNvPr id="9" name="Rectangle 8">
+            <a:extLst>
+              <a:ext uri="{FF2B5EF4-FFF2-40B4-BE49-F238E27FC236}">
+                <a16:creationId xmlns:a16="http://schemas.microsoft.com/office/drawing/2014/main" id="{CFC3B6A0-E473-03E1-ECE2-795F3E7548F0}"/>
+              </a:ext>
+            </a:extLst>
+          </p:cNvPr>
+          <p:cNvSpPr/>
+          <p:nvPr/>
+        </p:nvSpPr>
+        <p:spPr>
+          <a:xfrm>
+            <a:off x="4317452" y="1736785"/>
+            <a:ext cx="2007080" cy="971910"/>
+          </a:xfrm>
+          <a:prstGeom prst="rect">
+            <a:avLst/>
+          </a:prstGeom>
+        </p:spPr>
+        <p:style>
+          <a:lnRef idx="2">
+            <a:schemeClr val="accent2">
+              <a:shade val="15000"/>
+            </a:schemeClr>
+          </a:lnRef>
+          <a:fillRef idx="1">
+            <a:schemeClr val="accent2"/>
+          </a:fillRef>
+          <a:effectRef idx="0">
+            <a:schemeClr val="accent2"/>
+          </a:effectRef>
+          <a:fontRef idx="minor">
+            <a:schemeClr val="lt1"/>
+          </a:fontRef>
+        </p:style>
+        <p:txBody>
+          <a:bodyPr rtlCol="0" anchor="ctr"/>
+          <a:lstStyle/>
+          <a:p>
+            <a:pPr algn="ctr"/>
+            <a:r>
+              <a:rPr lang="en-SG" b="1" dirty="0"/>
+              <a:t>REST API REQUEST</a:t>
+            </a:r>
+          </a:p>
+        </p:txBody>
+      </p:sp>
+      <p:sp>
+        <p:nvSpPr>
+          <p:cNvPr id="11" name="Rectangle 10">
+            <a:extLst>
+              <a:ext uri="{FF2B5EF4-FFF2-40B4-BE49-F238E27FC236}">
+                <a16:creationId xmlns:a16="http://schemas.microsoft.com/office/drawing/2014/main" id="{B9E4D4B0-BE1C-030E-B0D2-192719231248}"/>
+              </a:ext>
+            </a:extLst>
+          </p:cNvPr>
+          <p:cNvSpPr/>
+          <p:nvPr/>
+        </p:nvSpPr>
+        <p:spPr>
+          <a:xfrm>
+            <a:off x="7529089" y="1736785"/>
+            <a:ext cx="2007080" cy="971910"/>
+          </a:xfrm>
+          <a:prstGeom prst="rect">
+            <a:avLst/>
+          </a:prstGeom>
+        </p:spPr>
+        <p:style>
+          <a:lnRef idx="2">
+            <a:schemeClr val="accent2">
+              <a:shade val="15000"/>
+            </a:schemeClr>
+          </a:lnRef>
+          <a:fillRef idx="1">
+            <a:schemeClr val="accent2"/>
+          </a:fillRef>
+          <a:effectRef idx="0">
+            <a:schemeClr val="accent2"/>
+          </a:effectRef>
+          <a:fontRef idx="minor">
+            <a:schemeClr val="lt1"/>
+          </a:fontRef>
+        </p:style>
+        <p:txBody>
+          <a:bodyPr rtlCol="0" anchor="ctr"/>
+          <a:lstStyle/>
+          <a:p>
+            <a:pPr algn="ctr"/>
+            <a:r>
+              <a:rPr lang="en-SG" b="1" dirty="0"/>
+              <a:t>BACKEND API </a:t>
+            </a:r>
+          </a:p>
+        </p:txBody>
+      </p:sp>
+      <p:sp>
+        <p:nvSpPr>
+          <p:cNvPr id="13" name="Rectangle 12">
+            <a:extLst>
+              <a:ext uri="{FF2B5EF4-FFF2-40B4-BE49-F238E27FC236}">
+                <a16:creationId xmlns:a16="http://schemas.microsoft.com/office/drawing/2014/main" id="{D44F0444-B1A7-0403-96E1-13A8F5C1EC4D}"/>
+              </a:ext>
+            </a:extLst>
+          </p:cNvPr>
+          <p:cNvSpPr/>
+          <p:nvPr/>
+        </p:nvSpPr>
+        <p:spPr>
+          <a:xfrm>
+            <a:off x="7529089" y="3274249"/>
+            <a:ext cx="2007080" cy="971910"/>
+          </a:xfrm>
+          <a:prstGeom prst="rect">
+            <a:avLst/>
+          </a:prstGeom>
+        </p:spPr>
+        <p:style>
+          <a:lnRef idx="2">
+            <a:schemeClr val="accent2">
+              <a:shade val="15000"/>
+            </a:schemeClr>
+          </a:lnRef>
+          <a:fillRef idx="1">
+            <a:schemeClr val="accent2"/>
+          </a:fillRef>
+          <a:effectRef idx="0">
+            <a:schemeClr val="accent2"/>
+          </a:effectRef>
+          <a:fontRef idx="minor">
+            <a:schemeClr val="lt1"/>
+          </a:fontRef>
+        </p:style>
+        <p:txBody>
+          <a:bodyPr rtlCol="0" anchor="ctr"/>
+          <a:lstStyle/>
+          <a:p>
+            <a:pPr algn="ctr"/>
+            <a:r>
+              <a:rPr lang="en-SG" b="1" dirty="0"/>
+              <a:t>DATABASE</a:t>
+            </a:r>
+          </a:p>
+        </p:txBody>
+      </p:sp>
+      <p:sp>
+        <p:nvSpPr>
+          <p:cNvPr id="15" name="Rectangle 14">
+            <a:extLst>
+              <a:ext uri="{FF2B5EF4-FFF2-40B4-BE49-F238E27FC236}">
+                <a16:creationId xmlns:a16="http://schemas.microsoft.com/office/drawing/2014/main" id="{57DE8DC9-11C5-303A-41EB-9DF7D09F57AB}"/>
+              </a:ext>
+            </a:extLst>
+          </p:cNvPr>
+          <p:cNvSpPr/>
+          <p:nvPr/>
+        </p:nvSpPr>
+        <p:spPr>
+          <a:xfrm>
+            <a:off x="4329033" y="3274249"/>
+            <a:ext cx="2007080" cy="971910"/>
+          </a:xfrm>
+          <a:prstGeom prst="rect">
+            <a:avLst/>
+          </a:prstGeom>
+        </p:spPr>
+        <p:style>
+          <a:lnRef idx="2">
+            <a:schemeClr val="accent2">
+              <a:shade val="15000"/>
+            </a:schemeClr>
+          </a:lnRef>
+          <a:fillRef idx="1">
+            <a:schemeClr val="accent2"/>
+          </a:fillRef>
+          <a:effectRef idx="0">
+            <a:schemeClr val="accent2"/>
+          </a:effectRef>
+          <a:fontRef idx="minor">
+            <a:schemeClr val="lt1"/>
+          </a:fontRef>
+        </p:style>
+        <p:txBody>
+          <a:bodyPr rtlCol="0" anchor="ctr"/>
+          <a:lstStyle/>
+          <a:p>
+            <a:pPr algn="ctr"/>
+            <a:r>
+              <a:rPr lang="en-SG" b="1" dirty="0"/>
+              <a:t>MACHINE LEARNING</a:t>
+            </a:r>
+          </a:p>
+        </p:txBody>
+      </p:sp>
+      <p:sp>
+        <p:nvSpPr>
+          <p:cNvPr id="17" name="Rectangle 16">
+            <a:extLst>
+              <a:ext uri="{FF2B5EF4-FFF2-40B4-BE49-F238E27FC236}">
+                <a16:creationId xmlns:a16="http://schemas.microsoft.com/office/drawing/2014/main" id="{37083AA4-F232-F3BF-862F-4B730881E4AD}"/>
+              </a:ext>
+            </a:extLst>
+          </p:cNvPr>
+          <p:cNvSpPr/>
+          <p:nvPr/>
+        </p:nvSpPr>
+        <p:spPr>
+          <a:xfrm>
+            <a:off x="1043638" y="3274249"/>
+            <a:ext cx="2007080" cy="971910"/>
+          </a:xfrm>
+          <a:prstGeom prst="rect">
+            <a:avLst/>
+          </a:prstGeom>
+        </p:spPr>
+        <p:style>
+          <a:lnRef idx="2">
+            <a:schemeClr val="accent2">
+              <a:shade val="15000"/>
+            </a:schemeClr>
+          </a:lnRef>
+          <a:fillRef idx="1">
+            <a:schemeClr val="accent2"/>
+          </a:fillRef>
+          <a:effectRef idx="0">
+            <a:schemeClr val="accent2"/>
+          </a:effectRef>
+          <a:fontRef idx="minor">
+            <a:schemeClr val="lt1"/>
+          </a:fontRef>
+        </p:style>
+        <p:txBody>
+          <a:bodyPr rtlCol="0" anchor="ctr"/>
+          <a:lstStyle/>
+          <a:p>
+            <a:pPr algn="ctr"/>
+            <a:r>
+              <a:rPr lang="en-SG" b="1" dirty="0"/>
+              <a:t>DATABASE</a:t>
+            </a:r>
+          </a:p>
+        </p:txBody>
+      </p:sp>
+      <p:sp>
+        <p:nvSpPr>
+          <p:cNvPr id="19" name="Rectangle 18">
+            <a:extLst>
+              <a:ext uri="{FF2B5EF4-FFF2-40B4-BE49-F238E27FC236}">
+                <a16:creationId xmlns:a16="http://schemas.microsoft.com/office/drawing/2014/main" id="{82CCFD25-8EE3-FEE1-4035-D3DE5F08BEBB}"/>
+              </a:ext>
+            </a:extLst>
+          </p:cNvPr>
+          <p:cNvSpPr/>
+          <p:nvPr/>
+        </p:nvSpPr>
+        <p:spPr>
+          <a:xfrm>
+            <a:off x="1043638" y="5029116"/>
+            <a:ext cx="2007080" cy="971910"/>
+          </a:xfrm>
+          <a:prstGeom prst="rect">
+            <a:avLst/>
+          </a:prstGeom>
+        </p:spPr>
+        <p:style>
+          <a:lnRef idx="2">
+            <a:schemeClr val="accent2">
+              <a:shade val="15000"/>
+            </a:schemeClr>
+          </a:lnRef>
+          <a:fillRef idx="1">
+            <a:schemeClr val="accent2"/>
+          </a:fillRef>
+          <a:effectRef idx="0">
+            <a:schemeClr val="accent2"/>
+          </a:effectRef>
+          <a:fontRef idx="minor">
+            <a:schemeClr val="lt1"/>
+          </a:fontRef>
+        </p:style>
+        <p:txBody>
+          <a:bodyPr rtlCol="0" anchor="ctr"/>
+          <a:lstStyle/>
+          <a:p>
+            <a:pPr algn="ctr"/>
+            <a:r>
+              <a:rPr lang="en-SG" b="1" dirty="0"/>
+              <a:t>BACKEND API </a:t>
+            </a:r>
+          </a:p>
+        </p:txBody>
+      </p:sp>
+      <p:sp>
+        <p:nvSpPr>
+          <p:cNvPr id="21" name="Rectangle 20">
+            <a:extLst>
+              <a:ext uri="{FF2B5EF4-FFF2-40B4-BE49-F238E27FC236}">
+                <a16:creationId xmlns:a16="http://schemas.microsoft.com/office/drawing/2014/main" id="{AFC60817-335B-FB4E-DB77-7D0AA77F5DC1}"/>
+              </a:ext>
+            </a:extLst>
+          </p:cNvPr>
+          <p:cNvSpPr/>
+          <p:nvPr/>
+        </p:nvSpPr>
+        <p:spPr>
+          <a:xfrm>
+            <a:off x="4329033" y="5029116"/>
+            <a:ext cx="2007080" cy="971910"/>
+          </a:xfrm>
+          <a:prstGeom prst="rect">
+            <a:avLst/>
+          </a:prstGeom>
+        </p:spPr>
+        <p:style>
+          <a:lnRef idx="2">
+            <a:schemeClr val="accent2">
+              <a:shade val="15000"/>
+            </a:schemeClr>
+          </a:lnRef>
+          <a:fillRef idx="1">
+            <a:schemeClr val="accent2"/>
+          </a:fillRef>
+          <a:effectRef idx="0">
+            <a:schemeClr val="accent2"/>
+          </a:effectRef>
+          <a:fontRef idx="minor">
+            <a:schemeClr val="lt1"/>
+          </a:fontRef>
+        </p:style>
+        <p:txBody>
+          <a:bodyPr rtlCol="0" anchor="ctr"/>
+          <a:lstStyle/>
+          <a:p>
+            <a:pPr algn="ctr"/>
+            <a:r>
+              <a:rPr lang="en-SG" b="1" dirty="0"/>
+              <a:t>FRONTEND DASHBOARD</a:t>
+            </a:r>
+          </a:p>
+        </p:txBody>
+      </p:sp>
+      <p:cxnSp>
+        <p:nvCxnSpPr>
+          <p:cNvPr id="23" name="Straight Arrow Connector 22">
+            <a:extLst>
+              <a:ext uri="{FF2B5EF4-FFF2-40B4-BE49-F238E27FC236}">
+                <a16:creationId xmlns:a16="http://schemas.microsoft.com/office/drawing/2014/main" id="{1E18CB8C-27B7-999F-0D60-9C0CB9D43C61}"/>
+              </a:ext>
+            </a:extLst>
+          </p:cNvPr>
+          <p:cNvCxnSpPr>
+            <a:stCxn id="7" idx="3"/>
+            <a:endCxn id="9" idx="1"/>
+          </p:cNvCxnSpPr>
+          <p:nvPr/>
+        </p:nvCxnSpPr>
+        <p:spPr>
+          <a:xfrm>
+            <a:off x="3073880" y="2222740"/>
+            <a:ext cx="1243572" cy="0"/>
+          </a:xfrm>
+          <a:prstGeom prst="straightConnector1">
+            <a:avLst/>
+          </a:prstGeom>
+          <a:ln w="19050" cap="flat" cmpd="sng" algn="ctr">
+            <a:solidFill>
+              <a:schemeClr val="accent2"/>
+            </a:solidFill>
+            <a:prstDash val="solid"/>
+            <a:round/>
+            <a:headEnd type="none" w="med" len="med"/>
+            <a:tailEnd type="arrow" w="med" len="med"/>
+          </a:ln>
+        </p:spPr>
+        <p:style>
+          <a:lnRef idx="0">
+            <a:scrgbClr r="0" g="0" b="0"/>
+          </a:lnRef>
+          <a:fillRef idx="0">
+            <a:scrgbClr r="0" g="0" b="0"/>
+          </a:fillRef>
+          <a:effectRef idx="0">
+            <a:scrgbClr r="0" g="0" b="0"/>
+          </a:effectRef>
+          <a:fontRef idx="minor">
+            <a:schemeClr val="tx1"/>
+          </a:fontRef>
+        </p:style>
+      </p:cxnSp>
+      <p:cxnSp>
+        <p:nvCxnSpPr>
+          <p:cNvPr id="25" name="Straight Arrow Connector 24">
+            <a:extLst>
+              <a:ext uri="{FF2B5EF4-FFF2-40B4-BE49-F238E27FC236}">
+                <a16:creationId xmlns:a16="http://schemas.microsoft.com/office/drawing/2014/main" id="{C8605026-19AE-2552-B82E-278DBC7642BB}"/>
+              </a:ext>
+            </a:extLst>
+          </p:cNvPr>
+          <p:cNvCxnSpPr>
+            <a:cxnSpLocks/>
+            <a:stCxn id="9" idx="3"/>
+            <a:endCxn id="11" idx="1"/>
+          </p:cNvCxnSpPr>
+          <p:nvPr/>
+        </p:nvCxnSpPr>
+        <p:spPr>
+          <a:xfrm>
+            <a:off x="6324532" y="2222740"/>
+            <a:ext cx="1204557" cy="0"/>
+          </a:xfrm>
+          <a:prstGeom prst="straightConnector1">
+            <a:avLst/>
+          </a:prstGeom>
+          <a:ln w="19050" cap="flat" cmpd="sng" algn="ctr">
+            <a:solidFill>
+              <a:schemeClr val="accent2"/>
+            </a:solidFill>
+            <a:prstDash val="solid"/>
+            <a:round/>
+            <a:headEnd type="none" w="med" len="med"/>
+            <a:tailEnd type="arrow" w="med" len="med"/>
+          </a:ln>
+        </p:spPr>
+        <p:style>
+          <a:lnRef idx="0">
+            <a:scrgbClr r="0" g="0" b="0"/>
+          </a:lnRef>
+          <a:fillRef idx="0">
+            <a:scrgbClr r="0" g="0" b="0"/>
+          </a:fillRef>
+          <a:effectRef idx="0">
+            <a:scrgbClr r="0" g="0" b="0"/>
+          </a:effectRef>
+          <a:fontRef idx="minor">
+            <a:schemeClr val="tx1"/>
+          </a:fontRef>
+        </p:style>
+      </p:cxnSp>
+      <p:cxnSp>
+        <p:nvCxnSpPr>
+          <p:cNvPr id="29" name="Straight Arrow Connector 28">
+            <a:extLst>
+              <a:ext uri="{FF2B5EF4-FFF2-40B4-BE49-F238E27FC236}">
+                <a16:creationId xmlns:a16="http://schemas.microsoft.com/office/drawing/2014/main" id="{9FB595AA-95C4-8DD5-6CAB-64CC4EF25F7E}"/>
+              </a:ext>
+            </a:extLst>
+          </p:cNvPr>
+          <p:cNvCxnSpPr>
+            <a:stCxn id="11" idx="2"/>
+            <a:endCxn id="13" idx="0"/>
+          </p:cNvCxnSpPr>
+          <p:nvPr/>
+        </p:nvCxnSpPr>
+        <p:spPr>
+          <a:xfrm>
+            <a:off x="8532629" y="2708695"/>
+            <a:ext cx="0" cy="565554"/>
+          </a:xfrm>
+          <a:prstGeom prst="straightConnector1">
+            <a:avLst/>
+          </a:prstGeom>
+          <a:ln w="19050" cap="flat" cmpd="sng" algn="ctr">
+            <a:solidFill>
+              <a:schemeClr val="accent2"/>
+            </a:solidFill>
+            <a:prstDash val="solid"/>
+            <a:round/>
+            <a:headEnd type="none" w="med" len="med"/>
+            <a:tailEnd type="arrow" w="med" len="med"/>
+          </a:ln>
+        </p:spPr>
+        <p:style>
+          <a:lnRef idx="0">
+            <a:scrgbClr r="0" g="0" b="0"/>
+          </a:lnRef>
+          <a:fillRef idx="0">
+            <a:scrgbClr r="0" g="0" b="0"/>
+          </a:fillRef>
+          <a:effectRef idx="0">
+            <a:scrgbClr r="0" g="0" b="0"/>
+          </a:effectRef>
+          <a:fontRef idx="minor">
+            <a:schemeClr val="tx1"/>
+          </a:fontRef>
+        </p:style>
+      </p:cxnSp>
+      <p:cxnSp>
+        <p:nvCxnSpPr>
+          <p:cNvPr id="32" name="Straight Arrow Connector 31">
+            <a:extLst>
+              <a:ext uri="{FF2B5EF4-FFF2-40B4-BE49-F238E27FC236}">
+                <a16:creationId xmlns:a16="http://schemas.microsoft.com/office/drawing/2014/main" id="{A769D896-C4CE-B2AF-5303-59C4706AAF52}"/>
+              </a:ext>
+            </a:extLst>
+          </p:cNvPr>
+          <p:cNvCxnSpPr>
+            <a:stCxn id="13" idx="1"/>
+            <a:endCxn id="15" idx="3"/>
+          </p:cNvCxnSpPr>
+          <p:nvPr/>
+        </p:nvCxnSpPr>
+        <p:spPr>
+          <a:xfrm flipH="1">
+            <a:off x="6336113" y="3760204"/>
+            <a:ext cx="1192976" cy="0"/>
+          </a:xfrm>
+          <a:prstGeom prst="straightConnector1">
+            <a:avLst/>
+          </a:prstGeom>
+          <a:ln w="19050" cap="flat" cmpd="sng" algn="ctr">
+            <a:solidFill>
+              <a:schemeClr val="accent2"/>
+            </a:solidFill>
+            <a:prstDash val="solid"/>
+            <a:round/>
+            <a:headEnd type="none" w="med" len="med"/>
+            <a:tailEnd type="arrow" w="med" len="med"/>
+          </a:ln>
+        </p:spPr>
+        <p:style>
+          <a:lnRef idx="0">
+            <a:scrgbClr r="0" g="0" b="0"/>
+          </a:lnRef>
+          <a:fillRef idx="0">
+            <a:scrgbClr r="0" g="0" b="0"/>
+          </a:fillRef>
+          <a:effectRef idx="0">
+            <a:scrgbClr r="0" g="0" b="0"/>
+          </a:effectRef>
+          <a:fontRef idx="minor">
+            <a:schemeClr val="tx1"/>
+          </a:fontRef>
+        </p:style>
+      </p:cxnSp>
+      <p:cxnSp>
+        <p:nvCxnSpPr>
+          <p:cNvPr id="34" name="Straight Arrow Connector 33">
+            <a:extLst>
+              <a:ext uri="{FF2B5EF4-FFF2-40B4-BE49-F238E27FC236}">
+                <a16:creationId xmlns:a16="http://schemas.microsoft.com/office/drawing/2014/main" id="{82CCA0C9-4E67-06C8-5F06-97A1EBA73AF7}"/>
+              </a:ext>
+            </a:extLst>
+          </p:cNvPr>
+          <p:cNvCxnSpPr>
+            <a:stCxn id="15" idx="1"/>
+            <a:endCxn id="17" idx="3"/>
+          </p:cNvCxnSpPr>
+          <p:nvPr/>
+        </p:nvCxnSpPr>
+        <p:spPr>
+          <a:xfrm flipH="1">
+            <a:off x="3050718" y="3760204"/>
+            <a:ext cx="1278315" cy="0"/>
+          </a:xfrm>
+          <a:prstGeom prst="straightConnector1">
+            <a:avLst/>
+          </a:prstGeom>
+          <a:ln w="19050" cap="flat" cmpd="sng" algn="ctr">
+            <a:solidFill>
+              <a:schemeClr val="accent2"/>
+            </a:solidFill>
+            <a:prstDash val="solid"/>
+            <a:round/>
+            <a:headEnd type="none" w="med" len="med"/>
+            <a:tailEnd type="arrow" w="med" len="med"/>
+          </a:ln>
+        </p:spPr>
+        <p:style>
+          <a:lnRef idx="0">
+            <a:scrgbClr r="0" g="0" b="0"/>
+          </a:lnRef>
+          <a:fillRef idx="0">
+            <a:scrgbClr r="0" g="0" b="0"/>
+          </a:fillRef>
+          <a:effectRef idx="0">
+            <a:scrgbClr r="0" g="0" b="0"/>
+          </a:effectRef>
+          <a:fontRef idx="minor">
+            <a:schemeClr val="tx1"/>
+          </a:fontRef>
+        </p:style>
+      </p:cxnSp>
+      <p:cxnSp>
+        <p:nvCxnSpPr>
+          <p:cNvPr id="36" name="Straight Arrow Connector 35">
+            <a:extLst>
+              <a:ext uri="{FF2B5EF4-FFF2-40B4-BE49-F238E27FC236}">
+                <a16:creationId xmlns:a16="http://schemas.microsoft.com/office/drawing/2014/main" id="{B7C09E6D-8179-6929-B8C7-3B8DF8919F1F}"/>
+              </a:ext>
+            </a:extLst>
+          </p:cNvPr>
+          <p:cNvCxnSpPr>
+            <a:stCxn id="17" idx="2"/>
+            <a:endCxn id="19" idx="0"/>
+          </p:cNvCxnSpPr>
+          <p:nvPr/>
+        </p:nvCxnSpPr>
+        <p:spPr>
+          <a:xfrm>
+            <a:off x="2047178" y="4246159"/>
+            <a:ext cx="0" cy="782957"/>
+          </a:xfrm>
+          <a:prstGeom prst="straightConnector1">
+            <a:avLst/>
+          </a:prstGeom>
+          <a:ln w="19050" cap="flat" cmpd="sng" algn="ctr">
+            <a:solidFill>
+              <a:schemeClr val="accent2"/>
+            </a:solidFill>
+            <a:prstDash val="solid"/>
+            <a:round/>
+            <a:headEnd type="none" w="med" len="med"/>
+            <a:tailEnd type="arrow" w="med" len="med"/>
+          </a:ln>
+        </p:spPr>
+        <p:style>
+          <a:lnRef idx="0">
+            <a:scrgbClr r="0" g="0" b="0"/>
+          </a:lnRef>
+          <a:fillRef idx="0">
+            <a:scrgbClr r="0" g="0" b="0"/>
+          </a:fillRef>
+          <a:effectRef idx="0">
+            <a:scrgbClr r="0" g="0" b="0"/>
+          </a:effectRef>
+          <a:fontRef idx="minor">
+            <a:schemeClr val="tx1"/>
+          </a:fontRef>
+        </p:style>
+      </p:cxnSp>
+      <p:cxnSp>
+        <p:nvCxnSpPr>
+          <p:cNvPr id="41" name="Straight Arrow Connector 40">
+            <a:extLst>
+              <a:ext uri="{FF2B5EF4-FFF2-40B4-BE49-F238E27FC236}">
+                <a16:creationId xmlns:a16="http://schemas.microsoft.com/office/drawing/2014/main" id="{C860D47B-8950-6405-088D-8C47A9B4BA89}"/>
+              </a:ext>
+            </a:extLst>
+          </p:cNvPr>
+          <p:cNvCxnSpPr>
+            <a:stCxn id="19" idx="3"/>
+            <a:endCxn id="21" idx="1"/>
+          </p:cNvCxnSpPr>
+          <p:nvPr/>
+        </p:nvCxnSpPr>
+        <p:spPr>
+          <a:xfrm>
+            <a:off x="3050718" y="5515071"/>
+            <a:ext cx="1278315" cy="0"/>
+          </a:xfrm>
+          <a:prstGeom prst="straightConnector1">
+            <a:avLst/>
+          </a:prstGeom>
+          <a:ln w="19050" cap="flat" cmpd="sng" algn="ctr">
+            <a:solidFill>
+              <a:schemeClr val="accent2"/>
+            </a:solidFill>
+            <a:prstDash val="solid"/>
+            <a:round/>
+            <a:headEnd type="none" w="med" len="med"/>
+            <a:tailEnd type="arrow" w="med" len="med"/>
+          </a:ln>
+        </p:spPr>
+        <p:style>
+          <a:lnRef idx="0">
+            <a:scrgbClr r="0" g="0" b="0"/>
+          </a:lnRef>
+          <a:fillRef idx="0">
+            <a:scrgbClr r="0" g="0" b="0"/>
+          </a:fillRef>
+          <a:effectRef idx="0">
+            <a:scrgbClr r="0" g="0" b="0"/>
+          </a:effectRef>
+          <a:fontRef idx="minor">
+            <a:schemeClr val="tx1"/>
+          </a:fontRef>
+        </p:style>
+      </p:cxnSp>
+      <p:sp>
+        <p:nvSpPr>
+          <p:cNvPr id="42" name="TextBox 41">
+            <a:extLst>
+              <a:ext uri="{FF2B5EF4-FFF2-40B4-BE49-F238E27FC236}">
+                <a16:creationId xmlns:a16="http://schemas.microsoft.com/office/drawing/2014/main" id="{B0DB540F-21B3-F355-93D9-C446F53FE396}"/>
+              </a:ext>
+            </a:extLst>
+          </p:cNvPr>
+          <p:cNvSpPr txBox="1"/>
+          <p:nvPr/>
+        </p:nvSpPr>
+        <p:spPr>
+          <a:xfrm>
+            <a:off x="3220836" y="5087428"/>
+            <a:ext cx="938077" cy="369332"/>
+          </a:xfrm>
+          <a:prstGeom prst="rect">
+            <a:avLst/>
+          </a:prstGeom>
+          <a:noFill/>
+        </p:spPr>
+        <p:txBody>
+          <a:bodyPr wrap="none" rtlCol="0">
+            <a:spAutoFit/>
+          </a:bodyPr>
+          <a:lstStyle/>
+          <a:p>
+            <a:r>
+              <a:rPr lang="en-SG" dirty="0"/>
+              <a:t>Display</a:t>
+            </a:r>
+          </a:p>
+        </p:txBody>
+      </p:sp>
+      <p:sp>
+        <p:nvSpPr>
+          <p:cNvPr id="44" name="TextBox 43">
+            <a:extLst>
+              <a:ext uri="{FF2B5EF4-FFF2-40B4-BE49-F238E27FC236}">
+                <a16:creationId xmlns:a16="http://schemas.microsoft.com/office/drawing/2014/main" id="{DB9A1047-40CE-AE69-17DB-F70C5AAECBF9}"/>
+              </a:ext>
+            </a:extLst>
+          </p:cNvPr>
+          <p:cNvSpPr txBox="1"/>
+          <p:nvPr/>
+        </p:nvSpPr>
+        <p:spPr>
+          <a:xfrm>
+            <a:off x="6324532" y="3060949"/>
+            <a:ext cx="1685026" cy="615553"/>
+          </a:xfrm>
+          <a:prstGeom prst="rect">
+            <a:avLst/>
+          </a:prstGeom>
+          <a:noFill/>
+        </p:spPr>
+        <p:txBody>
+          <a:bodyPr wrap="square" rtlCol="0">
+            <a:spAutoFit/>
+          </a:bodyPr>
+          <a:lstStyle/>
+          <a:p>
+            <a:r>
+              <a:rPr lang="en-SG" sz="1700" dirty="0"/>
+              <a:t>Pre-processing</a:t>
+            </a:r>
+          </a:p>
+        </p:txBody>
+      </p:sp>
+      <p:sp>
+        <p:nvSpPr>
+          <p:cNvPr id="50" name="TextBox 49">
+            <a:extLst>
+              <a:ext uri="{FF2B5EF4-FFF2-40B4-BE49-F238E27FC236}">
+                <a16:creationId xmlns:a16="http://schemas.microsoft.com/office/drawing/2014/main" id="{EEFCA747-8D72-04FC-A8D8-1B699871D0F4}"/>
+              </a:ext>
+            </a:extLst>
+          </p:cNvPr>
+          <p:cNvSpPr txBox="1"/>
+          <p:nvPr/>
+        </p:nvSpPr>
+        <p:spPr>
+          <a:xfrm>
+            <a:off x="3220835" y="3274249"/>
+            <a:ext cx="845103" cy="369332"/>
+          </a:xfrm>
+          <a:prstGeom prst="rect">
+            <a:avLst/>
+          </a:prstGeom>
+          <a:noFill/>
+        </p:spPr>
+        <p:txBody>
+          <a:bodyPr wrap="none" rtlCol="0">
+            <a:spAutoFit/>
+          </a:bodyPr>
+          <a:lstStyle/>
+          <a:p>
+            <a:r>
+              <a:rPr lang="en-SG" dirty="0"/>
+              <a:t>Result</a:t>
+            </a:r>
+          </a:p>
+        </p:txBody>
+      </p:sp>
     </p:spTree>
     <p:extLst>
       <p:ext uri="{BB962C8B-B14F-4D97-AF65-F5344CB8AC3E}">
-        <p14:creationId xmlns:p14="http://schemas.microsoft.com/office/powerpoint/2010/main" val="2037361668"/>
+        <p14:creationId xmlns:p14="http://schemas.microsoft.com/office/powerpoint/2010/main" val="2648405994"/>
       </p:ext>
     </p:extLst>
   </p:cSld>
@@ -34836,30 +37207,25 @@
           <p:cNvPr id="2" name="Title 1">
             <a:extLst>
               <a:ext uri="{FF2B5EF4-FFF2-40B4-BE49-F238E27FC236}">
-                <a16:creationId xmlns:a16="http://schemas.microsoft.com/office/drawing/2014/main" id="{5399766A-8D26-6DCE-60BF-703811C9A8AF}"/>
-              </a:ext>
-            </a:extLst>
-          </p:cNvPr>
-          <p:cNvSpPr>
-            <a:spLocks noGrp="1"/>
-          </p:cNvSpPr>
-          <p:nvPr>
-            <p:ph type="ctrTitle"/>
-          </p:nvPr>
-        </p:nvSpPr>
-        <p:spPr>
-          <a:xfrm>
-            <a:off x="3536831" y="1463040"/>
-            <a:ext cx="5210354" cy="3931920"/>
-          </a:xfrm>
-        </p:spPr>
+                <a16:creationId xmlns:a16="http://schemas.microsoft.com/office/drawing/2014/main" id="{5C971468-309A-F249-8785-022D994B40F8}"/>
+              </a:ext>
+            </a:extLst>
+          </p:cNvPr>
+          <p:cNvSpPr>
+            <a:spLocks noGrp="1"/>
+          </p:cNvSpPr>
+          <p:nvPr>
+            <p:ph type="title"/>
+          </p:nvPr>
+        </p:nvSpPr>
+        <p:spPr/>
         <p:txBody>
           <a:bodyPr/>
           <a:lstStyle/>
           <a:p>
             <a:r>
               <a:rPr lang="en-SG" dirty="0"/>
-              <a:t>MICROSERVICES</a:t>
+              <a:t>FRONTEND DASHBOARD</a:t>
             </a:r>
           </a:p>
         </p:txBody>
@@ -34869,7 +37235,7 @@
           <p:cNvPr id="3" name="Footer Placeholder 2">
             <a:extLst>
               <a:ext uri="{FF2B5EF4-FFF2-40B4-BE49-F238E27FC236}">
-                <a16:creationId xmlns:a16="http://schemas.microsoft.com/office/drawing/2014/main" id="{02CD1AC0-9939-D7DA-C1B5-89896E5490E1}"/>
+                <a16:creationId xmlns:a16="http://schemas.microsoft.com/office/drawing/2014/main" id="{67AF8A32-848F-6580-5D1D-863E7ACC1449}"/>
               </a:ext>
             </a:extLst>
           </p:cNvPr>
@@ -34895,18 +37261,18 @@
       </p:sp>
       <p:sp>
         <p:nvSpPr>
-          <p:cNvPr id="4" name="Date Placeholder 3">
-            <a:extLst>
-              <a:ext uri="{FF2B5EF4-FFF2-40B4-BE49-F238E27FC236}">
-                <a16:creationId xmlns:a16="http://schemas.microsoft.com/office/drawing/2014/main" id="{19E5B9C4-A021-AD37-4063-4CD82AEA3362}"/>
-              </a:ext>
-            </a:extLst>
-          </p:cNvPr>
-          <p:cNvSpPr>
-            <a:spLocks noGrp="1"/>
-          </p:cNvSpPr>
-          <p:nvPr>
-            <p:ph type="dt" sz="half" idx="10"/>
+          <p:cNvPr id="4" name="Content Placeholder 3">
+            <a:extLst>
+              <a:ext uri="{FF2B5EF4-FFF2-40B4-BE49-F238E27FC236}">
+                <a16:creationId xmlns:a16="http://schemas.microsoft.com/office/drawing/2014/main" id="{48189E54-8A42-FC2B-2617-0003B6CC127C}"/>
+              </a:ext>
+            </a:extLst>
+          </p:cNvPr>
+          <p:cNvSpPr>
+            <a:spLocks noGrp="1"/>
+          </p:cNvSpPr>
+          <p:nvPr>
+            <p:ph sz="quarter" idx="13"/>
           </p:nvPr>
         </p:nvSpPr>
         <p:spPr/>
@@ -34914,9 +37280,34 @@
           <a:bodyPr/>
           <a:lstStyle/>
           <a:p>
-            <a:fld id="{010D0AB2-23BC-3043-AC30-5928E542C0CE}" type="datetime1">
+            <a:endParaRPr lang="en-SG"/>
+          </a:p>
+        </p:txBody>
+      </p:sp>
+      <p:sp>
+        <p:nvSpPr>
+          <p:cNvPr id="5" name="Date Placeholder 4">
+            <a:extLst>
+              <a:ext uri="{FF2B5EF4-FFF2-40B4-BE49-F238E27FC236}">
+                <a16:creationId xmlns:a16="http://schemas.microsoft.com/office/drawing/2014/main" id="{38F89DBF-AAD8-E49E-2244-336A204599CC}"/>
+              </a:ext>
+            </a:extLst>
+          </p:cNvPr>
+          <p:cNvSpPr>
+            <a:spLocks noGrp="1"/>
+          </p:cNvSpPr>
+          <p:nvPr>
+            <p:ph type="dt" sz="half" idx="10"/>
+          </p:nvPr>
+        </p:nvSpPr>
+        <p:spPr/>
+        <p:txBody>
+          <a:bodyPr/>
+          <a:lstStyle/>
+          <a:p>
+            <a:fld id="{927C0DEB-4AE1-EA4D-826D-E3C22802B942}" type="datetime1">
               <a:rPr lang="en-US" smtClean="0"/>
-              <a:t>7/16/2026</a:t>
+              <a:t>7/20/2026</a:t>
             </a:fld>
             <a:endParaRPr lang="en-US" dirty="0"/>
           </a:p>
@@ -34924,10 +37315,10 @@
       </p:sp>
       <p:sp>
         <p:nvSpPr>
-          <p:cNvPr id="5" name="Slide Number Placeholder 4">
-            <a:extLst>
-              <a:ext uri="{FF2B5EF4-FFF2-40B4-BE49-F238E27FC236}">
-                <a16:creationId xmlns:a16="http://schemas.microsoft.com/office/drawing/2014/main" id="{D796FA40-EF4F-7414-795C-90E90F514FCC}"/>
+          <p:cNvPr id="6" name="Slide Number Placeholder 5">
+            <a:extLst>
+              <a:ext uri="{FF2B5EF4-FFF2-40B4-BE49-F238E27FC236}">
+                <a16:creationId xmlns:a16="http://schemas.microsoft.com/office/drawing/2014/main" id="{FFE04B86-3E7C-BF8A-4395-0323C52E4558}"/>
               </a:ext>
             </a:extLst>
           </p:cNvPr>
@@ -34955,7 +37346,7 @@
     </p:spTree>
     <p:extLst>
       <p:ext uri="{BB962C8B-B14F-4D97-AF65-F5344CB8AC3E}">
-        <p14:creationId xmlns:p14="http://schemas.microsoft.com/office/powerpoint/2010/main" val="1787156668"/>
+        <p14:creationId xmlns:p14="http://schemas.microsoft.com/office/powerpoint/2010/main" val="1382694037"/>
       </p:ext>
     </p:extLst>
   </p:cSld>
@@ -35797,6 +38188,26 @@
 </file>
 
 <file path=customXml/item1.xml><?xml version="1.0" encoding="utf-8"?>
+<p:properties xmlns:p="http://schemas.microsoft.com/office/2006/metadata/properties" xmlns:xsi="http://www.w3.org/2001/XMLSchema-instance" xmlns:pc="http://schemas.microsoft.com/office/infopath/2007/PartnerControls">
+  <documentManagement>
+    <_ip_UnifiedCompliancePolicyUIAction xmlns="http://schemas.microsoft.com/sharepoint/v3" xsi:nil="true"/>
+    <Image xmlns="71af3243-3dd4-4a8d-8c0d-dd76da1f02a5">
+      <Url xsi:nil="true"/>
+      <Description xsi:nil="true"/>
+    </Image>
+    <Status xmlns="71af3243-3dd4-4a8d-8c0d-dd76da1f02a5">Not started</Status>
+    <Background xmlns="71af3243-3dd4-4a8d-8c0d-dd76da1f02a5">false</Background>
+    <_ip_UnifiedCompliancePolicyProperties xmlns="http://schemas.microsoft.com/sharepoint/v3" xsi:nil="true"/>
+    <ImageTagsTaxHTField xmlns="71af3243-3dd4-4a8d-8c0d-dd76da1f02a5">
+      <Terms xmlns="http://schemas.microsoft.com/office/infopath/2007/PartnerControls"/>
+    </ImageTagsTaxHTField>
+    <TaxCatchAll xmlns="230e9df3-be65-4c73-a93b-d1236ebd677e" xsi:nil="true"/>
+    <MediaServiceKeyPoints xmlns="71af3243-3dd4-4a8d-8c0d-dd76da1f02a5" xsi:nil="true"/>
+  </documentManagement>
+</p:properties>
+</file>
+
+<file path=customXml/item2.xml><?xml version="1.0" encoding="utf-8"?>
 <ct:contentTypeSchema xmlns:ct="http://schemas.microsoft.com/office/2006/metadata/contentType" xmlns:ma="http://schemas.microsoft.com/office/2006/metadata/properties/metaAttributes" ct:_="" ma:_="" ma:contentTypeName="Document" ma:contentTypeID="0x01010079F111ED35F8CC479449609E8A0923A6" ma:contentTypeVersion="30" ma:contentTypeDescription="Create a new document." ma:contentTypeScope="" ma:versionID="cec0622158e8f13124e9e8fd4de31bd1">
   <xsd:schema xmlns:xsd="http://www.w3.org/2001/XMLSchema" xmlns:xs="http://www.w3.org/2001/XMLSchema" xmlns:p="http://schemas.microsoft.com/office/2006/metadata/properties" xmlns:ns1="http://schemas.microsoft.com/sharepoint/v3" xmlns:ns2="71af3243-3dd4-4a8d-8c0d-dd76da1f02a5" xmlns:ns3="16c05727-aa75-4e4a-9b5f-8a80a1165891" xmlns:ns4="230e9df3-be65-4c73-a93b-d1236ebd677e" targetNamespace="http://schemas.microsoft.com/office/2006/metadata/properties" ma:root="true" ma:fieldsID="3b52f30ab005d15df08657af532e6e38" ns1:_="" ns2:_="" ns3:_="" ns4:_="">
     <xsd:import namespace="http://schemas.microsoft.com/sharepoint/v3"/>
@@ -36114,26 +38525,6 @@
 </ct:contentTypeSchema>
 </file>
 
-<file path=customXml/item2.xml><?xml version="1.0" encoding="utf-8"?>
-<p:properties xmlns:p="http://schemas.microsoft.com/office/2006/metadata/properties" xmlns:xsi="http://www.w3.org/2001/XMLSchema-instance" xmlns:pc="http://schemas.microsoft.com/office/infopath/2007/PartnerControls">
-  <documentManagement>
-    <_ip_UnifiedCompliancePolicyUIAction xmlns="http://schemas.microsoft.com/sharepoint/v3" xsi:nil="true"/>
-    <Image xmlns="71af3243-3dd4-4a8d-8c0d-dd76da1f02a5">
-      <Url xsi:nil="true"/>
-      <Description xsi:nil="true"/>
-    </Image>
-    <Status xmlns="71af3243-3dd4-4a8d-8c0d-dd76da1f02a5">Not started</Status>
-    <Background xmlns="71af3243-3dd4-4a8d-8c0d-dd76da1f02a5">false</Background>
-    <_ip_UnifiedCompliancePolicyProperties xmlns="http://schemas.microsoft.com/sharepoint/v3" xsi:nil="true"/>
-    <ImageTagsTaxHTField xmlns="71af3243-3dd4-4a8d-8c0d-dd76da1f02a5">
-      <Terms xmlns="http://schemas.microsoft.com/office/infopath/2007/PartnerControls"/>
-    </ImageTagsTaxHTField>
-    <TaxCatchAll xmlns="230e9df3-be65-4c73-a93b-d1236ebd677e" xsi:nil="true"/>
-    <MediaServiceKeyPoints xmlns="71af3243-3dd4-4a8d-8c0d-dd76da1f02a5" xsi:nil="true"/>
-  </documentManagement>
-</p:properties>
-</file>
-
 <file path=customXml/item3.xml><?xml version="1.0" encoding="utf-8"?>
 <?mso-contentType ?>
 <FormTemplates xmlns="http://schemas.microsoft.com/sharepoint/v3/contenttype/forms">
@@ -36144,6 +38535,25 @@
 </file>
 
 <file path=customXml/itemProps1.xml><?xml version="1.0" encoding="utf-8"?>
+<ds:datastoreItem xmlns:ds="http://schemas.openxmlformats.org/officeDocument/2006/customXml" ds:itemID="{D1CEDABF-7176-4A42-8EF9-E5D4DD31FF6C}">
+  <ds:schemaRefs>
+    <ds:schemaRef ds:uri="http://schemas.microsoft.com/office/infopath/2007/PartnerControls"/>
+    <ds:schemaRef ds:uri="http://purl.org/dc/terms/"/>
+    <ds:schemaRef ds:uri="http://schemas.microsoft.com/office/2006/metadata/properties"/>
+    <ds:schemaRef ds:uri="http://schemas.microsoft.com/office/2006/documentManagement/types"/>
+    <ds:schemaRef ds:uri="http://purl.org/dc/dcmitype/"/>
+    <ds:schemaRef ds:uri="http://schemas.openxmlformats.org/package/2006/metadata/core-properties"/>
+    <ds:schemaRef ds:uri="http://www.w3.org/XML/1998/namespace"/>
+    <ds:schemaRef ds:uri="230e9df3-be65-4c73-a93b-d1236ebd677e"/>
+    <ds:schemaRef ds:uri="http://purl.org/dc/elements/1.1/"/>
+    <ds:schemaRef ds:uri="16c05727-aa75-4e4a-9b5f-8a80a1165891"/>
+    <ds:schemaRef ds:uri="71af3243-3dd4-4a8d-8c0d-dd76da1f02a5"/>
+    <ds:schemaRef ds:uri="http://schemas.microsoft.com/sharepoint/v3"/>
+  </ds:schemaRefs>
+</ds:datastoreItem>
+</file>
+
+<file path=customXml/itemProps2.xml><?xml version="1.0" encoding="utf-8"?>
 <ds:datastoreItem xmlns:ds="http://schemas.openxmlformats.org/officeDocument/2006/customXml" ds:itemID="{9EEC3793-C1BC-496C-A03C-202DFFC513D6}">
   <ds:schemaRefs>
     <ds:schemaRef ds:uri="http://schemas.microsoft.com/office/2006/metadata/contentType"/>
@@ -36164,25 +38574,6 @@
 </ds:datastoreItem>
 </file>
 
-<file path=customXml/itemProps2.xml><?xml version="1.0" encoding="utf-8"?>
-<ds:datastoreItem xmlns:ds="http://schemas.openxmlformats.org/officeDocument/2006/customXml" ds:itemID="{D1CEDABF-7176-4A42-8EF9-E5D4DD31FF6C}">
-  <ds:schemaRefs>
-    <ds:schemaRef ds:uri="http://schemas.microsoft.com/office/infopath/2007/PartnerControls"/>
-    <ds:schemaRef ds:uri="http://purl.org/dc/terms/"/>
-    <ds:schemaRef ds:uri="http://schemas.microsoft.com/office/2006/metadata/properties"/>
-    <ds:schemaRef ds:uri="http://schemas.microsoft.com/office/2006/documentManagement/types"/>
-    <ds:schemaRef ds:uri="http://purl.org/dc/dcmitype/"/>
-    <ds:schemaRef ds:uri="http://schemas.openxmlformats.org/package/2006/metadata/core-properties"/>
-    <ds:schemaRef ds:uri="http://www.w3.org/XML/1998/namespace"/>
-    <ds:schemaRef ds:uri="230e9df3-be65-4c73-a93b-d1236ebd677e"/>
-    <ds:schemaRef ds:uri="http://purl.org/dc/elements/1.1/"/>
-    <ds:schemaRef ds:uri="16c05727-aa75-4e4a-9b5f-8a80a1165891"/>
-    <ds:schemaRef ds:uri="71af3243-3dd4-4a8d-8c0d-dd76da1f02a5"/>
-    <ds:schemaRef ds:uri="http://schemas.microsoft.com/sharepoint/v3"/>
-  </ds:schemaRefs>
-</ds:datastoreItem>
-</file>
-
 <file path=customXml/itemProps3.xml><?xml version="1.0" encoding="utf-8"?>
 <ds:datastoreItem xmlns:ds="http://schemas.openxmlformats.org/officeDocument/2006/customXml" ds:itemID="{D3301439-688F-4D19-B908-B48B62C56078}">
   <ds:schemaRefs>

--- a/EGT307 PRESENTATION.pptx
+++ b/EGT307 PRESENTATION.pptx
@@ -241,7 +241,7 @@
           <a:p>
             <a:fld id="{D5D1EC30-5B0B-48D0-A1A8-66A96720DF24}" type="datetimeFigureOut">
               <a:rPr lang="en-US" smtClean="0"/>
-              <a:t>7/19/2026</a:t>
+              <a:t>7/27/2026</a:t>
             </a:fld>
             <a:endParaRPr lang="en-US" dirty="0"/>
           </a:p>
@@ -418,7 +418,7 @@
           <a:p>
             <a:fld id="{69F68A4D-42A7-45F7-9930-00E8DCB48D7E}" type="datetimeFigureOut">
               <a:rPr lang="en-US" smtClean="0"/>
-              <a:t>7/19/2026</a:t>
+              <a:t>7/27/2026</a:t>
             </a:fld>
             <a:endParaRPr lang="en-US" dirty="0"/>
           </a:p>
@@ -1979,7 +1979,7 @@
           <a:p>
             <a:fld id="{EBC9FF77-C2BC-3842-9757-C2EBADB34099}" type="datetime1">
               <a:rPr lang="en-US" smtClean="0"/>
-              <a:t>7/19/2026</a:t>
+              <a:t>7/27/2026</a:t>
             </a:fld>
             <a:endParaRPr lang="en-US" dirty="0"/>
           </a:p>
@@ -2343,7 +2343,7 @@
           <a:p>
             <a:fld id="{010D0AB2-23BC-3043-AC30-5928E542C0CE}" type="datetime1">
               <a:rPr lang="en-US" smtClean="0"/>
-              <a:t>7/19/2026</a:t>
+              <a:t>7/27/2026</a:t>
             </a:fld>
             <a:endParaRPr lang="en-US" dirty="0"/>
           </a:p>
@@ -2869,7 +2869,7 @@
           <a:p>
             <a:fld id="{3EE24C61-4277-DA47-BF4A-DCEFD7F4C6B4}" type="datetime1">
               <a:rPr lang="en-US" smtClean="0"/>
-              <a:t>7/19/2026</a:t>
+              <a:t>7/27/2026</a:t>
             </a:fld>
             <a:endParaRPr lang="en-US" dirty="0"/>
           </a:p>
@@ -3395,7 +3395,7 @@
           <a:p>
             <a:fld id="{53D1C53B-D534-AA48-85B3-4F5B03DDCBA8}" type="datetime1">
               <a:rPr lang="en-US" smtClean="0"/>
-              <a:t>7/19/2026</a:t>
+              <a:t>7/27/2026</a:t>
             </a:fld>
             <a:endParaRPr lang="en-US" dirty="0"/>
           </a:p>
@@ -4041,7 +4041,7 @@
           <a:p>
             <a:fld id="{B2A7CB4E-BD8C-8E4D-91FF-B1939559C134}" type="datetime1">
               <a:rPr lang="en-US" smtClean="0"/>
-              <a:t>7/19/2026</a:t>
+              <a:t>7/27/2026</a:t>
             </a:fld>
             <a:endParaRPr lang="en-US" dirty="0"/>
           </a:p>
@@ -4650,7 +4650,7 @@
           <a:p>
             <a:fld id="{4142E188-D61A-9842-B8A2-1559B3399613}" type="datetime1">
               <a:rPr lang="en-US" smtClean="0"/>
-              <a:t>7/19/2026</a:t>
+              <a:t>7/27/2026</a:t>
             </a:fld>
             <a:endParaRPr lang="en-US" dirty="0"/>
           </a:p>
@@ -5221,7 +5221,7 @@
           <a:p>
             <a:fld id="{0D0C1909-8EA0-3E44-B1AC-A9EA56584238}" type="datetime1">
               <a:rPr lang="en-US" smtClean="0"/>
-              <a:t>7/19/2026</a:t>
+              <a:t>7/27/2026</a:t>
             </a:fld>
             <a:endParaRPr lang="en-US" dirty="0"/>
           </a:p>
@@ -5760,7 +5760,7 @@
           <a:p>
             <a:fld id="{C752DD5A-B150-8340-8E59-4C8F3F7E3A59}" type="datetime1">
               <a:rPr lang="en-US" smtClean="0"/>
-              <a:t>7/19/2026</a:t>
+              <a:t>7/27/2026</a:t>
             </a:fld>
             <a:endParaRPr lang="en-US" dirty="0"/>
           </a:p>
@@ -6269,7 +6269,7 @@
           <a:p>
             <a:fld id="{0FD936B8-E398-1A41-8DE9-58DDB113FEEA}" type="datetime1">
               <a:rPr lang="en-US" smtClean="0"/>
-              <a:t>7/19/2026</a:t>
+              <a:t>7/27/2026</a:t>
             </a:fld>
             <a:endParaRPr lang="en-US" dirty="0"/>
           </a:p>
@@ -6767,7 +6767,7 @@
           <a:p>
             <a:fld id="{927C0DEB-4AE1-EA4D-826D-E3C22802B942}" type="datetime1">
               <a:rPr lang="en-US" smtClean="0"/>
-              <a:t>7/19/2026</a:t>
+              <a:t>7/27/2026</a:t>
             </a:fld>
             <a:endParaRPr lang="en-US" dirty="0"/>
           </a:p>
@@ -7252,7 +7252,7 @@
           <a:p>
             <a:fld id="{BE2752B3-7BF7-614C-A80A-1256FFE41AD1}" type="datetime1">
               <a:rPr lang="en-US" smtClean="0"/>
-              <a:t>7/19/2026</a:t>
+              <a:t>7/27/2026</a:t>
             </a:fld>
             <a:endParaRPr lang="en-US" dirty="0"/>
           </a:p>
@@ -7706,7 +7706,7 @@
           <a:p>
             <a:fld id="{40482BA7-8406-1C47-9A76-988652CA5787}" type="datetime1">
               <a:rPr lang="en-US" smtClean="0"/>
-              <a:t>7/19/2026</a:t>
+              <a:t>7/27/2026</a:t>
             </a:fld>
             <a:endParaRPr lang="en-US" dirty="0"/>
           </a:p>
@@ -8263,7 +8263,7 @@
           <a:p>
             <a:fld id="{79F03E26-E542-1A4D-AC7A-1E4E95BAEC6A}" type="datetime1">
               <a:rPr lang="en-US" smtClean="0"/>
-              <a:t>7/19/2026</a:t>
+              <a:t>7/27/2026</a:t>
             </a:fld>
             <a:endParaRPr lang="en-US" dirty="0"/>
           </a:p>
@@ -8861,7 +8861,7 @@
           <a:p>
             <a:fld id="{115476B0-E2C7-E147-B9CE-3E274E847A52}" type="datetime1">
               <a:rPr lang="en-US" smtClean="0"/>
-              <a:t>7/19/2026</a:t>
+              <a:t>7/27/2026</a:t>
             </a:fld>
             <a:endParaRPr lang="en-US" dirty="0"/>
           </a:p>
@@ -9459,7 +9459,7 @@
           <a:p>
             <a:fld id="{30D7DCC1-5043-7A46-8443-F8426D5EAB75}" type="datetime1">
               <a:rPr lang="en-US" smtClean="0"/>
-              <a:t>7/19/2026</a:t>
+              <a:t>7/27/2026</a:t>
             </a:fld>
             <a:endParaRPr lang="en-US" dirty="0"/>
           </a:p>
@@ -10059,7 +10059,7 @@
           <a:p>
             <a:fld id="{D1A2963D-70FD-3A42-A53A-2480966C033D}" type="datetime1">
               <a:rPr lang="en-US" smtClean="0"/>
-              <a:t>7/19/2026</a:t>
+              <a:t>7/27/2026</a:t>
             </a:fld>
             <a:endParaRPr lang="en-US" dirty="0"/>
           </a:p>
@@ -10659,7 +10659,7 @@
           <a:p>
             <a:fld id="{F1A8FB16-FCFB-DA44-98E9-136CD51670D6}" type="datetime1">
               <a:rPr lang="en-US" smtClean="0"/>
-              <a:t>7/19/2026</a:t>
+              <a:t>7/27/2026</a:t>
             </a:fld>
             <a:endParaRPr lang="en-US" dirty="0"/>
           </a:p>
@@ -11257,7 +11257,7 @@
           <a:p>
             <a:fld id="{58EFB3A8-11B5-7149-8412-15238624EFFD}" type="datetime1">
               <a:rPr lang="en-US" smtClean="0"/>
-              <a:t>7/19/2026</a:t>
+              <a:t>7/27/2026</a:t>
             </a:fld>
             <a:endParaRPr lang="en-US" dirty="0"/>
           </a:p>
@@ -11855,7 +11855,7 @@
           <a:p>
             <a:fld id="{650FCFAB-53E3-A342-A296-D67E0AB8D0CD}" type="datetime1">
               <a:rPr lang="en-US" smtClean="0"/>
-              <a:t>7/19/2026</a:t>
+              <a:t>7/27/2026</a:t>
             </a:fld>
             <a:endParaRPr lang="en-US" dirty="0"/>
           </a:p>
@@ -12451,7 +12451,7 @@
           <a:p>
             <a:fld id="{8DC46901-11EF-4445-8903-DC36784F331E}" type="datetime1">
               <a:rPr lang="en-US" smtClean="0"/>
-              <a:t>7/19/2026</a:t>
+              <a:t>7/27/2026</a:t>
             </a:fld>
             <a:endParaRPr lang="en-US" dirty="0"/>
           </a:p>
@@ -12980,7 +12980,7 @@
           <a:p>
             <a:fld id="{86A42598-CA8F-5141-9F98-7018240FA786}" type="datetime1">
               <a:rPr lang="en-US" smtClean="0"/>
-              <a:t>7/19/2026</a:t>
+              <a:t>7/27/2026</a:t>
             </a:fld>
             <a:endParaRPr lang="en-US" dirty="0"/>
           </a:p>
@@ -13596,7 +13596,7 @@
           <a:p>
             <a:fld id="{BB5C750C-98D3-2541-9DBA-212130458E4E}" type="datetime1">
               <a:rPr lang="en-US" smtClean="0"/>
-              <a:t>7/19/2026</a:t>
+              <a:t>7/27/2026</a:t>
             </a:fld>
             <a:endParaRPr lang="en-US" dirty="0"/>
           </a:p>
@@ -14196,7 +14196,7 @@
           <a:p>
             <a:fld id="{91C99844-6C9E-BB4D-8B47-7C2CC32AAC02}" type="datetime1">
               <a:rPr lang="en-US" smtClean="0"/>
-              <a:t>7/19/2026</a:t>
+              <a:t>7/27/2026</a:t>
             </a:fld>
             <a:endParaRPr lang="en-US" dirty="0"/>
           </a:p>
@@ -14796,7 +14796,7 @@
           <a:p>
             <a:fld id="{97582611-C0A2-BD42-A8F7-C2F9A013F10C}" type="datetime1">
               <a:rPr lang="en-US" smtClean="0"/>
-              <a:t>7/19/2026</a:t>
+              <a:t>7/27/2026</a:t>
             </a:fld>
             <a:endParaRPr lang="en-US" dirty="0"/>
           </a:p>
@@ -15394,7 +15394,7 @@
           <a:p>
             <a:fld id="{1048417B-2BA9-FC42-993A-F5CAB8ABAB3C}" type="datetime1">
               <a:rPr lang="en-US" smtClean="0"/>
-              <a:t>7/19/2026</a:t>
+              <a:t>7/27/2026</a:t>
             </a:fld>
             <a:endParaRPr lang="en-US" dirty="0"/>
           </a:p>
@@ -15997,7 +15997,7 @@
           <a:p>
             <a:fld id="{B9956DE8-31F3-0C48-AD89-A99E39B5E351}" type="datetime1">
               <a:rPr lang="en-US" smtClean="0"/>
-              <a:t>7/19/2026</a:t>
+              <a:t>7/27/2026</a:t>
             </a:fld>
             <a:endParaRPr lang="en-US" dirty="0"/>
           </a:p>
@@ -16557,7 +16557,7 @@
           <a:p>
             <a:fld id="{1247F170-621E-394E-A3F2-D37D14C6B270}" type="datetime1">
               <a:rPr lang="en-US" smtClean="0"/>
-              <a:t>7/19/2026</a:t>
+              <a:t>7/27/2026</a:t>
             </a:fld>
             <a:endParaRPr lang="en-US" dirty="0"/>
           </a:p>
@@ -17119,7 +17119,7 @@
           <a:p>
             <a:fld id="{3BFEB256-000B-7640-A176-A6ED88FB302B}" type="datetime1">
               <a:rPr lang="en-US" smtClean="0"/>
-              <a:t>7/19/2026</a:t>
+              <a:t>7/27/2026</a:t>
             </a:fld>
             <a:endParaRPr lang="en-US" dirty="0"/>
           </a:p>
@@ -17676,7 +17676,7 @@
           <a:p>
             <a:fld id="{AD187FAD-DCB9-3D4B-B066-9000219F05FB}" type="datetime1">
               <a:rPr lang="en-US" smtClean="0"/>
-              <a:t>7/19/2026</a:t>
+              <a:t>7/27/2026</a:t>
             </a:fld>
             <a:endParaRPr lang="en-US" dirty="0"/>
           </a:p>
@@ -18276,7 +18276,7 @@
           <a:p>
             <a:fld id="{189C5B77-1EC5-224E-B44E-9B7868782731}" type="datetime1">
               <a:rPr lang="en-US" smtClean="0"/>
-              <a:t>7/19/2026</a:t>
+              <a:t>7/27/2026</a:t>
             </a:fld>
             <a:endParaRPr lang="en-US" dirty="0"/>
           </a:p>
@@ -18879,7 +18879,7 @@
           <a:p>
             <a:fld id="{C8F601A6-19D3-EB49-B7F2-A9801AE13DA6}" type="datetime1">
               <a:rPr lang="en-US" smtClean="0"/>
-              <a:t>7/19/2026</a:t>
+              <a:t>7/27/2026</a:t>
             </a:fld>
             <a:endParaRPr lang="en-US" dirty="0"/>
           </a:p>
@@ -19361,7 +19361,7 @@
           <a:p>
             <a:fld id="{FF5D23C8-9820-654D-9C1E-FE1FC23DA807}" type="datetime1">
               <a:rPr lang="en-US" smtClean="0"/>
-              <a:t>7/19/2026</a:t>
+              <a:t>7/27/2026</a:t>
             </a:fld>
             <a:endParaRPr lang="en-US" dirty="0"/>
           </a:p>
@@ -19982,7 +19982,7 @@
           <a:p>
             <a:fld id="{B5DCFA2C-3BE3-964B-9AAF-C20CC59CEE43}" type="datetime1">
               <a:rPr lang="en-US" smtClean="0"/>
-              <a:t>7/19/2026</a:t>
+              <a:t>7/27/2026</a:t>
             </a:fld>
             <a:endParaRPr lang="en-US" dirty="0"/>
           </a:p>
@@ -20420,7 +20420,7 @@
           <a:p>
             <a:fld id="{79A3CDA5-1015-3148-A386-36088AF5334C}" type="datetime1">
               <a:rPr lang="en-US" smtClean="0"/>
-              <a:t>7/19/2026</a:t>
+              <a:t>7/27/2026</a:t>
             </a:fld>
             <a:endParaRPr lang="en-US" dirty="0"/>
           </a:p>
@@ -20855,7 +20855,7 @@
           <a:p>
             <a:fld id="{C112E8AA-E35F-CF44-B5A4-3B5EDD4AC3FC}" type="datetime1">
               <a:rPr lang="en-US" smtClean="0"/>
-              <a:t>7/19/2026</a:t>
+              <a:t>7/27/2026</a:t>
             </a:fld>
             <a:endParaRPr lang="en-US" dirty="0"/>
           </a:p>
@@ -21467,7 +21467,7 @@
           <a:p>
             <a:fld id="{E0FF3B4E-61F2-9C45-A7C9-0649FA3F05AD}" type="datetime1">
               <a:rPr lang="en-US" smtClean="0"/>
-              <a:t>7/19/2026</a:t>
+              <a:t>7/27/2026</a:t>
             </a:fld>
             <a:endParaRPr lang="en-US" dirty="0"/>
           </a:p>
@@ -22092,7 +22092,7 @@
           <a:p>
             <a:fld id="{CC4A289B-0B17-4246-8E33-E89C12A90840}" type="datetime1">
               <a:rPr lang="en-US" smtClean="0"/>
-              <a:t>7/19/2026</a:t>
+              <a:t>7/27/2026</a:t>
             </a:fld>
             <a:endParaRPr lang="en-US" dirty="0"/>
           </a:p>
@@ -22712,7 +22712,7 @@
           <a:p>
             <a:fld id="{C8092CDE-5B88-E044-9012-03F4795B046E}" type="datetime1">
               <a:rPr lang="en-US" smtClean="0"/>
-              <a:t>7/19/2026</a:t>
+              <a:t>7/27/2026</a:t>
             </a:fld>
             <a:endParaRPr lang="en-US" dirty="0"/>
           </a:p>
@@ -23366,7 +23366,7 @@
           <a:p>
             <a:fld id="{EC076D1D-DE21-9B42-8106-8CD72DA85F70}" type="datetime1">
               <a:rPr lang="en-US" smtClean="0"/>
-              <a:t>7/19/2026</a:t>
+              <a:t>7/27/2026</a:t>
             </a:fld>
             <a:endParaRPr lang="en-US" dirty="0"/>
           </a:p>
@@ -24020,7 +24020,7 @@
           <a:p>
             <a:fld id="{57807DC2-592A-C24E-8E32-92959310D82C}" type="datetime1">
               <a:rPr lang="en-US" smtClean="0"/>
-              <a:t>7/19/2026</a:t>
+              <a:t>7/27/2026</a:t>
             </a:fld>
             <a:endParaRPr lang="en-US" dirty="0"/>
           </a:p>
@@ -24707,7 +24707,7 @@
             <a:fld id="{2A17FF52-3D92-5045-83B3-191BF759FA8D}" type="datetime1">
               <a:rPr lang="en-US" smtClean="0"/>
               <a:pPr/>
-              <a:t>7/19/2026</a:t>
+              <a:t>7/27/2026</a:t>
             </a:fld>
             <a:endParaRPr lang="en-US" dirty="0"/>
           </a:p>
@@ -25148,7 +25148,7 @@
             <a:fld id="{17C67708-7A94-8245-80C8-4B4702495DB1}" type="datetime1">
               <a:rPr lang="en-US" smtClean="0"/>
               <a:pPr/>
-              <a:t>7/19/2026</a:t>
+              <a:t>7/27/2026</a:t>
             </a:fld>
             <a:endParaRPr lang="en-US" dirty="0"/>
           </a:p>
@@ -25673,7 +25673,7 @@
           <a:p>
             <a:fld id="{763C345D-F56F-0743-AB88-4EB3E35EF63D}" type="datetime1">
               <a:rPr lang="en-US" smtClean="0"/>
-              <a:t>7/19/2026</a:t>
+              <a:t>7/27/2026</a:t>
             </a:fld>
             <a:endParaRPr lang="en-US" dirty="0"/>
           </a:p>
@@ -26171,7 +26171,7 @@
             <a:fld id="{C3A90753-8D45-EB44-AB23-49A6290D6DA6}" type="datetime1">
               <a:rPr lang="en-US" smtClean="0"/>
               <a:pPr/>
-              <a:t>7/19/2026</a:t>
+              <a:t>7/27/2026</a:t>
             </a:fld>
             <a:endParaRPr lang="en-US" dirty="0"/>
           </a:p>
@@ -26757,7 +26757,7 @@
           <a:p>
             <a:fld id="{C5059AB6-B751-F44D-A28C-E19CFA261A8F}" type="datetime1">
               <a:rPr lang="en-US" smtClean="0"/>
-              <a:t>7/19/2026</a:t>
+              <a:t>7/27/2026</a:t>
             </a:fld>
             <a:endParaRPr lang="en-US" dirty="0"/>
           </a:p>
@@ -27460,7 +27460,7 @@
           <a:p>
             <a:fld id="{F4B7459A-9905-1A4B-AB1A-C91FAC752AC6}" type="datetime1">
               <a:rPr lang="en-US" smtClean="0"/>
-              <a:t>7/19/2026</a:t>
+              <a:t>7/27/2026</a:t>
             </a:fld>
             <a:endParaRPr lang="en-US" dirty="0"/>
           </a:p>
@@ -27843,7 +27843,7 @@
           <a:p>
             <a:fld id="{D255AB00-997D-D540-BC20-37B7E62B26C1}" type="datetime1">
               <a:rPr lang="en-US" smtClean="0"/>
-              <a:t>7/19/2026</a:t>
+              <a:t>7/27/2026</a:t>
             </a:fld>
             <a:endParaRPr lang="en-US" dirty="0"/>
           </a:p>
@@ -28184,7 +28184,7 @@
           <a:p>
             <a:fld id="{69F3ECCF-2CCD-CA4B-8712-AE4484B24AE9}" type="datetime1">
               <a:rPr lang="en-US" smtClean="0"/>
-              <a:t>7/19/2026</a:t>
+              <a:t>7/27/2026</a:t>
             </a:fld>
             <a:endParaRPr lang="en-US" dirty="0"/>
           </a:p>
@@ -28769,7 +28769,7 @@
           <a:p>
             <a:fld id="{22942A74-7D23-DC49-91AA-85B24B3B8A00}" type="datetime1">
               <a:rPr lang="en-US" smtClean="0"/>
-              <a:t>7/19/2026</a:t>
+              <a:t>7/27/2026</a:t>
             </a:fld>
             <a:endParaRPr lang="en-US" dirty="0"/>
           </a:p>
@@ -29322,7 +29322,7 @@
           <a:p>
             <a:fld id="{22A0247B-8639-BE4B-9EB6-99BF33B2FE57}" type="datetime1">
               <a:rPr lang="en-US" smtClean="0"/>
-              <a:t>7/19/2026</a:t>
+              <a:t>7/27/2026</a:t>
             </a:fld>
             <a:endParaRPr lang="en-US" dirty="0"/>
           </a:p>
@@ -29852,7 +29852,7 @@
           <a:p>
             <a:fld id="{162FAA25-3923-0740-83DA-275C59DD4599}" type="datetime1">
               <a:rPr lang="en-US" smtClean="0"/>
-              <a:t>7/19/2026</a:t>
+              <a:t>7/27/2026</a:t>
             </a:fld>
             <a:endParaRPr lang="en-US" dirty="0"/>
           </a:p>
@@ -30343,7 +30343,7 @@
           <a:p>
             <a:fld id="{AB1B52C7-37F9-BD40-8BE5-16C7107F6B2A}" type="datetime1">
               <a:rPr lang="en-US" smtClean="0"/>
-              <a:t>7/19/2026</a:t>
+              <a:t>7/27/2026</a:t>
             </a:fld>
             <a:endParaRPr lang="en-US" dirty="0"/>
           </a:p>
@@ -31060,7 +31060,7 @@
           <a:p>
             <a:fld id="{FF5D23C8-9820-654D-9C1E-FE1FC23DA807}" type="datetime1">
               <a:rPr lang="en-US" smtClean="0"/>
-              <a:t>7/19/2026</a:t>
+              <a:t>7/27/2026</a:t>
             </a:fld>
             <a:endParaRPr lang="en-US" dirty="0"/>
           </a:p>
@@ -31306,7 +31306,7 @@
           <a:p>
             <a:fld id="{5594B28A-4C74-C14A-960D-ABD28BCC0EB4}" type="datetime1">
               <a:rPr lang="en-US" smtClean="0"/>
-              <a:t>7/19/2026</a:t>
+              <a:t>7/27/2026</a:t>
             </a:fld>
             <a:endParaRPr lang="en-US" dirty="0"/>
           </a:p>
@@ -31724,7 +31724,7 @@
           <a:p>
             <a:fld id="{D8CCD23C-B1EB-604C-96F1-0CF64015D152}" type="datetime1">
               <a:rPr lang="en-US" smtClean="0"/>
-              <a:t>7/19/2026</a:t>
+              <a:t>7/27/2026</a:t>
             </a:fld>
             <a:endParaRPr lang="en-US" dirty="0"/>
           </a:p>
@@ -32161,7 +32161,7 @@
           <a:p>
             <a:fld id="{4BE11430-0446-F343-817C-D9D2C78891B0}" type="datetime1">
               <a:rPr lang="en-US" smtClean="0"/>
-              <a:t>7/19/2026</a:t>
+              <a:t>7/27/2026</a:t>
             </a:fld>
             <a:endParaRPr lang="en-US" dirty="0"/>
           </a:p>
@@ -32682,7 +32682,7 @@
             <a:fld id="{6739503E-9C75-484A-A764-D9D8121AAE05}" type="datetime1">
               <a:rPr lang="en-US" smtClean="0"/>
               <a:pPr/>
-              <a:t>7/19/2026</a:t>
+              <a:t>7/27/2026</a:t>
             </a:fld>
             <a:endParaRPr lang="en-US" dirty="0"/>
           </a:p>
@@ -33620,7 +33620,7 @@
           <a:p>
             <a:fld id="{927C0DEB-4AE1-EA4D-826D-E3C22802B942}" type="datetime1">
               <a:rPr lang="en-US" smtClean="0"/>
-              <a:t>7/20/2026</a:t>
+              <a:t>7/27/2026</a:t>
             </a:fld>
             <a:endParaRPr lang="en-US" dirty="0"/>
           </a:p>
@@ -33791,7 +33791,7 @@
           <a:p>
             <a:fld id="{927C0DEB-4AE1-EA4D-826D-E3C22802B942}" type="datetime1">
               <a:rPr lang="en-US" smtClean="0"/>
-              <a:t>7/20/2026</a:t>
+              <a:t>7/27/2026</a:t>
             </a:fld>
             <a:endParaRPr lang="en-US" dirty="0"/>
           </a:p>
@@ -33962,7 +33962,7 @@
           <a:p>
             <a:fld id="{927C0DEB-4AE1-EA4D-826D-E3C22802B942}" type="datetime1">
               <a:rPr lang="en-US" smtClean="0"/>
-              <a:t>7/20/2026</a:t>
+              <a:t>7/27/2026</a:t>
             </a:fld>
             <a:endParaRPr lang="en-US" dirty="0"/>
           </a:p>
@@ -34108,7 +34108,7 @@
           <a:p>
             <a:fld id="{010D0AB2-23BC-3043-AC30-5928E542C0CE}" type="datetime1">
               <a:rPr lang="en-US" smtClean="0"/>
-              <a:t>7/19/2026</a:t>
+              <a:t>7/27/2026</a:t>
             </a:fld>
             <a:endParaRPr lang="en-US" dirty="0"/>
           </a:p>
@@ -34254,7 +34254,7 @@
           <a:p>
             <a:fld id="{010D0AB2-23BC-3043-AC30-5928E542C0CE}" type="datetime1">
               <a:rPr lang="en-US" smtClean="0"/>
-              <a:t>7/19/2026</a:t>
+              <a:t>7/27/2026</a:t>
             </a:fld>
             <a:endParaRPr lang="en-US" dirty="0"/>
           </a:p>
@@ -34405,7 +34405,7 @@
           <a:p>
             <a:fld id="{010D0AB2-23BC-3043-AC30-5928E542C0CE}" type="datetime1">
               <a:rPr lang="en-US" smtClean="0"/>
-              <a:t>7/19/2026</a:t>
+              <a:t>7/27/2026</a:t>
             </a:fld>
             <a:endParaRPr lang="en-US" dirty="0"/>
           </a:p>
@@ -34551,7 +34551,7 @@
           <a:p>
             <a:fld id="{010D0AB2-23BC-3043-AC30-5928E542C0CE}" type="datetime1">
               <a:rPr lang="en-US" smtClean="0"/>
-              <a:t>7/19/2026</a:t>
+              <a:t>7/27/2026</a:t>
             </a:fld>
             <a:endParaRPr lang="en-US" dirty="0"/>
           </a:p>
@@ -34697,7 +34697,7 @@
           <a:p>
             <a:fld id="{010D0AB2-23BC-3043-AC30-5928E542C0CE}" type="datetime1">
               <a:rPr lang="en-US" smtClean="0"/>
-              <a:t>7/19/2026</a:t>
+              <a:t>7/27/2026</a:t>
             </a:fld>
             <a:endParaRPr lang="en-US" dirty="0"/>
           </a:p>
@@ -34979,7 +34979,7 @@
                   <a:spcPts val="600"/>
                 </a:spcAft>
               </a:pPr>
-              <a:t>7/19/2026</a:t>
+              <a:t>7/27/2026</a:t>
             </a:fld>
             <a:endParaRPr lang="en-US"/>
           </a:p>
@@ -35265,7 +35265,7 @@
           <a:p>
             <a:fld id="{927C0DEB-4AE1-EA4D-826D-E3C22802B942}" type="datetime1">
               <a:rPr lang="en-US" smtClean="0"/>
-              <a:t>7/20/2026</a:t>
+              <a:t>7/27/2026</a:t>
             </a:fld>
             <a:endParaRPr lang="en-US" dirty="0"/>
           </a:p>
@@ -35502,7 +35502,7 @@
                   <a:spcPts val="600"/>
                 </a:spcAft>
               </a:pPr>
-              <a:t>7/20/2026</a:t>
+              <a:t>7/27/2026</a:t>
             </a:fld>
             <a:endParaRPr lang="en-US"/>
           </a:p>
@@ -35835,7 +35835,7 @@
                   <a:spcPts val="600"/>
                 </a:spcAft>
               </a:pPr>
-              <a:t>7/20/2026</a:t>
+              <a:t>7/27/2026</a:t>
             </a:fld>
             <a:endParaRPr lang="en-US"/>
           </a:p>
@@ -35998,7 +35998,7 @@
           <a:p>
             <a:fld id="{53D1C53B-D534-AA48-85B3-4F5B03DDCBA8}" type="datetime1">
               <a:rPr lang="en-US" smtClean="0"/>
-              <a:t>7/19/2026</a:t>
+              <a:t>7/27/2026</a:t>
             </a:fld>
             <a:endParaRPr lang="en-US" dirty="0"/>
           </a:p>
@@ -36150,7 +36150,7 @@
           <a:p>
             <a:fld id="{53D1C53B-D534-AA48-85B3-4F5B03DDCBA8}" type="datetime1">
               <a:rPr lang="en-US" smtClean="0"/>
-              <a:t>7/19/2026</a:t>
+              <a:t>7/27/2026</a:t>
             </a:fld>
             <a:endParaRPr lang="en-US" dirty="0"/>
           </a:p>
@@ -36302,7 +36302,7 @@
           <a:p>
             <a:fld id="{927C0DEB-4AE1-EA4D-826D-E3C22802B942}" type="datetime1">
               <a:rPr lang="en-US" smtClean="0"/>
-              <a:t>7/19/2026</a:t>
+              <a:t>7/27/2026</a:t>
             </a:fld>
             <a:endParaRPr lang="en-US" dirty="0"/>
           </a:p>
@@ -36382,7 +36382,7 @@
             <a:pPr algn="ctr"/>
             <a:r>
               <a:rPr lang="en-SG" b="1" dirty="0"/>
-              <a:t>FRONTEND DASHBOARD</a:t>
+              <a:t>IoT Sensors</a:t>
             </a:r>
           </a:p>
         </p:txBody>
@@ -36431,7 +36431,7 @@
             <a:pPr algn="ctr"/>
             <a:r>
               <a:rPr lang="en-SG" b="1" dirty="0"/>
-              <a:t>REST API REQUEST</a:t>
+              <a:t>Data Ingestion</a:t>
             </a:r>
           </a:p>
         </p:txBody>
@@ -36480,7 +36480,7 @@
             <a:pPr algn="ctr"/>
             <a:r>
               <a:rPr lang="en-SG" b="1" dirty="0"/>
-              <a:t>BACKEND API </a:t>
+              <a:t>Database</a:t>
             </a:r>
           </a:p>
         </p:txBody>
@@ -36529,7 +36529,7 @@
             <a:pPr algn="ctr"/>
             <a:r>
               <a:rPr lang="en-SG" b="1" dirty="0"/>
-              <a:t>DATABASE</a:t>
+              <a:t>Backend API</a:t>
             </a:r>
           </a:p>
         </p:txBody>
@@ -36627,7 +36627,7 @@
             <a:pPr algn="ctr"/>
             <a:r>
               <a:rPr lang="en-SG" b="1" dirty="0"/>
-              <a:t>DATABASE</a:t>
+              <a:t>Prediction</a:t>
             </a:r>
           </a:p>
         </p:txBody>
@@ -36676,7 +36676,7 @@
             <a:pPr algn="ctr"/>
             <a:r>
               <a:rPr lang="en-SG" b="1" dirty="0"/>
-              <a:t>BACKEND API </a:t>
+              <a:t>Notification</a:t>
             </a:r>
           </a:p>
         </p:txBody>
@@ -36725,7 +36725,7 @@
             <a:pPr algn="ctr"/>
             <a:r>
               <a:rPr lang="en-SG" b="1" dirty="0"/>
-              <a:t>FRONTEND DASHBOARD</a:t>
+              <a:t>Telegram Bot</a:t>
             </a:r>
           </a:p>
         </p:txBody>
@@ -37069,109 +37069,101 @@
       </p:cxnSp>
       <p:sp>
         <p:nvSpPr>
-          <p:cNvPr id="42" name="TextBox 41">
-            <a:extLst>
-              <a:ext uri="{FF2B5EF4-FFF2-40B4-BE49-F238E27FC236}">
-                <a16:creationId xmlns:a16="http://schemas.microsoft.com/office/drawing/2014/main" id="{B0DB540F-21B3-F355-93D9-C446F53FE396}"/>
-              </a:ext>
-            </a:extLst>
-          </p:cNvPr>
-          <p:cNvSpPr txBox="1"/>
+          <p:cNvPr id="8" name="Rectangle 7">
+            <a:extLst>
+              <a:ext uri="{FF2B5EF4-FFF2-40B4-BE49-F238E27FC236}">
+                <a16:creationId xmlns:a16="http://schemas.microsoft.com/office/drawing/2014/main" id="{FF7827A5-7D57-8FF6-F4F0-A50EEA2ADA8F}"/>
+              </a:ext>
+            </a:extLst>
+          </p:cNvPr>
+          <p:cNvSpPr/>
           <p:nvPr/>
         </p:nvSpPr>
         <p:spPr>
           <a:xfrm>
-            <a:off x="3220836" y="5087428"/>
-            <a:ext cx="938077" cy="369332"/>
+            <a:off x="7591265" y="5029116"/>
+            <a:ext cx="2007080" cy="971910"/>
           </a:xfrm>
           <a:prstGeom prst="rect">
             <a:avLst/>
           </a:prstGeom>
-          <a:noFill/>
         </p:spPr>
-        <p:txBody>
-          <a:bodyPr wrap="none" rtlCol="0">
-            <a:spAutoFit/>
-          </a:bodyPr>
+        <p:style>
+          <a:lnRef idx="2">
+            <a:schemeClr val="accent2">
+              <a:shade val="15000"/>
+            </a:schemeClr>
+          </a:lnRef>
+          <a:fillRef idx="1">
+            <a:schemeClr val="accent2"/>
+          </a:fillRef>
+          <a:effectRef idx="0">
+            <a:schemeClr val="accent2"/>
+          </a:effectRef>
+          <a:fontRef idx="minor">
+            <a:schemeClr val="lt1"/>
+          </a:fontRef>
+        </p:style>
+        <p:txBody>
+          <a:bodyPr rtlCol="0" anchor="ctr"/>
           <a:lstStyle/>
           <a:p>
-            <a:r>
-              <a:rPr lang="en-SG" dirty="0"/>
-              <a:t>Display</a:t>
-            </a:r>
-          </a:p>
-        </p:txBody>
-      </p:sp>
-      <p:sp>
-        <p:nvSpPr>
-          <p:cNvPr id="44" name="TextBox 43">
-            <a:extLst>
-              <a:ext uri="{FF2B5EF4-FFF2-40B4-BE49-F238E27FC236}">
-                <a16:creationId xmlns:a16="http://schemas.microsoft.com/office/drawing/2014/main" id="{DB9A1047-40CE-AE69-17DB-F70C5AAECBF9}"/>
-              </a:ext>
-            </a:extLst>
-          </p:cNvPr>
-          <p:cNvSpPr txBox="1"/>
+            <a:pPr algn="ctr"/>
+            <a:r>
+              <a:rPr lang="en-SG" b="1" dirty="0"/>
+              <a:t>FRONTEND DASHBOARD</a:t>
+            </a:r>
+          </a:p>
+        </p:txBody>
+      </p:sp>
+      <p:cxnSp>
+        <p:nvCxnSpPr>
+          <p:cNvPr id="12" name="Straight Arrow Connector 11">
+            <a:extLst>
+              <a:ext uri="{FF2B5EF4-FFF2-40B4-BE49-F238E27FC236}">
+                <a16:creationId xmlns:a16="http://schemas.microsoft.com/office/drawing/2014/main" id="{AD051656-A33A-2CF1-E4EB-1BD7EDEF2466}"/>
+              </a:ext>
+            </a:extLst>
+          </p:cNvPr>
+          <p:cNvCxnSpPr>
+            <a:stCxn id="21" idx="3"/>
+            <a:endCxn id="8" idx="1"/>
+          </p:cNvCxnSpPr>
           <p:nvPr/>
-        </p:nvSpPr>
+        </p:nvCxnSpPr>
         <p:spPr>
           <a:xfrm>
-            <a:off x="6324532" y="3060949"/>
-            <a:ext cx="1685026" cy="615553"/>
+            <a:off x="6336113" y="5515071"/>
+            <a:ext cx="1255152" cy="0"/>
           </a:xfrm>
-          <a:prstGeom prst="rect">
+          <a:prstGeom prst="straightConnector1">
             <a:avLst/>
           </a:prstGeom>
-          <a:noFill/>
+          <a:ln w="19050" cap="flat" cmpd="sng" algn="ctr">
+            <a:solidFill>
+              <a:schemeClr val="accent2"/>
+            </a:solidFill>
+            <a:prstDash val="solid"/>
+            <a:round/>
+            <a:headEnd type="none" w="med" len="med"/>
+            <a:tailEnd type="arrow" w="med" len="med"/>
+          </a:ln>
         </p:spPr>
-        <p:txBody>
-          <a:bodyPr wrap="square" rtlCol="0">
-            <a:spAutoFit/>
-          </a:bodyPr>
-          <a:lstStyle/>
-          <a:p>
-            <a:r>
-              <a:rPr lang="en-SG" sz="1700" dirty="0"/>
-              <a:t>Pre-processing</a:t>
-            </a:r>
-          </a:p>
-        </p:txBody>
-      </p:sp>
-      <p:sp>
-        <p:nvSpPr>
-          <p:cNvPr id="50" name="TextBox 49">
-            <a:extLst>
-              <a:ext uri="{FF2B5EF4-FFF2-40B4-BE49-F238E27FC236}">
-                <a16:creationId xmlns:a16="http://schemas.microsoft.com/office/drawing/2014/main" id="{EEFCA747-8D72-04FC-A8D8-1B699871D0F4}"/>
-              </a:ext>
-            </a:extLst>
-          </p:cNvPr>
-          <p:cNvSpPr txBox="1"/>
-          <p:nvPr/>
-        </p:nvSpPr>
-        <p:spPr>
-          <a:xfrm>
-            <a:off x="3220835" y="3274249"/>
-            <a:ext cx="845103" cy="369332"/>
-          </a:xfrm>
-          <a:prstGeom prst="rect">
-            <a:avLst/>
-          </a:prstGeom>
-          <a:noFill/>
-        </p:spPr>
-        <p:txBody>
-          <a:bodyPr wrap="none" rtlCol="0">
-            <a:spAutoFit/>
-          </a:bodyPr>
-          <a:lstStyle/>
-          <a:p>
-            <a:r>
-              <a:rPr lang="en-SG" dirty="0"/>
-              <a:t>Result</a:t>
-            </a:r>
-          </a:p>
-        </p:txBody>
-      </p:sp>
+        <p:style>
+          <a:lnRef idx="0">
+            <a:scrgbClr r="0" g="0" b="0"/>
+          </a:lnRef>
+          <a:fillRef idx="0">
+            <a:scrgbClr r="0" g="0" b="0"/>
+          </a:fillRef>
+          <a:effectRef idx="0">
+            <a:scrgbClr r="0" g="0" b="0"/>
+          </a:effectRef>
+          <a:fontRef idx="minor">
+            <a:schemeClr val="tx1"/>
+          </a:fontRef>
+        </p:style>
+      </p:cxnSp>
     </p:spTree>
     <p:extLst>
       <p:ext uri="{BB962C8B-B14F-4D97-AF65-F5344CB8AC3E}">
@@ -37307,7 +37299,7 @@
           <a:p>
             <a:fld id="{927C0DEB-4AE1-EA4D-826D-E3C22802B942}" type="datetime1">
               <a:rPr lang="en-US" smtClean="0"/>
-              <a:t>7/20/2026</a:t>
+              <a:t>7/27/2026</a:t>
             </a:fld>
             <a:endParaRPr lang="en-US" dirty="0"/>
           </a:p>
@@ -38188,26 +38180,6 @@
 </file>
 
 <file path=customXml/item1.xml><?xml version="1.0" encoding="utf-8"?>
-<p:properties xmlns:p="http://schemas.microsoft.com/office/2006/metadata/properties" xmlns:xsi="http://www.w3.org/2001/XMLSchema-instance" xmlns:pc="http://schemas.microsoft.com/office/infopath/2007/PartnerControls">
-  <documentManagement>
-    <_ip_UnifiedCompliancePolicyUIAction xmlns="http://schemas.microsoft.com/sharepoint/v3" xsi:nil="true"/>
-    <Image xmlns="71af3243-3dd4-4a8d-8c0d-dd76da1f02a5">
-      <Url xsi:nil="true"/>
-      <Description xsi:nil="true"/>
-    </Image>
-    <Status xmlns="71af3243-3dd4-4a8d-8c0d-dd76da1f02a5">Not started</Status>
-    <Background xmlns="71af3243-3dd4-4a8d-8c0d-dd76da1f02a5">false</Background>
-    <_ip_UnifiedCompliancePolicyProperties xmlns="http://schemas.microsoft.com/sharepoint/v3" xsi:nil="true"/>
-    <ImageTagsTaxHTField xmlns="71af3243-3dd4-4a8d-8c0d-dd76da1f02a5">
-      <Terms xmlns="http://schemas.microsoft.com/office/infopath/2007/PartnerControls"/>
-    </ImageTagsTaxHTField>
-    <TaxCatchAll xmlns="230e9df3-be65-4c73-a93b-d1236ebd677e" xsi:nil="true"/>
-    <MediaServiceKeyPoints xmlns="71af3243-3dd4-4a8d-8c0d-dd76da1f02a5" xsi:nil="true"/>
-  </documentManagement>
-</p:properties>
-</file>
-
-<file path=customXml/item2.xml><?xml version="1.0" encoding="utf-8"?>
 <ct:contentTypeSchema xmlns:ct="http://schemas.microsoft.com/office/2006/metadata/contentType" xmlns:ma="http://schemas.microsoft.com/office/2006/metadata/properties/metaAttributes" ct:_="" ma:_="" ma:contentTypeName="Document" ma:contentTypeID="0x01010079F111ED35F8CC479449609E8A0923A6" ma:contentTypeVersion="30" ma:contentTypeDescription="Create a new document." ma:contentTypeScope="" ma:versionID="cec0622158e8f13124e9e8fd4de31bd1">
   <xsd:schema xmlns:xsd="http://www.w3.org/2001/XMLSchema" xmlns:xs="http://www.w3.org/2001/XMLSchema" xmlns:p="http://schemas.microsoft.com/office/2006/metadata/properties" xmlns:ns1="http://schemas.microsoft.com/sharepoint/v3" xmlns:ns2="71af3243-3dd4-4a8d-8c0d-dd76da1f02a5" xmlns:ns3="16c05727-aa75-4e4a-9b5f-8a80a1165891" xmlns:ns4="230e9df3-be65-4c73-a93b-d1236ebd677e" targetNamespace="http://schemas.microsoft.com/office/2006/metadata/properties" ma:root="true" ma:fieldsID="3b52f30ab005d15df08657af532e6e38" ns1:_="" ns2:_="" ns3:_="" ns4:_="">
     <xsd:import namespace="http://schemas.microsoft.com/sharepoint/v3"/>
@@ -38525,6 +38497,26 @@
 </ct:contentTypeSchema>
 </file>
 
+<file path=customXml/item2.xml><?xml version="1.0" encoding="utf-8"?>
+<p:properties xmlns:p="http://schemas.microsoft.com/office/2006/metadata/properties" xmlns:xsi="http://www.w3.org/2001/XMLSchema-instance" xmlns:pc="http://schemas.microsoft.com/office/infopath/2007/PartnerControls">
+  <documentManagement>
+    <_ip_UnifiedCompliancePolicyUIAction xmlns="http://schemas.microsoft.com/sharepoint/v3" xsi:nil="true"/>
+    <Image xmlns="71af3243-3dd4-4a8d-8c0d-dd76da1f02a5">
+      <Url xsi:nil="true"/>
+      <Description xsi:nil="true"/>
+    </Image>
+    <Status xmlns="71af3243-3dd4-4a8d-8c0d-dd76da1f02a5">Not started</Status>
+    <Background xmlns="71af3243-3dd4-4a8d-8c0d-dd76da1f02a5">false</Background>
+    <_ip_UnifiedCompliancePolicyProperties xmlns="http://schemas.microsoft.com/sharepoint/v3" xsi:nil="true"/>
+    <ImageTagsTaxHTField xmlns="71af3243-3dd4-4a8d-8c0d-dd76da1f02a5">
+      <Terms xmlns="http://schemas.microsoft.com/office/infopath/2007/PartnerControls"/>
+    </ImageTagsTaxHTField>
+    <TaxCatchAll xmlns="230e9df3-be65-4c73-a93b-d1236ebd677e" xsi:nil="true"/>
+    <MediaServiceKeyPoints xmlns="71af3243-3dd4-4a8d-8c0d-dd76da1f02a5" xsi:nil="true"/>
+  </documentManagement>
+</p:properties>
+</file>
+
 <file path=customXml/item3.xml><?xml version="1.0" encoding="utf-8"?>
 <?mso-contentType ?>
 <FormTemplates xmlns="http://schemas.microsoft.com/sharepoint/v3/contenttype/forms">
@@ -38535,25 +38527,6 @@
 </file>
 
 <file path=customXml/itemProps1.xml><?xml version="1.0" encoding="utf-8"?>
-<ds:datastoreItem xmlns:ds="http://schemas.openxmlformats.org/officeDocument/2006/customXml" ds:itemID="{D1CEDABF-7176-4A42-8EF9-E5D4DD31FF6C}">
-  <ds:schemaRefs>
-    <ds:schemaRef ds:uri="http://schemas.microsoft.com/office/infopath/2007/PartnerControls"/>
-    <ds:schemaRef ds:uri="http://purl.org/dc/terms/"/>
-    <ds:schemaRef ds:uri="http://schemas.microsoft.com/office/2006/metadata/properties"/>
-    <ds:schemaRef ds:uri="http://schemas.microsoft.com/office/2006/documentManagement/types"/>
-    <ds:schemaRef ds:uri="http://purl.org/dc/dcmitype/"/>
-    <ds:schemaRef ds:uri="http://schemas.openxmlformats.org/package/2006/metadata/core-properties"/>
-    <ds:schemaRef ds:uri="http://www.w3.org/XML/1998/namespace"/>
-    <ds:schemaRef ds:uri="230e9df3-be65-4c73-a93b-d1236ebd677e"/>
-    <ds:schemaRef ds:uri="http://purl.org/dc/elements/1.1/"/>
-    <ds:schemaRef ds:uri="16c05727-aa75-4e4a-9b5f-8a80a1165891"/>
-    <ds:schemaRef ds:uri="71af3243-3dd4-4a8d-8c0d-dd76da1f02a5"/>
-    <ds:schemaRef ds:uri="http://schemas.microsoft.com/sharepoint/v3"/>
-  </ds:schemaRefs>
-</ds:datastoreItem>
-</file>
-
-<file path=customXml/itemProps2.xml><?xml version="1.0" encoding="utf-8"?>
 <ds:datastoreItem xmlns:ds="http://schemas.openxmlformats.org/officeDocument/2006/customXml" ds:itemID="{9EEC3793-C1BC-496C-A03C-202DFFC513D6}">
   <ds:schemaRefs>
     <ds:schemaRef ds:uri="http://schemas.microsoft.com/office/2006/metadata/contentType"/>
@@ -38574,6 +38547,25 @@
 </ds:datastoreItem>
 </file>
 
+<file path=customXml/itemProps2.xml><?xml version="1.0" encoding="utf-8"?>
+<ds:datastoreItem xmlns:ds="http://schemas.openxmlformats.org/officeDocument/2006/customXml" ds:itemID="{D1CEDABF-7176-4A42-8EF9-E5D4DD31FF6C}">
+  <ds:schemaRefs>
+    <ds:schemaRef ds:uri="http://schemas.microsoft.com/office/infopath/2007/PartnerControls"/>
+    <ds:schemaRef ds:uri="http://purl.org/dc/terms/"/>
+    <ds:schemaRef ds:uri="http://schemas.microsoft.com/office/2006/metadata/properties"/>
+    <ds:schemaRef ds:uri="http://schemas.microsoft.com/office/2006/documentManagement/types"/>
+    <ds:schemaRef ds:uri="http://purl.org/dc/dcmitype/"/>
+    <ds:schemaRef ds:uri="http://schemas.openxmlformats.org/package/2006/metadata/core-properties"/>
+    <ds:schemaRef ds:uri="http://www.w3.org/XML/1998/namespace"/>
+    <ds:schemaRef ds:uri="230e9df3-be65-4c73-a93b-d1236ebd677e"/>
+    <ds:schemaRef ds:uri="http://purl.org/dc/elements/1.1/"/>
+    <ds:schemaRef ds:uri="16c05727-aa75-4e4a-9b5f-8a80a1165891"/>
+    <ds:schemaRef ds:uri="71af3243-3dd4-4a8d-8c0d-dd76da1f02a5"/>
+    <ds:schemaRef ds:uri="http://schemas.microsoft.com/sharepoint/v3"/>
+  </ds:schemaRefs>
+</ds:datastoreItem>
+</file>
+
 <file path=customXml/itemProps3.xml><?xml version="1.0" encoding="utf-8"?>
 <ds:datastoreItem xmlns:ds="http://schemas.openxmlformats.org/officeDocument/2006/customXml" ds:itemID="{D3301439-688F-4D19-B908-B48B62C56078}">
   <ds:schemaRefs>

--- a/EGT307 PRESENTATION.pptx
+++ b/EGT307 PRESENTATION.pptx
@@ -19,14 +19,14 @@
     <p:sldId id="275" r:id="rId10"/>
     <p:sldId id="276" r:id="rId11"/>
     <p:sldId id="277" r:id="rId12"/>
-    <p:sldId id="281" r:id="rId13"/>
-    <p:sldId id="282" r:id="rId14"/>
-    <p:sldId id="283" r:id="rId15"/>
-    <p:sldId id="284" r:id="rId16"/>
-    <p:sldId id="267" r:id="rId17"/>
-    <p:sldId id="268" r:id="rId18"/>
-    <p:sldId id="269" r:id="rId19"/>
-    <p:sldId id="270" r:id="rId20"/>
+    <p:sldId id="286" r:id="rId13"/>
+    <p:sldId id="284" r:id="rId14"/>
+    <p:sldId id="282" r:id="rId15"/>
+    <p:sldId id="283" r:id="rId16"/>
+    <p:sldId id="285" r:id="rId17"/>
+    <p:sldId id="281" r:id="rId18"/>
+    <p:sldId id="267" r:id="rId19"/>
+    <p:sldId id="268" r:id="rId20"/>
     <p:sldId id="271" r:id="rId21"/>
     <p:sldId id="274" r:id="rId22"/>
   </p:sldIdLst>
@@ -760,6 +760,90 @@
     <p:extLst>
       <p:ext uri="{BB962C8B-B14F-4D97-AF65-F5344CB8AC3E}">
         <p14:creationId xmlns:p14="http://schemas.microsoft.com/office/powerpoint/2010/main" val="2402005802"/>
+      </p:ext>
+    </p:extLst>
+  </p:cSld>
+  <p:clrMapOvr>
+    <a:masterClrMapping/>
+  </p:clrMapOvr>
+</p:notes>
+</file>
+
+<file path=ppt/notesSlides/notesSlide2.xml><?xml version="1.0" encoding="utf-8"?>
+<p:notes xmlns:a="http://schemas.openxmlformats.org/drawingml/2006/main" xmlns:r="http://schemas.openxmlformats.org/officeDocument/2006/relationships" xmlns:p="http://schemas.openxmlformats.org/presentationml/2006/main">
+  <p:cSld>
+    <p:spTree>
+      <p:nvGrpSpPr>
+        <p:cNvPr id="1" name=""/>
+        <p:cNvGrpSpPr/>
+        <p:nvPr/>
+      </p:nvGrpSpPr>
+      <p:grpSpPr>
+        <a:xfrm>
+          <a:off x="0" y="0"/>
+          <a:ext cx="0" cy="0"/>
+          <a:chOff x="0" y="0"/>
+          <a:chExt cx="0" cy="0"/>
+        </a:xfrm>
+      </p:grpSpPr>
+      <p:sp>
+        <p:nvSpPr>
+          <p:cNvPr id="2" name="Slide Image Placeholder 1"/>
+          <p:cNvSpPr>
+            <a:spLocks noGrp="1" noRot="1" noChangeAspect="1"/>
+          </p:cNvSpPr>
+          <p:nvPr>
+            <p:ph type="sldImg"/>
+          </p:nvPr>
+        </p:nvSpPr>
+        <p:spPr/>
+      </p:sp>
+      <p:sp>
+        <p:nvSpPr>
+          <p:cNvPr id="3" name="Notes Placeholder 2"/>
+          <p:cNvSpPr>
+            <a:spLocks noGrp="1"/>
+          </p:cNvSpPr>
+          <p:nvPr>
+            <p:ph type="body" idx="1"/>
+          </p:nvPr>
+        </p:nvSpPr>
+        <p:spPr/>
+        <p:txBody>
+          <a:bodyPr/>
+          <a:lstStyle/>
+          <a:p>
+            <a:endParaRPr lang="en-SG" dirty="0"/>
+          </a:p>
+        </p:txBody>
+      </p:sp>
+      <p:sp>
+        <p:nvSpPr>
+          <p:cNvPr id="4" name="Slide Number Placeholder 3"/>
+          <p:cNvSpPr>
+            <a:spLocks noGrp="1"/>
+          </p:cNvSpPr>
+          <p:nvPr>
+            <p:ph type="sldNum" sz="quarter" idx="5"/>
+          </p:nvPr>
+        </p:nvSpPr>
+        <p:spPr/>
+        <p:txBody>
+          <a:bodyPr/>
+          <a:lstStyle/>
+          <a:p>
+            <a:fld id="{BFDD6F49-EBB7-4CCF-97A8-E526BB28BB69}" type="slidenum">
+              <a:rPr lang="en-US" smtClean="0"/>
+              <a:t>14</a:t>
+            </a:fld>
+            <a:endParaRPr lang="en-US" dirty="0"/>
+          </a:p>
+        </p:txBody>
+      </p:sp>
+    </p:spTree>
+    <p:extLst>
+      <p:ext uri="{BB962C8B-B14F-4D97-AF65-F5344CB8AC3E}">
+        <p14:creationId xmlns:p14="http://schemas.microsoft.com/office/powerpoint/2010/main" val="997743295"/>
       </p:ext>
     </p:extLst>
   </p:cSld>
@@ -33457,7 +33541,9 @@
           </a:xfrm>
         </p:spPr>
         <p:txBody>
-          <a:bodyPr/>
+          <a:bodyPr>
+            <a:normAutofit fontScale="92500" lnSpcReduction="20000"/>
+          </a:bodyPr>
           <a:lstStyle/>
           <a:p>
             <a:r>
@@ -33481,6 +33567,12 @@
             <a:r>
               <a:rPr lang="en-US" dirty="0"/>
               <a:t>DEREK</a:t>
+            </a:r>
+          </a:p>
+          <a:p>
+            <a:r>
+              <a:rPr lang="en-US" dirty="0"/>
+              <a:t>Louis</a:t>
             </a:r>
           </a:p>
         </p:txBody>
@@ -33520,7 +33612,7 @@
           <p:cNvPr id="2" name="Title 1">
             <a:extLst>
               <a:ext uri="{FF2B5EF4-FFF2-40B4-BE49-F238E27FC236}">
-                <a16:creationId xmlns:a16="http://schemas.microsoft.com/office/drawing/2014/main" id="{E3CD4FA5-0F16-9080-F2C4-2713CDB98D73}"/>
+                <a16:creationId xmlns:a16="http://schemas.microsoft.com/office/drawing/2014/main" id="{286B1922-876E-5121-A1B1-09421CD101B6}"/>
               </a:ext>
             </a:extLst>
           </p:cNvPr>
@@ -33531,14 +33623,21 @@
             <p:ph type="title"/>
           </p:nvPr>
         </p:nvSpPr>
-        <p:spPr/>
-        <p:txBody>
-          <a:bodyPr/>
+        <p:spPr>
+          <a:xfrm>
+            <a:off x="1255032" y="862335"/>
+            <a:ext cx="4389120" cy="5120640"/>
+          </a:xfrm>
+        </p:spPr>
+        <p:txBody>
+          <a:bodyPr anchor="ctr">
+            <a:normAutofit/>
+          </a:bodyPr>
           <a:lstStyle/>
           <a:p>
             <a:r>
               <a:rPr lang="en-SG" dirty="0"/>
-              <a:t>BACKEND API</a:t>
+              <a:t>DATABASE</a:t>
             </a:r>
           </a:p>
         </p:txBody>
@@ -33548,7 +33647,7 @@
           <p:cNvPr id="3" name="Footer Placeholder 2">
             <a:extLst>
               <a:ext uri="{FF2B5EF4-FFF2-40B4-BE49-F238E27FC236}">
-                <a16:creationId xmlns:a16="http://schemas.microsoft.com/office/drawing/2014/main" id="{87D4288F-EF10-D916-115B-E02EBF709DBE}"/>
+                <a16:creationId xmlns:a16="http://schemas.microsoft.com/office/drawing/2014/main" id="{130300D0-5A97-A007-8822-C75A86BC135D}"/>
               </a:ext>
             </a:extLst>
           </p:cNvPr>
@@ -33559,16 +33658,27 @@
             <p:ph type="ftr" sz="quarter" idx="11"/>
           </p:nvPr>
         </p:nvSpPr>
-        <p:spPr/>
-        <p:txBody>
-          <a:bodyPr/>
+        <p:spPr>
+          <a:xfrm rot="16200000">
+            <a:off x="-1005840" y="1525384"/>
+            <a:ext cx="2805405" cy="365125"/>
+          </a:xfrm>
+        </p:spPr>
+        <p:txBody>
+          <a:bodyPr anchor="ctr">
+            <a:normAutofit/>
+          </a:bodyPr>
           <a:lstStyle/>
           <a:p>
+            <a:pPr>
+              <a:spcAft>
+                <a:spcPts val="600"/>
+              </a:spcAft>
+            </a:pPr>
             <a:r>
               <a:rPr lang="en-US"/>
               <a:t>SAMPLE FOOTER TEXT</a:t>
             </a:r>
-            <a:endParaRPr lang="en-US" dirty="0"/>
           </a:p>
         </p:txBody>
       </p:sp>
@@ -33577,7 +33687,7 @@
           <p:cNvPr id="4" name="Content Placeholder 3">
             <a:extLst>
               <a:ext uri="{FF2B5EF4-FFF2-40B4-BE49-F238E27FC236}">
-                <a16:creationId xmlns:a16="http://schemas.microsoft.com/office/drawing/2014/main" id="{8EBC3E0A-B721-E75C-D747-71415EBBE5BB}"/>
+                <a16:creationId xmlns:a16="http://schemas.microsoft.com/office/drawing/2014/main" id="{AF3B857A-83E3-2D2A-978B-032EBACA2376}"/>
               </a:ext>
             </a:extLst>
           </p:cNvPr>
@@ -33588,12 +33698,25 @@
             <p:ph sz="quarter" idx="13"/>
           </p:nvPr>
         </p:nvSpPr>
-        <p:spPr/>
-        <p:txBody>
-          <a:bodyPr/>
+        <p:spPr>
+          <a:xfrm>
+            <a:off x="6547100" y="816615"/>
+            <a:ext cx="4389120" cy="5212080"/>
+          </a:xfrm>
+        </p:spPr>
+        <p:txBody>
+          <a:bodyPr anchor="ctr">
+            <a:normAutofit/>
+          </a:bodyPr>
           <a:lstStyle/>
           <a:p>
-            <a:endParaRPr lang="en-SG"/>
+            <a:r>
+              <a:rPr lang="en-SG" dirty="0"/>
+              <a:t>The Database Service stores the imported environmental monitoring dataset, anomaly prediction results, and historical records. The Backend API retrieves data from the database for preprocessing and machine learning analysis, while prediction results are stored for future reference and visualisation. This provides persistent and centralized data storage, enabling efficient data management and historical analysis.</a:t>
+            </a:r>
+          </a:p>
+          <a:p>
+            <a:endParaRPr lang="en-SG" dirty="0"/>
           </a:p>
         </p:txBody>
       </p:sp>
@@ -33602,7 +33725,7 @@
           <p:cNvPr id="5" name="Date Placeholder 4">
             <a:extLst>
               <a:ext uri="{FF2B5EF4-FFF2-40B4-BE49-F238E27FC236}">
-                <a16:creationId xmlns:a16="http://schemas.microsoft.com/office/drawing/2014/main" id="{F346DFDA-D36A-641B-1086-9A4690C23E0E}"/>
+                <a16:creationId xmlns:a16="http://schemas.microsoft.com/office/drawing/2014/main" id="{84920A6B-C20E-B038-D917-D179D6C31213}"/>
               </a:ext>
             </a:extLst>
           </p:cNvPr>
@@ -33613,16 +33736,33 @@
             <p:ph type="dt" sz="half" idx="10"/>
           </p:nvPr>
         </p:nvSpPr>
-        <p:spPr/>
-        <p:txBody>
-          <a:bodyPr/>
+        <p:spPr>
+          <a:xfrm rot="5400000">
+            <a:off x="10040831" y="4206240"/>
+            <a:ext cx="3494314" cy="365125"/>
+          </a:xfrm>
+        </p:spPr>
+        <p:txBody>
+          <a:bodyPr anchor="ctr">
+            <a:normAutofit/>
+          </a:bodyPr>
           <a:lstStyle/>
           <a:p>
+            <a:pPr>
+              <a:spcAft>
+                <a:spcPts val="600"/>
+              </a:spcAft>
+            </a:pPr>
             <a:fld id="{927C0DEB-4AE1-EA4D-826D-E3C22802B942}" type="datetime1">
               <a:rPr lang="en-US" smtClean="0"/>
+              <a:pPr>
+                <a:spcAft>
+                  <a:spcPts val="600"/>
+                </a:spcAft>
+              </a:pPr>
               <a:t>7/27/2026</a:t>
             </a:fld>
-            <a:endParaRPr lang="en-US" dirty="0"/>
+            <a:endParaRPr lang="en-US"/>
           </a:p>
         </p:txBody>
       </p:sp>
@@ -33631,7 +33771,7 @@
           <p:cNvPr id="6" name="Slide Number Placeholder 5">
             <a:extLst>
               <a:ext uri="{FF2B5EF4-FFF2-40B4-BE49-F238E27FC236}">
-                <a16:creationId xmlns:a16="http://schemas.microsoft.com/office/drawing/2014/main" id="{C127D931-F45C-2EE8-A41C-7C4E0A181684}"/>
+                <a16:creationId xmlns:a16="http://schemas.microsoft.com/office/drawing/2014/main" id="{F5D522DE-ABA7-62B2-AAB9-C272B74D3EC1}"/>
               </a:ext>
             </a:extLst>
           </p:cNvPr>
@@ -33642,24 +33782,40 @@
             <p:ph type="sldNum" sz="quarter" idx="12"/>
           </p:nvPr>
         </p:nvSpPr>
-        <p:spPr/>
-        <p:txBody>
-          <a:bodyPr/>
+        <p:spPr>
+          <a:xfrm>
+            <a:off x="11573385" y="6229552"/>
+            <a:ext cx="429207" cy="365125"/>
+          </a:xfrm>
+        </p:spPr>
+        <p:txBody>
+          <a:bodyPr anchor="ctr">
+            <a:normAutofit/>
+          </a:bodyPr>
           <a:lstStyle/>
           <a:p>
+            <a:pPr>
+              <a:spcAft>
+                <a:spcPts val="600"/>
+              </a:spcAft>
+            </a:pPr>
             <a:fld id="{CC057153-B650-4DEB-B370-79DDCFDCE934}" type="slidenum">
               <a:rPr lang="en-US" smtClean="0"/>
-              <a:pPr/>
+              <a:pPr>
+                <a:spcAft>
+                  <a:spcPts val="600"/>
+                </a:spcAft>
+              </a:pPr>
               <a:t>10</a:t>
             </a:fld>
-            <a:endParaRPr lang="en-US" dirty="0"/>
+            <a:endParaRPr lang="en-US"/>
           </a:p>
         </p:txBody>
       </p:sp>
     </p:spTree>
     <p:extLst>
       <p:ext uri="{BB962C8B-B14F-4D97-AF65-F5344CB8AC3E}">
-        <p14:creationId xmlns:p14="http://schemas.microsoft.com/office/powerpoint/2010/main" val="2127768817"/>
+        <p14:creationId xmlns:p14="http://schemas.microsoft.com/office/powerpoint/2010/main" val="2133928878"/>
       </p:ext>
     </p:extLst>
   </p:cSld>
@@ -33691,7 +33847,7 @@
           <p:cNvPr id="2" name="Title 1">
             <a:extLst>
               <a:ext uri="{FF2B5EF4-FFF2-40B4-BE49-F238E27FC236}">
-                <a16:creationId xmlns:a16="http://schemas.microsoft.com/office/drawing/2014/main" id="{151996FA-5CDB-38EA-C314-20A7D3B73B1E}"/>
+                <a16:creationId xmlns:a16="http://schemas.microsoft.com/office/drawing/2014/main" id="{E3CD4FA5-0F16-9080-F2C4-2713CDB98D73}"/>
               </a:ext>
             </a:extLst>
           </p:cNvPr>
@@ -33702,14 +33858,21 @@
             <p:ph type="title"/>
           </p:nvPr>
         </p:nvSpPr>
-        <p:spPr/>
-        <p:txBody>
-          <a:bodyPr/>
+        <p:spPr>
+          <a:xfrm>
+            <a:off x="1255032" y="862335"/>
+            <a:ext cx="4389120" cy="5120640"/>
+          </a:xfrm>
+        </p:spPr>
+        <p:txBody>
+          <a:bodyPr anchor="ctr">
+            <a:normAutofit/>
+          </a:bodyPr>
           <a:lstStyle/>
           <a:p>
             <a:r>
               <a:rPr lang="en-SG" dirty="0"/>
-              <a:t>MACHINE LEARNING</a:t>
+              <a:t>BACKEND API</a:t>
             </a:r>
           </a:p>
         </p:txBody>
@@ -33719,7 +33882,7 @@
           <p:cNvPr id="3" name="Footer Placeholder 2">
             <a:extLst>
               <a:ext uri="{FF2B5EF4-FFF2-40B4-BE49-F238E27FC236}">
-                <a16:creationId xmlns:a16="http://schemas.microsoft.com/office/drawing/2014/main" id="{32F2DFD3-85FB-CCD8-8239-D2725E65F67A}"/>
+                <a16:creationId xmlns:a16="http://schemas.microsoft.com/office/drawing/2014/main" id="{87D4288F-EF10-D916-115B-E02EBF709DBE}"/>
               </a:ext>
             </a:extLst>
           </p:cNvPr>
@@ -33730,16 +33893,27 @@
             <p:ph type="ftr" sz="quarter" idx="11"/>
           </p:nvPr>
         </p:nvSpPr>
-        <p:spPr/>
-        <p:txBody>
-          <a:bodyPr/>
+        <p:spPr>
+          <a:xfrm rot="16200000">
+            <a:off x="-1005840" y="1525384"/>
+            <a:ext cx="2805405" cy="365125"/>
+          </a:xfrm>
+        </p:spPr>
+        <p:txBody>
+          <a:bodyPr anchor="ctr">
+            <a:normAutofit/>
+          </a:bodyPr>
           <a:lstStyle/>
           <a:p>
+            <a:pPr>
+              <a:spcAft>
+                <a:spcPts val="600"/>
+              </a:spcAft>
+            </a:pPr>
             <a:r>
               <a:rPr lang="en-US"/>
               <a:t>SAMPLE FOOTER TEXT</a:t>
             </a:r>
-            <a:endParaRPr lang="en-US" dirty="0"/>
           </a:p>
         </p:txBody>
       </p:sp>
@@ -33748,7 +33922,7 @@
           <p:cNvPr id="4" name="Content Placeholder 3">
             <a:extLst>
               <a:ext uri="{FF2B5EF4-FFF2-40B4-BE49-F238E27FC236}">
-                <a16:creationId xmlns:a16="http://schemas.microsoft.com/office/drawing/2014/main" id="{711FD2D7-80AB-8915-426E-1B7BB86AD5FA}"/>
+                <a16:creationId xmlns:a16="http://schemas.microsoft.com/office/drawing/2014/main" id="{8EBC3E0A-B721-E75C-D747-71415EBBE5BB}"/>
               </a:ext>
             </a:extLst>
           </p:cNvPr>
@@ -33759,12 +33933,25 @@
             <p:ph sz="quarter" idx="13"/>
           </p:nvPr>
         </p:nvSpPr>
-        <p:spPr/>
-        <p:txBody>
-          <a:bodyPr/>
+        <p:spPr>
+          <a:xfrm>
+            <a:off x="6547100" y="816615"/>
+            <a:ext cx="4389120" cy="5212080"/>
+          </a:xfrm>
+        </p:spPr>
+        <p:txBody>
+          <a:bodyPr anchor="ctr">
+            <a:normAutofit/>
+          </a:bodyPr>
           <a:lstStyle/>
           <a:p>
-            <a:endParaRPr lang="en-SG"/>
+            <a:r>
+              <a:rPr lang="en-SG" dirty="0"/>
+              <a:t>The Backend API Service acts as the communication layer between all microservices. It receives requests from the Frontend Dashboard, retrieves sensor data from the database, sends data to the Machine Learning Service for prediction, stores the prediction results, and returns the processed information to the user.</a:t>
+            </a:r>
+          </a:p>
+          <a:p>
+            <a:endParaRPr lang="en-SG" dirty="0"/>
           </a:p>
         </p:txBody>
       </p:sp>
@@ -33773,7 +33960,7 @@
           <p:cNvPr id="5" name="Date Placeholder 4">
             <a:extLst>
               <a:ext uri="{FF2B5EF4-FFF2-40B4-BE49-F238E27FC236}">
-                <a16:creationId xmlns:a16="http://schemas.microsoft.com/office/drawing/2014/main" id="{8A36F9D2-4C85-2A4E-4F02-F16819F34517}"/>
+                <a16:creationId xmlns:a16="http://schemas.microsoft.com/office/drawing/2014/main" id="{F346DFDA-D36A-641B-1086-9A4690C23E0E}"/>
               </a:ext>
             </a:extLst>
           </p:cNvPr>
@@ -33784,16 +33971,33 @@
             <p:ph type="dt" sz="half" idx="10"/>
           </p:nvPr>
         </p:nvSpPr>
-        <p:spPr/>
-        <p:txBody>
-          <a:bodyPr/>
+        <p:spPr>
+          <a:xfrm rot="5400000">
+            <a:off x="10040831" y="4206240"/>
+            <a:ext cx="3494314" cy="365125"/>
+          </a:xfrm>
+        </p:spPr>
+        <p:txBody>
+          <a:bodyPr anchor="ctr">
+            <a:normAutofit/>
+          </a:bodyPr>
           <a:lstStyle/>
           <a:p>
+            <a:pPr>
+              <a:spcAft>
+                <a:spcPts val="600"/>
+              </a:spcAft>
+            </a:pPr>
             <a:fld id="{927C0DEB-4AE1-EA4D-826D-E3C22802B942}" type="datetime1">
               <a:rPr lang="en-US" smtClean="0"/>
+              <a:pPr>
+                <a:spcAft>
+                  <a:spcPts val="600"/>
+                </a:spcAft>
+              </a:pPr>
               <a:t>7/27/2026</a:t>
             </a:fld>
-            <a:endParaRPr lang="en-US" dirty="0"/>
+            <a:endParaRPr lang="en-US"/>
           </a:p>
         </p:txBody>
       </p:sp>
@@ -33802,7 +34006,7 @@
           <p:cNvPr id="6" name="Slide Number Placeholder 5">
             <a:extLst>
               <a:ext uri="{FF2B5EF4-FFF2-40B4-BE49-F238E27FC236}">
-                <a16:creationId xmlns:a16="http://schemas.microsoft.com/office/drawing/2014/main" id="{F89C23D6-8443-978E-F5FF-276AD0A7C93F}"/>
+                <a16:creationId xmlns:a16="http://schemas.microsoft.com/office/drawing/2014/main" id="{C127D931-F45C-2EE8-A41C-7C4E0A181684}"/>
               </a:ext>
             </a:extLst>
           </p:cNvPr>
@@ -33813,24 +34017,40 @@
             <p:ph type="sldNum" sz="quarter" idx="12"/>
           </p:nvPr>
         </p:nvSpPr>
-        <p:spPr/>
-        <p:txBody>
-          <a:bodyPr/>
+        <p:spPr>
+          <a:xfrm>
+            <a:off x="11573385" y="6229552"/>
+            <a:ext cx="429207" cy="365125"/>
+          </a:xfrm>
+        </p:spPr>
+        <p:txBody>
+          <a:bodyPr anchor="ctr">
+            <a:normAutofit/>
+          </a:bodyPr>
           <a:lstStyle/>
           <a:p>
+            <a:pPr>
+              <a:spcAft>
+                <a:spcPts val="600"/>
+              </a:spcAft>
+            </a:pPr>
             <a:fld id="{CC057153-B650-4DEB-B370-79DDCFDCE934}" type="slidenum">
               <a:rPr lang="en-US" smtClean="0"/>
-              <a:pPr/>
+              <a:pPr>
+                <a:spcAft>
+                  <a:spcPts val="600"/>
+                </a:spcAft>
+              </a:pPr>
               <a:t>11</a:t>
             </a:fld>
-            <a:endParaRPr lang="en-US" dirty="0"/>
+            <a:endParaRPr lang="en-US"/>
           </a:p>
         </p:txBody>
       </p:sp>
     </p:spTree>
     <p:extLst>
       <p:ext uri="{BB962C8B-B14F-4D97-AF65-F5344CB8AC3E}">
-        <p14:creationId xmlns:p14="http://schemas.microsoft.com/office/powerpoint/2010/main" val="308232602"/>
+        <p14:creationId xmlns:p14="http://schemas.microsoft.com/office/powerpoint/2010/main" val="2127768817"/>
       </p:ext>
     </p:extLst>
   </p:cSld>
@@ -33862,7 +34082,7 @@
           <p:cNvPr id="2" name="Title 1">
             <a:extLst>
               <a:ext uri="{FF2B5EF4-FFF2-40B4-BE49-F238E27FC236}">
-                <a16:creationId xmlns:a16="http://schemas.microsoft.com/office/drawing/2014/main" id="{286B1922-876E-5121-A1B1-09421CD101B6}"/>
+                <a16:creationId xmlns:a16="http://schemas.microsoft.com/office/drawing/2014/main" id="{151996FA-5CDB-38EA-C314-20A7D3B73B1E}"/>
               </a:ext>
             </a:extLst>
           </p:cNvPr>
@@ -33873,14 +34093,21 @@
             <p:ph type="title"/>
           </p:nvPr>
         </p:nvSpPr>
-        <p:spPr/>
-        <p:txBody>
-          <a:bodyPr/>
+        <p:spPr>
+          <a:xfrm>
+            <a:off x="1255032" y="862335"/>
+            <a:ext cx="4389120" cy="5120640"/>
+          </a:xfrm>
+        </p:spPr>
+        <p:txBody>
+          <a:bodyPr anchor="ctr">
+            <a:normAutofit/>
+          </a:bodyPr>
           <a:lstStyle/>
           <a:p>
             <a:r>
               <a:rPr lang="en-SG" dirty="0"/>
-              <a:t>DATABASE</a:t>
+              <a:t>MACHINE LEARNING</a:t>
             </a:r>
           </a:p>
         </p:txBody>
@@ -33890,7 +34117,7 @@
           <p:cNvPr id="3" name="Footer Placeholder 2">
             <a:extLst>
               <a:ext uri="{FF2B5EF4-FFF2-40B4-BE49-F238E27FC236}">
-                <a16:creationId xmlns:a16="http://schemas.microsoft.com/office/drawing/2014/main" id="{130300D0-5A97-A007-8822-C75A86BC135D}"/>
+                <a16:creationId xmlns:a16="http://schemas.microsoft.com/office/drawing/2014/main" id="{32F2DFD3-85FB-CCD8-8239-D2725E65F67A}"/>
               </a:ext>
             </a:extLst>
           </p:cNvPr>
@@ -33901,16 +34128,27 @@
             <p:ph type="ftr" sz="quarter" idx="11"/>
           </p:nvPr>
         </p:nvSpPr>
-        <p:spPr/>
-        <p:txBody>
-          <a:bodyPr/>
+        <p:spPr>
+          <a:xfrm rot="16200000">
+            <a:off x="-1005840" y="1525384"/>
+            <a:ext cx="2805405" cy="365125"/>
+          </a:xfrm>
+        </p:spPr>
+        <p:txBody>
+          <a:bodyPr anchor="ctr">
+            <a:normAutofit/>
+          </a:bodyPr>
           <a:lstStyle/>
           <a:p>
+            <a:pPr>
+              <a:spcAft>
+                <a:spcPts val="600"/>
+              </a:spcAft>
+            </a:pPr>
             <a:r>
               <a:rPr lang="en-US"/>
               <a:t>SAMPLE FOOTER TEXT</a:t>
             </a:r>
-            <a:endParaRPr lang="en-US" dirty="0"/>
           </a:p>
         </p:txBody>
       </p:sp>
@@ -33919,7 +34157,7 @@
           <p:cNvPr id="4" name="Content Placeholder 3">
             <a:extLst>
               <a:ext uri="{FF2B5EF4-FFF2-40B4-BE49-F238E27FC236}">
-                <a16:creationId xmlns:a16="http://schemas.microsoft.com/office/drawing/2014/main" id="{AF3B857A-83E3-2D2A-978B-032EBACA2376}"/>
+                <a16:creationId xmlns:a16="http://schemas.microsoft.com/office/drawing/2014/main" id="{711FD2D7-80AB-8915-426E-1B7BB86AD5FA}"/>
               </a:ext>
             </a:extLst>
           </p:cNvPr>
@@ -33930,12 +34168,25 @@
             <p:ph sz="quarter" idx="13"/>
           </p:nvPr>
         </p:nvSpPr>
-        <p:spPr/>
-        <p:txBody>
-          <a:bodyPr/>
+        <p:spPr>
+          <a:xfrm>
+            <a:off x="6547100" y="816615"/>
+            <a:ext cx="4389120" cy="5212080"/>
+          </a:xfrm>
+        </p:spPr>
+        <p:txBody>
+          <a:bodyPr anchor="ctr">
+            <a:normAutofit/>
+          </a:bodyPr>
           <a:lstStyle/>
           <a:p>
-            <a:endParaRPr lang="en-SG"/>
+            <a:r>
+              <a:rPr lang="en-SG" dirty="0"/>
+              <a:t>The Machine Learning Service receives validated sensor data from the Backend API, analyses it using the trained model, and returns prediction results. If an abnormal condition is detected, the Backend API stores the result in the database and triggers the Notification Service to send a Telegram alert.</a:t>
+            </a:r>
+          </a:p>
+          <a:p>
+            <a:endParaRPr lang="en-SG" dirty="0"/>
           </a:p>
         </p:txBody>
       </p:sp>
@@ -33944,7 +34195,7 @@
           <p:cNvPr id="5" name="Date Placeholder 4">
             <a:extLst>
               <a:ext uri="{FF2B5EF4-FFF2-40B4-BE49-F238E27FC236}">
-                <a16:creationId xmlns:a16="http://schemas.microsoft.com/office/drawing/2014/main" id="{84920A6B-C20E-B038-D917-D179D6C31213}"/>
+                <a16:creationId xmlns:a16="http://schemas.microsoft.com/office/drawing/2014/main" id="{8A36F9D2-4C85-2A4E-4F02-F16819F34517}"/>
               </a:ext>
             </a:extLst>
           </p:cNvPr>
@@ -33955,16 +34206,33 @@
             <p:ph type="dt" sz="half" idx="10"/>
           </p:nvPr>
         </p:nvSpPr>
-        <p:spPr/>
-        <p:txBody>
-          <a:bodyPr/>
+        <p:spPr>
+          <a:xfrm rot="5400000">
+            <a:off x="10040831" y="4206240"/>
+            <a:ext cx="3494314" cy="365125"/>
+          </a:xfrm>
+        </p:spPr>
+        <p:txBody>
+          <a:bodyPr anchor="ctr">
+            <a:normAutofit/>
+          </a:bodyPr>
           <a:lstStyle/>
           <a:p>
+            <a:pPr>
+              <a:spcAft>
+                <a:spcPts val="600"/>
+              </a:spcAft>
+            </a:pPr>
             <a:fld id="{927C0DEB-4AE1-EA4D-826D-E3C22802B942}" type="datetime1">
               <a:rPr lang="en-US" smtClean="0"/>
+              <a:pPr>
+                <a:spcAft>
+                  <a:spcPts val="600"/>
+                </a:spcAft>
+              </a:pPr>
               <a:t>7/27/2026</a:t>
             </a:fld>
-            <a:endParaRPr lang="en-US" dirty="0"/>
+            <a:endParaRPr lang="en-US"/>
           </a:p>
         </p:txBody>
       </p:sp>
@@ -33973,7 +34241,7 @@
           <p:cNvPr id="6" name="Slide Number Placeholder 5">
             <a:extLst>
               <a:ext uri="{FF2B5EF4-FFF2-40B4-BE49-F238E27FC236}">
-                <a16:creationId xmlns:a16="http://schemas.microsoft.com/office/drawing/2014/main" id="{F5D522DE-ABA7-62B2-AAB9-C272B74D3EC1}"/>
+                <a16:creationId xmlns:a16="http://schemas.microsoft.com/office/drawing/2014/main" id="{F89C23D6-8443-978E-F5FF-276AD0A7C93F}"/>
               </a:ext>
             </a:extLst>
           </p:cNvPr>
@@ -33984,24 +34252,40 @@
             <p:ph type="sldNum" sz="quarter" idx="12"/>
           </p:nvPr>
         </p:nvSpPr>
-        <p:spPr/>
-        <p:txBody>
-          <a:bodyPr/>
+        <p:spPr>
+          <a:xfrm>
+            <a:off x="11573385" y="6229552"/>
+            <a:ext cx="429207" cy="365125"/>
+          </a:xfrm>
+        </p:spPr>
+        <p:txBody>
+          <a:bodyPr anchor="ctr">
+            <a:normAutofit/>
+          </a:bodyPr>
           <a:lstStyle/>
           <a:p>
+            <a:pPr>
+              <a:spcAft>
+                <a:spcPts val="600"/>
+              </a:spcAft>
+            </a:pPr>
             <a:fld id="{CC057153-B650-4DEB-B370-79DDCFDCE934}" type="slidenum">
               <a:rPr lang="en-US" smtClean="0"/>
-              <a:pPr/>
+              <a:pPr>
+                <a:spcAft>
+                  <a:spcPts val="600"/>
+                </a:spcAft>
+              </a:pPr>
               <a:t>12</a:t>
             </a:fld>
-            <a:endParaRPr lang="en-US" dirty="0"/>
+            <a:endParaRPr lang="en-US"/>
           </a:p>
         </p:txBody>
       </p:sp>
     </p:spTree>
     <p:extLst>
       <p:ext uri="{BB962C8B-B14F-4D97-AF65-F5344CB8AC3E}">
-        <p14:creationId xmlns:p14="http://schemas.microsoft.com/office/powerpoint/2010/main" val="2133928878"/>
+        <p14:creationId xmlns:p14="http://schemas.microsoft.com/office/powerpoint/2010/main" val="308232602"/>
       </p:ext>
     </p:extLst>
   </p:cSld>
@@ -34033,25 +34317,32 @@
           <p:cNvPr id="2" name="Title 1">
             <a:extLst>
               <a:ext uri="{FF2B5EF4-FFF2-40B4-BE49-F238E27FC236}">
-                <a16:creationId xmlns:a16="http://schemas.microsoft.com/office/drawing/2014/main" id="{DEFF6106-7A0A-48DF-A54A-1203136FE872}"/>
-              </a:ext>
-            </a:extLst>
-          </p:cNvPr>
-          <p:cNvSpPr>
-            <a:spLocks noGrp="1"/>
-          </p:cNvSpPr>
-          <p:nvPr>
-            <p:ph type="ctrTitle"/>
-          </p:nvPr>
-        </p:nvSpPr>
-        <p:spPr/>
-        <p:txBody>
-          <a:bodyPr/>
+                <a16:creationId xmlns:a16="http://schemas.microsoft.com/office/drawing/2014/main" id="{B25E0C94-20FB-C969-6C19-69419842B4E4}"/>
+              </a:ext>
+            </a:extLst>
+          </p:cNvPr>
+          <p:cNvSpPr>
+            <a:spLocks noGrp="1"/>
+          </p:cNvSpPr>
+          <p:nvPr>
+            <p:ph type="title"/>
+          </p:nvPr>
+        </p:nvSpPr>
+        <p:spPr>
+          <a:xfrm>
+            <a:off x="1255032" y="862335"/>
+            <a:ext cx="4389120" cy="5120640"/>
+          </a:xfrm>
+        </p:spPr>
+        <p:txBody>
+          <a:bodyPr anchor="ctr">
+            <a:normAutofit/>
+          </a:bodyPr>
           <a:lstStyle/>
           <a:p>
             <a:r>
               <a:rPr lang="en-SG" dirty="0"/>
-              <a:t>Docker</a:t>
+              <a:t>NOTIFICATION SERVICE</a:t>
             </a:r>
           </a:p>
         </p:txBody>
@@ -34061,7 +34352,7 @@
           <p:cNvPr id="3" name="Footer Placeholder 2">
             <a:extLst>
               <a:ext uri="{FF2B5EF4-FFF2-40B4-BE49-F238E27FC236}">
-                <a16:creationId xmlns:a16="http://schemas.microsoft.com/office/drawing/2014/main" id="{B2BCAD1A-CFBC-A349-DD67-7349B93D3720}"/>
+                <a16:creationId xmlns:a16="http://schemas.microsoft.com/office/drawing/2014/main" id="{EB95D6F0-E4EC-52B6-2932-C1E90A398A61}"/>
               </a:ext>
             </a:extLst>
           </p:cNvPr>
@@ -34072,25 +34363,71 @@
             <p:ph type="ftr" sz="quarter" idx="11"/>
           </p:nvPr>
         </p:nvSpPr>
-        <p:spPr/>
-        <p:txBody>
-          <a:bodyPr/>
+        <p:spPr>
+          <a:xfrm rot="16200000">
+            <a:off x="-1005840" y="1525384"/>
+            <a:ext cx="2805405" cy="365125"/>
+          </a:xfrm>
+        </p:spPr>
+        <p:txBody>
+          <a:bodyPr anchor="ctr">
+            <a:normAutofit/>
+          </a:bodyPr>
           <a:lstStyle/>
           <a:p>
+            <a:pPr>
+              <a:spcAft>
+                <a:spcPts val="600"/>
+              </a:spcAft>
+            </a:pPr>
             <a:r>
               <a:rPr lang="en-US"/>
               <a:t>SAMPLE FOOTER TEXT</a:t>
             </a:r>
-            <a:endParaRPr lang="en-US" dirty="0"/>
-          </a:p>
-        </p:txBody>
-      </p:sp>
-      <p:sp>
-        <p:nvSpPr>
-          <p:cNvPr id="4" name="Date Placeholder 3">
-            <a:extLst>
-              <a:ext uri="{FF2B5EF4-FFF2-40B4-BE49-F238E27FC236}">
-                <a16:creationId xmlns:a16="http://schemas.microsoft.com/office/drawing/2014/main" id="{3BA4730D-F0FF-B752-323B-BE0157CA02F8}"/>
+          </a:p>
+        </p:txBody>
+      </p:sp>
+      <p:sp>
+        <p:nvSpPr>
+          <p:cNvPr id="4" name="Content Placeholder 3">
+            <a:extLst>
+              <a:ext uri="{FF2B5EF4-FFF2-40B4-BE49-F238E27FC236}">
+                <a16:creationId xmlns:a16="http://schemas.microsoft.com/office/drawing/2014/main" id="{5D1878C6-6400-093D-A46A-E042384F9F0D}"/>
+              </a:ext>
+            </a:extLst>
+          </p:cNvPr>
+          <p:cNvSpPr>
+            <a:spLocks noGrp="1"/>
+          </p:cNvSpPr>
+          <p:nvPr>
+            <p:ph sz="quarter" idx="13"/>
+          </p:nvPr>
+        </p:nvSpPr>
+        <p:spPr>
+          <a:xfrm>
+            <a:off x="6547100" y="816615"/>
+            <a:ext cx="4389120" cy="5212080"/>
+          </a:xfrm>
+        </p:spPr>
+        <p:txBody>
+          <a:bodyPr anchor="ctr">
+            <a:normAutofit/>
+          </a:bodyPr>
+          <a:lstStyle/>
+          <a:p>
+            <a:r>
+              <a:rPr lang="en-SG" dirty="0"/>
+              <a:t>The Notification Service monitors the AI prediction results and checks for abnormal environmental conditions. When a sensor reading exceeds the predefined threshold, it automatically sends an alert to users through a Telegram bot. This allows users to receive instant notifications on their phones and respond quickly. As a separate microservice, it is also easy to maintain, update, and scale independently.</a:t>
+            </a:r>
+          </a:p>
+        </p:txBody>
+      </p:sp>
+      <p:sp>
+        <p:nvSpPr>
+          <p:cNvPr id="5" name="Date Placeholder 4">
+            <a:extLst>
+              <a:ext uri="{FF2B5EF4-FFF2-40B4-BE49-F238E27FC236}">
+                <a16:creationId xmlns:a16="http://schemas.microsoft.com/office/drawing/2014/main" id="{CB2B7116-E05D-3935-AC39-ABEAF6B2F85D}"/>
               </a:ext>
             </a:extLst>
           </p:cNvPr>
@@ -34101,25 +34438,42 @@
             <p:ph type="dt" sz="half" idx="10"/>
           </p:nvPr>
         </p:nvSpPr>
-        <p:spPr/>
-        <p:txBody>
-          <a:bodyPr/>
+        <p:spPr>
+          <a:xfrm rot="5400000">
+            <a:off x="10040831" y="4206240"/>
+            <a:ext cx="3494314" cy="365125"/>
+          </a:xfrm>
+        </p:spPr>
+        <p:txBody>
+          <a:bodyPr anchor="ctr">
+            <a:normAutofit/>
+          </a:bodyPr>
           <a:lstStyle/>
           <a:p>
-            <a:fld id="{010D0AB2-23BC-3043-AC30-5928E542C0CE}" type="datetime1">
+            <a:pPr>
+              <a:spcAft>
+                <a:spcPts val="600"/>
+              </a:spcAft>
+            </a:pPr>
+            <a:fld id="{927C0DEB-4AE1-EA4D-826D-E3C22802B942}" type="datetime1">
               <a:rPr lang="en-US" smtClean="0"/>
+              <a:pPr>
+                <a:spcAft>
+                  <a:spcPts val="600"/>
+                </a:spcAft>
+              </a:pPr>
               <a:t>7/27/2026</a:t>
             </a:fld>
-            <a:endParaRPr lang="en-US" dirty="0"/>
-          </a:p>
-        </p:txBody>
-      </p:sp>
-      <p:sp>
-        <p:nvSpPr>
-          <p:cNvPr id="5" name="Slide Number Placeholder 4">
-            <a:extLst>
-              <a:ext uri="{FF2B5EF4-FFF2-40B4-BE49-F238E27FC236}">
-                <a16:creationId xmlns:a16="http://schemas.microsoft.com/office/drawing/2014/main" id="{49E7DB59-C4F8-CDE1-61A4-49E42A74492A}"/>
+            <a:endParaRPr lang="en-US"/>
+          </a:p>
+        </p:txBody>
+      </p:sp>
+      <p:sp>
+        <p:nvSpPr>
+          <p:cNvPr id="6" name="Slide Number Placeholder 5">
+            <a:extLst>
+              <a:ext uri="{FF2B5EF4-FFF2-40B4-BE49-F238E27FC236}">
+                <a16:creationId xmlns:a16="http://schemas.microsoft.com/office/drawing/2014/main" id="{0AEC6833-AAF0-F134-A6A8-387E8CCD7F6F}"/>
               </a:ext>
             </a:extLst>
           </p:cNvPr>
@@ -34130,24 +34484,40 @@
             <p:ph type="sldNum" sz="quarter" idx="12"/>
           </p:nvPr>
         </p:nvSpPr>
-        <p:spPr/>
-        <p:txBody>
-          <a:bodyPr/>
+        <p:spPr>
+          <a:xfrm>
+            <a:off x="11573385" y="6229552"/>
+            <a:ext cx="429207" cy="365125"/>
+          </a:xfrm>
+        </p:spPr>
+        <p:txBody>
+          <a:bodyPr anchor="ctr">
+            <a:normAutofit/>
+          </a:bodyPr>
           <a:lstStyle/>
           <a:p>
+            <a:pPr>
+              <a:spcAft>
+                <a:spcPts val="600"/>
+              </a:spcAft>
+            </a:pPr>
             <a:fld id="{CC057153-B650-4DEB-B370-79DDCFDCE934}" type="slidenum">
               <a:rPr lang="en-US" smtClean="0"/>
-              <a:pPr/>
+              <a:pPr>
+                <a:spcAft>
+                  <a:spcPts val="600"/>
+                </a:spcAft>
+              </a:pPr>
               <a:t>13</a:t>
             </a:fld>
-            <a:endParaRPr lang="en-US" dirty="0"/>
+            <a:endParaRPr lang="en-US"/>
           </a:p>
         </p:txBody>
       </p:sp>
     </p:spTree>
     <p:extLst>
       <p:ext uri="{BB962C8B-B14F-4D97-AF65-F5344CB8AC3E}">
-        <p14:creationId xmlns:p14="http://schemas.microsoft.com/office/powerpoint/2010/main" val="1662138044"/>
+        <p14:creationId xmlns:p14="http://schemas.microsoft.com/office/powerpoint/2010/main" val="3055457452"/>
       </p:ext>
     </p:extLst>
   </p:cSld>
@@ -34179,25 +34549,32 @@
           <p:cNvPr id="2" name="Title 1">
             <a:extLst>
               <a:ext uri="{FF2B5EF4-FFF2-40B4-BE49-F238E27FC236}">
-                <a16:creationId xmlns:a16="http://schemas.microsoft.com/office/drawing/2014/main" id="{F27EEF88-486E-52FF-3AF3-C50D322E6819}"/>
-              </a:ext>
-            </a:extLst>
-          </p:cNvPr>
-          <p:cNvSpPr>
-            <a:spLocks noGrp="1"/>
-          </p:cNvSpPr>
-          <p:nvPr>
-            <p:ph type="ctrTitle"/>
-          </p:nvPr>
-        </p:nvSpPr>
-        <p:spPr/>
-        <p:txBody>
-          <a:bodyPr/>
+                <a16:creationId xmlns:a16="http://schemas.microsoft.com/office/drawing/2014/main" id="{5C971468-309A-F249-8785-022D994B40F8}"/>
+              </a:ext>
+            </a:extLst>
+          </p:cNvPr>
+          <p:cNvSpPr>
+            <a:spLocks noGrp="1"/>
+          </p:cNvSpPr>
+          <p:nvPr>
+            <p:ph type="title"/>
+          </p:nvPr>
+        </p:nvSpPr>
+        <p:spPr>
+          <a:xfrm>
+            <a:off x="1255032" y="862335"/>
+            <a:ext cx="4389120" cy="5120640"/>
+          </a:xfrm>
+        </p:spPr>
+        <p:txBody>
+          <a:bodyPr anchor="ctr">
+            <a:normAutofit/>
+          </a:bodyPr>
           <a:lstStyle/>
           <a:p>
             <a:r>
               <a:rPr lang="en-SG" dirty="0"/>
-              <a:t>KUBERNATES</a:t>
+              <a:t>FRONTEND DASHBOARD</a:t>
             </a:r>
           </a:p>
         </p:txBody>
@@ -34207,7 +34584,7 @@
           <p:cNvPr id="3" name="Footer Placeholder 2">
             <a:extLst>
               <a:ext uri="{FF2B5EF4-FFF2-40B4-BE49-F238E27FC236}">
-                <a16:creationId xmlns:a16="http://schemas.microsoft.com/office/drawing/2014/main" id="{D2F62700-C8BC-371F-E4A0-146018195E63}"/>
+                <a16:creationId xmlns:a16="http://schemas.microsoft.com/office/drawing/2014/main" id="{67AF8A32-848F-6580-5D1D-863E7ACC1449}"/>
               </a:ext>
             </a:extLst>
           </p:cNvPr>
@@ -34218,25 +34595,74 @@
             <p:ph type="ftr" sz="quarter" idx="11"/>
           </p:nvPr>
         </p:nvSpPr>
-        <p:spPr/>
-        <p:txBody>
-          <a:bodyPr/>
+        <p:spPr>
+          <a:xfrm rot="16200000">
+            <a:off x="-1005840" y="1525384"/>
+            <a:ext cx="2805405" cy="365125"/>
+          </a:xfrm>
+        </p:spPr>
+        <p:txBody>
+          <a:bodyPr anchor="ctr">
+            <a:normAutofit/>
+          </a:bodyPr>
           <a:lstStyle/>
           <a:p>
+            <a:pPr>
+              <a:spcAft>
+                <a:spcPts val="600"/>
+              </a:spcAft>
+            </a:pPr>
             <a:r>
               <a:rPr lang="en-US"/>
               <a:t>SAMPLE FOOTER TEXT</a:t>
             </a:r>
-            <a:endParaRPr lang="en-US" dirty="0"/>
-          </a:p>
-        </p:txBody>
-      </p:sp>
-      <p:sp>
-        <p:nvSpPr>
-          <p:cNvPr id="4" name="Date Placeholder 3">
-            <a:extLst>
-              <a:ext uri="{FF2B5EF4-FFF2-40B4-BE49-F238E27FC236}">
-                <a16:creationId xmlns:a16="http://schemas.microsoft.com/office/drawing/2014/main" id="{97386FD1-37AC-99FB-025F-EC72261EF737}"/>
+          </a:p>
+        </p:txBody>
+      </p:sp>
+      <p:sp>
+        <p:nvSpPr>
+          <p:cNvPr id="4" name="Content Placeholder 3">
+            <a:extLst>
+              <a:ext uri="{FF2B5EF4-FFF2-40B4-BE49-F238E27FC236}">
+                <a16:creationId xmlns:a16="http://schemas.microsoft.com/office/drawing/2014/main" id="{48189E54-8A42-FC2B-2617-0003B6CC127C}"/>
+              </a:ext>
+            </a:extLst>
+          </p:cNvPr>
+          <p:cNvSpPr>
+            <a:spLocks noGrp="1"/>
+          </p:cNvSpPr>
+          <p:nvPr>
+            <p:ph sz="quarter" idx="13"/>
+          </p:nvPr>
+        </p:nvSpPr>
+        <p:spPr>
+          <a:xfrm>
+            <a:off x="6547100" y="816615"/>
+            <a:ext cx="4389120" cy="5212080"/>
+          </a:xfrm>
+        </p:spPr>
+        <p:txBody>
+          <a:bodyPr anchor="ctr">
+            <a:normAutofit/>
+          </a:bodyPr>
+          <a:lstStyle/>
+          <a:p>
+            <a:r>
+              <a:rPr lang="en-SG" dirty="0"/>
+              <a:t>The Frontend Dashboard provides a user-friendly interface for monitoring environmental conditions. It displays sensor data, anomaly detection results, and historical trends by sending REST API requests to the Backend API. Users can easily view environmental status and receive alerts without directly interacting with the database.</a:t>
+            </a:r>
+          </a:p>
+          <a:p>
+            <a:endParaRPr lang="en-SG" dirty="0"/>
+          </a:p>
+        </p:txBody>
+      </p:sp>
+      <p:sp>
+        <p:nvSpPr>
+          <p:cNvPr id="5" name="Date Placeholder 4">
+            <a:extLst>
+              <a:ext uri="{FF2B5EF4-FFF2-40B4-BE49-F238E27FC236}">
+                <a16:creationId xmlns:a16="http://schemas.microsoft.com/office/drawing/2014/main" id="{38F89DBF-AAD8-E49E-2244-336A204599CC}"/>
               </a:ext>
             </a:extLst>
           </p:cNvPr>
@@ -34247,25 +34673,42 @@
             <p:ph type="dt" sz="half" idx="10"/>
           </p:nvPr>
         </p:nvSpPr>
-        <p:spPr/>
-        <p:txBody>
-          <a:bodyPr/>
+        <p:spPr>
+          <a:xfrm rot="5400000">
+            <a:off x="10040831" y="4206240"/>
+            <a:ext cx="3494314" cy="365125"/>
+          </a:xfrm>
+        </p:spPr>
+        <p:txBody>
+          <a:bodyPr anchor="ctr">
+            <a:normAutofit/>
+          </a:bodyPr>
           <a:lstStyle/>
           <a:p>
-            <a:fld id="{010D0AB2-23BC-3043-AC30-5928E542C0CE}" type="datetime1">
+            <a:pPr>
+              <a:spcAft>
+                <a:spcPts val="600"/>
+              </a:spcAft>
+            </a:pPr>
+            <a:fld id="{927C0DEB-4AE1-EA4D-826D-E3C22802B942}" type="datetime1">
               <a:rPr lang="en-US" smtClean="0"/>
+              <a:pPr>
+                <a:spcAft>
+                  <a:spcPts val="600"/>
+                </a:spcAft>
+              </a:pPr>
               <a:t>7/27/2026</a:t>
             </a:fld>
-            <a:endParaRPr lang="en-US" dirty="0"/>
-          </a:p>
-        </p:txBody>
-      </p:sp>
-      <p:sp>
-        <p:nvSpPr>
-          <p:cNvPr id="5" name="Slide Number Placeholder 4">
-            <a:extLst>
-              <a:ext uri="{FF2B5EF4-FFF2-40B4-BE49-F238E27FC236}">
-                <a16:creationId xmlns:a16="http://schemas.microsoft.com/office/drawing/2014/main" id="{D08F73AA-8FFF-4571-C0CF-0F21F722B187}"/>
+            <a:endParaRPr lang="en-US"/>
+          </a:p>
+        </p:txBody>
+      </p:sp>
+      <p:sp>
+        <p:nvSpPr>
+          <p:cNvPr id="6" name="Slide Number Placeholder 5">
+            <a:extLst>
+              <a:ext uri="{FF2B5EF4-FFF2-40B4-BE49-F238E27FC236}">
+                <a16:creationId xmlns:a16="http://schemas.microsoft.com/office/drawing/2014/main" id="{FFE04B86-3E7C-BF8A-4395-0323C52E4558}"/>
               </a:ext>
             </a:extLst>
           </p:cNvPr>
@@ -34276,24 +34719,40 @@
             <p:ph type="sldNum" sz="quarter" idx="12"/>
           </p:nvPr>
         </p:nvSpPr>
-        <p:spPr/>
-        <p:txBody>
-          <a:bodyPr/>
+        <p:spPr>
+          <a:xfrm>
+            <a:off x="11573385" y="6229552"/>
+            <a:ext cx="429207" cy="365125"/>
+          </a:xfrm>
+        </p:spPr>
+        <p:txBody>
+          <a:bodyPr anchor="ctr">
+            <a:normAutofit/>
+          </a:bodyPr>
           <a:lstStyle/>
           <a:p>
+            <a:pPr>
+              <a:spcAft>
+                <a:spcPts val="600"/>
+              </a:spcAft>
+            </a:pPr>
             <a:fld id="{CC057153-B650-4DEB-B370-79DDCFDCE934}" type="slidenum">
               <a:rPr lang="en-US" smtClean="0"/>
-              <a:pPr/>
+              <a:pPr>
+                <a:spcAft>
+                  <a:spcPts val="600"/>
+                </a:spcAft>
+              </a:pPr>
               <a:t>14</a:t>
             </a:fld>
-            <a:endParaRPr lang="en-US" dirty="0"/>
+            <a:endParaRPr lang="en-US"/>
           </a:p>
         </p:txBody>
       </p:sp>
     </p:spTree>
     <p:extLst>
       <p:ext uri="{BB962C8B-B14F-4D97-AF65-F5344CB8AC3E}">
-        <p14:creationId xmlns:p14="http://schemas.microsoft.com/office/powerpoint/2010/main" val="2037361668"/>
+        <p14:creationId xmlns:p14="http://schemas.microsoft.com/office/powerpoint/2010/main" val="1382694037"/>
       </p:ext>
     </p:extLst>
   </p:cSld>
@@ -34325,7 +34784,7 @@
           <p:cNvPr id="2" name="Title 1">
             <a:extLst>
               <a:ext uri="{FF2B5EF4-FFF2-40B4-BE49-F238E27FC236}">
-                <a16:creationId xmlns:a16="http://schemas.microsoft.com/office/drawing/2014/main" id="{5399766A-8D26-6DCE-60BF-703811C9A8AF}"/>
+                <a16:creationId xmlns:a16="http://schemas.microsoft.com/office/drawing/2014/main" id="{DEFF6106-7A0A-48DF-A54A-1203136FE872}"/>
               </a:ext>
             </a:extLst>
           </p:cNvPr>
@@ -34336,19 +34795,14 @@
             <p:ph type="ctrTitle"/>
           </p:nvPr>
         </p:nvSpPr>
-        <p:spPr>
-          <a:xfrm>
-            <a:off x="3536831" y="1463040"/>
-            <a:ext cx="5210354" cy="3931920"/>
-          </a:xfrm>
-        </p:spPr>
+        <p:spPr/>
         <p:txBody>
           <a:bodyPr/>
           <a:lstStyle/>
           <a:p>
             <a:r>
               <a:rPr lang="en-SG" dirty="0"/>
-              <a:t>MICROSERVICES</a:t>
+              <a:t>Docker</a:t>
             </a:r>
           </a:p>
         </p:txBody>
@@ -34358,7 +34812,7 @@
           <p:cNvPr id="3" name="Footer Placeholder 2">
             <a:extLst>
               <a:ext uri="{FF2B5EF4-FFF2-40B4-BE49-F238E27FC236}">
-                <a16:creationId xmlns:a16="http://schemas.microsoft.com/office/drawing/2014/main" id="{02CD1AC0-9939-D7DA-C1B5-89896E5490E1}"/>
+                <a16:creationId xmlns:a16="http://schemas.microsoft.com/office/drawing/2014/main" id="{B2BCAD1A-CFBC-A349-DD67-7349B93D3720}"/>
               </a:ext>
             </a:extLst>
           </p:cNvPr>
@@ -34387,7 +34841,7 @@
           <p:cNvPr id="4" name="Date Placeholder 3">
             <a:extLst>
               <a:ext uri="{FF2B5EF4-FFF2-40B4-BE49-F238E27FC236}">
-                <a16:creationId xmlns:a16="http://schemas.microsoft.com/office/drawing/2014/main" id="{19E5B9C4-A021-AD37-4063-4CD82AEA3362}"/>
+                <a16:creationId xmlns:a16="http://schemas.microsoft.com/office/drawing/2014/main" id="{3BA4730D-F0FF-B752-323B-BE0157CA02F8}"/>
               </a:ext>
             </a:extLst>
           </p:cNvPr>
@@ -34416,7 +34870,7 @@
           <p:cNvPr id="5" name="Slide Number Placeholder 4">
             <a:extLst>
               <a:ext uri="{FF2B5EF4-FFF2-40B4-BE49-F238E27FC236}">
-                <a16:creationId xmlns:a16="http://schemas.microsoft.com/office/drawing/2014/main" id="{D796FA40-EF4F-7414-795C-90E90F514FCC}"/>
+                <a16:creationId xmlns:a16="http://schemas.microsoft.com/office/drawing/2014/main" id="{49E7DB59-C4F8-CDE1-61A4-49E42A74492A}"/>
               </a:ext>
             </a:extLst>
           </p:cNvPr>
@@ -34444,7 +34898,7 @@
     </p:spTree>
     <p:extLst>
       <p:ext uri="{BB962C8B-B14F-4D97-AF65-F5344CB8AC3E}">
-        <p14:creationId xmlns:p14="http://schemas.microsoft.com/office/powerpoint/2010/main" val="1787156668"/>
+        <p14:creationId xmlns:p14="http://schemas.microsoft.com/office/powerpoint/2010/main" val="1662138044"/>
       </p:ext>
     </p:extLst>
   </p:cSld>
@@ -34476,7 +34930,7 @@
           <p:cNvPr id="2" name="Title 1">
             <a:extLst>
               <a:ext uri="{FF2B5EF4-FFF2-40B4-BE49-F238E27FC236}">
-                <a16:creationId xmlns:a16="http://schemas.microsoft.com/office/drawing/2014/main" id="{9DEAAF09-CB58-6E0F-3345-27591FA4FF54}"/>
+                <a16:creationId xmlns:a16="http://schemas.microsoft.com/office/drawing/2014/main" id="{F27EEF88-486E-52FF-3AF3-C50D322E6819}"/>
               </a:ext>
             </a:extLst>
           </p:cNvPr>
@@ -34494,7 +34948,7 @@
           <a:p>
             <a:r>
               <a:rPr lang="en-SG" dirty="0"/>
-              <a:t>DATA SOURCE</a:t>
+              <a:t>KUBERNATES</a:t>
             </a:r>
           </a:p>
         </p:txBody>
@@ -34504,7 +34958,7 @@
           <p:cNvPr id="3" name="Footer Placeholder 2">
             <a:extLst>
               <a:ext uri="{FF2B5EF4-FFF2-40B4-BE49-F238E27FC236}">
-                <a16:creationId xmlns:a16="http://schemas.microsoft.com/office/drawing/2014/main" id="{3F6A2061-CB22-D700-DFFA-693366FF7DAC}"/>
+                <a16:creationId xmlns:a16="http://schemas.microsoft.com/office/drawing/2014/main" id="{D2F62700-C8BC-371F-E4A0-146018195E63}"/>
               </a:ext>
             </a:extLst>
           </p:cNvPr>
@@ -34533,7 +34987,7 @@
           <p:cNvPr id="4" name="Date Placeholder 3">
             <a:extLst>
               <a:ext uri="{FF2B5EF4-FFF2-40B4-BE49-F238E27FC236}">
-                <a16:creationId xmlns:a16="http://schemas.microsoft.com/office/drawing/2014/main" id="{FB2649DC-6302-6FE7-EB8D-567208A1C78E}"/>
+                <a16:creationId xmlns:a16="http://schemas.microsoft.com/office/drawing/2014/main" id="{97386FD1-37AC-99FB-025F-EC72261EF737}"/>
               </a:ext>
             </a:extLst>
           </p:cNvPr>
@@ -34562,7 +35016,7 @@
           <p:cNvPr id="5" name="Slide Number Placeholder 4">
             <a:extLst>
               <a:ext uri="{FF2B5EF4-FFF2-40B4-BE49-F238E27FC236}">
-                <a16:creationId xmlns:a16="http://schemas.microsoft.com/office/drawing/2014/main" id="{66FF4A67-54EF-04B0-A7D5-1AED7EE1442F}"/>
+                <a16:creationId xmlns:a16="http://schemas.microsoft.com/office/drawing/2014/main" id="{D08F73AA-8FFF-4571-C0CF-0F21F722B187}"/>
               </a:ext>
             </a:extLst>
           </p:cNvPr>
@@ -34590,7 +35044,7 @@
     </p:spTree>
     <p:extLst>
       <p:ext uri="{BB962C8B-B14F-4D97-AF65-F5344CB8AC3E}">
-        <p14:creationId xmlns:p14="http://schemas.microsoft.com/office/powerpoint/2010/main" val="1748166942"/>
+        <p14:creationId xmlns:p14="http://schemas.microsoft.com/office/powerpoint/2010/main" val="2037361668"/>
       </p:ext>
     </p:extLst>
   </p:cSld>
@@ -37199,7 +37653,7 @@
           <p:cNvPr id="2" name="Title 1">
             <a:extLst>
               <a:ext uri="{FF2B5EF4-FFF2-40B4-BE49-F238E27FC236}">
-                <a16:creationId xmlns:a16="http://schemas.microsoft.com/office/drawing/2014/main" id="{5C971468-309A-F249-8785-022D994B40F8}"/>
+                <a16:creationId xmlns:a16="http://schemas.microsoft.com/office/drawing/2014/main" id="{B8EC085A-D7BE-6136-7F2E-5410A888566D}"/>
               </a:ext>
             </a:extLst>
           </p:cNvPr>
@@ -37210,14 +37664,21 @@
             <p:ph type="title"/>
           </p:nvPr>
         </p:nvSpPr>
-        <p:spPr/>
-        <p:txBody>
-          <a:bodyPr/>
+        <p:spPr>
+          <a:xfrm>
+            <a:off x="1255032" y="862335"/>
+            <a:ext cx="4389120" cy="5120640"/>
+          </a:xfrm>
+        </p:spPr>
+        <p:txBody>
+          <a:bodyPr anchor="ctr">
+            <a:normAutofit/>
+          </a:bodyPr>
           <a:lstStyle/>
           <a:p>
             <a:r>
               <a:rPr lang="en-SG" dirty="0"/>
-              <a:t>FRONTEND DASHBOARD</a:t>
+              <a:t>DATA INGESTION</a:t>
             </a:r>
           </a:p>
         </p:txBody>
@@ -37227,7 +37688,7 @@
           <p:cNvPr id="3" name="Footer Placeholder 2">
             <a:extLst>
               <a:ext uri="{FF2B5EF4-FFF2-40B4-BE49-F238E27FC236}">
-                <a16:creationId xmlns:a16="http://schemas.microsoft.com/office/drawing/2014/main" id="{67AF8A32-848F-6580-5D1D-863E7ACC1449}"/>
+                <a16:creationId xmlns:a16="http://schemas.microsoft.com/office/drawing/2014/main" id="{DDCBB3B8-6DED-E7E9-1A36-A0F263B4E7F5}"/>
               </a:ext>
             </a:extLst>
           </p:cNvPr>
@@ -37238,16 +37699,27 @@
             <p:ph type="ftr" sz="quarter" idx="11"/>
           </p:nvPr>
         </p:nvSpPr>
-        <p:spPr/>
-        <p:txBody>
-          <a:bodyPr/>
+        <p:spPr>
+          <a:xfrm rot="16200000">
+            <a:off x="-1005840" y="1525384"/>
+            <a:ext cx="2805405" cy="365125"/>
+          </a:xfrm>
+        </p:spPr>
+        <p:txBody>
+          <a:bodyPr anchor="ctr">
+            <a:normAutofit/>
+          </a:bodyPr>
           <a:lstStyle/>
           <a:p>
+            <a:pPr>
+              <a:spcAft>
+                <a:spcPts val="600"/>
+              </a:spcAft>
+            </a:pPr>
             <a:r>
               <a:rPr lang="en-US"/>
               <a:t>SAMPLE FOOTER TEXT</a:t>
             </a:r>
-            <a:endParaRPr lang="en-US" dirty="0"/>
           </a:p>
         </p:txBody>
       </p:sp>
@@ -37256,7 +37728,7 @@
           <p:cNvPr id="4" name="Content Placeholder 3">
             <a:extLst>
               <a:ext uri="{FF2B5EF4-FFF2-40B4-BE49-F238E27FC236}">
-                <a16:creationId xmlns:a16="http://schemas.microsoft.com/office/drawing/2014/main" id="{48189E54-8A42-FC2B-2617-0003B6CC127C}"/>
+                <a16:creationId xmlns:a16="http://schemas.microsoft.com/office/drawing/2014/main" id="{49D1D6E6-BB52-24CA-7576-B7194F347DE7}"/>
               </a:ext>
             </a:extLst>
           </p:cNvPr>
@@ -37267,12 +37739,22 @@
             <p:ph sz="quarter" idx="13"/>
           </p:nvPr>
         </p:nvSpPr>
-        <p:spPr/>
-        <p:txBody>
-          <a:bodyPr/>
+        <p:spPr>
+          <a:xfrm>
+            <a:off x="6547100" y="816615"/>
+            <a:ext cx="4389120" cy="5212080"/>
+          </a:xfrm>
+        </p:spPr>
+        <p:txBody>
+          <a:bodyPr anchor="ctr">
+            <a:normAutofit/>
+          </a:bodyPr>
           <a:lstStyle/>
           <a:p>
-            <a:endParaRPr lang="en-SG"/>
+            <a:r>
+              <a:rPr lang="en-SG" dirty="0"/>
+              <a:t>The Data Ingestion Service collects real-time sensor data, such as temperature, humidity, CO₂, and air quality, from IoT sensors. It validates the data, stores it in the database, and sends it to the Machine Learning Service for analysis. Separating this function into its own microservice makes the system easier to scale, maintain, and expand.</a:t>
+            </a:r>
           </a:p>
         </p:txBody>
       </p:sp>
@@ -37281,7 +37763,7 @@
           <p:cNvPr id="5" name="Date Placeholder 4">
             <a:extLst>
               <a:ext uri="{FF2B5EF4-FFF2-40B4-BE49-F238E27FC236}">
-                <a16:creationId xmlns:a16="http://schemas.microsoft.com/office/drawing/2014/main" id="{38F89DBF-AAD8-E49E-2244-336A204599CC}"/>
+                <a16:creationId xmlns:a16="http://schemas.microsoft.com/office/drawing/2014/main" id="{8F9AF1D9-FFF5-1F73-5E2B-9EF32E6D5DC7}"/>
               </a:ext>
             </a:extLst>
           </p:cNvPr>
@@ -37292,16 +37774,33 @@
             <p:ph type="dt" sz="half" idx="10"/>
           </p:nvPr>
         </p:nvSpPr>
-        <p:spPr/>
-        <p:txBody>
-          <a:bodyPr/>
+        <p:spPr>
+          <a:xfrm rot="5400000">
+            <a:off x="10040831" y="4206240"/>
+            <a:ext cx="3494314" cy="365125"/>
+          </a:xfrm>
+        </p:spPr>
+        <p:txBody>
+          <a:bodyPr anchor="ctr">
+            <a:normAutofit/>
+          </a:bodyPr>
           <a:lstStyle/>
           <a:p>
+            <a:pPr>
+              <a:spcAft>
+                <a:spcPts val="600"/>
+              </a:spcAft>
+            </a:pPr>
             <a:fld id="{927C0DEB-4AE1-EA4D-826D-E3C22802B942}" type="datetime1">
               <a:rPr lang="en-US" smtClean="0"/>
+              <a:pPr>
+                <a:spcAft>
+                  <a:spcPts val="600"/>
+                </a:spcAft>
+              </a:pPr>
               <a:t>7/27/2026</a:t>
             </a:fld>
-            <a:endParaRPr lang="en-US" dirty="0"/>
+            <a:endParaRPr lang="en-US"/>
           </a:p>
         </p:txBody>
       </p:sp>
@@ -37310,7 +37809,7 @@
           <p:cNvPr id="6" name="Slide Number Placeholder 5">
             <a:extLst>
               <a:ext uri="{FF2B5EF4-FFF2-40B4-BE49-F238E27FC236}">
-                <a16:creationId xmlns:a16="http://schemas.microsoft.com/office/drawing/2014/main" id="{FFE04B86-3E7C-BF8A-4395-0323C52E4558}"/>
+                <a16:creationId xmlns:a16="http://schemas.microsoft.com/office/drawing/2014/main" id="{4DA8EEF1-3820-1A48-D817-0DF67D8835B9}"/>
               </a:ext>
             </a:extLst>
           </p:cNvPr>
@@ -37321,24 +37820,40 @@
             <p:ph type="sldNum" sz="quarter" idx="12"/>
           </p:nvPr>
         </p:nvSpPr>
-        <p:spPr/>
-        <p:txBody>
-          <a:bodyPr/>
+        <p:spPr>
+          <a:xfrm>
+            <a:off x="11573385" y="6229552"/>
+            <a:ext cx="429207" cy="365125"/>
+          </a:xfrm>
+        </p:spPr>
+        <p:txBody>
+          <a:bodyPr anchor="ctr">
+            <a:normAutofit/>
+          </a:bodyPr>
           <a:lstStyle/>
           <a:p>
+            <a:pPr>
+              <a:spcAft>
+                <a:spcPts val="600"/>
+              </a:spcAft>
+            </a:pPr>
             <a:fld id="{CC057153-B650-4DEB-B370-79DDCFDCE934}" type="slidenum">
               <a:rPr lang="en-US" smtClean="0"/>
-              <a:pPr/>
+              <a:pPr>
+                <a:spcAft>
+                  <a:spcPts val="600"/>
+                </a:spcAft>
+              </a:pPr>
               <a:t>9</a:t>
             </a:fld>
-            <a:endParaRPr lang="en-US" dirty="0"/>
+            <a:endParaRPr lang="en-US"/>
           </a:p>
         </p:txBody>
       </p:sp>
     </p:spTree>
     <p:extLst>
       <p:ext uri="{BB962C8B-B14F-4D97-AF65-F5344CB8AC3E}">
-        <p14:creationId xmlns:p14="http://schemas.microsoft.com/office/powerpoint/2010/main" val="1382694037"/>
+        <p14:creationId xmlns:p14="http://schemas.microsoft.com/office/powerpoint/2010/main" val="2014340193"/>
       </p:ext>
     </p:extLst>
   </p:cSld>
@@ -38180,6 +38695,26 @@
 </file>
 
 <file path=customXml/item1.xml><?xml version="1.0" encoding="utf-8"?>
+<p:properties xmlns:p="http://schemas.microsoft.com/office/2006/metadata/properties" xmlns:xsi="http://www.w3.org/2001/XMLSchema-instance" xmlns:pc="http://schemas.microsoft.com/office/infopath/2007/PartnerControls">
+  <documentManagement>
+    <_ip_UnifiedCompliancePolicyUIAction xmlns="http://schemas.microsoft.com/sharepoint/v3" xsi:nil="true"/>
+    <Image xmlns="71af3243-3dd4-4a8d-8c0d-dd76da1f02a5">
+      <Url xsi:nil="true"/>
+      <Description xsi:nil="true"/>
+    </Image>
+    <Status xmlns="71af3243-3dd4-4a8d-8c0d-dd76da1f02a5">Not started</Status>
+    <Background xmlns="71af3243-3dd4-4a8d-8c0d-dd76da1f02a5">false</Background>
+    <_ip_UnifiedCompliancePolicyProperties xmlns="http://schemas.microsoft.com/sharepoint/v3" xsi:nil="true"/>
+    <ImageTagsTaxHTField xmlns="71af3243-3dd4-4a8d-8c0d-dd76da1f02a5">
+      <Terms xmlns="http://schemas.microsoft.com/office/infopath/2007/PartnerControls"/>
+    </ImageTagsTaxHTField>
+    <TaxCatchAll xmlns="230e9df3-be65-4c73-a93b-d1236ebd677e" xsi:nil="true"/>
+    <MediaServiceKeyPoints xmlns="71af3243-3dd4-4a8d-8c0d-dd76da1f02a5" xsi:nil="true"/>
+  </documentManagement>
+</p:properties>
+</file>
+
+<file path=customXml/item2.xml><?xml version="1.0" encoding="utf-8"?>
 <ct:contentTypeSchema xmlns:ct="http://schemas.microsoft.com/office/2006/metadata/contentType" xmlns:ma="http://schemas.microsoft.com/office/2006/metadata/properties/metaAttributes" ct:_="" ma:_="" ma:contentTypeName="Document" ma:contentTypeID="0x01010079F111ED35F8CC479449609E8A0923A6" ma:contentTypeVersion="30" ma:contentTypeDescription="Create a new document." ma:contentTypeScope="" ma:versionID="cec0622158e8f13124e9e8fd4de31bd1">
   <xsd:schema xmlns:xsd="http://www.w3.org/2001/XMLSchema" xmlns:xs="http://www.w3.org/2001/XMLSchema" xmlns:p="http://schemas.microsoft.com/office/2006/metadata/properties" xmlns:ns1="http://schemas.microsoft.com/sharepoint/v3" xmlns:ns2="71af3243-3dd4-4a8d-8c0d-dd76da1f02a5" xmlns:ns3="16c05727-aa75-4e4a-9b5f-8a80a1165891" xmlns:ns4="230e9df3-be65-4c73-a93b-d1236ebd677e" targetNamespace="http://schemas.microsoft.com/office/2006/metadata/properties" ma:root="true" ma:fieldsID="3b52f30ab005d15df08657af532e6e38" ns1:_="" ns2:_="" ns3:_="" ns4:_="">
     <xsd:import namespace="http://schemas.microsoft.com/sharepoint/v3"/>
@@ -38497,26 +39032,6 @@
 </ct:contentTypeSchema>
 </file>
 
-<file path=customXml/item2.xml><?xml version="1.0" encoding="utf-8"?>
-<p:properties xmlns:p="http://schemas.microsoft.com/office/2006/metadata/properties" xmlns:xsi="http://www.w3.org/2001/XMLSchema-instance" xmlns:pc="http://schemas.microsoft.com/office/infopath/2007/PartnerControls">
-  <documentManagement>
-    <_ip_UnifiedCompliancePolicyUIAction xmlns="http://schemas.microsoft.com/sharepoint/v3" xsi:nil="true"/>
-    <Image xmlns="71af3243-3dd4-4a8d-8c0d-dd76da1f02a5">
-      <Url xsi:nil="true"/>
-      <Description xsi:nil="true"/>
-    </Image>
-    <Status xmlns="71af3243-3dd4-4a8d-8c0d-dd76da1f02a5">Not started</Status>
-    <Background xmlns="71af3243-3dd4-4a8d-8c0d-dd76da1f02a5">false</Background>
-    <_ip_UnifiedCompliancePolicyProperties xmlns="http://schemas.microsoft.com/sharepoint/v3" xsi:nil="true"/>
-    <ImageTagsTaxHTField xmlns="71af3243-3dd4-4a8d-8c0d-dd76da1f02a5">
-      <Terms xmlns="http://schemas.microsoft.com/office/infopath/2007/PartnerControls"/>
-    </ImageTagsTaxHTField>
-    <TaxCatchAll xmlns="230e9df3-be65-4c73-a93b-d1236ebd677e" xsi:nil="true"/>
-    <MediaServiceKeyPoints xmlns="71af3243-3dd4-4a8d-8c0d-dd76da1f02a5" xsi:nil="true"/>
-  </documentManagement>
-</p:properties>
-</file>
-
 <file path=customXml/item3.xml><?xml version="1.0" encoding="utf-8"?>
 <?mso-contentType ?>
 <FormTemplates xmlns="http://schemas.microsoft.com/sharepoint/v3/contenttype/forms">
@@ -38527,6 +39042,25 @@
 </file>
 
 <file path=customXml/itemProps1.xml><?xml version="1.0" encoding="utf-8"?>
+<ds:datastoreItem xmlns:ds="http://schemas.openxmlformats.org/officeDocument/2006/customXml" ds:itemID="{D1CEDABF-7176-4A42-8EF9-E5D4DD31FF6C}">
+  <ds:schemaRefs>
+    <ds:schemaRef ds:uri="http://schemas.microsoft.com/office/infopath/2007/PartnerControls"/>
+    <ds:schemaRef ds:uri="http://purl.org/dc/terms/"/>
+    <ds:schemaRef ds:uri="http://schemas.microsoft.com/office/2006/metadata/properties"/>
+    <ds:schemaRef ds:uri="http://schemas.microsoft.com/office/2006/documentManagement/types"/>
+    <ds:schemaRef ds:uri="http://purl.org/dc/dcmitype/"/>
+    <ds:schemaRef ds:uri="http://schemas.openxmlformats.org/package/2006/metadata/core-properties"/>
+    <ds:schemaRef ds:uri="http://www.w3.org/XML/1998/namespace"/>
+    <ds:schemaRef ds:uri="230e9df3-be65-4c73-a93b-d1236ebd677e"/>
+    <ds:schemaRef ds:uri="http://purl.org/dc/elements/1.1/"/>
+    <ds:schemaRef ds:uri="16c05727-aa75-4e4a-9b5f-8a80a1165891"/>
+    <ds:schemaRef ds:uri="71af3243-3dd4-4a8d-8c0d-dd76da1f02a5"/>
+    <ds:schemaRef ds:uri="http://schemas.microsoft.com/sharepoint/v3"/>
+  </ds:schemaRefs>
+</ds:datastoreItem>
+</file>
+
+<file path=customXml/itemProps2.xml><?xml version="1.0" encoding="utf-8"?>
 <ds:datastoreItem xmlns:ds="http://schemas.openxmlformats.org/officeDocument/2006/customXml" ds:itemID="{9EEC3793-C1BC-496C-A03C-202DFFC513D6}">
   <ds:schemaRefs>
     <ds:schemaRef ds:uri="http://schemas.microsoft.com/office/2006/metadata/contentType"/>
@@ -38547,25 +39081,6 @@
 </ds:datastoreItem>
 </file>
 
-<file path=customXml/itemProps2.xml><?xml version="1.0" encoding="utf-8"?>
-<ds:datastoreItem xmlns:ds="http://schemas.openxmlformats.org/officeDocument/2006/customXml" ds:itemID="{D1CEDABF-7176-4A42-8EF9-E5D4DD31FF6C}">
-  <ds:schemaRefs>
-    <ds:schemaRef ds:uri="http://schemas.microsoft.com/office/infopath/2007/PartnerControls"/>
-    <ds:schemaRef ds:uri="http://purl.org/dc/terms/"/>
-    <ds:schemaRef ds:uri="http://schemas.microsoft.com/office/2006/metadata/properties"/>
-    <ds:schemaRef ds:uri="http://schemas.microsoft.com/office/2006/documentManagement/types"/>
-    <ds:schemaRef ds:uri="http://purl.org/dc/dcmitype/"/>
-    <ds:schemaRef ds:uri="http://schemas.openxmlformats.org/package/2006/metadata/core-properties"/>
-    <ds:schemaRef ds:uri="http://www.w3.org/XML/1998/namespace"/>
-    <ds:schemaRef ds:uri="230e9df3-be65-4c73-a93b-d1236ebd677e"/>
-    <ds:schemaRef ds:uri="http://purl.org/dc/elements/1.1/"/>
-    <ds:schemaRef ds:uri="16c05727-aa75-4e4a-9b5f-8a80a1165891"/>
-    <ds:schemaRef ds:uri="71af3243-3dd4-4a8d-8c0d-dd76da1f02a5"/>
-    <ds:schemaRef ds:uri="http://schemas.microsoft.com/sharepoint/v3"/>
-  </ds:schemaRefs>
-</ds:datastoreItem>
-</file>
-
 <file path=customXml/itemProps3.xml><?xml version="1.0" encoding="utf-8"?>
 <ds:datastoreItem xmlns:ds="http://schemas.openxmlformats.org/officeDocument/2006/customXml" ds:itemID="{D3301439-688F-4D19-B908-B48B62C56078}">
   <ds:schemaRefs>

--- a/EGT307 PRESENTATION.pptx
+++ b/EGT307 PRESENTATION.pptx
@@ -5,30 +5,31 @@
     <p:sldMasterId id="2147483917" r:id="rId4"/>
   </p:sldMasterIdLst>
   <p:notesMasterIdLst>
-    <p:notesMasterId r:id="rId23"/>
+    <p:notesMasterId r:id="rId24"/>
   </p:notesMasterIdLst>
   <p:handoutMasterIdLst>
-    <p:handoutMasterId r:id="rId24"/>
+    <p:handoutMasterId r:id="rId25"/>
   </p:handoutMasterIdLst>
   <p:sldIdLst>
     <p:sldId id="264" r:id="rId5"/>
     <p:sldId id="272" r:id="rId6"/>
-    <p:sldId id="278" r:id="rId7"/>
+    <p:sldId id="287" r:id="rId7"/>
     <p:sldId id="279" r:id="rId8"/>
     <p:sldId id="280" r:id="rId9"/>
-    <p:sldId id="275" r:id="rId10"/>
+    <p:sldId id="289" r:id="rId10"/>
     <p:sldId id="276" r:id="rId11"/>
     <p:sldId id="277" r:id="rId12"/>
-    <p:sldId id="286" r:id="rId13"/>
-    <p:sldId id="284" r:id="rId14"/>
-    <p:sldId id="282" r:id="rId15"/>
-    <p:sldId id="283" r:id="rId16"/>
-    <p:sldId id="285" r:id="rId17"/>
-    <p:sldId id="281" r:id="rId18"/>
-    <p:sldId id="267" r:id="rId19"/>
-    <p:sldId id="268" r:id="rId20"/>
-    <p:sldId id="271" r:id="rId21"/>
-    <p:sldId id="274" r:id="rId22"/>
+    <p:sldId id="290" r:id="rId13"/>
+    <p:sldId id="286" r:id="rId14"/>
+    <p:sldId id="284" r:id="rId15"/>
+    <p:sldId id="282" r:id="rId16"/>
+    <p:sldId id="283" r:id="rId17"/>
+    <p:sldId id="285" r:id="rId18"/>
+    <p:sldId id="281" r:id="rId19"/>
+    <p:sldId id="292" r:id="rId20"/>
+    <p:sldId id="293" r:id="rId21"/>
+    <p:sldId id="291" r:id="rId22"/>
+    <p:sldId id="274" r:id="rId23"/>
   </p:sldIdLst>
   <p:sldSz cx="12192000" cy="6858000"/>
   <p:notesSz cx="6858000" cy="9144000"/>
@@ -147,6 +148,2938 @@
 </p188:authorLst>
 </file>
 
+<file path=ppt/diagrams/colors1.xml><?xml version="1.0" encoding="utf-8"?>
+<dgm:colorsDef xmlns:dgm="http://schemas.openxmlformats.org/drawingml/2006/diagram" xmlns:a="http://schemas.openxmlformats.org/drawingml/2006/main" uniqueId="urn:microsoft.com/office/officeart/2005/8/colors/accent1_2">
+  <dgm:title val=""/>
+  <dgm:desc val=""/>
+  <dgm:catLst>
+    <dgm:cat type="accent1" pri="11200"/>
+  </dgm:catLst>
+  <dgm:styleLbl name="node0">
+    <dgm:fillClrLst meth="repeat">
+      <a:schemeClr val="accent1"/>
+    </dgm:fillClrLst>
+    <dgm:linClrLst meth="repeat">
+      <a:schemeClr val="lt1"/>
+    </dgm:linClrLst>
+    <dgm:effectClrLst/>
+    <dgm:txLinClrLst/>
+    <dgm:txFillClrLst/>
+    <dgm:txEffectClrLst/>
+  </dgm:styleLbl>
+  <dgm:styleLbl name="alignNode1">
+    <dgm:fillClrLst meth="repeat">
+      <a:schemeClr val="accent1"/>
+    </dgm:fillClrLst>
+    <dgm:linClrLst meth="repeat">
+      <a:schemeClr val="accent1"/>
+    </dgm:linClrLst>
+    <dgm:effectClrLst/>
+    <dgm:txLinClrLst/>
+    <dgm:txFillClrLst/>
+    <dgm:txEffectClrLst/>
+  </dgm:styleLbl>
+  <dgm:styleLbl name="node1">
+    <dgm:fillClrLst meth="repeat">
+      <a:schemeClr val="accent1"/>
+    </dgm:fillClrLst>
+    <dgm:linClrLst meth="repeat">
+      <a:schemeClr val="lt1"/>
+    </dgm:linClrLst>
+    <dgm:effectClrLst/>
+    <dgm:txLinClrLst/>
+    <dgm:txFillClrLst/>
+    <dgm:txEffectClrLst/>
+  </dgm:styleLbl>
+  <dgm:styleLbl name="lnNode1">
+    <dgm:fillClrLst meth="repeat">
+      <a:schemeClr val="accent1"/>
+    </dgm:fillClrLst>
+    <dgm:linClrLst meth="repeat">
+      <a:schemeClr val="lt1"/>
+    </dgm:linClrLst>
+    <dgm:effectClrLst/>
+    <dgm:txLinClrLst/>
+    <dgm:txFillClrLst/>
+    <dgm:txEffectClrLst/>
+  </dgm:styleLbl>
+  <dgm:styleLbl name="vennNode1">
+    <dgm:fillClrLst meth="repeat">
+      <a:schemeClr val="accent1">
+        <a:alpha val="50000"/>
+      </a:schemeClr>
+    </dgm:fillClrLst>
+    <dgm:linClrLst meth="repeat">
+      <a:schemeClr val="lt1"/>
+    </dgm:linClrLst>
+    <dgm:effectClrLst/>
+    <dgm:txLinClrLst/>
+    <dgm:txFillClrLst/>
+    <dgm:txEffectClrLst/>
+  </dgm:styleLbl>
+  <dgm:styleLbl name="node2">
+    <dgm:fillClrLst meth="repeat">
+      <a:schemeClr val="accent1"/>
+    </dgm:fillClrLst>
+    <dgm:linClrLst meth="repeat">
+      <a:schemeClr val="lt1"/>
+    </dgm:linClrLst>
+    <dgm:effectClrLst/>
+    <dgm:txLinClrLst/>
+    <dgm:txFillClrLst/>
+    <dgm:txEffectClrLst/>
+  </dgm:styleLbl>
+  <dgm:styleLbl name="node3">
+    <dgm:fillClrLst meth="repeat">
+      <a:schemeClr val="accent1"/>
+    </dgm:fillClrLst>
+    <dgm:linClrLst meth="repeat">
+      <a:schemeClr val="lt1"/>
+    </dgm:linClrLst>
+    <dgm:effectClrLst/>
+    <dgm:txLinClrLst/>
+    <dgm:txFillClrLst/>
+    <dgm:txEffectClrLst/>
+  </dgm:styleLbl>
+  <dgm:styleLbl name="node4">
+    <dgm:fillClrLst meth="repeat">
+      <a:schemeClr val="accent1"/>
+    </dgm:fillClrLst>
+    <dgm:linClrLst meth="repeat">
+      <a:schemeClr val="lt1"/>
+    </dgm:linClrLst>
+    <dgm:effectClrLst/>
+    <dgm:txLinClrLst/>
+    <dgm:txFillClrLst/>
+    <dgm:txEffectClrLst/>
+  </dgm:styleLbl>
+  <dgm:styleLbl name="fgImgPlace1">
+    <dgm:fillClrLst meth="repeat">
+      <a:schemeClr val="accent1">
+        <a:tint val="50000"/>
+      </a:schemeClr>
+    </dgm:fillClrLst>
+    <dgm:linClrLst meth="repeat">
+      <a:schemeClr val="lt1"/>
+    </dgm:linClrLst>
+    <dgm:effectClrLst/>
+    <dgm:txLinClrLst/>
+    <dgm:txFillClrLst meth="repeat">
+      <a:schemeClr val="lt1"/>
+    </dgm:txFillClrLst>
+    <dgm:txEffectClrLst/>
+  </dgm:styleLbl>
+  <dgm:styleLbl name="alignImgPlace1">
+    <dgm:fillClrLst meth="repeat">
+      <a:schemeClr val="accent1">
+        <a:tint val="50000"/>
+      </a:schemeClr>
+    </dgm:fillClrLst>
+    <dgm:linClrLst meth="repeat">
+      <a:schemeClr val="lt1"/>
+    </dgm:linClrLst>
+    <dgm:effectClrLst/>
+    <dgm:txLinClrLst/>
+    <dgm:txFillClrLst meth="repeat">
+      <a:schemeClr val="lt1"/>
+    </dgm:txFillClrLst>
+    <dgm:txEffectClrLst/>
+  </dgm:styleLbl>
+  <dgm:styleLbl name="bgImgPlace1">
+    <dgm:fillClrLst meth="repeat">
+      <a:schemeClr val="accent1">
+        <a:tint val="50000"/>
+      </a:schemeClr>
+    </dgm:fillClrLst>
+    <dgm:linClrLst meth="repeat">
+      <a:schemeClr val="lt1"/>
+    </dgm:linClrLst>
+    <dgm:effectClrLst/>
+    <dgm:txLinClrLst/>
+    <dgm:txFillClrLst meth="repeat">
+      <a:schemeClr val="lt1"/>
+    </dgm:txFillClrLst>
+    <dgm:txEffectClrLst/>
+  </dgm:styleLbl>
+  <dgm:styleLbl name="sibTrans2D1">
+    <dgm:fillClrLst meth="repeat">
+      <a:schemeClr val="accent1">
+        <a:tint val="60000"/>
+      </a:schemeClr>
+    </dgm:fillClrLst>
+    <dgm:linClrLst meth="repeat">
+      <a:schemeClr val="accent1">
+        <a:tint val="60000"/>
+      </a:schemeClr>
+    </dgm:linClrLst>
+    <dgm:effectClrLst/>
+    <dgm:txLinClrLst/>
+    <dgm:txFillClrLst/>
+    <dgm:txEffectClrLst/>
+  </dgm:styleLbl>
+  <dgm:styleLbl name="fgSibTrans2D1">
+    <dgm:fillClrLst meth="repeat">
+      <a:schemeClr val="accent1">
+        <a:tint val="60000"/>
+      </a:schemeClr>
+    </dgm:fillClrLst>
+    <dgm:linClrLst meth="repeat">
+      <a:schemeClr val="accent1">
+        <a:tint val="60000"/>
+      </a:schemeClr>
+    </dgm:linClrLst>
+    <dgm:effectClrLst/>
+    <dgm:txLinClrLst/>
+    <dgm:txFillClrLst/>
+    <dgm:txEffectClrLst/>
+  </dgm:styleLbl>
+  <dgm:styleLbl name="bgSibTrans2D1">
+    <dgm:fillClrLst meth="repeat">
+      <a:schemeClr val="accent1">
+        <a:tint val="60000"/>
+      </a:schemeClr>
+    </dgm:fillClrLst>
+    <dgm:linClrLst meth="repeat">
+      <a:schemeClr val="accent1">
+        <a:tint val="60000"/>
+      </a:schemeClr>
+    </dgm:linClrLst>
+    <dgm:effectClrLst/>
+    <dgm:txLinClrLst/>
+    <dgm:txFillClrLst/>
+    <dgm:txEffectClrLst/>
+  </dgm:styleLbl>
+  <dgm:styleLbl name="sibTrans1D1">
+    <dgm:fillClrLst meth="repeat">
+      <a:schemeClr val="accent1"/>
+    </dgm:fillClrLst>
+    <dgm:linClrLst meth="repeat">
+      <a:schemeClr val="accent1"/>
+    </dgm:linClrLst>
+    <dgm:effectClrLst/>
+    <dgm:txLinClrLst/>
+    <dgm:txFillClrLst meth="repeat">
+      <a:schemeClr val="tx1"/>
+    </dgm:txFillClrLst>
+    <dgm:txEffectClrLst/>
+  </dgm:styleLbl>
+  <dgm:styleLbl name="callout">
+    <dgm:fillClrLst meth="repeat">
+      <a:schemeClr val="accent1"/>
+    </dgm:fillClrLst>
+    <dgm:linClrLst meth="repeat">
+      <a:schemeClr val="accent1">
+        <a:tint val="50000"/>
+      </a:schemeClr>
+    </dgm:linClrLst>
+    <dgm:effectClrLst/>
+    <dgm:txLinClrLst/>
+    <dgm:txFillClrLst meth="repeat">
+      <a:schemeClr val="tx1"/>
+    </dgm:txFillClrLst>
+    <dgm:txEffectClrLst/>
+  </dgm:styleLbl>
+  <dgm:styleLbl name="asst0">
+    <dgm:fillClrLst meth="repeat">
+      <a:schemeClr val="accent1"/>
+    </dgm:fillClrLst>
+    <dgm:linClrLst meth="repeat">
+      <a:schemeClr val="lt1"/>
+    </dgm:linClrLst>
+    <dgm:effectClrLst/>
+    <dgm:txLinClrLst/>
+    <dgm:txFillClrLst/>
+    <dgm:txEffectClrLst/>
+  </dgm:styleLbl>
+  <dgm:styleLbl name="asst1">
+    <dgm:fillClrLst meth="repeat">
+      <a:schemeClr val="accent1"/>
+    </dgm:fillClrLst>
+    <dgm:linClrLst meth="repeat">
+      <a:schemeClr val="lt1"/>
+    </dgm:linClrLst>
+    <dgm:effectClrLst/>
+    <dgm:txLinClrLst/>
+    <dgm:txFillClrLst/>
+    <dgm:txEffectClrLst/>
+  </dgm:styleLbl>
+  <dgm:styleLbl name="asst2">
+    <dgm:fillClrLst meth="repeat">
+      <a:schemeClr val="accent1"/>
+    </dgm:fillClrLst>
+    <dgm:linClrLst meth="repeat">
+      <a:schemeClr val="lt1"/>
+    </dgm:linClrLst>
+    <dgm:effectClrLst/>
+    <dgm:txLinClrLst/>
+    <dgm:txFillClrLst/>
+    <dgm:txEffectClrLst/>
+  </dgm:styleLbl>
+  <dgm:styleLbl name="asst3">
+    <dgm:fillClrLst meth="repeat">
+      <a:schemeClr val="accent1"/>
+    </dgm:fillClrLst>
+    <dgm:linClrLst meth="repeat">
+      <a:schemeClr val="lt1"/>
+    </dgm:linClrLst>
+    <dgm:effectClrLst/>
+    <dgm:txLinClrLst/>
+    <dgm:txFillClrLst/>
+    <dgm:txEffectClrLst/>
+  </dgm:styleLbl>
+  <dgm:styleLbl name="asst4">
+    <dgm:fillClrLst meth="repeat">
+      <a:schemeClr val="accent1"/>
+    </dgm:fillClrLst>
+    <dgm:linClrLst meth="repeat">
+      <a:schemeClr val="lt1"/>
+    </dgm:linClrLst>
+    <dgm:effectClrLst/>
+    <dgm:txLinClrLst/>
+    <dgm:txFillClrLst/>
+    <dgm:txEffectClrLst/>
+  </dgm:styleLbl>
+  <dgm:styleLbl name="parChTrans2D1">
+    <dgm:fillClrLst meth="repeat">
+      <a:schemeClr val="accent1">
+        <a:tint val="60000"/>
+      </a:schemeClr>
+    </dgm:fillClrLst>
+    <dgm:linClrLst meth="repeat">
+      <a:schemeClr val="accent1">
+        <a:tint val="60000"/>
+      </a:schemeClr>
+    </dgm:linClrLst>
+    <dgm:effectClrLst/>
+    <dgm:txLinClrLst/>
+    <dgm:txFillClrLst meth="repeat">
+      <a:schemeClr val="lt1"/>
+    </dgm:txFillClrLst>
+    <dgm:txEffectClrLst/>
+  </dgm:styleLbl>
+  <dgm:styleLbl name="parChTrans2D2">
+    <dgm:fillClrLst meth="repeat">
+      <a:schemeClr val="accent1"/>
+    </dgm:fillClrLst>
+    <dgm:linClrLst meth="repeat">
+      <a:schemeClr val="accent1"/>
+    </dgm:linClrLst>
+    <dgm:effectClrLst/>
+    <dgm:txLinClrLst/>
+    <dgm:txFillClrLst meth="repeat">
+      <a:schemeClr val="lt1"/>
+    </dgm:txFillClrLst>
+    <dgm:txEffectClrLst/>
+  </dgm:styleLbl>
+  <dgm:styleLbl name="parChTrans2D3">
+    <dgm:fillClrLst meth="repeat">
+      <a:schemeClr val="accent1"/>
+    </dgm:fillClrLst>
+    <dgm:linClrLst meth="repeat">
+      <a:schemeClr val="accent1"/>
+    </dgm:linClrLst>
+    <dgm:effectClrLst/>
+    <dgm:txLinClrLst/>
+    <dgm:txFillClrLst meth="repeat">
+      <a:schemeClr val="lt1"/>
+    </dgm:txFillClrLst>
+    <dgm:txEffectClrLst/>
+  </dgm:styleLbl>
+  <dgm:styleLbl name="parChTrans2D4">
+    <dgm:fillClrLst meth="repeat">
+      <a:schemeClr val="accent1"/>
+    </dgm:fillClrLst>
+    <dgm:linClrLst meth="repeat">
+      <a:schemeClr val="accent1"/>
+    </dgm:linClrLst>
+    <dgm:effectClrLst/>
+    <dgm:txLinClrLst/>
+    <dgm:txFillClrLst meth="repeat">
+      <a:schemeClr val="lt1"/>
+    </dgm:txFillClrLst>
+    <dgm:txEffectClrLst/>
+  </dgm:styleLbl>
+  <dgm:styleLbl name="parChTrans1D1">
+    <dgm:fillClrLst meth="repeat">
+      <a:schemeClr val="accent1"/>
+    </dgm:fillClrLst>
+    <dgm:linClrLst meth="repeat">
+      <a:schemeClr val="accent1">
+        <a:shade val="60000"/>
+      </a:schemeClr>
+    </dgm:linClrLst>
+    <dgm:effectClrLst/>
+    <dgm:txLinClrLst/>
+    <dgm:txFillClrLst meth="repeat">
+      <a:schemeClr val="tx1"/>
+    </dgm:txFillClrLst>
+    <dgm:txEffectClrLst/>
+  </dgm:styleLbl>
+  <dgm:styleLbl name="parChTrans1D2">
+    <dgm:fillClrLst meth="repeat">
+      <a:schemeClr val="accent1"/>
+    </dgm:fillClrLst>
+    <dgm:linClrLst meth="repeat">
+      <a:schemeClr val="accent1">
+        <a:shade val="60000"/>
+      </a:schemeClr>
+    </dgm:linClrLst>
+    <dgm:effectClrLst/>
+    <dgm:txLinClrLst/>
+    <dgm:txFillClrLst meth="repeat">
+      <a:schemeClr val="tx1"/>
+    </dgm:txFillClrLst>
+    <dgm:txEffectClrLst/>
+  </dgm:styleLbl>
+  <dgm:styleLbl name="parChTrans1D3">
+    <dgm:fillClrLst meth="repeat">
+      <a:schemeClr val="accent1"/>
+    </dgm:fillClrLst>
+    <dgm:linClrLst meth="repeat">
+      <a:schemeClr val="accent1">
+        <a:shade val="80000"/>
+      </a:schemeClr>
+    </dgm:linClrLst>
+    <dgm:effectClrLst/>
+    <dgm:txLinClrLst/>
+    <dgm:txFillClrLst meth="repeat">
+      <a:schemeClr val="tx1"/>
+    </dgm:txFillClrLst>
+    <dgm:txEffectClrLst/>
+  </dgm:styleLbl>
+  <dgm:styleLbl name="parChTrans1D4">
+    <dgm:fillClrLst meth="repeat">
+      <a:schemeClr val="accent1"/>
+    </dgm:fillClrLst>
+    <dgm:linClrLst meth="repeat">
+      <a:schemeClr val="accent1">
+        <a:shade val="80000"/>
+      </a:schemeClr>
+    </dgm:linClrLst>
+    <dgm:effectClrLst/>
+    <dgm:txLinClrLst/>
+    <dgm:txFillClrLst meth="repeat">
+      <a:schemeClr val="tx1"/>
+    </dgm:txFillClrLst>
+    <dgm:txEffectClrLst/>
+  </dgm:styleLbl>
+  <dgm:styleLbl name="fgAcc1">
+    <dgm:fillClrLst meth="repeat">
+      <a:schemeClr val="lt1">
+        <a:alpha val="90000"/>
+      </a:schemeClr>
+    </dgm:fillClrLst>
+    <dgm:linClrLst meth="repeat">
+      <a:schemeClr val="accent1"/>
+    </dgm:linClrLst>
+    <dgm:effectClrLst/>
+    <dgm:txLinClrLst/>
+    <dgm:txFillClrLst meth="repeat">
+      <a:schemeClr val="dk1"/>
+    </dgm:txFillClrLst>
+    <dgm:txEffectClrLst/>
+  </dgm:styleLbl>
+  <dgm:styleLbl name="conFgAcc1">
+    <dgm:fillClrLst meth="repeat">
+      <a:schemeClr val="lt1">
+        <a:alpha val="90000"/>
+      </a:schemeClr>
+    </dgm:fillClrLst>
+    <dgm:linClrLst meth="repeat">
+      <a:schemeClr val="accent1"/>
+    </dgm:linClrLst>
+    <dgm:effectClrLst/>
+    <dgm:txLinClrLst/>
+    <dgm:txFillClrLst meth="repeat">
+      <a:schemeClr val="dk1"/>
+    </dgm:txFillClrLst>
+    <dgm:txEffectClrLst/>
+  </dgm:styleLbl>
+  <dgm:styleLbl name="alignAcc1">
+    <dgm:fillClrLst meth="repeat">
+      <a:schemeClr val="lt1">
+        <a:alpha val="90000"/>
+      </a:schemeClr>
+    </dgm:fillClrLst>
+    <dgm:linClrLst meth="repeat">
+      <a:schemeClr val="accent1"/>
+    </dgm:linClrLst>
+    <dgm:effectClrLst/>
+    <dgm:txLinClrLst/>
+    <dgm:txFillClrLst meth="repeat">
+      <a:schemeClr val="dk1"/>
+    </dgm:txFillClrLst>
+    <dgm:txEffectClrLst/>
+  </dgm:styleLbl>
+  <dgm:styleLbl name="trAlignAcc1">
+    <dgm:fillClrLst meth="repeat">
+      <a:schemeClr val="lt1">
+        <a:alpha val="40000"/>
+      </a:schemeClr>
+    </dgm:fillClrLst>
+    <dgm:linClrLst meth="repeat">
+      <a:schemeClr val="accent1"/>
+    </dgm:linClrLst>
+    <dgm:effectClrLst/>
+    <dgm:txLinClrLst/>
+    <dgm:txFillClrLst meth="repeat">
+      <a:schemeClr val="dk1"/>
+    </dgm:txFillClrLst>
+    <dgm:txEffectClrLst/>
+  </dgm:styleLbl>
+  <dgm:styleLbl name="bgAcc1">
+    <dgm:fillClrLst meth="repeat">
+      <a:schemeClr val="lt1">
+        <a:alpha val="90000"/>
+      </a:schemeClr>
+    </dgm:fillClrLst>
+    <dgm:linClrLst meth="repeat">
+      <a:schemeClr val="accent1"/>
+    </dgm:linClrLst>
+    <dgm:effectClrLst/>
+    <dgm:txLinClrLst/>
+    <dgm:txFillClrLst meth="repeat">
+      <a:schemeClr val="dk1"/>
+    </dgm:txFillClrLst>
+    <dgm:txEffectClrLst/>
+  </dgm:styleLbl>
+  <dgm:styleLbl name="solidFgAcc1">
+    <dgm:fillClrLst meth="repeat">
+      <a:schemeClr val="lt1"/>
+    </dgm:fillClrLst>
+    <dgm:linClrLst meth="repeat">
+      <a:schemeClr val="accent1"/>
+    </dgm:linClrLst>
+    <dgm:effectClrLst/>
+    <dgm:txLinClrLst/>
+    <dgm:txFillClrLst meth="repeat">
+      <a:schemeClr val="dk1"/>
+    </dgm:txFillClrLst>
+    <dgm:txEffectClrLst/>
+  </dgm:styleLbl>
+  <dgm:styleLbl name="solidAlignAcc1">
+    <dgm:fillClrLst meth="repeat">
+      <a:schemeClr val="lt1"/>
+    </dgm:fillClrLst>
+    <dgm:linClrLst meth="repeat">
+      <a:schemeClr val="accent1"/>
+    </dgm:linClrLst>
+    <dgm:effectClrLst/>
+    <dgm:txLinClrLst/>
+    <dgm:txFillClrLst meth="repeat">
+      <a:schemeClr val="dk1"/>
+    </dgm:txFillClrLst>
+    <dgm:txEffectClrLst/>
+  </dgm:styleLbl>
+  <dgm:styleLbl name="solidBgAcc1">
+    <dgm:fillClrLst meth="repeat">
+      <a:schemeClr val="lt1"/>
+    </dgm:fillClrLst>
+    <dgm:linClrLst meth="repeat">
+      <a:schemeClr val="accent1"/>
+    </dgm:linClrLst>
+    <dgm:effectClrLst/>
+    <dgm:txLinClrLst/>
+    <dgm:txFillClrLst meth="repeat">
+      <a:schemeClr val="dk1"/>
+    </dgm:txFillClrLst>
+    <dgm:txEffectClrLst/>
+  </dgm:styleLbl>
+  <dgm:styleLbl name="fgAccFollowNode1">
+    <dgm:fillClrLst meth="repeat">
+      <a:schemeClr val="accent1">
+        <a:alpha val="90000"/>
+        <a:tint val="40000"/>
+      </a:schemeClr>
+    </dgm:fillClrLst>
+    <dgm:linClrLst meth="repeat">
+      <a:schemeClr val="accent1">
+        <a:alpha val="90000"/>
+        <a:tint val="40000"/>
+      </a:schemeClr>
+    </dgm:linClrLst>
+    <dgm:effectClrLst/>
+    <dgm:txLinClrLst/>
+    <dgm:txFillClrLst meth="repeat">
+      <a:schemeClr val="dk1"/>
+    </dgm:txFillClrLst>
+    <dgm:txEffectClrLst/>
+  </dgm:styleLbl>
+  <dgm:styleLbl name="alignAccFollowNode1">
+    <dgm:fillClrLst meth="repeat">
+      <a:schemeClr val="accent1">
+        <a:alpha val="90000"/>
+        <a:tint val="40000"/>
+      </a:schemeClr>
+    </dgm:fillClrLst>
+    <dgm:linClrLst meth="repeat">
+      <a:schemeClr val="accent1">
+        <a:alpha val="90000"/>
+        <a:tint val="40000"/>
+      </a:schemeClr>
+    </dgm:linClrLst>
+    <dgm:effectClrLst/>
+    <dgm:txLinClrLst/>
+    <dgm:txFillClrLst meth="repeat">
+      <a:schemeClr val="dk1"/>
+    </dgm:txFillClrLst>
+    <dgm:txEffectClrLst/>
+  </dgm:styleLbl>
+  <dgm:styleLbl name="bgAccFollowNode1">
+    <dgm:fillClrLst meth="repeat">
+      <a:schemeClr val="accent1">
+        <a:alpha val="90000"/>
+        <a:tint val="40000"/>
+      </a:schemeClr>
+    </dgm:fillClrLst>
+    <dgm:linClrLst meth="repeat">
+      <a:schemeClr val="accent1">
+        <a:alpha val="90000"/>
+        <a:tint val="40000"/>
+      </a:schemeClr>
+    </dgm:linClrLst>
+    <dgm:effectClrLst/>
+    <dgm:txLinClrLst/>
+    <dgm:txFillClrLst meth="repeat">
+      <a:schemeClr val="dk1"/>
+    </dgm:txFillClrLst>
+    <dgm:txEffectClrLst/>
+  </dgm:styleLbl>
+  <dgm:styleLbl name="fgAcc0">
+    <dgm:fillClrLst meth="repeat">
+      <a:schemeClr val="lt1">
+        <a:alpha val="90000"/>
+      </a:schemeClr>
+    </dgm:fillClrLst>
+    <dgm:linClrLst meth="repeat">
+      <a:schemeClr val="accent1"/>
+    </dgm:linClrLst>
+    <dgm:effectClrLst/>
+    <dgm:txLinClrLst/>
+    <dgm:txFillClrLst meth="repeat">
+      <a:schemeClr val="dk1"/>
+    </dgm:txFillClrLst>
+    <dgm:txEffectClrLst/>
+  </dgm:styleLbl>
+  <dgm:styleLbl name="fgAcc2">
+    <dgm:fillClrLst meth="repeat">
+      <a:schemeClr val="lt1">
+        <a:alpha val="90000"/>
+      </a:schemeClr>
+    </dgm:fillClrLst>
+    <dgm:linClrLst meth="repeat">
+      <a:schemeClr val="accent1"/>
+    </dgm:linClrLst>
+    <dgm:effectClrLst/>
+    <dgm:txLinClrLst/>
+    <dgm:txFillClrLst meth="repeat">
+      <a:schemeClr val="dk1"/>
+    </dgm:txFillClrLst>
+    <dgm:txEffectClrLst/>
+  </dgm:styleLbl>
+  <dgm:styleLbl name="fgAcc3">
+    <dgm:fillClrLst meth="repeat">
+      <a:schemeClr val="lt1">
+        <a:alpha val="90000"/>
+      </a:schemeClr>
+    </dgm:fillClrLst>
+    <dgm:linClrLst meth="repeat">
+      <a:schemeClr val="accent1"/>
+    </dgm:linClrLst>
+    <dgm:effectClrLst/>
+    <dgm:txLinClrLst/>
+    <dgm:txFillClrLst meth="repeat">
+      <a:schemeClr val="dk1"/>
+    </dgm:txFillClrLst>
+    <dgm:txEffectClrLst/>
+  </dgm:styleLbl>
+  <dgm:styleLbl name="fgAcc4">
+    <dgm:fillClrLst meth="repeat">
+      <a:schemeClr val="lt1">
+        <a:alpha val="90000"/>
+      </a:schemeClr>
+    </dgm:fillClrLst>
+    <dgm:linClrLst meth="repeat">
+      <a:schemeClr val="accent1"/>
+    </dgm:linClrLst>
+    <dgm:effectClrLst/>
+    <dgm:txLinClrLst/>
+    <dgm:txFillClrLst meth="repeat">
+      <a:schemeClr val="dk1"/>
+    </dgm:txFillClrLst>
+    <dgm:txEffectClrLst/>
+  </dgm:styleLbl>
+  <dgm:styleLbl name="bgShp">
+    <dgm:fillClrLst meth="repeat">
+      <a:schemeClr val="accent1">
+        <a:tint val="40000"/>
+      </a:schemeClr>
+    </dgm:fillClrLst>
+    <dgm:linClrLst meth="repeat">
+      <a:schemeClr val="accent1"/>
+    </dgm:linClrLst>
+    <dgm:effectClrLst/>
+    <dgm:txLinClrLst/>
+    <dgm:txFillClrLst meth="repeat">
+      <a:schemeClr val="dk1"/>
+    </dgm:txFillClrLst>
+    <dgm:txEffectClrLst/>
+  </dgm:styleLbl>
+  <dgm:styleLbl name="dkBgShp">
+    <dgm:fillClrLst meth="repeat">
+      <a:schemeClr val="accent1">
+        <a:shade val="80000"/>
+      </a:schemeClr>
+    </dgm:fillClrLst>
+    <dgm:linClrLst meth="repeat">
+      <a:schemeClr val="accent1"/>
+    </dgm:linClrLst>
+    <dgm:effectClrLst/>
+    <dgm:txLinClrLst/>
+    <dgm:txFillClrLst meth="repeat">
+      <a:schemeClr val="lt1"/>
+    </dgm:txFillClrLst>
+    <dgm:txEffectClrLst/>
+  </dgm:styleLbl>
+  <dgm:styleLbl name="trBgShp">
+    <dgm:fillClrLst meth="repeat">
+      <a:schemeClr val="accent1">
+        <a:tint val="50000"/>
+        <a:alpha val="40000"/>
+      </a:schemeClr>
+    </dgm:fillClrLst>
+    <dgm:linClrLst meth="repeat">
+      <a:schemeClr val="accent1"/>
+    </dgm:linClrLst>
+    <dgm:effectClrLst/>
+    <dgm:txLinClrLst/>
+    <dgm:txFillClrLst meth="repeat">
+      <a:schemeClr val="lt1"/>
+    </dgm:txFillClrLst>
+    <dgm:txEffectClrLst/>
+  </dgm:styleLbl>
+  <dgm:styleLbl name="fgShp">
+    <dgm:fillClrLst meth="repeat">
+      <a:schemeClr val="accent1">
+        <a:tint val="60000"/>
+      </a:schemeClr>
+    </dgm:fillClrLst>
+    <dgm:linClrLst meth="repeat">
+      <a:schemeClr val="lt1"/>
+    </dgm:linClrLst>
+    <dgm:effectClrLst/>
+    <dgm:txLinClrLst/>
+    <dgm:txFillClrLst meth="repeat">
+      <a:schemeClr val="dk1"/>
+    </dgm:txFillClrLst>
+    <dgm:txEffectClrLst/>
+  </dgm:styleLbl>
+  <dgm:styleLbl name="revTx">
+    <dgm:fillClrLst meth="repeat">
+      <a:schemeClr val="lt1">
+        <a:alpha val="0"/>
+      </a:schemeClr>
+    </dgm:fillClrLst>
+    <dgm:linClrLst meth="repeat">
+      <a:schemeClr val="dk1">
+        <a:alpha val="0"/>
+      </a:schemeClr>
+    </dgm:linClrLst>
+    <dgm:effectClrLst/>
+    <dgm:txLinClrLst/>
+    <dgm:txFillClrLst meth="repeat">
+      <a:schemeClr val="tx1"/>
+    </dgm:txFillClrLst>
+    <dgm:txEffectClrLst/>
+  </dgm:styleLbl>
+</dgm:colorsDef>
+</file>
+
+<file path=ppt/diagrams/data1.xml><?xml version="1.0" encoding="utf-8"?>
+<dgm:dataModel xmlns:dgm="http://schemas.openxmlformats.org/drawingml/2006/diagram" xmlns:a="http://schemas.openxmlformats.org/drawingml/2006/main">
+  <dgm:ptLst>
+    <dgm:pt modelId="{115C770B-B759-418F-B059-55928E2D22A1}" type="doc">
+      <dgm:prSet loTypeId="urn:microsoft.com/office/officeart/2005/8/layout/vList2" loCatId="list" qsTypeId="urn:microsoft.com/office/officeart/2005/8/quickstyle/simple4" qsCatId="simple" csTypeId="urn:microsoft.com/office/officeart/2005/8/colors/accent1_2" csCatId="accent1"/>
+      <dgm:spPr/>
+      <dgm:t>
+        <a:bodyPr/>
+        <a:lstStyle/>
+        <a:p>
+          <a:endParaRPr lang="en-US"/>
+        </a:p>
+      </dgm:t>
+    </dgm:pt>
+    <dgm:pt modelId="{F833ABDD-37DA-493C-B661-FF749DDEBFE3}">
+      <dgm:prSet/>
+      <dgm:spPr/>
+      <dgm:t>
+        <a:bodyPr/>
+        <a:lstStyle/>
+        <a:p>
+          <a:r>
+            <a:rPr lang="en-SG" b="0" i="0"/>
+            <a:t>Simulates IoT sensors by reading environmental data from a CSV dataset. </a:t>
+          </a:r>
+          <a:endParaRPr lang="en-US"/>
+        </a:p>
+      </dgm:t>
+    </dgm:pt>
+    <dgm:pt modelId="{5AE3E8E5-26E3-40D9-9868-7EE3AECBBC3D}" type="parTrans" cxnId="{E55245ED-A916-4B9D-840B-6F6EE857B7C4}">
+      <dgm:prSet/>
+      <dgm:spPr/>
+      <dgm:t>
+        <a:bodyPr/>
+        <a:lstStyle/>
+        <a:p>
+          <a:endParaRPr lang="en-US"/>
+        </a:p>
+      </dgm:t>
+    </dgm:pt>
+    <dgm:pt modelId="{B9634E9F-6B3D-495B-9870-47DC2D61CD69}" type="sibTrans" cxnId="{E55245ED-A916-4B9D-840B-6F6EE857B7C4}">
+      <dgm:prSet/>
+      <dgm:spPr/>
+      <dgm:t>
+        <a:bodyPr/>
+        <a:lstStyle/>
+        <a:p>
+          <a:endParaRPr lang="en-US"/>
+        </a:p>
+      </dgm:t>
+    </dgm:pt>
+    <dgm:pt modelId="{9C33E53F-0C00-4A92-A7F5-090EBA0C83E9}">
+      <dgm:prSet/>
+      <dgm:spPr/>
+      <dgm:t>
+        <a:bodyPr/>
+        <a:lstStyle/>
+        <a:p>
+          <a:r>
+            <a:rPr lang="en-SG" b="0" i="0"/>
+            <a:t>Continuously loops through the dataset to generate real-time sensor readings. </a:t>
+          </a:r>
+          <a:endParaRPr lang="en-US"/>
+        </a:p>
+      </dgm:t>
+    </dgm:pt>
+    <dgm:pt modelId="{01D5D7E2-18CA-42F4-B09B-E475A0A4263D}" type="parTrans" cxnId="{0F370EFE-61ED-411E-B683-662C1623ADD8}">
+      <dgm:prSet/>
+      <dgm:spPr/>
+      <dgm:t>
+        <a:bodyPr/>
+        <a:lstStyle/>
+        <a:p>
+          <a:endParaRPr lang="en-US"/>
+        </a:p>
+      </dgm:t>
+    </dgm:pt>
+    <dgm:pt modelId="{5F88ED4A-68E1-4D64-8CE7-E4E2C3E37CBB}" type="sibTrans" cxnId="{0F370EFE-61ED-411E-B683-662C1623ADD8}">
+      <dgm:prSet/>
+      <dgm:spPr/>
+      <dgm:t>
+        <a:bodyPr/>
+        <a:lstStyle/>
+        <a:p>
+          <a:endParaRPr lang="en-US"/>
+        </a:p>
+      </dgm:t>
+    </dgm:pt>
+    <dgm:pt modelId="{122FCE30-A249-4B0F-9FF5-426A88D04FDB}">
+      <dgm:prSet/>
+      <dgm:spPr/>
+      <dgm:t>
+        <a:bodyPr/>
+        <a:lstStyle/>
+        <a:p>
+          <a:r>
+            <a:rPr lang="en-SG" b="0" i="0"/>
+            <a:t>Sends one data record at a time to the </a:t>
+          </a:r>
+          <a:r>
+            <a:rPr lang="en-SG" b="1" i="0"/>
+            <a:t>Data Ingestion Service</a:t>
+          </a:r>
+          <a:r>
+            <a:rPr lang="en-SG" b="0" i="0"/>
+            <a:t> via REST API. </a:t>
+          </a:r>
+          <a:endParaRPr lang="en-US"/>
+        </a:p>
+      </dgm:t>
+    </dgm:pt>
+    <dgm:pt modelId="{FD1ED5DF-E536-4890-82F2-F0B0BFA9DA1A}" type="parTrans" cxnId="{855BC63A-3E05-4457-8E4D-032985535239}">
+      <dgm:prSet/>
+      <dgm:spPr/>
+      <dgm:t>
+        <a:bodyPr/>
+        <a:lstStyle/>
+        <a:p>
+          <a:endParaRPr lang="en-US"/>
+        </a:p>
+      </dgm:t>
+    </dgm:pt>
+    <dgm:pt modelId="{27FEB4CA-BF0E-4686-948E-229BCF577BFD}" type="sibTrans" cxnId="{855BC63A-3E05-4457-8E4D-032985535239}">
+      <dgm:prSet/>
+      <dgm:spPr/>
+      <dgm:t>
+        <a:bodyPr/>
+        <a:lstStyle/>
+        <a:p>
+          <a:endParaRPr lang="en-US"/>
+        </a:p>
+      </dgm:t>
+    </dgm:pt>
+    <dgm:pt modelId="{F3B7335F-80DB-4BEF-8B74-D37A9F0F7AF9}">
+      <dgm:prSet/>
+      <dgm:spPr/>
+      <dgm:t>
+        <a:bodyPr/>
+        <a:lstStyle/>
+        <a:p>
+          <a:r>
+            <a:rPr lang="en-SG" b="0" i="0"/>
+            <a:t>Mimics a live data stream for processing, analysis, and visualization. </a:t>
+          </a:r>
+          <a:endParaRPr lang="en-US" dirty="0"/>
+        </a:p>
+      </dgm:t>
+    </dgm:pt>
+    <dgm:pt modelId="{DB710271-5A6B-4020-AD53-A9C22F091B76}" type="parTrans" cxnId="{C766F4E8-9982-4227-9F4D-BD5E5579F539}">
+      <dgm:prSet/>
+      <dgm:spPr/>
+      <dgm:t>
+        <a:bodyPr/>
+        <a:lstStyle/>
+        <a:p>
+          <a:endParaRPr lang="en-US"/>
+        </a:p>
+      </dgm:t>
+    </dgm:pt>
+    <dgm:pt modelId="{832DE638-0C31-4007-9AC8-2F185A5A1B3B}" type="sibTrans" cxnId="{C766F4E8-9982-4227-9F4D-BD5E5579F539}">
+      <dgm:prSet/>
+      <dgm:spPr/>
+      <dgm:t>
+        <a:bodyPr/>
+        <a:lstStyle/>
+        <a:p>
+          <a:endParaRPr lang="en-US"/>
+        </a:p>
+      </dgm:t>
+    </dgm:pt>
+    <dgm:pt modelId="{22A6E412-DCFA-48A5-BFA8-B9B258A74664}">
+      <dgm:prSet/>
+      <dgm:spPr/>
+      <dgm:t>
+        <a:bodyPr/>
+        <a:lstStyle/>
+        <a:p>
+          <a:r>
+            <a:rPr lang="en-SG" b="0" i="0" dirty="0"/>
+            <a:t>Enables system testing without requiring physical IoT sensors. </a:t>
+          </a:r>
+          <a:endParaRPr lang="en-US" dirty="0"/>
+        </a:p>
+      </dgm:t>
+    </dgm:pt>
+    <dgm:pt modelId="{98251FAC-7A60-4055-BBA1-DAC75ADDCE28}" type="parTrans" cxnId="{CE3FB61F-CD47-4F20-B0A0-26F419C4E572}">
+      <dgm:prSet/>
+      <dgm:spPr/>
+      <dgm:t>
+        <a:bodyPr/>
+        <a:lstStyle/>
+        <a:p>
+          <a:endParaRPr lang="en-US"/>
+        </a:p>
+      </dgm:t>
+    </dgm:pt>
+    <dgm:pt modelId="{FB570BCA-47F2-4C11-9B7E-623F57159652}" type="sibTrans" cxnId="{CE3FB61F-CD47-4F20-B0A0-26F419C4E572}">
+      <dgm:prSet/>
+      <dgm:spPr/>
+      <dgm:t>
+        <a:bodyPr/>
+        <a:lstStyle/>
+        <a:p>
+          <a:endParaRPr lang="en-US"/>
+        </a:p>
+      </dgm:t>
+    </dgm:pt>
+    <dgm:pt modelId="{434B403C-FEFC-4EFE-BB46-932C95CF5F41}">
+      <dgm:prSet/>
+      <dgm:spPr/>
+      <dgm:t>
+        <a:bodyPr/>
+        <a:lstStyle/>
+        <a:p>
+          <a:r>
+            <a:rPr lang="en-SG" b="0" i="0"/>
+            <a:t>Can be easily replaced with real sensors in a production environment. </a:t>
+          </a:r>
+          <a:endParaRPr lang="en-US"/>
+        </a:p>
+      </dgm:t>
+    </dgm:pt>
+    <dgm:pt modelId="{81622D1B-D682-435C-BE8D-EACD9C8194F1}" type="parTrans" cxnId="{4B5A023E-E935-437C-A5E1-D9B48AB608B6}">
+      <dgm:prSet/>
+      <dgm:spPr/>
+      <dgm:t>
+        <a:bodyPr/>
+        <a:lstStyle/>
+        <a:p>
+          <a:endParaRPr lang="en-US"/>
+        </a:p>
+      </dgm:t>
+    </dgm:pt>
+    <dgm:pt modelId="{D31AE6BD-73DB-487D-98D1-4AA698491566}" type="sibTrans" cxnId="{4B5A023E-E935-437C-A5E1-D9B48AB608B6}">
+      <dgm:prSet/>
+      <dgm:spPr/>
+      <dgm:t>
+        <a:bodyPr/>
+        <a:lstStyle/>
+        <a:p>
+          <a:endParaRPr lang="en-US"/>
+        </a:p>
+      </dgm:t>
+    </dgm:pt>
+    <dgm:pt modelId="{4E6C68EC-C16A-4658-9F81-153681193BD1}" type="pres">
+      <dgm:prSet presAssocID="{115C770B-B759-418F-B059-55928E2D22A1}" presName="linear" presStyleCnt="0">
+        <dgm:presLayoutVars>
+          <dgm:animLvl val="lvl"/>
+          <dgm:resizeHandles val="exact"/>
+        </dgm:presLayoutVars>
+      </dgm:prSet>
+      <dgm:spPr/>
+    </dgm:pt>
+    <dgm:pt modelId="{803D2DDB-A8CA-4671-890F-F8BDACE777F7}" type="pres">
+      <dgm:prSet presAssocID="{F833ABDD-37DA-493C-B661-FF749DDEBFE3}" presName="parentText" presStyleLbl="node1" presStyleIdx="0" presStyleCnt="6">
+        <dgm:presLayoutVars>
+          <dgm:chMax val="0"/>
+          <dgm:bulletEnabled val="1"/>
+        </dgm:presLayoutVars>
+      </dgm:prSet>
+      <dgm:spPr/>
+    </dgm:pt>
+    <dgm:pt modelId="{4B841BE8-3230-458D-97FA-FC490F489385}" type="pres">
+      <dgm:prSet presAssocID="{B9634E9F-6B3D-495B-9870-47DC2D61CD69}" presName="spacer" presStyleCnt="0"/>
+      <dgm:spPr/>
+    </dgm:pt>
+    <dgm:pt modelId="{F487DC3A-F61C-44B4-9F99-0F65CD4DEBAA}" type="pres">
+      <dgm:prSet presAssocID="{9C33E53F-0C00-4A92-A7F5-090EBA0C83E9}" presName="parentText" presStyleLbl="node1" presStyleIdx="1" presStyleCnt="6">
+        <dgm:presLayoutVars>
+          <dgm:chMax val="0"/>
+          <dgm:bulletEnabled val="1"/>
+        </dgm:presLayoutVars>
+      </dgm:prSet>
+      <dgm:spPr/>
+    </dgm:pt>
+    <dgm:pt modelId="{AACC3E33-A2E2-443A-A721-3AAAA23DF07A}" type="pres">
+      <dgm:prSet presAssocID="{5F88ED4A-68E1-4D64-8CE7-E4E2C3E37CBB}" presName="spacer" presStyleCnt="0"/>
+      <dgm:spPr/>
+    </dgm:pt>
+    <dgm:pt modelId="{56F213EB-114B-4E5D-849E-626861359D02}" type="pres">
+      <dgm:prSet presAssocID="{122FCE30-A249-4B0F-9FF5-426A88D04FDB}" presName="parentText" presStyleLbl="node1" presStyleIdx="2" presStyleCnt="6">
+        <dgm:presLayoutVars>
+          <dgm:chMax val="0"/>
+          <dgm:bulletEnabled val="1"/>
+        </dgm:presLayoutVars>
+      </dgm:prSet>
+      <dgm:spPr/>
+    </dgm:pt>
+    <dgm:pt modelId="{9CCBBDB0-474F-4CBF-ADDC-77802E01FD7A}" type="pres">
+      <dgm:prSet presAssocID="{27FEB4CA-BF0E-4686-948E-229BCF577BFD}" presName="spacer" presStyleCnt="0"/>
+      <dgm:spPr/>
+    </dgm:pt>
+    <dgm:pt modelId="{0EC18C10-9BD1-4D6B-8B02-4375CA4A8FAD}" type="pres">
+      <dgm:prSet presAssocID="{F3B7335F-80DB-4BEF-8B74-D37A9F0F7AF9}" presName="parentText" presStyleLbl="node1" presStyleIdx="3" presStyleCnt="6">
+        <dgm:presLayoutVars>
+          <dgm:chMax val="0"/>
+          <dgm:bulletEnabled val="1"/>
+        </dgm:presLayoutVars>
+      </dgm:prSet>
+      <dgm:spPr/>
+    </dgm:pt>
+    <dgm:pt modelId="{4DA00AD2-3970-4D74-BA0F-67D9C594B304}" type="pres">
+      <dgm:prSet presAssocID="{832DE638-0C31-4007-9AC8-2F185A5A1B3B}" presName="spacer" presStyleCnt="0"/>
+      <dgm:spPr/>
+    </dgm:pt>
+    <dgm:pt modelId="{183FE836-C141-4348-8519-82B5514B031A}" type="pres">
+      <dgm:prSet presAssocID="{22A6E412-DCFA-48A5-BFA8-B9B258A74664}" presName="parentText" presStyleLbl="node1" presStyleIdx="4" presStyleCnt="6">
+        <dgm:presLayoutVars>
+          <dgm:chMax val="0"/>
+          <dgm:bulletEnabled val="1"/>
+        </dgm:presLayoutVars>
+      </dgm:prSet>
+      <dgm:spPr/>
+    </dgm:pt>
+    <dgm:pt modelId="{1A300483-DA7B-4DDF-BB7A-ABE848E8E14D}" type="pres">
+      <dgm:prSet presAssocID="{FB570BCA-47F2-4C11-9B7E-623F57159652}" presName="spacer" presStyleCnt="0"/>
+      <dgm:spPr/>
+    </dgm:pt>
+    <dgm:pt modelId="{6F5AFA70-95A8-4BBC-B013-0C576A29FEF0}" type="pres">
+      <dgm:prSet presAssocID="{434B403C-FEFC-4EFE-BB46-932C95CF5F41}" presName="parentText" presStyleLbl="node1" presStyleIdx="5" presStyleCnt="6">
+        <dgm:presLayoutVars>
+          <dgm:chMax val="0"/>
+          <dgm:bulletEnabled val="1"/>
+        </dgm:presLayoutVars>
+      </dgm:prSet>
+      <dgm:spPr/>
+    </dgm:pt>
+  </dgm:ptLst>
+  <dgm:cxnLst>
+    <dgm:cxn modelId="{41DBA503-FA48-4D4D-B2E8-0825A64D1B1F}" type="presOf" srcId="{434B403C-FEFC-4EFE-BB46-932C95CF5F41}" destId="{6F5AFA70-95A8-4BBC-B013-0C576A29FEF0}" srcOrd="0" destOrd="0" presId="urn:microsoft.com/office/officeart/2005/8/layout/vList2"/>
+    <dgm:cxn modelId="{AB0FD20C-1258-4037-A57B-E92D212E9BB9}" type="presOf" srcId="{9C33E53F-0C00-4A92-A7F5-090EBA0C83E9}" destId="{F487DC3A-F61C-44B4-9F99-0F65CD4DEBAA}" srcOrd="0" destOrd="0" presId="urn:microsoft.com/office/officeart/2005/8/layout/vList2"/>
+    <dgm:cxn modelId="{CE3FB61F-CD47-4F20-B0A0-26F419C4E572}" srcId="{115C770B-B759-418F-B059-55928E2D22A1}" destId="{22A6E412-DCFA-48A5-BFA8-B9B258A74664}" srcOrd="4" destOrd="0" parTransId="{98251FAC-7A60-4055-BBA1-DAC75ADDCE28}" sibTransId="{FB570BCA-47F2-4C11-9B7E-623F57159652}"/>
+    <dgm:cxn modelId="{2F793722-EB72-4E5C-9A4C-7AE93DD90F5C}" type="presOf" srcId="{F833ABDD-37DA-493C-B661-FF749DDEBFE3}" destId="{803D2DDB-A8CA-4671-890F-F8BDACE777F7}" srcOrd="0" destOrd="0" presId="urn:microsoft.com/office/officeart/2005/8/layout/vList2"/>
+    <dgm:cxn modelId="{855BC63A-3E05-4457-8E4D-032985535239}" srcId="{115C770B-B759-418F-B059-55928E2D22A1}" destId="{122FCE30-A249-4B0F-9FF5-426A88D04FDB}" srcOrd="2" destOrd="0" parTransId="{FD1ED5DF-E536-4890-82F2-F0B0BFA9DA1A}" sibTransId="{27FEB4CA-BF0E-4686-948E-229BCF577BFD}"/>
+    <dgm:cxn modelId="{4B5A023E-E935-437C-A5E1-D9B48AB608B6}" srcId="{115C770B-B759-418F-B059-55928E2D22A1}" destId="{434B403C-FEFC-4EFE-BB46-932C95CF5F41}" srcOrd="5" destOrd="0" parTransId="{81622D1B-D682-435C-BE8D-EACD9C8194F1}" sibTransId="{D31AE6BD-73DB-487D-98D1-4AA698491566}"/>
+    <dgm:cxn modelId="{069A1463-6C31-4448-882E-75744EBFAF8B}" type="presOf" srcId="{F3B7335F-80DB-4BEF-8B74-D37A9F0F7AF9}" destId="{0EC18C10-9BD1-4D6B-8B02-4375CA4A8FAD}" srcOrd="0" destOrd="0" presId="urn:microsoft.com/office/officeart/2005/8/layout/vList2"/>
+    <dgm:cxn modelId="{FD52637D-5B60-467D-82F1-B404F5148FE3}" type="presOf" srcId="{122FCE30-A249-4B0F-9FF5-426A88D04FDB}" destId="{56F213EB-114B-4E5D-849E-626861359D02}" srcOrd="0" destOrd="0" presId="urn:microsoft.com/office/officeart/2005/8/layout/vList2"/>
+    <dgm:cxn modelId="{06D6FB9C-75CD-4F66-9587-EDC96F0A0942}" type="presOf" srcId="{22A6E412-DCFA-48A5-BFA8-B9B258A74664}" destId="{183FE836-C141-4348-8519-82B5514B031A}" srcOrd="0" destOrd="0" presId="urn:microsoft.com/office/officeart/2005/8/layout/vList2"/>
+    <dgm:cxn modelId="{9DB31FC3-3CCD-48FE-A6FA-FC0CC31D654D}" type="presOf" srcId="{115C770B-B759-418F-B059-55928E2D22A1}" destId="{4E6C68EC-C16A-4658-9F81-153681193BD1}" srcOrd="0" destOrd="0" presId="urn:microsoft.com/office/officeart/2005/8/layout/vList2"/>
+    <dgm:cxn modelId="{C766F4E8-9982-4227-9F4D-BD5E5579F539}" srcId="{115C770B-B759-418F-B059-55928E2D22A1}" destId="{F3B7335F-80DB-4BEF-8B74-D37A9F0F7AF9}" srcOrd="3" destOrd="0" parTransId="{DB710271-5A6B-4020-AD53-A9C22F091B76}" sibTransId="{832DE638-0C31-4007-9AC8-2F185A5A1B3B}"/>
+    <dgm:cxn modelId="{E55245ED-A916-4B9D-840B-6F6EE857B7C4}" srcId="{115C770B-B759-418F-B059-55928E2D22A1}" destId="{F833ABDD-37DA-493C-B661-FF749DDEBFE3}" srcOrd="0" destOrd="0" parTransId="{5AE3E8E5-26E3-40D9-9868-7EE3AECBBC3D}" sibTransId="{B9634E9F-6B3D-495B-9870-47DC2D61CD69}"/>
+    <dgm:cxn modelId="{0F370EFE-61ED-411E-B683-662C1623ADD8}" srcId="{115C770B-B759-418F-B059-55928E2D22A1}" destId="{9C33E53F-0C00-4A92-A7F5-090EBA0C83E9}" srcOrd="1" destOrd="0" parTransId="{01D5D7E2-18CA-42F4-B09B-E475A0A4263D}" sibTransId="{5F88ED4A-68E1-4D64-8CE7-E4E2C3E37CBB}"/>
+    <dgm:cxn modelId="{9C47E5F1-F5B1-4DBF-8BA6-FD0D58FC9D72}" type="presParOf" srcId="{4E6C68EC-C16A-4658-9F81-153681193BD1}" destId="{803D2DDB-A8CA-4671-890F-F8BDACE777F7}" srcOrd="0" destOrd="0" presId="urn:microsoft.com/office/officeart/2005/8/layout/vList2"/>
+    <dgm:cxn modelId="{CE716086-303C-43E7-A664-C0F89C948C36}" type="presParOf" srcId="{4E6C68EC-C16A-4658-9F81-153681193BD1}" destId="{4B841BE8-3230-458D-97FA-FC490F489385}" srcOrd="1" destOrd="0" presId="urn:microsoft.com/office/officeart/2005/8/layout/vList2"/>
+    <dgm:cxn modelId="{C8714BF9-2AF7-4044-989F-D882EA694E04}" type="presParOf" srcId="{4E6C68EC-C16A-4658-9F81-153681193BD1}" destId="{F487DC3A-F61C-44B4-9F99-0F65CD4DEBAA}" srcOrd="2" destOrd="0" presId="urn:microsoft.com/office/officeart/2005/8/layout/vList2"/>
+    <dgm:cxn modelId="{DA40D11C-23AA-4550-A0BB-1FD951354A82}" type="presParOf" srcId="{4E6C68EC-C16A-4658-9F81-153681193BD1}" destId="{AACC3E33-A2E2-443A-A721-3AAAA23DF07A}" srcOrd="3" destOrd="0" presId="urn:microsoft.com/office/officeart/2005/8/layout/vList2"/>
+    <dgm:cxn modelId="{99564E0C-1FFD-428D-BB15-69F7B9A76450}" type="presParOf" srcId="{4E6C68EC-C16A-4658-9F81-153681193BD1}" destId="{56F213EB-114B-4E5D-849E-626861359D02}" srcOrd="4" destOrd="0" presId="urn:microsoft.com/office/officeart/2005/8/layout/vList2"/>
+    <dgm:cxn modelId="{6295C930-944E-48E4-BE99-35FAAF68789C}" type="presParOf" srcId="{4E6C68EC-C16A-4658-9F81-153681193BD1}" destId="{9CCBBDB0-474F-4CBF-ADDC-77802E01FD7A}" srcOrd="5" destOrd="0" presId="urn:microsoft.com/office/officeart/2005/8/layout/vList2"/>
+    <dgm:cxn modelId="{6E4E9875-9238-4099-8D2A-2FD5B77B8460}" type="presParOf" srcId="{4E6C68EC-C16A-4658-9F81-153681193BD1}" destId="{0EC18C10-9BD1-4D6B-8B02-4375CA4A8FAD}" srcOrd="6" destOrd="0" presId="urn:microsoft.com/office/officeart/2005/8/layout/vList2"/>
+    <dgm:cxn modelId="{FD1AB111-D2A0-4CF3-B4F2-8A4F93491078}" type="presParOf" srcId="{4E6C68EC-C16A-4658-9F81-153681193BD1}" destId="{4DA00AD2-3970-4D74-BA0F-67D9C594B304}" srcOrd="7" destOrd="0" presId="urn:microsoft.com/office/officeart/2005/8/layout/vList2"/>
+    <dgm:cxn modelId="{472820A1-5649-47AC-BC3A-3FBC87C82C9F}" type="presParOf" srcId="{4E6C68EC-C16A-4658-9F81-153681193BD1}" destId="{183FE836-C141-4348-8519-82B5514B031A}" srcOrd="8" destOrd="0" presId="urn:microsoft.com/office/officeart/2005/8/layout/vList2"/>
+    <dgm:cxn modelId="{AFD0C0EF-9CE7-42C6-8563-900B688564B0}" type="presParOf" srcId="{4E6C68EC-C16A-4658-9F81-153681193BD1}" destId="{1A300483-DA7B-4DDF-BB7A-ABE848E8E14D}" srcOrd="9" destOrd="0" presId="urn:microsoft.com/office/officeart/2005/8/layout/vList2"/>
+    <dgm:cxn modelId="{C61D7AC9-7DB0-4071-9446-E59BAEEF25C5}" type="presParOf" srcId="{4E6C68EC-C16A-4658-9F81-153681193BD1}" destId="{6F5AFA70-95A8-4BBC-B013-0C576A29FEF0}" srcOrd="10" destOrd="0" presId="urn:microsoft.com/office/officeart/2005/8/layout/vList2"/>
+  </dgm:cxnLst>
+  <dgm:bg/>
+  <dgm:whole/>
+  <dgm:extLst>
+    <a:ext uri="http://schemas.microsoft.com/office/drawing/2008/diagram">
+      <dsp:dataModelExt xmlns:dsp="http://schemas.microsoft.com/office/drawing/2008/diagram" relId="rId9" minVer="http://schemas.openxmlformats.org/drawingml/2006/diagram"/>
+    </a:ext>
+  </dgm:extLst>
+</dgm:dataModel>
+</file>
+
+<file path=ppt/diagrams/drawing1.xml><?xml version="1.0" encoding="utf-8"?>
+<dsp:drawing xmlns:dgm="http://schemas.openxmlformats.org/drawingml/2006/diagram" xmlns:dsp="http://schemas.microsoft.com/office/drawing/2008/diagram" xmlns:a="http://schemas.openxmlformats.org/drawingml/2006/main">
+  <dsp:spTree>
+    <dsp:nvGrpSpPr>
+      <dsp:cNvPr id="0" name=""/>
+      <dsp:cNvGrpSpPr/>
+    </dsp:nvGrpSpPr>
+    <dsp:grpSpPr/>
+    <dsp:sp modelId="{803D2DDB-A8CA-4671-890F-F8BDACE777F7}">
+      <dsp:nvSpPr>
+        <dsp:cNvPr id="0" name=""/>
+        <dsp:cNvSpPr/>
+      </dsp:nvSpPr>
+      <dsp:spPr>
+        <a:xfrm>
+          <a:off x="0" y="85860"/>
+          <a:ext cx="6492240" cy="835379"/>
+        </a:xfrm>
+        <a:prstGeom prst="roundRect">
+          <a:avLst/>
+        </a:prstGeom>
+        <a:gradFill rotWithShape="0">
+          <a:gsLst>
+            <a:gs pos="0">
+              <a:schemeClr val="accent1">
+                <a:hueOff val="0"/>
+                <a:satOff val="0"/>
+                <a:lumOff val="0"/>
+                <a:alphaOff val="0"/>
+                <a:satMod val="103000"/>
+                <a:lumMod val="102000"/>
+                <a:tint val="94000"/>
+              </a:schemeClr>
+            </a:gs>
+            <a:gs pos="50000">
+              <a:schemeClr val="accent1">
+                <a:hueOff val="0"/>
+                <a:satOff val="0"/>
+                <a:lumOff val="0"/>
+                <a:alphaOff val="0"/>
+                <a:satMod val="110000"/>
+                <a:lumMod val="100000"/>
+                <a:shade val="100000"/>
+              </a:schemeClr>
+            </a:gs>
+            <a:gs pos="100000">
+              <a:schemeClr val="accent1">
+                <a:hueOff val="0"/>
+                <a:satOff val="0"/>
+                <a:lumOff val="0"/>
+                <a:alphaOff val="0"/>
+                <a:lumMod val="99000"/>
+                <a:satMod val="120000"/>
+                <a:shade val="78000"/>
+              </a:schemeClr>
+            </a:gs>
+          </a:gsLst>
+          <a:lin ang="5400000" scaled="0"/>
+        </a:gradFill>
+        <a:ln>
+          <a:noFill/>
+        </a:ln>
+        <a:effectLst/>
+      </dsp:spPr>
+      <dsp:style>
+        <a:lnRef idx="0">
+          <a:scrgbClr r="0" g="0" b="0"/>
+        </a:lnRef>
+        <a:fillRef idx="3">
+          <a:scrgbClr r="0" g="0" b="0"/>
+        </a:fillRef>
+        <a:effectRef idx="2">
+          <a:scrgbClr r="0" g="0" b="0"/>
+        </a:effectRef>
+        <a:fontRef idx="minor">
+          <a:schemeClr val="lt1"/>
+        </a:fontRef>
+      </dsp:style>
+      <dsp:txBody>
+        <a:bodyPr spcFirstLastPara="0" vert="horz" wrap="square" lIns="80010" tIns="80010" rIns="80010" bIns="80010" numCol="1" spcCol="1270" anchor="ctr" anchorCtr="0">
+          <a:noAutofit/>
+        </a:bodyPr>
+        <a:lstStyle/>
+        <a:p>
+          <a:pPr marL="0" lvl="0" indent="0" algn="l" defTabSz="933450">
+            <a:lnSpc>
+              <a:spcPct val="90000"/>
+            </a:lnSpc>
+            <a:spcBef>
+              <a:spcPct val="0"/>
+            </a:spcBef>
+            <a:spcAft>
+              <a:spcPct val="35000"/>
+            </a:spcAft>
+            <a:buNone/>
+          </a:pPr>
+          <a:r>
+            <a:rPr lang="en-SG" sz="2100" b="0" i="0" kern="1200"/>
+            <a:t>Simulates IoT sensors by reading environmental data from a CSV dataset. </a:t>
+          </a:r>
+          <a:endParaRPr lang="en-US" sz="2100" kern="1200"/>
+        </a:p>
+      </dsp:txBody>
+      <dsp:txXfrm>
+        <a:off x="40780" y="126640"/>
+        <a:ext cx="6410680" cy="753819"/>
+      </dsp:txXfrm>
+    </dsp:sp>
+    <dsp:sp modelId="{F487DC3A-F61C-44B4-9F99-0F65CD4DEBAA}">
+      <dsp:nvSpPr>
+        <dsp:cNvPr id="0" name=""/>
+        <dsp:cNvSpPr/>
+      </dsp:nvSpPr>
+      <dsp:spPr>
+        <a:xfrm>
+          <a:off x="0" y="981720"/>
+          <a:ext cx="6492240" cy="835379"/>
+        </a:xfrm>
+        <a:prstGeom prst="roundRect">
+          <a:avLst/>
+        </a:prstGeom>
+        <a:gradFill rotWithShape="0">
+          <a:gsLst>
+            <a:gs pos="0">
+              <a:schemeClr val="accent1">
+                <a:hueOff val="0"/>
+                <a:satOff val="0"/>
+                <a:lumOff val="0"/>
+                <a:alphaOff val="0"/>
+                <a:satMod val="103000"/>
+                <a:lumMod val="102000"/>
+                <a:tint val="94000"/>
+              </a:schemeClr>
+            </a:gs>
+            <a:gs pos="50000">
+              <a:schemeClr val="accent1">
+                <a:hueOff val="0"/>
+                <a:satOff val="0"/>
+                <a:lumOff val="0"/>
+                <a:alphaOff val="0"/>
+                <a:satMod val="110000"/>
+                <a:lumMod val="100000"/>
+                <a:shade val="100000"/>
+              </a:schemeClr>
+            </a:gs>
+            <a:gs pos="100000">
+              <a:schemeClr val="accent1">
+                <a:hueOff val="0"/>
+                <a:satOff val="0"/>
+                <a:lumOff val="0"/>
+                <a:alphaOff val="0"/>
+                <a:lumMod val="99000"/>
+                <a:satMod val="120000"/>
+                <a:shade val="78000"/>
+              </a:schemeClr>
+            </a:gs>
+          </a:gsLst>
+          <a:lin ang="5400000" scaled="0"/>
+        </a:gradFill>
+        <a:ln>
+          <a:noFill/>
+        </a:ln>
+        <a:effectLst/>
+      </dsp:spPr>
+      <dsp:style>
+        <a:lnRef idx="0">
+          <a:scrgbClr r="0" g="0" b="0"/>
+        </a:lnRef>
+        <a:fillRef idx="3">
+          <a:scrgbClr r="0" g="0" b="0"/>
+        </a:fillRef>
+        <a:effectRef idx="2">
+          <a:scrgbClr r="0" g="0" b="0"/>
+        </a:effectRef>
+        <a:fontRef idx="minor">
+          <a:schemeClr val="lt1"/>
+        </a:fontRef>
+      </dsp:style>
+      <dsp:txBody>
+        <a:bodyPr spcFirstLastPara="0" vert="horz" wrap="square" lIns="80010" tIns="80010" rIns="80010" bIns="80010" numCol="1" spcCol="1270" anchor="ctr" anchorCtr="0">
+          <a:noAutofit/>
+        </a:bodyPr>
+        <a:lstStyle/>
+        <a:p>
+          <a:pPr marL="0" lvl="0" indent="0" algn="l" defTabSz="933450">
+            <a:lnSpc>
+              <a:spcPct val="90000"/>
+            </a:lnSpc>
+            <a:spcBef>
+              <a:spcPct val="0"/>
+            </a:spcBef>
+            <a:spcAft>
+              <a:spcPct val="35000"/>
+            </a:spcAft>
+            <a:buNone/>
+          </a:pPr>
+          <a:r>
+            <a:rPr lang="en-SG" sz="2100" b="0" i="0" kern="1200"/>
+            <a:t>Continuously loops through the dataset to generate real-time sensor readings. </a:t>
+          </a:r>
+          <a:endParaRPr lang="en-US" sz="2100" kern="1200"/>
+        </a:p>
+      </dsp:txBody>
+      <dsp:txXfrm>
+        <a:off x="40780" y="1022500"/>
+        <a:ext cx="6410680" cy="753819"/>
+      </dsp:txXfrm>
+    </dsp:sp>
+    <dsp:sp modelId="{56F213EB-114B-4E5D-849E-626861359D02}">
+      <dsp:nvSpPr>
+        <dsp:cNvPr id="0" name=""/>
+        <dsp:cNvSpPr/>
+      </dsp:nvSpPr>
+      <dsp:spPr>
+        <a:xfrm>
+          <a:off x="0" y="1877580"/>
+          <a:ext cx="6492240" cy="835379"/>
+        </a:xfrm>
+        <a:prstGeom prst="roundRect">
+          <a:avLst/>
+        </a:prstGeom>
+        <a:gradFill rotWithShape="0">
+          <a:gsLst>
+            <a:gs pos="0">
+              <a:schemeClr val="accent1">
+                <a:hueOff val="0"/>
+                <a:satOff val="0"/>
+                <a:lumOff val="0"/>
+                <a:alphaOff val="0"/>
+                <a:satMod val="103000"/>
+                <a:lumMod val="102000"/>
+                <a:tint val="94000"/>
+              </a:schemeClr>
+            </a:gs>
+            <a:gs pos="50000">
+              <a:schemeClr val="accent1">
+                <a:hueOff val="0"/>
+                <a:satOff val="0"/>
+                <a:lumOff val="0"/>
+                <a:alphaOff val="0"/>
+                <a:satMod val="110000"/>
+                <a:lumMod val="100000"/>
+                <a:shade val="100000"/>
+              </a:schemeClr>
+            </a:gs>
+            <a:gs pos="100000">
+              <a:schemeClr val="accent1">
+                <a:hueOff val="0"/>
+                <a:satOff val="0"/>
+                <a:lumOff val="0"/>
+                <a:alphaOff val="0"/>
+                <a:lumMod val="99000"/>
+                <a:satMod val="120000"/>
+                <a:shade val="78000"/>
+              </a:schemeClr>
+            </a:gs>
+          </a:gsLst>
+          <a:lin ang="5400000" scaled="0"/>
+        </a:gradFill>
+        <a:ln>
+          <a:noFill/>
+        </a:ln>
+        <a:effectLst/>
+      </dsp:spPr>
+      <dsp:style>
+        <a:lnRef idx="0">
+          <a:scrgbClr r="0" g="0" b="0"/>
+        </a:lnRef>
+        <a:fillRef idx="3">
+          <a:scrgbClr r="0" g="0" b="0"/>
+        </a:fillRef>
+        <a:effectRef idx="2">
+          <a:scrgbClr r="0" g="0" b="0"/>
+        </a:effectRef>
+        <a:fontRef idx="minor">
+          <a:schemeClr val="lt1"/>
+        </a:fontRef>
+      </dsp:style>
+      <dsp:txBody>
+        <a:bodyPr spcFirstLastPara="0" vert="horz" wrap="square" lIns="80010" tIns="80010" rIns="80010" bIns="80010" numCol="1" spcCol="1270" anchor="ctr" anchorCtr="0">
+          <a:noAutofit/>
+        </a:bodyPr>
+        <a:lstStyle/>
+        <a:p>
+          <a:pPr marL="0" lvl="0" indent="0" algn="l" defTabSz="933450">
+            <a:lnSpc>
+              <a:spcPct val="90000"/>
+            </a:lnSpc>
+            <a:spcBef>
+              <a:spcPct val="0"/>
+            </a:spcBef>
+            <a:spcAft>
+              <a:spcPct val="35000"/>
+            </a:spcAft>
+            <a:buNone/>
+          </a:pPr>
+          <a:r>
+            <a:rPr lang="en-SG" sz="2100" b="0" i="0" kern="1200"/>
+            <a:t>Sends one data record at a time to the </a:t>
+          </a:r>
+          <a:r>
+            <a:rPr lang="en-SG" sz="2100" b="1" i="0" kern="1200"/>
+            <a:t>Data Ingestion Service</a:t>
+          </a:r>
+          <a:r>
+            <a:rPr lang="en-SG" sz="2100" b="0" i="0" kern="1200"/>
+            <a:t> via REST API. </a:t>
+          </a:r>
+          <a:endParaRPr lang="en-US" sz="2100" kern="1200"/>
+        </a:p>
+      </dsp:txBody>
+      <dsp:txXfrm>
+        <a:off x="40780" y="1918360"/>
+        <a:ext cx="6410680" cy="753819"/>
+      </dsp:txXfrm>
+    </dsp:sp>
+    <dsp:sp modelId="{0EC18C10-9BD1-4D6B-8B02-4375CA4A8FAD}">
+      <dsp:nvSpPr>
+        <dsp:cNvPr id="0" name=""/>
+        <dsp:cNvSpPr/>
+      </dsp:nvSpPr>
+      <dsp:spPr>
+        <a:xfrm>
+          <a:off x="0" y="2773440"/>
+          <a:ext cx="6492240" cy="835379"/>
+        </a:xfrm>
+        <a:prstGeom prst="roundRect">
+          <a:avLst/>
+        </a:prstGeom>
+        <a:gradFill rotWithShape="0">
+          <a:gsLst>
+            <a:gs pos="0">
+              <a:schemeClr val="accent1">
+                <a:hueOff val="0"/>
+                <a:satOff val="0"/>
+                <a:lumOff val="0"/>
+                <a:alphaOff val="0"/>
+                <a:satMod val="103000"/>
+                <a:lumMod val="102000"/>
+                <a:tint val="94000"/>
+              </a:schemeClr>
+            </a:gs>
+            <a:gs pos="50000">
+              <a:schemeClr val="accent1">
+                <a:hueOff val="0"/>
+                <a:satOff val="0"/>
+                <a:lumOff val="0"/>
+                <a:alphaOff val="0"/>
+                <a:satMod val="110000"/>
+                <a:lumMod val="100000"/>
+                <a:shade val="100000"/>
+              </a:schemeClr>
+            </a:gs>
+            <a:gs pos="100000">
+              <a:schemeClr val="accent1">
+                <a:hueOff val="0"/>
+                <a:satOff val="0"/>
+                <a:lumOff val="0"/>
+                <a:alphaOff val="0"/>
+                <a:lumMod val="99000"/>
+                <a:satMod val="120000"/>
+                <a:shade val="78000"/>
+              </a:schemeClr>
+            </a:gs>
+          </a:gsLst>
+          <a:lin ang="5400000" scaled="0"/>
+        </a:gradFill>
+        <a:ln>
+          <a:noFill/>
+        </a:ln>
+        <a:effectLst/>
+      </dsp:spPr>
+      <dsp:style>
+        <a:lnRef idx="0">
+          <a:scrgbClr r="0" g="0" b="0"/>
+        </a:lnRef>
+        <a:fillRef idx="3">
+          <a:scrgbClr r="0" g="0" b="0"/>
+        </a:fillRef>
+        <a:effectRef idx="2">
+          <a:scrgbClr r="0" g="0" b="0"/>
+        </a:effectRef>
+        <a:fontRef idx="minor">
+          <a:schemeClr val="lt1"/>
+        </a:fontRef>
+      </dsp:style>
+      <dsp:txBody>
+        <a:bodyPr spcFirstLastPara="0" vert="horz" wrap="square" lIns="80010" tIns="80010" rIns="80010" bIns="80010" numCol="1" spcCol="1270" anchor="ctr" anchorCtr="0">
+          <a:noAutofit/>
+        </a:bodyPr>
+        <a:lstStyle/>
+        <a:p>
+          <a:pPr marL="0" lvl="0" indent="0" algn="l" defTabSz="933450">
+            <a:lnSpc>
+              <a:spcPct val="90000"/>
+            </a:lnSpc>
+            <a:spcBef>
+              <a:spcPct val="0"/>
+            </a:spcBef>
+            <a:spcAft>
+              <a:spcPct val="35000"/>
+            </a:spcAft>
+            <a:buNone/>
+          </a:pPr>
+          <a:r>
+            <a:rPr lang="en-SG" sz="2100" b="0" i="0" kern="1200"/>
+            <a:t>Mimics a live data stream for processing, analysis, and visualization. </a:t>
+          </a:r>
+          <a:endParaRPr lang="en-US" sz="2100" kern="1200" dirty="0"/>
+        </a:p>
+      </dsp:txBody>
+      <dsp:txXfrm>
+        <a:off x="40780" y="2814220"/>
+        <a:ext cx="6410680" cy="753819"/>
+      </dsp:txXfrm>
+    </dsp:sp>
+    <dsp:sp modelId="{183FE836-C141-4348-8519-82B5514B031A}">
+      <dsp:nvSpPr>
+        <dsp:cNvPr id="0" name=""/>
+        <dsp:cNvSpPr/>
+      </dsp:nvSpPr>
+      <dsp:spPr>
+        <a:xfrm>
+          <a:off x="0" y="3669300"/>
+          <a:ext cx="6492240" cy="835379"/>
+        </a:xfrm>
+        <a:prstGeom prst="roundRect">
+          <a:avLst/>
+        </a:prstGeom>
+        <a:gradFill rotWithShape="0">
+          <a:gsLst>
+            <a:gs pos="0">
+              <a:schemeClr val="accent1">
+                <a:hueOff val="0"/>
+                <a:satOff val="0"/>
+                <a:lumOff val="0"/>
+                <a:alphaOff val="0"/>
+                <a:satMod val="103000"/>
+                <a:lumMod val="102000"/>
+                <a:tint val="94000"/>
+              </a:schemeClr>
+            </a:gs>
+            <a:gs pos="50000">
+              <a:schemeClr val="accent1">
+                <a:hueOff val="0"/>
+                <a:satOff val="0"/>
+                <a:lumOff val="0"/>
+                <a:alphaOff val="0"/>
+                <a:satMod val="110000"/>
+                <a:lumMod val="100000"/>
+                <a:shade val="100000"/>
+              </a:schemeClr>
+            </a:gs>
+            <a:gs pos="100000">
+              <a:schemeClr val="accent1">
+                <a:hueOff val="0"/>
+                <a:satOff val="0"/>
+                <a:lumOff val="0"/>
+                <a:alphaOff val="0"/>
+                <a:lumMod val="99000"/>
+                <a:satMod val="120000"/>
+                <a:shade val="78000"/>
+              </a:schemeClr>
+            </a:gs>
+          </a:gsLst>
+          <a:lin ang="5400000" scaled="0"/>
+        </a:gradFill>
+        <a:ln>
+          <a:noFill/>
+        </a:ln>
+        <a:effectLst/>
+      </dsp:spPr>
+      <dsp:style>
+        <a:lnRef idx="0">
+          <a:scrgbClr r="0" g="0" b="0"/>
+        </a:lnRef>
+        <a:fillRef idx="3">
+          <a:scrgbClr r="0" g="0" b="0"/>
+        </a:fillRef>
+        <a:effectRef idx="2">
+          <a:scrgbClr r="0" g="0" b="0"/>
+        </a:effectRef>
+        <a:fontRef idx="minor">
+          <a:schemeClr val="lt1"/>
+        </a:fontRef>
+      </dsp:style>
+      <dsp:txBody>
+        <a:bodyPr spcFirstLastPara="0" vert="horz" wrap="square" lIns="80010" tIns="80010" rIns="80010" bIns="80010" numCol="1" spcCol="1270" anchor="ctr" anchorCtr="0">
+          <a:noAutofit/>
+        </a:bodyPr>
+        <a:lstStyle/>
+        <a:p>
+          <a:pPr marL="0" lvl="0" indent="0" algn="l" defTabSz="933450">
+            <a:lnSpc>
+              <a:spcPct val="90000"/>
+            </a:lnSpc>
+            <a:spcBef>
+              <a:spcPct val="0"/>
+            </a:spcBef>
+            <a:spcAft>
+              <a:spcPct val="35000"/>
+            </a:spcAft>
+            <a:buNone/>
+          </a:pPr>
+          <a:r>
+            <a:rPr lang="en-SG" sz="2100" b="0" i="0" kern="1200" dirty="0"/>
+            <a:t>Enables system testing without requiring physical IoT sensors. </a:t>
+          </a:r>
+          <a:endParaRPr lang="en-US" sz="2100" kern="1200" dirty="0"/>
+        </a:p>
+      </dsp:txBody>
+      <dsp:txXfrm>
+        <a:off x="40780" y="3710080"/>
+        <a:ext cx="6410680" cy="753819"/>
+      </dsp:txXfrm>
+    </dsp:sp>
+    <dsp:sp modelId="{6F5AFA70-95A8-4BBC-B013-0C576A29FEF0}">
+      <dsp:nvSpPr>
+        <dsp:cNvPr id="0" name=""/>
+        <dsp:cNvSpPr/>
+      </dsp:nvSpPr>
+      <dsp:spPr>
+        <a:xfrm>
+          <a:off x="0" y="4565160"/>
+          <a:ext cx="6492240" cy="835379"/>
+        </a:xfrm>
+        <a:prstGeom prst="roundRect">
+          <a:avLst/>
+        </a:prstGeom>
+        <a:gradFill rotWithShape="0">
+          <a:gsLst>
+            <a:gs pos="0">
+              <a:schemeClr val="accent1">
+                <a:hueOff val="0"/>
+                <a:satOff val="0"/>
+                <a:lumOff val="0"/>
+                <a:alphaOff val="0"/>
+                <a:satMod val="103000"/>
+                <a:lumMod val="102000"/>
+                <a:tint val="94000"/>
+              </a:schemeClr>
+            </a:gs>
+            <a:gs pos="50000">
+              <a:schemeClr val="accent1">
+                <a:hueOff val="0"/>
+                <a:satOff val="0"/>
+                <a:lumOff val="0"/>
+                <a:alphaOff val="0"/>
+                <a:satMod val="110000"/>
+                <a:lumMod val="100000"/>
+                <a:shade val="100000"/>
+              </a:schemeClr>
+            </a:gs>
+            <a:gs pos="100000">
+              <a:schemeClr val="accent1">
+                <a:hueOff val="0"/>
+                <a:satOff val="0"/>
+                <a:lumOff val="0"/>
+                <a:alphaOff val="0"/>
+                <a:lumMod val="99000"/>
+                <a:satMod val="120000"/>
+                <a:shade val="78000"/>
+              </a:schemeClr>
+            </a:gs>
+          </a:gsLst>
+          <a:lin ang="5400000" scaled="0"/>
+        </a:gradFill>
+        <a:ln>
+          <a:noFill/>
+        </a:ln>
+        <a:effectLst/>
+      </dsp:spPr>
+      <dsp:style>
+        <a:lnRef idx="0">
+          <a:scrgbClr r="0" g="0" b="0"/>
+        </a:lnRef>
+        <a:fillRef idx="3">
+          <a:scrgbClr r="0" g="0" b="0"/>
+        </a:fillRef>
+        <a:effectRef idx="2">
+          <a:scrgbClr r="0" g="0" b="0"/>
+        </a:effectRef>
+        <a:fontRef idx="minor">
+          <a:schemeClr val="lt1"/>
+        </a:fontRef>
+      </dsp:style>
+      <dsp:txBody>
+        <a:bodyPr spcFirstLastPara="0" vert="horz" wrap="square" lIns="80010" tIns="80010" rIns="80010" bIns="80010" numCol="1" spcCol="1270" anchor="ctr" anchorCtr="0">
+          <a:noAutofit/>
+        </a:bodyPr>
+        <a:lstStyle/>
+        <a:p>
+          <a:pPr marL="0" lvl="0" indent="0" algn="l" defTabSz="933450">
+            <a:lnSpc>
+              <a:spcPct val="90000"/>
+            </a:lnSpc>
+            <a:spcBef>
+              <a:spcPct val="0"/>
+            </a:spcBef>
+            <a:spcAft>
+              <a:spcPct val="35000"/>
+            </a:spcAft>
+            <a:buNone/>
+          </a:pPr>
+          <a:r>
+            <a:rPr lang="en-SG" sz="2100" b="0" i="0" kern="1200"/>
+            <a:t>Can be easily replaced with real sensors in a production environment. </a:t>
+          </a:r>
+          <a:endParaRPr lang="en-US" sz="2100" kern="1200"/>
+        </a:p>
+      </dsp:txBody>
+      <dsp:txXfrm>
+        <a:off x="40780" y="4605940"/>
+        <a:ext cx="6410680" cy="753819"/>
+      </dsp:txXfrm>
+    </dsp:sp>
+  </dsp:spTree>
+</dsp:drawing>
+</file>
+
+<file path=ppt/diagrams/layout1.xml><?xml version="1.0" encoding="utf-8"?>
+<dgm:layoutDef xmlns:dgm="http://schemas.openxmlformats.org/drawingml/2006/diagram" xmlns:a="http://schemas.openxmlformats.org/drawingml/2006/main" uniqueId="urn:microsoft.com/office/officeart/2005/8/layout/vList2">
+  <dgm:title val=""/>
+  <dgm:desc val=""/>
+  <dgm:catLst>
+    <dgm:cat type="list" pri="3000"/>
+    <dgm:cat type="convert" pri="1000"/>
+  </dgm:catLst>
+  <dgm:sampData>
+    <dgm:dataModel>
+      <dgm:ptLst>
+        <dgm:pt modelId="0" type="doc"/>
+        <dgm:pt modelId="1">
+          <dgm:prSet phldr="1"/>
+        </dgm:pt>
+        <dgm:pt modelId="11">
+          <dgm:prSet phldr="1"/>
+        </dgm:pt>
+        <dgm:pt modelId="2">
+          <dgm:prSet phldr="1"/>
+        </dgm:pt>
+        <dgm:pt modelId="21">
+          <dgm:prSet phldr="1"/>
+        </dgm:pt>
+      </dgm:ptLst>
+      <dgm:cxnLst>
+        <dgm:cxn modelId="4" srcId="0" destId="1" srcOrd="0" destOrd="0"/>
+        <dgm:cxn modelId="5" srcId="0" destId="2" srcOrd="1" destOrd="0"/>
+        <dgm:cxn modelId="12" srcId="1" destId="11" srcOrd="0" destOrd="0"/>
+        <dgm:cxn modelId="23" srcId="2" destId="21" srcOrd="0" destOrd="0"/>
+      </dgm:cxnLst>
+      <dgm:bg/>
+      <dgm:whole/>
+    </dgm:dataModel>
+  </dgm:sampData>
+  <dgm:styleData>
+    <dgm:dataModel>
+      <dgm:ptLst>
+        <dgm:pt modelId="0" type="doc"/>
+        <dgm:pt modelId="1"/>
+        <dgm:pt modelId="2"/>
+      </dgm:ptLst>
+      <dgm:cxnLst>
+        <dgm:cxn modelId="3" srcId="0" destId="1" srcOrd="0" destOrd="0"/>
+        <dgm:cxn modelId="4" srcId="0" destId="2" srcOrd="1" destOrd="0"/>
+      </dgm:cxnLst>
+      <dgm:bg/>
+      <dgm:whole/>
+    </dgm:dataModel>
+  </dgm:styleData>
+  <dgm:clrData>
+    <dgm:dataModel>
+      <dgm:ptLst>
+        <dgm:pt modelId="0" type="doc"/>
+        <dgm:pt modelId="1"/>
+        <dgm:pt modelId="2"/>
+        <dgm:pt modelId="3"/>
+        <dgm:pt modelId="4"/>
+      </dgm:ptLst>
+      <dgm:cxnLst>
+        <dgm:cxn modelId="5" srcId="0" destId="1" srcOrd="0" destOrd="0"/>
+        <dgm:cxn modelId="6" srcId="0" destId="2" srcOrd="1" destOrd="0"/>
+        <dgm:cxn modelId="7" srcId="0" destId="3" srcOrd="2" destOrd="0"/>
+        <dgm:cxn modelId="8" srcId="0" destId="4" srcOrd="3" destOrd="0"/>
+      </dgm:cxnLst>
+      <dgm:bg/>
+      <dgm:whole/>
+    </dgm:dataModel>
+  </dgm:clrData>
+  <dgm:layoutNode name="linear">
+    <dgm:varLst>
+      <dgm:animLvl val="lvl"/>
+      <dgm:resizeHandles val="exact"/>
+    </dgm:varLst>
+    <dgm:alg type="lin">
+      <dgm:param type="linDir" val="fromT"/>
+      <dgm:param type="vertAlign" val="mid"/>
+    </dgm:alg>
+    <dgm:shape xmlns:r="http://schemas.openxmlformats.org/officeDocument/2006/relationships" r:blip="">
+      <dgm:adjLst/>
+    </dgm:shape>
+    <dgm:presOf/>
+    <dgm:constrLst>
+      <dgm:constr type="w" for="ch" forName="parentText" refType="w"/>
+      <dgm:constr type="h" for="ch" forName="parentText" refType="primFontSz" refFor="ch" refForName="parentText" fact="0.52"/>
+      <dgm:constr type="w" for="ch" forName="childText" refType="w"/>
+      <dgm:constr type="h" for="ch" forName="childText" refType="primFontSz" refFor="ch" refForName="parentText" fact="0.46"/>
+      <dgm:constr type="h" for="ch" forName="parentText" op="equ"/>
+      <dgm:constr type="primFontSz" for="ch" forName="parentText" op="equ" val="65"/>
+      <dgm:constr type="primFontSz" for="ch" forName="childText" refType="primFontSz" refFor="ch" refForName="parentText" op="equ"/>
+      <dgm:constr type="h" for="ch" forName="spacer" refType="primFontSz" refFor="ch" refForName="parentText" fact="0.08"/>
+    </dgm:constrLst>
+    <dgm:ruleLst>
+      <dgm:rule type="primFontSz" for="ch" forName="parentText" val="5" fact="NaN" max="NaN"/>
+    </dgm:ruleLst>
+    <dgm:forEach name="Name0" axis="ch" ptType="node">
+      <dgm:layoutNode name="parentText" styleLbl="node1">
+        <dgm:varLst>
+          <dgm:chMax val="0"/>
+          <dgm:bulletEnabled val="1"/>
+        </dgm:varLst>
+        <dgm:alg type="tx">
+          <dgm:param type="parTxLTRAlign" val="l"/>
+          <dgm:param type="parTxRTLAlign" val="r"/>
+        </dgm:alg>
+        <dgm:shape xmlns:r="http://schemas.openxmlformats.org/officeDocument/2006/relationships" type="roundRect" r:blip="">
+          <dgm:adjLst/>
+        </dgm:shape>
+        <dgm:presOf axis="self"/>
+        <dgm:constrLst>
+          <dgm:constr type="tMarg" refType="primFontSz" fact="0.3"/>
+          <dgm:constr type="bMarg" refType="primFontSz" fact="0.3"/>
+          <dgm:constr type="lMarg" refType="primFontSz" fact="0.3"/>
+          <dgm:constr type="rMarg" refType="primFontSz" fact="0.3"/>
+        </dgm:constrLst>
+        <dgm:ruleLst>
+          <dgm:rule type="h" val="INF" fact="NaN" max="NaN"/>
+        </dgm:ruleLst>
+      </dgm:layoutNode>
+      <dgm:choose name="Name1">
+        <dgm:if name="Name2" axis="ch" ptType="node" func="cnt" op="gte" val="1">
+          <dgm:layoutNode name="childText" styleLbl="revTx">
+            <dgm:varLst>
+              <dgm:bulletEnabled val="1"/>
+            </dgm:varLst>
+            <dgm:alg type="tx">
+              <dgm:param type="stBulletLvl" val="1"/>
+              <dgm:param type="lnSpAfChP" val="20"/>
+            </dgm:alg>
+            <dgm:shape xmlns:r="http://schemas.openxmlformats.org/officeDocument/2006/relationships" type="rect" r:blip="">
+              <dgm:adjLst/>
+            </dgm:shape>
+            <dgm:presOf axis="des" ptType="node"/>
+            <dgm:constrLst>
+              <dgm:constr type="tMarg" refType="primFontSz" fact="0.1"/>
+              <dgm:constr type="bMarg" refType="primFontSz" fact="0.1"/>
+              <dgm:constr type="lMarg" refType="w" fact="0.09"/>
+            </dgm:constrLst>
+            <dgm:ruleLst>
+              <dgm:rule type="h" val="INF" fact="NaN" max="NaN"/>
+            </dgm:ruleLst>
+          </dgm:layoutNode>
+        </dgm:if>
+        <dgm:else name="Name3">
+          <dgm:choose name="Name4">
+            <dgm:if name="Name5" axis="par ch" ptType="doc node" func="cnt" op="gte" val="2">
+              <dgm:forEach name="Name6" axis="followSib" ptType="sibTrans" cnt="1">
+                <dgm:layoutNode name="spacer">
+                  <dgm:alg type="sp"/>
+                  <dgm:shape xmlns:r="http://schemas.openxmlformats.org/officeDocument/2006/relationships" r:blip="">
+                    <dgm:adjLst/>
+                  </dgm:shape>
+                  <dgm:presOf/>
+                  <dgm:constrLst/>
+                  <dgm:ruleLst/>
+                </dgm:layoutNode>
+              </dgm:forEach>
+            </dgm:if>
+            <dgm:else name="Name7"/>
+          </dgm:choose>
+        </dgm:else>
+      </dgm:choose>
+    </dgm:forEach>
+  </dgm:layoutNode>
+</dgm:layoutDef>
+</file>
+
+<file path=ppt/diagrams/quickStyle1.xml><?xml version="1.0" encoding="utf-8"?>
+<dgm:styleDef xmlns:dgm="http://schemas.openxmlformats.org/drawingml/2006/diagram" xmlns:a="http://schemas.openxmlformats.org/drawingml/2006/main" uniqueId="urn:microsoft.com/office/officeart/2005/8/quickstyle/simple4">
+  <dgm:title val=""/>
+  <dgm:desc val=""/>
+  <dgm:catLst>
+    <dgm:cat type="simple" pri="10400"/>
+  </dgm:catLst>
+  <dgm:scene3d>
+    <a:camera prst="orthographicFront"/>
+    <a:lightRig rig="threePt" dir="t"/>
+  </dgm:scene3d>
+  <dgm:styleLbl name="node0">
+    <dgm:scene3d>
+      <a:camera prst="orthographicFront"/>
+      <a:lightRig rig="threePt" dir="t"/>
+    </dgm:scene3d>
+    <dgm:sp3d/>
+    <dgm:txPr/>
+    <dgm:style>
+      <a:lnRef idx="0">
+        <a:scrgbClr r="0" g="0" b="0"/>
+      </a:lnRef>
+      <a:fillRef idx="3">
+        <a:scrgbClr r="0" g="0" b="0"/>
+      </a:fillRef>
+      <a:effectRef idx="2">
+        <a:scrgbClr r="0" g="0" b="0"/>
+      </a:effectRef>
+      <a:fontRef idx="minor">
+        <a:schemeClr val="lt1"/>
+      </a:fontRef>
+    </dgm:style>
+  </dgm:styleLbl>
+  <dgm:styleLbl name="lnNode1">
+    <dgm:scene3d>
+      <a:camera prst="orthographicFront"/>
+      <a:lightRig rig="threePt" dir="t"/>
+    </dgm:scene3d>
+    <dgm:sp3d/>
+    <dgm:txPr/>
+    <dgm:style>
+      <a:lnRef idx="1">
+        <a:scrgbClr r="0" g="0" b="0"/>
+      </a:lnRef>
+      <a:fillRef idx="3">
+        <a:scrgbClr r="0" g="0" b="0"/>
+      </a:fillRef>
+      <a:effectRef idx="2">
+        <a:scrgbClr r="0" g="0" b="0"/>
+      </a:effectRef>
+      <a:fontRef idx="minor">
+        <a:schemeClr val="lt1"/>
+      </a:fontRef>
+    </dgm:style>
+  </dgm:styleLbl>
+  <dgm:styleLbl name="vennNode1">
+    <dgm:scene3d>
+      <a:camera prst="orthographicFront"/>
+      <a:lightRig rig="threePt" dir="t"/>
+    </dgm:scene3d>
+    <dgm:sp3d/>
+    <dgm:txPr/>
+    <dgm:style>
+      <a:lnRef idx="0">
+        <a:scrgbClr r="0" g="0" b="0"/>
+      </a:lnRef>
+      <a:fillRef idx="3">
+        <a:scrgbClr r="0" g="0" b="0"/>
+      </a:fillRef>
+      <a:effectRef idx="0">
+        <a:scrgbClr r="0" g="0" b="0"/>
+      </a:effectRef>
+      <a:fontRef idx="minor">
+        <a:schemeClr val="tx1"/>
+      </a:fontRef>
+    </dgm:style>
+  </dgm:styleLbl>
+  <dgm:styleLbl name="alignNode1">
+    <dgm:scene3d>
+      <a:camera prst="orthographicFront"/>
+      <a:lightRig rig="threePt" dir="t"/>
+    </dgm:scene3d>
+    <dgm:sp3d/>
+    <dgm:txPr/>
+    <dgm:style>
+      <a:lnRef idx="1">
+        <a:scrgbClr r="0" g="0" b="0"/>
+      </a:lnRef>
+      <a:fillRef idx="3">
+        <a:scrgbClr r="0" g="0" b="0"/>
+      </a:fillRef>
+      <a:effectRef idx="2">
+        <a:scrgbClr r="0" g="0" b="0"/>
+      </a:effectRef>
+      <a:fontRef idx="minor">
+        <a:schemeClr val="lt1"/>
+      </a:fontRef>
+    </dgm:style>
+  </dgm:styleLbl>
+  <dgm:styleLbl name="node1">
+    <dgm:scene3d>
+      <a:camera prst="orthographicFront"/>
+      <a:lightRig rig="threePt" dir="t"/>
+    </dgm:scene3d>
+    <dgm:sp3d/>
+    <dgm:txPr/>
+    <dgm:style>
+      <a:lnRef idx="0">
+        <a:scrgbClr r="0" g="0" b="0"/>
+      </a:lnRef>
+      <a:fillRef idx="3">
+        <a:scrgbClr r="0" g="0" b="0"/>
+      </a:fillRef>
+      <a:effectRef idx="2">
+        <a:scrgbClr r="0" g="0" b="0"/>
+      </a:effectRef>
+      <a:fontRef idx="minor">
+        <a:schemeClr val="lt1"/>
+      </a:fontRef>
+    </dgm:style>
+  </dgm:styleLbl>
+  <dgm:styleLbl name="node2">
+    <dgm:scene3d>
+      <a:camera prst="orthographicFront"/>
+      <a:lightRig rig="threePt" dir="t"/>
+    </dgm:scene3d>
+    <dgm:sp3d/>
+    <dgm:txPr/>
+    <dgm:style>
+      <a:lnRef idx="0">
+        <a:scrgbClr r="0" g="0" b="0"/>
+      </a:lnRef>
+      <a:fillRef idx="3">
+        <a:scrgbClr r="0" g="0" b="0"/>
+      </a:fillRef>
+      <a:effectRef idx="2">
+        <a:scrgbClr r="0" g="0" b="0"/>
+      </a:effectRef>
+      <a:fontRef idx="minor">
+        <a:schemeClr val="lt1"/>
+      </a:fontRef>
+    </dgm:style>
+  </dgm:styleLbl>
+  <dgm:styleLbl name="node3">
+    <dgm:scene3d>
+      <a:camera prst="orthographicFront"/>
+      <a:lightRig rig="threePt" dir="t"/>
+    </dgm:scene3d>
+    <dgm:sp3d/>
+    <dgm:txPr/>
+    <dgm:style>
+      <a:lnRef idx="0">
+        <a:scrgbClr r="0" g="0" b="0"/>
+      </a:lnRef>
+      <a:fillRef idx="3">
+        <a:scrgbClr r="0" g="0" b="0"/>
+      </a:fillRef>
+      <a:effectRef idx="2">
+        <a:scrgbClr r="0" g="0" b="0"/>
+      </a:effectRef>
+      <a:fontRef idx="minor">
+        <a:schemeClr val="lt1"/>
+      </a:fontRef>
+    </dgm:style>
+  </dgm:styleLbl>
+  <dgm:styleLbl name="node4">
+    <dgm:scene3d>
+      <a:camera prst="orthographicFront"/>
+      <a:lightRig rig="threePt" dir="t"/>
+    </dgm:scene3d>
+    <dgm:sp3d/>
+    <dgm:txPr/>
+    <dgm:style>
+      <a:lnRef idx="0">
+        <a:scrgbClr r="0" g="0" b="0"/>
+      </a:lnRef>
+      <a:fillRef idx="3">
+        <a:scrgbClr r="0" g="0" b="0"/>
+      </a:fillRef>
+      <a:effectRef idx="2">
+        <a:scrgbClr r="0" g="0" b="0"/>
+      </a:effectRef>
+      <a:fontRef idx="minor">
+        <a:schemeClr val="lt1"/>
+      </a:fontRef>
+    </dgm:style>
+  </dgm:styleLbl>
+  <dgm:styleLbl name="fgImgPlace1">
+    <dgm:scene3d>
+      <a:camera prst="orthographicFront"/>
+      <a:lightRig rig="threePt" dir="t"/>
+    </dgm:scene3d>
+    <dgm:sp3d/>
+    <dgm:txPr/>
+    <dgm:style>
+      <a:lnRef idx="0">
+        <a:scrgbClr r="0" g="0" b="0"/>
+      </a:lnRef>
+      <a:fillRef idx="1">
+        <a:scrgbClr r="0" g="0" b="0"/>
+      </a:fillRef>
+      <a:effectRef idx="2">
+        <a:scrgbClr r="0" g="0" b="0"/>
+      </a:effectRef>
+      <a:fontRef idx="minor"/>
+    </dgm:style>
+  </dgm:styleLbl>
+  <dgm:styleLbl name="alignImgPlace1">
+    <dgm:scene3d>
+      <a:camera prst="orthographicFront"/>
+      <a:lightRig rig="threePt" dir="t"/>
+    </dgm:scene3d>
+    <dgm:sp3d/>
+    <dgm:txPr/>
+    <dgm:style>
+      <a:lnRef idx="0">
+        <a:scrgbClr r="0" g="0" b="0"/>
+      </a:lnRef>
+      <a:fillRef idx="1">
+        <a:scrgbClr r="0" g="0" b="0"/>
+      </a:fillRef>
+      <a:effectRef idx="2">
+        <a:scrgbClr r="0" g="0" b="0"/>
+      </a:effectRef>
+      <a:fontRef idx="minor"/>
+    </dgm:style>
+  </dgm:styleLbl>
+  <dgm:styleLbl name="bgImgPlace1">
+    <dgm:scene3d>
+      <a:camera prst="orthographicFront"/>
+      <a:lightRig rig="threePt" dir="t"/>
+    </dgm:scene3d>
+    <dgm:sp3d/>
+    <dgm:txPr/>
+    <dgm:style>
+      <a:lnRef idx="0">
+        <a:scrgbClr r="0" g="0" b="0"/>
+      </a:lnRef>
+      <a:fillRef idx="1">
+        <a:scrgbClr r="0" g="0" b="0"/>
+      </a:fillRef>
+      <a:effectRef idx="2">
+        <a:scrgbClr r="0" g="0" b="0"/>
+      </a:effectRef>
+      <a:fontRef idx="minor"/>
+    </dgm:style>
+  </dgm:styleLbl>
+  <dgm:styleLbl name="sibTrans2D1">
+    <dgm:scene3d>
+      <a:camera prst="orthographicFront"/>
+      <a:lightRig rig="threePt" dir="t"/>
+    </dgm:scene3d>
+    <dgm:sp3d/>
+    <dgm:txPr/>
+    <dgm:style>
+      <a:lnRef idx="0">
+        <a:scrgbClr r="0" g="0" b="0"/>
+      </a:lnRef>
+      <a:fillRef idx="3">
+        <a:scrgbClr r="0" g="0" b="0"/>
+      </a:fillRef>
+      <a:effectRef idx="2">
+        <a:scrgbClr r="0" g="0" b="0"/>
+      </a:effectRef>
+      <a:fontRef idx="minor">
+        <a:schemeClr val="lt1"/>
+      </a:fontRef>
+    </dgm:style>
+  </dgm:styleLbl>
+  <dgm:styleLbl name="fgSibTrans2D1">
+    <dgm:scene3d>
+      <a:camera prst="orthographicFront"/>
+      <a:lightRig rig="threePt" dir="t"/>
+    </dgm:scene3d>
+    <dgm:sp3d/>
+    <dgm:txPr/>
+    <dgm:style>
+      <a:lnRef idx="0">
+        <a:scrgbClr r="0" g="0" b="0"/>
+      </a:lnRef>
+      <a:fillRef idx="3">
+        <a:scrgbClr r="0" g="0" b="0"/>
+      </a:fillRef>
+      <a:effectRef idx="2">
+        <a:scrgbClr r="0" g="0" b="0"/>
+      </a:effectRef>
+      <a:fontRef idx="minor">
+        <a:schemeClr val="lt1"/>
+      </a:fontRef>
+    </dgm:style>
+  </dgm:styleLbl>
+  <dgm:styleLbl name="bgSibTrans2D1">
+    <dgm:scene3d>
+      <a:camera prst="orthographicFront"/>
+      <a:lightRig rig="threePt" dir="t"/>
+    </dgm:scene3d>
+    <dgm:sp3d/>
+    <dgm:txPr/>
+    <dgm:style>
+      <a:lnRef idx="0">
+        <a:scrgbClr r="0" g="0" b="0"/>
+      </a:lnRef>
+      <a:fillRef idx="3">
+        <a:scrgbClr r="0" g="0" b="0"/>
+      </a:fillRef>
+      <a:effectRef idx="2">
+        <a:scrgbClr r="0" g="0" b="0"/>
+      </a:effectRef>
+      <a:fontRef idx="minor">
+        <a:schemeClr val="lt1"/>
+      </a:fontRef>
+    </dgm:style>
+  </dgm:styleLbl>
+  <dgm:styleLbl name="sibTrans1D1">
+    <dgm:scene3d>
+      <a:camera prst="orthographicFront"/>
+      <a:lightRig rig="threePt" dir="t"/>
+    </dgm:scene3d>
+    <dgm:sp3d/>
+    <dgm:txPr/>
+    <dgm:style>
+      <a:lnRef idx="1">
+        <a:scrgbClr r="0" g="0" b="0"/>
+      </a:lnRef>
+      <a:fillRef idx="0">
+        <a:scrgbClr r="0" g="0" b="0"/>
+      </a:fillRef>
+      <a:effectRef idx="0">
+        <a:scrgbClr r="0" g="0" b="0"/>
+      </a:effectRef>
+      <a:fontRef idx="minor"/>
+    </dgm:style>
+  </dgm:styleLbl>
+  <dgm:styleLbl name="callout">
+    <dgm:scene3d>
+      <a:camera prst="orthographicFront"/>
+      <a:lightRig rig="threePt" dir="t"/>
+    </dgm:scene3d>
+    <dgm:sp3d/>
+    <dgm:txPr/>
+    <dgm:style>
+      <a:lnRef idx="2">
+        <a:scrgbClr r="0" g="0" b="0"/>
+      </a:lnRef>
+      <a:fillRef idx="1">
+        <a:scrgbClr r="0" g="0" b="0"/>
+      </a:fillRef>
+      <a:effectRef idx="1">
+        <a:scrgbClr r="0" g="0" b="0"/>
+      </a:effectRef>
+      <a:fontRef idx="minor"/>
+    </dgm:style>
+  </dgm:styleLbl>
+  <dgm:styleLbl name="asst0">
+    <dgm:scene3d>
+      <a:camera prst="orthographicFront"/>
+      <a:lightRig rig="threePt" dir="t"/>
+    </dgm:scene3d>
+    <dgm:sp3d/>
+    <dgm:txPr/>
+    <dgm:style>
+      <a:lnRef idx="0">
+        <a:scrgbClr r="0" g="0" b="0"/>
+      </a:lnRef>
+      <a:fillRef idx="3">
+        <a:scrgbClr r="0" g="0" b="0"/>
+      </a:fillRef>
+      <a:effectRef idx="2">
+        <a:scrgbClr r="0" g="0" b="0"/>
+      </a:effectRef>
+      <a:fontRef idx="minor">
+        <a:schemeClr val="lt1"/>
+      </a:fontRef>
+    </dgm:style>
+  </dgm:styleLbl>
+  <dgm:styleLbl name="asst1">
+    <dgm:scene3d>
+      <a:camera prst="orthographicFront"/>
+      <a:lightRig rig="threePt" dir="t"/>
+    </dgm:scene3d>
+    <dgm:sp3d/>
+    <dgm:txPr/>
+    <dgm:style>
+      <a:lnRef idx="0">
+        <a:scrgbClr r="0" g="0" b="0"/>
+      </a:lnRef>
+      <a:fillRef idx="3">
+        <a:scrgbClr r="0" g="0" b="0"/>
+      </a:fillRef>
+      <a:effectRef idx="2">
+        <a:scrgbClr r="0" g="0" b="0"/>
+      </a:effectRef>
+      <a:fontRef idx="minor">
+        <a:schemeClr val="lt1"/>
+      </a:fontRef>
+    </dgm:style>
+  </dgm:styleLbl>
+  <dgm:styleLbl name="asst2">
+    <dgm:scene3d>
+      <a:camera prst="orthographicFront"/>
+      <a:lightRig rig="threePt" dir="t"/>
+    </dgm:scene3d>
+    <dgm:sp3d/>
+    <dgm:txPr/>
+    <dgm:style>
+      <a:lnRef idx="0">
+        <a:scrgbClr r="0" g="0" b="0"/>
+      </a:lnRef>
+      <a:fillRef idx="3">
+        <a:scrgbClr r="0" g="0" b="0"/>
+      </a:fillRef>
+      <a:effectRef idx="2">
+        <a:scrgbClr r="0" g="0" b="0"/>
+      </a:effectRef>
+      <a:fontRef idx="minor">
+        <a:schemeClr val="lt1"/>
+      </a:fontRef>
+    </dgm:style>
+  </dgm:styleLbl>
+  <dgm:styleLbl name="asst3">
+    <dgm:scene3d>
+      <a:camera prst="orthographicFront"/>
+      <a:lightRig rig="threePt" dir="t"/>
+    </dgm:scene3d>
+    <dgm:sp3d/>
+    <dgm:txPr/>
+    <dgm:style>
+      <a:lnRef idx="0">
+        <a:scrgbClr r="0" g="0" b="0"/>
+      </a:lnRef>
+      <a:fillRef idx="3">
+        <a:scrgbClr r="0" g="0" b="0"/>
+      </a:fillRef>
+      <a:effectRef idx="2">
+        <a:scrgbClr r="0" g="0" b="0"/>
+      </a:effectRef>
+      <a:fontRef idx="minor">
+        <a:schemeClr val="lt1"/>
+      </a:fontRef>
+    </dgm:style>
+  </dgm:styleLbl>
+  <dgm:styleLbl name="asst4">
+    <dgm:scene3d>
+      <a:camera prst="orthographicFront"/>
+      <a:lightRig rig="threePt" dir="t"/>
+    </dgm:scene3d>
+    <dgm:sp3d/>
+    <dgm:txPr/>
+    <dgm:style>
+      <a:lnRef idx="0">
+        <a:scrgbClr r="0" g="0" b="0"/>
+      </a:lnRef>
+      <a:fillRef idx="3">
+        <a:scrgbClr r="0" g="0" b="0"/>
+      </a:fillRef>
+      <a:effectRef idx="2">
+        <a:scrgbClr r="0" g="0" b="0"/>
+      </a:effectRef>
+      <a:fontRef idx="minor">
+        <a:schemeClr val="lt1"/>
+      </a:fontRef>
+    </dgm:style>
+  </dgm:styleLbl>
+  <dgm:styleLbl name="parChTrans2D1">
+    <dgm:scene3d>
+      <a:camera prst="orthographicFront"/>
+      <a:lightRig rig="threePt" dir="t"/>
+    </dgm:scene3d>
+    <dgm:sp3d/>
+    <dgm:txPr/>
+    <dgm:style>
+      <a:lnRef idx="0">
+        <a:scrgbClr r="0" g="0" b="0"/>
+      </a:lnRef>
+      <a:fillRef idx="3">
+        <a:scrgbClr r="0" g="0" b="0"/>
+      </a:fillRef>
+      <a:effectRef idx="2">
+        <a:scrgbClr r="0" g="0" b="0"/>
+      </a:effectRef>
+      <a:fontRef idx="minor">
+        <a:schemeClr val="lt1"/>
+      </a:fontRef>
+    </dgm:style>
+  </dgm:styleLbl>
+  <dgm:styleLbl name="parChTrans2D2">
+    <dgm:scene3d>
+      <a:camera prst="orthographicFront"/>
+      <a:lightRig rig="threePt" dir="t"/>
+    </dgm:scene3d>
+    <dgm:sp3d/>
+    <dgm:txPr/>
+    <dgm:style>
+      <a:lnRef idx="0">
+        <a:scrgbClr r="0" g="0" b="0"/>
+      </a:lnRef>
+      <a:fillRef idx="3">
+        <a:scrgbClr r="0" g="0" b="0"/>
+      </a:fillRef>
+      <a:effectRef idx="2">
+        <a:scrgbClr r="0" g="0" b="0"/>
+      </a:effectRef>
+      <a:fontRef idx="minor">
+        <a:schemeClr val="lt1"/>
+      </a:fontRef>
+    </dgm:style>
+  </dgm:styleLbl>
+  <dgm:styleLbl name="parChTrans2D3">
+    <dgm:scene3d>
+      <a:camera prst="orthographicFront"/>
+      <a:lightRig rig="threePt" dir="t"/>
+    </dgm:scene3d>
+    <dgm:sp3d/>
+    <dgm:txPr/>
+    <dgm:style>
+      <a:lnRef idx="1">
+        <a:scrgbClr r="0" g="0" b="0"/>
+      </a:lnRef>
+      <a:fillRef idx="3">
+        <a:scrgbClr r="0" g="0" b="0"/>
+      </a:fillRef>
+      <a:effectRef idx="2">
+        <a:scrgbClr r="0" g="0" b="0"/>
+      </a:effectRef>
+      <a:fontRef idx="minor">
+        <a:schemeClr val="lt1"/>
+      </a:fontRef>
+    </dgm:style>
+  </dgm:styleLbl>
+  <dgm:styleLbl name="parChTrans2D4">
+    <dgm:scene3d>
+      <a:camera prst="orthographicFront"/>
+      <a:lightRig rig="threePt" dir="t"/>
+    </dgm:scene3d>
+    <dgm:sp3d/>
+    <dgm:txPr/>
+    <dgm:style>
+      <a:lnRef idx="1">
+        <a:scrgbClr r="0" g="0" b="0"/>
+      </a:lnRef>
+      <a:fillRef idx="3">
+        <a:scrgbClr r="0" g="0" b="0"/>
+      </a:fillRef>
+      <a:effectRef idx="2">
+        <a:scrgbClr r="0" g="0" b="0"/>
+      </a:effectRef>
+      <a:fontRef idx="minor">
+        <a:schemeClr val="lt1"/>
+      </a:fontRef>
+    </dgm:style>
+  </dgm:styleLbl>
+  <dgm:styleLbl name="parChTrans1D1">
+    <dgm:scene3d>
+      <a:camera prst="orthographicFront"/>
+      <a:lightRig rig="threePt" dir="t"/>
+    </dgm:scene3d>
+    <dgm:sp3d/>
+    <dgm:txPr/>
+    <dgm:style>
+      <a:lnRef idx="1">
+        <a:scrgbClr r="0" g="0" b="0"/>
+      </a:lnRef>
+      <a:fillRef idx="0">
+        <a:scrgbClr r="0" g="0" b="0"/>
+      </a:fillRef>
+      <a:effectRef idx="0">
+        <a:scrgbClr r="0" g="0" b="0"/>
+      </a:effectRef>
+      <a:fontRef idx="minor"/>
+    </dgm:style>
+  </dgm:styleLbl>
+  <dgm:styleLbl name="parChTrans1D2">
+    <dgm:scene3d>
+      <a:camera prst="orthographicFront"/>
+      <a:lightRig rig="threePt" dir="t"/>
+    </dgm:scene3d>
+    <dgm:sp3d/>
+    <dgm:txPr/>
+    <dgm:style>
+      <a:lnRef idx="1">
+        <a:scrgbClr r="0" g="0" b="0"/>
+      </a:lnRef>
+      <a:fillRef idx="0">
+        <a:scrgbClr r="0" g="0" b="0"/>
+      </a:fillRef>
+      <a:effectRef idx="0">
+        <a:scrgbClr r="0" g="0" b="0"/>
+      </a:effectRef>
+      <a:fontRef idx="minor"/>
+    </dgm:style>
+  </dgm:styleLbl>
+  <dgm:styleLbl name="parChTrans1D3">
+    <dgm:scene3d>
+      <a:camera prst="orthographicFront"/>
+      <a:lightRig rig="threePt" dir="t"/>
+    </dgm:scene3d>
+    <dgm:sp3d/>
+    <dgm:txPr/>
+    <dgm:style>
+      <a:lnRef idx="1">
+        <a:scrgbClr r="0" g="0" b="0"/>
+      </a:lnRef>
+      <a:fillRef idx="0">
+        <a:scrgbClr r="0" g="0" b="0"/>
+      </a:fillRef>
+      <a:effectRef idx="0">
+        <a:scrgbClr r="0" g="0" b="0"/>
+      </a:effectRef>
+      <a:fontRef idx="minor"/>
+    </dgm:style>
+  </dgm:styleLbl>
+  <dgm:styleLbl name="parChTrans1D4">
+    <dgm:scene3d>
+      <a:camera prst="orthographicFront"/>
+      <a:lightRig rig="threePt" dir="t"/>
+    </dgm:scene3d>
+    <dgm:sp3d/>
+    <dgm:txPr/>
+    <dgm:style>
+      <a:lnRef idx="1">
+        <a:scrgbClr r="0" g="0" b="0"/>
+      </a:lnRef>
+      <a:fillRef idx="0">
+        <a:scrgbClr r="0" g="0" b="0"/>
+      </a:fillRef>
+      <a:effectRef idx="0">
+        <a:scrgbClr r="0" g="0" b="0"/>
+      </a:effectRef>
+      <a:fontRef idx="minor"/>
+    </dgm:style>
+  </dgm:styleLbl>
+  <dgm:styleLbl name="fgAcc1">
+    <dgm:scene3d>
+      <a:camera prst="orthographicFront"/>
+      <a:lightRig rig="threePt" dir="t"/>
+    </dgm:scene3d>
+    <dgm:sp3d/>
+    <dgm:txPr/>
+    <dgm:style>
+      <a:lnRef idx="1">
+        <a:scrgbClr r="0" g="0" b="0"/>
+      </a:lnRef>
+      <a:fillRef idx="1">
+        <a:scrgbClr r="0" g="0" b="0"/>
+      </a:fillRef>
+      <a:effectRef idx="0">
+        <a:scrgbClr r="0" g="0" b="0"/>
+      </a:effectRef>
+      <a:fontRef idx="minor"/>
+    </dgm:style>
+  </dgm:styleLbl>
+  <dgm:styleLbl name="conFgAcc1">
+    <dgm:scene3d>
+      <a:camera prst="orthographicFront"/>
+      <a:lightRig rig="threePt" dir="t"/>
+    </dgm:scene3d>
+    <dgm:sp3d/>
+    <dgm:txPr/>
+    <dgm:style>
+      <a:lnRef idx="1">
+        <a:scrgbClr r="0" g="0" b="0"/>
+      </a:lnRef>
+      <a:fillRef idx="1">
+        <a:scrgbClr r="0" g="0" b="0"/>
+      </a:fillRef>
+      <a:effectRef idx="0">
+        <a:scrgbClr r="0" g="0" b="0"/>
+      </a:effectRef>
+      <a:fontRef idx="minor"/>
+    </dgm:style>
+  </dgm:styleLbl>
+  <dgm:styleLbl name="alignAcc1">
+    <dgm:scene3d>
+      <a:camera prst="orthographicFront"/>
+      <a:lightRig rig="threePt" dir="t"/>
+    </dgm:scene3d>
+    <dgm:sp3d/>
+    <dgm:txPr/>
+    <dgm:style>
+      <a:lnRef idx="1">
+        <a:scrgbClr r="0" g="0" b="0"/>
+      </a:lnRef>
+      <a:fillRef idx="1">
+        <a:scrgbClr r="0" g="0" b="0"/>
+      </a:fillRef>
+      <a:effectRef idx="0">
+        <a:scrgbClr r="0" g="0" b="0"/>
+      </a:effectRef>
+      <a:fontRef idx="minor"/>
+    </dgm:style>
+  </dgm:styleLbl>
+  <dgm:styleLbl name="trAlignAcc1">
+    <dgm:scene3d>
+      <a:camera prst="orthographicFront"/>
+      <a:lightRig rig="threePt" dir="t"/>
+    </dgm:scene3d>
+    <dgm:sp3d/>
+    <dgm:txPr/>
+    <dgm:style>
+      <a:lnRef idx="1">
+        <a:scrgbClr r="0" g="0" b="0"/>
+      </a:lnRef>
+      <a:fillRef idx="1">
+        <a:scrgbClr r="0" g="0" b="0"/>
+      </a:fillRef>
+      <a:effectRef idx="0">
+        <a:scrgbClr r="0" g="0" b="0"/>
+      </a:effectRef>
+      <a:fontRef idx="minor"/>
+    </dgm:style>
+  </dgm:styleLbl>
+  <dgm:styleLbl name="bgAcc1">
+    <dgm:scene3d>
+      <a:camera prst="orthographicFront"/>
+      <a:lightRig rig="threePt" dir="t"/>
+    </dgm:scene3d>
+    <dgm:sp3d/>
+    <dgm:txPr/>
+    <dgm:style>
+      <a:lnRef idx="1">
+        <a:scrgbClr r="0" g="0" b="0"/>
+      </a:lnRef>
+      <a:fillRef idx="1">
+        <a:scrgbClr r="0" g="0" b="0"/>
+      </a:fillRef>
+      <a:effectRef idx="0">
+        <a:scrgbClr r="0" g="0" b="0"/>
+      </a:effectRef>
+      <a:fontRef idx="minor"/>
+    </dgm:style>
+  </dgm:styleLbl>
+  <dgm:styleLbl name="solidFgAcc1">
+    <dgm:scene3d>
+      <a:camera prst="orthographicFront"/>
+      <a:lightRig rig="threePt" dir="t"/>
+    </dgm:scene3d>
+    <dgm:sp3d/>
+    <dgm:txPr/>
+    <dgm:style>
+      <a:lnRef idx="1">
+        <a:scrgbClr r="0" g="0" b="0"/>
+      </a:lnRef>
+      <a:fillRef idx="1">
+        <a:scrgbClr r="0" g="0" b="0"/>
+      </a:fillRef>
+      <a:effectRef idx="0">
+        <a:scrgbClr r="0" g="0" b="0"/>
+      </a:effectRef>
+      <a:fontRef idx="minor"/>
+    </dgm:style>
+  </dgm:styleLbl>
+  <dgm:styleLbl name="solidAlignAcc1">
+    <dgm:scene3d>
+      <a:camera prst="orthographicFront"/>
+      <a:lightRig rig="threePt" dir="t"/>
+    </dgm:scene3d>
+    <dgm:sp3d/>
+    <dgm:txPr/>
+    <dgm:style>
+      <a:lnRef idx="1">
+        <a:scrgbClr r="0" g="0" b="0"/>
+      </a:lnRef>
+      <a:fillRef idx="1">
+        <a:scrgbClr r="0" g="0" b="0"/>
+      </a:fillRef>
+      <a:effectRef idx="0">
+        <a:scrgbClr r="0" g="0" b="0"/>
+      </a:effectRef>
+      <a:fontRef idx="minor"/>
+    </dgm:style>
+  </dgm:styleLbl>
+  <dgm:styleLbl name="solidBgAcc1">
+    <dgm:scene3d>
+      <a:camera prst="orthographicFront"/>
+      <a:lightRig rig="threePt" dir="t"/>
+    </dgm:scene3d>
+    <dgm:sp3d/>
+    <dgm:txPr/>
+    <dgm:style>
+      <a:lnRef idx="1">
+        <a:scrgbClr r="0" g="0" b="0"/>
+      </a:lnRef>
+      <a:fillRef idx="1">
+        <a:scrgbClr r="0" g="0" b="0"/>
+      </a:fillRef>
+      <a:effectRef idx="0">
+        <a:scrgbClr r="0" g="0" b="0"/>
+      </a:effectRef>
+      <a:fontRef idx="minor"/>
+    </dgm:style>
+  </dgm:styleLbl>
+  <dgm:styleLbl name="fgAccFollowNode1">
+    <dgm:scene3d>
+      <a:camera prst="orthographicFront"/>
+      <a:lightRig rig="threePt" dir="t"/>
+    </dgm:scene3d>
+    <dgm:sp3d/>
+    <dgm:txPr/>
+    <dgm:style>
+      <a:lnRef idx="1">
+        <a:scrgbClr r="0" g="0" b="0"/>
+      </a:lnRef>
+      <a:fillRef idx="1">
+        <a:scrgbClr r="0" g="0" b="0"/>
+      </a:fillRef>
+      <a:effectRef idx="0">
+        <a:scrgbClr r="0" g="0" b="0"/>
+      </a:effectRef>
+      <a:fontRef idx="minor"/>
+    </dgm:style>
+  </dgm:styleLbl>
+  <dgm:styleLbl name="alignAccFollowNode1">
+    <dgm:scene3d>
+      <a:camera prst="orthographicFront"/>
+      <a:lightRig rig="threePt" dir="t"/>
+    </dgm:scene3d>
+    <dgm:sp3d/>
+    <dgm:txPr/>
+    <dgm:style>
+      <a:lnRef idx="1">
+        <a:scrgbClr r="0" g="0" b="0"/>
+      </a:lnRef>
+      <a:fillRef idx="1">
+        <a:scrgbClr r="0" g="0" b="0"/>
+      </a:fillRef>
+      <a:effectRef idx="0">
+        <a:scrgbClr r="0" g="0" b="0"/>
+      </a:effectRef>
+      <a:fontRef idx="minor"/>
+    </dgm:style>
+  </dgm:styleLbl>
+  <dgm:styleLbl name="bgAccFollowNode1">
+    <dgm:scene3d>
+      <a:camera prst="orthographicFront"/>
+      <a:lightRig rig="threePt" dir="t"/>
+    </dgm:scene3d>
+    <dgm:sp3d/>
+    <dgm:txPr/>
+    <dgm:style>
+      <a:lnRef idx="1">
+        <a:scrgbClr r="0" g="0" b="0"/>
+      </a:lnRef>
+      <a:fillRef idx="1">
+        <a:scrgbClr r="0" g="0" b="0"/>
+      </a:fillRef>
+      <a:effectRef idx="0">
+        <a:scrgbClr r="0" g="0" b="0"/>
+      </a:effectRef>
+      <a:fontRef idx="minor"/>
+    </dgm:style>
+  </dgm:styleLbl>
+  <dgm:styleLbl name="fgAcc0">
+    <dgm:scene3d>
+      <a:camera prst="orthographicFront"/>
+      <a:lightRig rig="threePt" dir="t"/>
+    </dgm:scene3d>
+    <dgm:sp3d/>
+    <dgm:txPr/>
+    <dgm:style>
+      <a:lnRef idx="1">
+        <a:scrgbClr r="0" g="0" b="0"/>
+      </a:lnRef>
+      <a:fillRef idx="1">
+        <a:scrgbClr r="0" g="0" b="0"/>
+      </a:fillRef>
+      <a:effectRef idx="0">
+        <a:scrgbClr r="0" g="0" b="0"/>
+      </a:effectRef>
+      <a:fontRef idx="minor"/>
+    </dgm:style>
+  </dgm:styleLbl>
+  <dgm:styleLbl name="fgAcc2">
+    <dgm:scene3d>
+      <a:camera prst="orthographicFront"/>
+      <a:lightRig rig="threePt" dir="t"/>
+    </dgm:scene3d>
+    <dgm:sp3d/>
+    <dgm:txPr/>
+    <dgm:style>
+      <a:lnRef idx="1">
+        <a:scrgbClr r="0" g="0" b="0"/>
+      </a:lnRef>
+      <a:fillRef idx="1">
+        <a:scrgbClr r="0" g="0" b="0"/>
+      </a:fillRef>
+      <a:effectRef idx="0">
+        <a:scrgbClr r="0" g="0" b="0"/>
+      </a:effectRef>
+      <a:fontRef idx="minor"/>
+    </dgm:style>
+  </dgm:styleLbl>
+  <dgm:styleLbl name="fgAcc3">
+    <dgm:scene3d>
+      <a:camera prst="orthographicFront"/>
+      <a:lightRig rig="threePt" dir="t"/>
+    </dgm:scene3d>
+    <dgm:sp3d/>
+    <dgm:txPr/>
+    <dgm:style>
+      <a:lnRef idx="1">
+        <a:scrgbClr r="0" g="0" b="0"/>
+      </a:lnRef>
+      <a:fillRef idx="1">
+        <a:scrgbClr r="0" g="0" b="0"/>
+      </a:fillRef>
+      <a:effectRef idx="0">
+        <a:scrgbClr r="0" g="0" b="0"/>
+      </a:effectRef>
+      <a:fontRef idx="minor"/>
+    </dgm:style>
+  </dgm:styleLbl>
+  <dgm:styleLbl name="fgAcc4">
+    <dgm:scene3d>
+      <a:camera prst="orthographicFront"/>
+      <a:lightRig rig="threePt" dir="t"/>
+    </dgm:scene3d>
+    <dgm:sp3d/>
+    <dgm:txPr/>
+    <dgm:style>
+      <a:lnRef idx="1">
+        <a:scrgbClr r="0" g="0" b="0"/>
+      </a:lnRef>
+      <a:fillRef idx="1">
+        <a:scrgbClr r="0" g="0" b="0"/>
+      </a:fillRef>
+      <a:effectRef idx="0">
+        <a:scrgbClr r="0" g="0" b="0"/>
+      </a:effectRef>
+      <a:fontRef idx="minor"/>
+    </dgm:style>
+  </dgm:styleLbl>
+  <dgm:styleLbl name="bgShp">
+    <dgm:scene3d>
+      <a:camera prst="orthographicFront"/>
+      <a:lightRig rig="threePt" dir="t"/>
+    </dgm:scene3d>
+    <dgm:sp3d/>
+    <dgm:txPr/>
+    <dgm:style>
+      <a:lnRef idx="0">
+        <a:scrgbClr r="0" g="0" b="0"/>
+      </a:lnRef>
+      <a:fillRef idx="1">
+        <a:scrgbClr r="0" g="0" b="0"/>
+      </a:fillRef>
+      <a:effectRef idx="2">
+        <a:scrgbClr r="0" g="0" b="0"/>
+      </a:effectRef>
+      <a:fontRef idx="minor"/>
+    </dgm:style>
+  </dgm:styleLbl>
+  <dgm:styleLbl name="dkBgShp">
+    <dgm:scene3d>
+      <a:camera prst="orthographicFront"/>
+      <a:lightRig rig="threePt" dir="t"/>
+    </dgm:scene3d>
+    <dgm:sp3d/>
+    <dgm:txPr/>
+    <dgm:style>
+      <a:lnRef idx="0">
+        <a:scrgbClr r="0" g="0" b="0"/>
+      </a:lnRef>
+      <a:fillRef idx="1">
+        <a:scrgbClr r="0" g="0" b="0"/>
+      </a:fillRef>
+      <a:effectRef idx="2">
+        <a:scrgbClr r="0" g="0" b="0"/>
+      </a:effectRef>
+      <a:fontRef idx="minor"/>
+    </dgm:style>
+  </dgm:styleLbl>
+  <dgm:styleLbl name="trBgShp">
+    <dgm:scene3d>
+      <a:camera prst="orthographicFront"/>
+      <a:lightRig rig="threePt" dir="t"/>
+    </dgm:scene3d>
+    <dgm:sp3d/>
+    <dgm:txPr/>
+    <dgm:style>
+      <a:lnRef idx="0">
+        <a:scrgbClr r="0" g="0" b="0"/>
+      </a:lnRef>
+      <a:fillRef idx="1">
+        <a:scrgbClr r="0" g="0" b="0"/>
+      </a:fillRef>
+      <a:effectRef idx="0">
+        <a:scrgbClr r="0" g="0" b="0"/>
+      </a:effectRef>
+      <a:fontRef idx="minor"/>
+    </dgm:style>
+  </dgm:styleLbl>
+  <dgm:styleLbl name="fgShp">
+    <dgm:scene3d>
+      <a:camera prst="orthographicFront"/>
+      <a:lightRig rig="threePt" dir="t"/>
+    </dgm:scene3d>
+    <dgm:sp3d/>
+    <dgm:txPr/>
+    <dgm:style>
+      <a:lnRef idx="0">
+        <a:scrgbClr r="0" g="0" b="0"/>
+      </a:lnRef>
+      <a:fillRef idx="3">
+        <a:scrgbClr r="0" g="0" b="0"/>
+      </a:fillRef>
+      <a:effectRef idx="2">
+        <a:scrgbClr r="0" g="0" b="0"/>
+      </a:effectRef>
+      <a:fontRef idx="minor"/>
+    </dgm:style>
+  </dgm:styleLbl>
+  <dgm:styleLbl name="revTx">
+    <dgm:scene3d>
+      <a:camera prst="orthographicFront"/>
+      <a:lightRig rig="threePt" dir="t"/>
+    </dgm:scene3d>
+    <dgm:sp3d/>
+    <dgm:txPr/>
+    <dgm:style>
+      <a:lnRef idx="0">
+        <a:scrgbClr r="0" g="0" b="0"/>
+      </a:lnRef>
+      <a:fillRef idx="0">
+        <a:scrgbClr r="0" g="0" b="0"/>
+      </a:fillRef>
+      <a:effectRef idx="0">
+        <a:scrgbClr r="0" g="0" b="0"/>
+      </a:effectRef>
+      <a:fontRef idx="minor"/>
+    </dgm:style>
+  </dgm:styleLbl>
+</dgm:styleDef>
+</file>
+
 <file path=ppt/handoutMasters/handoutMaster1.xml><?xml version="1.0" encoding="utf-8"?>
 <p:handoutMaster xmlns:a="http://schemas.openxmlformats.org/drawingml/2006/main" xmlns:r="http://schemas.openxmlformats.org/officeDocument/2006/relationships" xmlns:p="http://schemas.openxmlformats.org/presentationml/2006/main">
   <p:cSld>
@@ -241,7 +3174,7 @@
           <a:p>
             <a:fld id="{D5D1EC30-5B0B-48D0-A1A8-66A96720DF24}" type="datetimeFigureOut">
               <a:rPr lang="en-US" smtClean="0"/>
-              <a:t>7/27/2026</a:t>
+              <a:t>8/6/2026</a:t>
             </a:fld>
             <a:endParaRPr lang="en-US" dirty="0"/>
           </a:p>
@@ -418,7 +3351,7 @@
           <a:p>
             <a:fld id="{69F68A4D-42A7-45F7-9930-00E8DCB48D7E}" type="datetimeFigureOut">
               <a:rPr lang="en-US" smtClean="0"/>
-              <a:t>7/27/2026</a:t>
+              <a:t>8/6/2026</a:t>
             </a:fld>
             <a:endParaRPr lang="en-US" dirty="0"/>
           </a:p>
@@ -750,7 +3683,7 @@
           <a:p>
             <a:fld id="{BFDD6F49-EBB7-4CCF-97A8-E526BB28BB69}" type="slidenum">
               <a:rPr lang="en-US" smtClean="0"/>
-              <a:t>4</a:t>
+              <a:t>2</a:t>
             </a:fld>
             <a:endParaRPr lang="en-US" dirty="0"/>
           </a:p>
@@ -759,7 +3692,7 @@
     </p:spTree>
     <p:extLst>
       <p:ext uri="{BB962C8B-B14F-4D97-AF65-F5344CB8AC3E}">
-        <p14:creationId xmlns:p14="http://schemas.microsoft.com/office/powerpoint/2010/main" val="2402005802"/>
+        <p14:creationId xmlns:p14="http://schemas.microsoft.com/office/powerpoint/2010/main" val="289849132"/>
       </p:ext>
     </p:extLst>
   </p:cSld>
@@ -834,7 +3767,259 @@
           <a:p>
             <a:fld id="{BFDD6F49-EBB7-4CCF-97A8-E526BB28BB69}" type="slidenum">
               <a:rPr lang="en-US" smtClean="0"/>
-              <a:t>14</a:t>
+              <a:t>3</a:t>
+            </a:fld>
+            <a:endParaRPr lang="en-US" dirty="0"/>
+          </a:p>
+        </p:txBody>
+      </p:sp>
+    </p:spTree>
+    <p:extLst>
+      <p:ext uri="{BB962C8B-B14F-4D97-AF65-F5344CB8AC3E}">
+        <p14:creationId xmlns:p14="http://schemas.microsoft.com/office/powerpoint/2010/main" val="76247712"/>
+      </p:ext>
+    </p:extLst>
+  </p:cSld>
+  <p:clrMapOvr>
+    <a:masterClrMapping/>
+  </p:clrMapOvr>
+</p:notes>
+</file>
+
+<file path=ppt/notesSlides/notesSlide3.xml><?xml version="1.0" encoding="utf-8"?>
+<p:notes xmlns:a="http://schemas.openxmlformats.org/drawingml/2006/main" xmlns:r="http://schemas.openxmlformats.org/officeDocument/2006/relationships" xmlns:p="http://schemas.openxmlformats.org/presentationml/2006/main">
+  <p:cSld>
+    <p:spTree>
+      <p:nvGrpSpPr>
+        <p:cNvPr id="1" name=""/>
+        <p:cNvGrpSpPr/>
+        <p:nvPr/>
+      </p:nvGrpSpPr>
+      <p:grpSpPr>
+        <a:xfrm>
+          <a:off x="0" y="0"/>
+          <a:ext cx="0" cy="0"/>
+          <a:chOff x="0" y="0"/>
+          <a:chExt cx="0" cy="0"/>
+        </a:xfrm>
+      </p:grpSpPr>
+      <p:sp>
+        <p:nvSpPr>
+          <p:cNvPr id="2" name="Slide Image Placeholder 1"/>
+          <p:cNvSpPr>
+            <a:spLocks noGrp="1" noRot="1" noChangeAspect="1"/>
+          </p:cNvSpPr>
+          <p:nvPr>
+            <p:ph type="sldImg"/>
+          </p:nvPr>
+        </p:nvSpPr>
+        <p:spPr/>
+      </p:sp>
+      <p:sp>
+        <p:nvSpPr>
+          <p:cNvPr id="3" name="Notes Placeholder 2"/>
+          <p:cNvSpPr>
+            <a:spLocks noGrp="1"/>
+          </p:cNvSpPr>
+          <p:nvPr>
+            <p:ph type="body" idx="1"/>
+          </p:nvPr>
+        </p:nvSpPr>
+        <p:spPr/>
+        <p:txBody>
+          <a:bodyPr/>
+          <a:lstStyle/>
+          <a:p>
+            <a:endParaRPr lang="en-SG" dirty="0"/>
+          </a:p>
+        </p:txBody>
+      </p:sp>
+      <p:sp>
+        <p:nvSpPr>
+          <p:cNvPr id="4" name="Slide Number Placeholder 3"/>
+          <p:cNvSpPr>
+            <a:spLocks noGrp="1"/>
+          </p:cNvSpPr>
+          <p:nvPr>
+            <p:ph type="sldNum" sz="quarter" idx="5"/>
+          </p:nvPr>
+        </p:nvSpPr>
+        <p:spPr/>
+        <p:txBody>
+          <a:bodyPr/>
+          <a:lstStyle/>
+          <a:p>
+            <a:fld id="{BFDD6F49-EBB7-4CCF-97A8-E526BB28BB69}" type="slidenum">
+              <a:rPr lang="en-US" smtClean="0"/>
+              <a:t>4</a:t>
+            </a:fld>
+            <a:endParaRPr lang="en-US" dirty="0"/>
+          </a:p>
+        </p:txBody>
+      </p:sp>
+    </p:spTree>
+    <p:extLst>
+      <p:ext uri="{BB962C8B-B14F-4D97-AF65-F5344CB8AC3E}">
+        <p14:creationId xmlns:p14="http://schemas.microsoft.com/office/powerpoint/2010/main" val="2402005802"/>
+      </p:ext>
+    </p:extLst>
+  </p:cSld>
+  <p:clrMapOvr>
+    <a:masterClrMapping/>
+  </p:clrMapOvr>
+</p:notes>
+</file>
+
+<file path=ppt/notesSlides/notesSlide4.xml><?xml version="1.0" encoding="utf-8"?>
+<p:notes xmlns:a="http://schemas.openxmlformats.org/drawingml/2006/main" xmlns:r="http://schemas.openxmlformats.org/officeDocument/2006/relationships" xmlns:p="http://schemas.openxmlformats.org/presentationml/2006/main">
+  <p:cSld>
+    <p:spTree>
+      <p:nvGrpSpPr>
+        <p:cNvPr id="1" name=""/>
+        <p:cNvGrpSpPr/>
+        <p:nvPr/>
+      </p:nvGrpSpPr>
+      <p:grpSpPr>
+        <a:xfrm>
+          <a:off x="0" y="0"/>
+          <a:ext cx="0" cy="0"/>
+          <a:chOff x="0" y="0"/>
+          <a:chExt cx="0" cy="0"/>
+        </a:xfrm>
+      </p:grpSpPr>
+      <p:sp>
+        <p:nvSpPr>
+          <p:cNvPr id="2" name="Slide Image Placeholder 1"/>
+          <p:cNvSpPr>
+            <a:spLocks noGrp="1" noRot="1" noChangeAspect="1"/>
+          </p:cNvSpPr>
+          <p:nvPr>
+            <p:ph type="sldImg"/>
+          </p:nvPr>
+        </p:nvSpPr>
+        <p:spPr/>
+      </p:sp>
+      <p:sp>
+        <p:nvSpPr>
+          <p:cNvPr id="3" name="Notes Placeholder 2"/>
+          <p:cNvSpPr>
+            <a:spLocks noGrp="1"/>
+          </p:cNvSpPr>
+          <p:nvPr>
+            <p:ph type="body" idx="1"/>
+          </p:nvPr>
+        </p:nvSpPr>
+        <p:spPr/>
+        <p:txBody>
+          <a:bodyPr/>
+          <a:lstStyle/>
+          <a:p>
+            <a:endParaRPr lang="en-SG" dirty="0"/>
+          </a:p>
+        </p:txBody>
+      </p:sp>
+      <p:sp>
+        <p:nvSpPr>
+          <p:cNvPr id="4" name="Slide Number Placeholder 3"/>
+          <p:cNvSpPr>
+            <a:spLocks noGrp="1"/>
+          </p:cNvSpPr>
+          <p:nvPr>
+            <p:ph type="sldNum" sz="quarter" idx="5"/>
+          </p:nvPr>
+        </p:nvSpPr>
+        <p:spPr/>
+        <p:txBody>
+          <a:bodyPr/>
+          <a:lstStyle/>
+          <a:p>
+            <a:fld id="{BFDD6F49-EBB7-4CCF-97A8-E526BB28BB69}" type="slidenum">
+              <a:rPr lang="en-US" smtClean="0"/>
+              <a:t>6</a:t>
+            </a:fld>
+            <a:endParaRPr lang="en-US" dirty="0"/>
+          </a:p>
+        </p:txBody>
+      </p:sp>
+    </p:spTree>
+    <p:extLst>
+      <p:ext uri="{BB962C8B-B14F-4D97-AF65-F5344CB8AC3E}">
+        <p14:creationId xmlns:p14="http://schemas.microsoft.com/office/powerpoint/2010/main" val="3781172158"/>
+      </p:ext>
+    </p:extLst>
+  </p:cSld>
+  <p:clrMapOvr>
+    <a:masterClrMapping/>
+  </p:clrMapOvr>
+</p:notes>
+</file>
+
+<file path=ppt/notesSlides/notesSlide5.xml><?xml version="1.0" encoding="utf-8"?>
+<p:notes xmlns:a="http://schemas.openxmlformats.org/drawingml/2006/main" xmlns:r="http://schemas.openxmlformats.org/officeDocument/2006/relationships" xmlns:p="http://schemas.openxmlformats.org/presentationml/2006/main">
+  <p:cSld>
+    <p:spTree>
+      <p:nvGrpSpPr>
+        <p:cNvPr id="1" name=""/>
+        <p:cNvGrpSpPr/>
+        <p:nvPr/>
+      </p:nvGrpSpPr>
+      <p:grpSpPr>
+        <a:xfrm>
+          <a:off x="0" y="0"/>
+          <a:ext cx="0" cy="0"/>
+          <a:chOff x="0" y="0"/>
+          <a:chExt cx="0" cy="0"/>
+        </a:xfrm>
+      </p:grpSpPr>
+      <p:sp>
+        <p:nvSpPr>
+          <p:cNvPr id="2" name="Slide Image Placeholder 1"/>
+          <p:cNvSpPr>
+            <a:spLocks noGrp="1" noRot="1" noChangeAspect="1"/>
+          </p:cNvSpPr>
+          <p:nvPr>
+            <p:ph type="sldImg"/>
+          </p:nvPr>
+        </p:nvSpPr>
+        <p:spPr/>
+      </p:sp>
+      <p:sp>
+        <p:nvSpPr>
+          <p:cNvPr id="3" name="Notes Placeholder 2"/>
+          <p:cNvSpPr>
+            <a:spLocks noGrp="1"/>
+          </p:cNvSpPr>
+          <p:nvPr>
+            <p:ph type="body" idx="1"/>
+          </p:nvPr>
+        </p:nvSpPr>
+        <p:spPr/>
+        <p:txBody>
+          <a:bodyPr/>
+          <a:lstStyle/>
+          <a:p>
+            <a:endParaRPr lang="en-SG" dirty="0"/>
+          </a:p>
+        </p:txBody>
+      </p:sp>
+      <p:sp>
+        <p:nvSpPr>
+          <p:cNvPr id="4" name="Slide Number Placeholder 3"/>
+          <p:cNvSpPr>
+            <a:spLocks noGrp="1"/>
+          </p:cNvSpPr>
+          <p:nvPr>
+            <p:ph type="sldNum" sz="quarter" idx="5"/>
+          </p:nvPr>
+        </p:nvSpPr>
+        <p:spPr/>
+        <p:txBody>
+          <a:bodyPr/>
+          <a:lstStyle/>
+          <a:p>
+            <a:fld id="{BFDD6F49-EBB7-4CCF-97A8-E526BB28BB69}" type="slidenum">
+              <a:rPr lang="en-US" smtClean="0"/>
+              <a:t>15</a:t>
             </a:fld>
             <a:endParaRPr lang="en-US" dirty="0"/>
           </a:p>
@@ -2063,7 +5248,7 @@
           <a:p>
             <a:fld id="{EBC9FF77-C2BC-3842-9757-C2EBADB34099}" type="datetime1">
               <a:rPr lang="en-US" smtClean="0"/>
-              <a:t>7/27/2026</a:t>
+              <a:t>8/6/2026</a:t>
             </a:fld>
             <a:endParaRPr lang="en-US" dirty="0"/>
           </a:p>
@@ -2427,7 +5612,7 @@
           <a:p>
             <a:fld id="{010D0AB2-23BC-3043-AC30-5928E542C0CE}" type="datetime1">
               <a:rPr lang="en-US" smtClean="0"/>
-              <a:t>7/27/2026</a:t>
+              <a:t>8/6/2026</a:t>
             </a:fld>
             <a:endParaRPr lang="en-US" dirty="0"/>
           </a:p>
@@ -2953,7 +6138,7 @@
           <a:p>
             <a:fld id="{3EE24C61-4277-DA47-BF4A-DCEFD7F4C6B4}" type="datetime1">
               <a:rPr lang="en-US" smtClean="0"/>
-              <a:t>7/27/2026</a:t>
+              <a:t>8/6/2026</a:t>
             </a:fld>
             <a:endParaRPr lang="en-US" dirty="0"/>
           </a:p>
@@ -3479,7 +6664,7 @@
           <a:p>
             <a:fld id="{53D1C53B-D534-AA48-85B3-4F5B03DDCBA8}" type="datetime1">
               <a:rPr lang="en-US" smtClean="0"/>
-              <a:t>7/27/2026</a:t>
+              <a:t>8/6/2026</a:t>
             </a:fld>
             <a:endParaRPr lang="en-US" dirty="0"/>
           </a:p>
@@ -4125,7 +7310,7 @@
           <a:p>
             <a:fld id="{B2A7CB4E-BD8C-8E4D-91FF-B1939559C134}" type="datetime1">
               <a:rPr lang="en-US" smtClean="0"/>
-              <a:t>7/27/2026</a:t>
+              <a:t>8/6/2026</a:t>
             </a:fld>
             <a:endParaRPr lang="en-US" dirty="0"/>
           </a:p>
@@ -4734,7 +7919,7 @@
           <a:p>
             <a:fld id="{4142E188-D61A-9842-B8A2-1559B3399613}" type="datetime1">
               <a:rPr lang="en-US" smtClean="0"/>
-              <a:t>7/27/2026</a:t>
+              <a:t>8/6/2026</a:t>
             </a:fld>
             <a:endParaRPr lang="en-US" dirty="0"/>
           </a:p>
@@ -5305,7 +8490,7 @@
           <a:p>
             <a:fld id="{0D0C1909-8EA0-3E44-B1AC-A9EA56584238}" type="datetime1">
               <a:rPr lang="en-US" smtClean="0"/>
-              <a:t>7/27/2026</a:t>
+              <a:t>8/6/2026</a:t>
             </a:fld>
             <a:endParaRPr lang="en-US" dirty="0"/>
           </a:p>
@@ -5844,7 +9029,7 @@
           <a:p>
             <a:fld id="{C752DD5A-B150-8340-8E59-4C8F3F7E3A59}" type="datetime1">
               <a:rPr lang="en-US" smtClean="0"/>
-              <a:t>7/27/2026</a:t>
+              <a:t>8/6/2026</a:t>
             </a:fld>
             <a:endParaRPr lang="en-US" dirty="0"/>
           </a:p>
@@ -6353,7 +9538,7 @@
           <a:p>
             <a:fld id="{0FD936B8-E398-1A41-8DE9-58DDB113FEEA}" type="datetime1">
               <a:rPr lang="en-US" smtClean="0"/>
-              <a:t>7/27/2026</a:t>
+              <a:t>8/6/2026</a:t>
             </a:fld>
             <a:endParaRPr lang="en-US" dirty="0"/>
           </a:p>
@@ -6851,7 +10036,7 @@
           <a:p>
             <a:fld id="{927C0DEB-4AE1-EA4D-826D-E3C22802B942}" type="datetime1">
               <a:rPr lang="en-US" smtClean="0"/>
-              <a:t>7/27/2026</a:t>
+              <a:t>8/6/2026</a:t>
             </a:fld>
             <a:endParaRPr lang="en-US" dirty="0"/>
           </a:p>
@@ -7336,7 +10521,7 @@
           <a:p>
             <a:fld id="{BE2752B3-7BF7-614C-A80A-1256FFE41AD1}" type="datetime1">
               <a:rPr lang="en-US" smtClean="0"/>
-              <a:t>7/27/2026</a:t>
+              <a:t>8/6/2026</a:t>
             </a:fld>
             <a:endParaRPr lang="en-US" dirty="0"/>
           </a:p>
@@ -7790,7 +10975,7 @@
           <a:p>
             <a:fld id="{40482BA7-8406-1C47-9A76-988652CA5787}" type="datetime1">
               <a:rPr lang="en-US" smtClean="0"/>
-              <a:t>7/27/2026</a:t>
+              <a:t>8/6/2026</a:t>
             </a:fld>
             <a:endParaRPr lang="en-US" dirty="0"/>
           </a:p>
@@ -8347,7 +11532,7 @@
           <a:p>
             <a:fld id="{79F03E26-E542-1A4D-AC7A-1E4E95BAEC6A}" type="datetime1">
               <a:rPr lang="en-US" smtClean="0"/>
-              <a:t>7/27/2026</a:t>
+              <a:t>8/6/2026</a:t>
             </a:fld>
             <a:endParaRPr lang="en-US" dirty="0"/>
           </a:p>
@@ -8945,7 +12130,7 @@
           <a:p>
             <a:fld id="{115476B0-E2C7-E147-B9CE-3E274E847A52}" type="datetime1">
               <a:rPr lang="en-US" smtClean="0"/>
-              <a:t>7/27/2026</a:t>
+              <a:t>8/6/2026</a:t>
             </a:fld>
             <a:endParaRPr lang="en-US" dirty="0"/>
           </a:p>
@@ -9543,7 +12728,7 @@
           <a:p>
             <a:fld id="{30D7DCC1-5043-7A46-8443-F8426D5EAB75}" type="datetime1">
               <a:rPr lang="en-US" smtClean="0"/>
-              <a:t>7/27/2026</a:t>
+              <a:t>8/6/2026</a:t>
             </a:fld>
             <a:endParaRPr lang="en-US" dirty="0"/>
           </a:p>
@@ -10143,7 +13328,7 @@
           <a:p>
             <a:fld id="{D1A2963D-70FD-3A42-A53A-2480966C033D}" type="datetime1">
               <a:rPr lang="en-US" smtClean="0"/>
-              <a:t>7/27/2026</a:t>
+              <a:t>8/6/2026</a:t>
             </a:fld>
             <a:endParaRPr lang="en-US" dirty="0"/>
           </a:p>
@@ -10743,7 +13928,7 @@
           <a:p>
             <a:fld id="{F1A8FB16-FCFB-DA44-98E9-136CD51670D6}" type="datetime1">
               <a:rPr lang="en-US" smtClean="0"/>
-              <a:t>7/27/2026</a:t>
+              <a:t>8/6/2026</a:t>
             </a:fld>
             <a:endParaRPr lang="en-US" dirty="0"/>
           </a:p>
@@ -11341,7 +14526,7 @@
           <a:p>
             <a:fld id="{58EFB3A8-11B5-7149-8412-15238624EFFD}" type="datetime1">
               <a:rPr lang="en-US" smtClean="0"/>
-              <a:t>7/27/2026</a:t>
+              <a:t>8/6/2026</a:t>
             </a:fld>
             <a:endParaRPr lang="en-US" dirty="0"/>
           </a:p>
@@ -11939,7 +15124,7 @@
           <a:p>
             <a:fld id="{650FCFAB-53E3-A342-A296-D67E0AB8D0CD}" type="datetime1">
               <a:rPr lang="en-US" smtClean="0"/>
-              <a:t>7/27/2026</a:t>
+              <a:t>8/6/2026</a:t>
             </a:fld>
             <a:endParaRPr lang="en-US" dirty="0"/>
           </a:p>
@@ -12535,7 +15720,7 @@
           <a:p>
             <a:fld id="{8DC46901-11EF-4445-8903-DC36784F331E}" type="datetime1">
               <a:rPr lang="en-US" smtClean="0"/>
-              <a:t>7/27/2026</a:t>
+              <a:t>8/6/2026</a:t>
             </a:fld>
             <a:endParaRPr lang="en-US" dirty="0"/>
           </a:p>
@@ -13064,7 +16249,7 @@
           <a:p>
             <a:fld id="{86A42598-CA8F-5141-9F98-7018240FA786}" type="datetime1">
               <a:rPr lang="en-US" smtClean="0"/>
-              <a:t>7/27/2026</a:t>
+              <a:t>8/6/2026</a:t>
             </a:fld>
             <a:endParaRPr lang="en-US" dirty="0"/>
           </a:p>
@@ -13680,7 +16865,7 @@
           <a:p>
             <a:fld id="{BB5C750C-98D3-2541-9DBA-212130458E4E}" type="datetime1">
               <a:rPr lang="en-US" smtClean="0"/>
-              <a:t>7/27/2026</a:t>
+              <a:t>8/6/2026</a:t>
             </a:fld>
             <a:endParaRPr lang="en-US" dirty="0"/>
           </a:p>
@@ -14280,7 +17465,7 @@
           <a:p>
             <a:fld id="{91C99844-6C9E-BB4D-8B47-7C2CC32AAC02}" type="datetime1">
               <a:rPr lang="en-US" smtClean="0"/>
-              <a:t>7/27/2026</a:t>
+              <a:t>8/6/2026</a:t>
             </a:fld>
             <a:endParaRPr lang="en-US" dirty="0"/>
           </a:p>
@@ -14880,7 +18065,7 @@
           <a:p>
             <a:fld id="{97582611-C0A2-BD42-A8F7-C2F9A013F10C}" type="datetime1">
               <a:rPr lang="en-US" smtClean="0"/>
-              <a:t>7/27/2026</a:t>
+              <a:t>8/6/2026</a:t>
             </a:fld>
             <a:endParaRPr lang="en-US" dirty="0"/>
           </a:p>
@@ -15478,7 +18663,7 @@
           <a:p>
             <a:fld id="{1048417B-2BA9-FC42-993A-F5CAB8ABAB3C}" type="datetime1">
               <a:rPr lang="en-US" smtClean="0"/>
-              <a:t>7/27/2026</a:t>
+              <a:t>8/6/2026</a:t>
             </a:fld>
             <a:endParaRPr lang="en-US" dirty="0"/>
           </a:p>
@@ -16081,7 +19266,7 @@
           <a:p>
             <a:fld id="{B9956DE8-31F3-0C48-AD89-A99E39B5E351}" type="datetime1">
               <a:rPr lang="en-US" smtClean="0"/>
-              <a:t>7/27/2026</a:t>
+              <a:t>8/6/2026</a:t>
             </a:fld>
             <a:endParaRPr lang="en-US" dirty="0"/>
           </a:p>
@@ -16641,7 +19826,7 @@
           <a:p>
             <a:fld id="{1247F170-621E-394E-A3F2-D37D14C6B270}" type="datetime1">
               <a:rPr lang="en-US" smtClean="0"/>
-              <a:t>7/27/2026</a:t>
+              <a:t>8/6/2026</a:t>
             </a:fld>
             <a:endParaRPr lang="en-US" dirty="0"/>
           </a:p>
@@ -17203,7 +20388,7 @@
           <a:p>
             <a:fld id="{3BFEB256-000B-7640-A176-A6ED88FB302B}" type="datetime1">
               <a:rPr lang="en-US" smtClean="0"/>
-              <a:t>7/27/2026</a:t>
+              <a:t>8/6/2026</a:t>
             </a:fld>
             <a:endParaRPr lang="en-US" dirty="0"/>
           </a:p>
@@ -17760,7 +20945,7 @@
           <a:p>
             <a:fld id="{AD187FAD-DCB9-3D4B-B066-9000219F05FB}" type="datetime1">
               <a:rPr lang="en-US" smtClean="0"/>
-              <a:t>7/27/2026</a:t>
+              <a:t>8/6/2026</a:t>
             </a:fld>
             <a:endParaRPr lang="en-US" dirty="0"/>
           </a:p>
@@ -18360,7 +21545,7 @@
           <a:p>
             <a:fld id="{189C5B77-1EC5-224E-B44E-9B7868782731}" type="datetime1">
               <a:rPr lang="en-US" smtClean="0"/>
-              <a:t>7/27/2026</a:t>
+              <a:t>8/6/2026</a:t>
             </a:fld>
             <a:endParaRPr lang="en-US" dirty="0"/>
           </a:p>
@@ -18963,7 +22148,7 @@
           <a:p>
             <a:fld id="{C8F601A6-19D3-EB49-B7F2-A9801AE13DA6}" type="datetime1">
               <a:rPr lang="en-US" smtClean="0"/>
-              <a:t>7/27/2026</a:t>
+              <a:t>8/6/2026</a:t>
             </a:fld>
             <a:endParaRPr lang="en-US" dirty="0"/>
           </a:p>
@@ -19445,7 +22630,7 @@
           <a:p>
             <a:fld id="{FF5D23C8-9820-654D-9C1E-FE1FC23DA807}" type="datetime1">
               <a:rPr lang="en-US" smtClean="0"/>
-              <a:t>7/27/2026</a:t>
+              <a:t>8/6/2026</a:t>
             </a:fld>
             <a:endParaRPr lang="en-US" dirty="0"/>
           </a:p>
@@ -20066,7 +23251,7 @@
           <a:p>
             <a:fld id="{B5DCFA2C-3BE3-964B-9AAF-C20CC59CEE43}" type="datetime1">
               <a:rPr lang="en-US" smtClean="0"/>
-              <a:t>7/27/2026</a:t>
+              <a:t>8/6/2026</a:t>
             </a:fld>
             <a:endParaRPr lang="en-US" dirty="0"/>
           </a:p>
@@ -20504,7 +23689,7 @@
           <a:p>
             <a:fld id="{79A3CDA5-1015-3148-A386-36088AF5334C}" type="datetime1">
               <a:rPr lang="en-US" smtClean="0"/>
-              <a:t>7/27/2026</a:t>
+              <a:t>8/6/2026</a:t>
             </a:fld>
             <a:endParaRPr lang="en-US" dirty="0"/>
           </a:p>
@@ -20939,7 +24124,7 @@
           <a:p>
             <a:fld id="{C112E8AA-E35F-CF44-B5A4-3B5EDD4AC3FC}" type="datetime1">
               <a:rPr lang="en-US" smtClean="0"/>
-              <a:t>7/27/2026</a:t>
+              <a:t>8/6/2026</a:t>
             </a:fld>
             <a:endParaRPr lang="en-US" dirty="0"/>
           </a:p>
@@ -21551,7 +24736,7 @@
           <a:p>
             <a:fld id="{E0FF3B4E-61F2-9C45-A7C9-0649FA3F05AD}" type="datetime1">
               <a:rPr lang="en-US" smtClean="0"/>
-              <a:t>7/27/2026</a:t>
+              <a:t>8/6/2026</a:t>
             </a:fld>
             <a:endParaRPr lang="en-US" dirty="0"/>
           </a:p>
@@ -22176,7 +25361,7 @@
           <a:p>
             <a:fld id="{CC4A289B-0B17-4246-8E33-E89C12A90840}" type="datetime1">
               <a:rPr lang="en-US" smtClean="0"/>
-              <a:t>7/27/2026</a:t>
+              <a:t>8/6/2026</a:t>
             </a:fld>
             <a:endParaRPr lang="en-US" dirty="0"/>
           </a:p>
@@ -22796,7 +25981,7 @@
           <a:p>
             <a:fld id="{C8092CDE-5B88-E044-9012-03F4795B046E}" type="datetime1">
               <a:rPr lang="en-US" smtClean="0"/>
-              <a:t>7/27/2026</a:t>
+              <a:t>8/6/2026</a:t>
             </a:fld>
             <a:endParaRPr lang="en-US" dirty="0"/>
           </a:p>
@@ -23450,7 +26635,7 @@
           <a:p>
             <a:fld id="{EC076D1D-DE21-9B42-8106-8CD72DA85F70}" type="datetime1">
               <a:rPr lang="en-US" smtClean="0"/>
-              <a:t>7/27/2026</a:t>
+              <a:t>8/6/2026</a:t>
             </a:fld>
             <a:endParaRPr lang="en-US" dirty="0"/>
           </a:p>
@@ -24104,7 +27289,7 @@
           <a:p>
             <a:fld id="{57807DC2-592A-C24E-8E32-92959310D82C}" type="datetime1">
               <a:rPr lang="en-US" smtClean="0"/>
-              <a:t>7/27/2026</a:t>
+              <a:t>8/6/2026</a:t>
             </a:fld>
             <a:endParaRPr lang="en-US" dirty="0"/>
           </a:p>
@@ -24791,7 +27976,7 @@
             <a:fld id="{2A17FF52-3D92-5045-83B3-191BF759FA8D}" type="datetime1">
               <a:rPr lang="en-US" smtClean="0"/>
               <a:pPr/>
-              <a:t>7/27/2026</a:t>
+              <a:t>8/6/2026</a:t>
             </a:fld>
             <a:endParaRPr lang="en-US" dirty="0"/>
           </a:p>
@@ -25232,7 +28417,7 @@
             <a:fld id="{17C67708-7A94-8245-80C8-4B4702495DB1}" type="datetime1">
               <a:rPr lang="en-US" smtClean="0"/>
               <a:pPr/>
-              <a:t>7/27/2026</a:t>
+              <a:t>8/6/2026</a:t>
             </a:fld>
             <a:endParaRPr lang="en-US" dirty="0"/>
           </a:p>
@@ -25757,7 +28942,7 @@
           <a:p>
             <a:fld id="{763C345D-F56F-0743-AB88-4EB3E35EF63D}" type="datetime1">
               <a:rPr lang="en-US" smtClean="0"/>
-              <a:t>7/27/2026</a:t>
+              <a:t>8/6/2026</a:t>
             </a:fld>
             <a:endParaRPr lang="en-US" dirty="0"/>
           </a:p>
@@ -26255,7 +29440,7 @@
             <a:fld id="{C3A90753-8D45-EB44-AB23-49A6290D6DA6}" type="datetime1">
               <a:rPr lang="en-US" smtClean="0"/>
               <a:pPr/>
-              <a:t>7/27/2026</a:t>
+              <a:t>8/6/2026</a:t>
             </a:fld>
             <a:endParaRPr lang="en-US" dirty="0"/>
           </a:p>
@@ -26841,7 +30026,7 @@
           <a:p>
             <a:fld id="{C5059AB6-B751-F44D-A28C-E19CFA261A8F}" type="datetime1">
               <a:rPr lang="en-US" smtClean="0"/>
-              <a:t>7/27/2026</a:t>
+              <a:t>8/6/2026</a:t>
             </a:fld>
             <a:endParaRPr lang="en-US" dirty="0"/>
           </a:p>
@@ -27544,7 +30729,7 @@
           <a:p>
             <a:fld id="{F4B7459A-9905-1A4B-AB1A-C91FAC752AC6}" type="datetime1">
               <a:rPr lang="en-US" smtClean="0"/>
-              <a:t>7/27/2026</a:t>
+              <a:t>8/6/2026</a:t>
             </a:fld>
             <a:endParaRPr lang="en-US" dirty="0"/>
           </a:p>
@@ -27927,7 +31112,7 @@
           <a:p>
             <a:fld id="{D255AB00-997D-D540-BC20-37B7E62B26C1}" type="datetime1">
               <a:rPr lang="en-US" smtClean="0"/>
-              <a:t>7/27/2026</a:t>
+              <a:t>8/6/2026</a:t>
             </a:fld>
             <a:endParaRPr lang="en-US" dirty="0"/>
           </a:p>
@@ -28268,7 +31453,7 @@
           <a:p>
             <a:fld id="{69F3ECCF-2CCD-CA4B-8712-AE4484B24AE9}" type="datetime1">
               <a:rPr lang="en-US" smtClean="0"/>
-              <a:t>7/27/2026</a:t>
+              <a:t>8/6/2026</a:t>
             </a:fld>
             <a:endParaRPr lang="en-US" dirty="0"/>
           </a:p>
@@ -28853,7 +32038,7 @@
           <a:p>
             <a:fld id="{22942A74-7D23-DC49-91AA-85B24B3B8A00}" type="datetime1">
               <a:rPr lang="en-US" smtClean="0"/>
-              <a:t>7/27/2026</a:t>
+              <a:t>8/6/2026</a:t>
             </a:fld>
             <a:endParaRPr lang="en-US" dirty="0"/>
           </a:p>
@@ -29406,7 +32591,7 @@
           <a:p>
             <a:fld id="{22A0247B-8639-BE4B-9EB6-99BF33B2FE57}" type="datetime1">
               <a:rPr lang="en-US" smtClean="0"/>
-              <a:t>7/27/2026</a:t>
+              <a:t>8/6/2026</a:t>
             </a:fld>
             <a:endParaRPr lang="en-US" dirty="0"/>
           </a:p>
@@ -29936,7 +33121,7 @@
           <a:p>
             <a:fld id="{162FAA25-3923-0740-83DA-275C59DD4599}" type="datetime1">
               <a:rPr lang="en-US" smtClean="0"/>
-              <a:t>7/27/2026</a:t>
+              <a:t>8/6/2026</a:t>
             </a:fld>
             <a:endParaRPr lang="en-US" dirty="0"/>
           </a:p>
@@ -30427,7 +33612,7 @@
           <a:p>
             <a:fld id="{AB1B52C7-37F9-BD40-8BE5-16C7107F6B2A}" type="datetime1">
               <a:rPr lang="en-US" smtClean="0"/>
-              <a:t>7/27/2026</a:t>
+              <a:t>8/6/2026</a:t>
             </a:fld>
             <a:endParaRPr lang="en-US" dirty="0"/>
           </a:p>
@@ -31144,7 +34329,7 @@
           <a:p>
             <a:fld id="{FF5D23C8-9820-654D-9C1E-FE1FC23DA807}" type="datetime1">
               <a:rPr lang="en-US" smtClean="0"/>
-              <a:t>7/27/2026</a:t>
+              <a:t>8/6/2026</a:t>
             </a:fld>
             <a:endParaRPr lang="en-US" dirty="0"/>
           </a:p>
@@ -31390,7 +34575,7 @@
           <a:p>
             <a:fld id="{5594B28A-4C74-C14A-960D-ABD28BCC0EB4}" type="datetime1">
               <a:rPr lang="en-US" smtClean="0"/>
-              <a:t>7/27/2026</a:t>
+              <a:t>8/6/2026</a:t>
             </a:fld>
             <a:endParaRPr lang="en-US" dirty="0"/>
           </a:p>
@@ -31808,7 +34993,7 @@
           <a:p>
             <a:fld id="{D8CCD23C-B1EB-604C-96F1-0CF64015D152}" type="datetime1">
               <a:rPr lang="en-US" smtClean="0"/>
-              <a:t>7/27/2026</a:t>
+              <a:t>8/6/2026</a:t>
             </a:fld>
             <a:endParaRPr lang="en-US" dirty="0"/>
           </a:p>
@@ -32245,7 +35430,7 @@
           <a:p>
             <a:fld id="{4BE11430-0446-F343-817C-D9D2C78891B0}" type="datetime1">
               <a:rPr lang="en-US" smtClean="0"/>
-              <a:t>7/27/2026</a:t>
+              <a:t>8/6/2026</a:t>
             </a:fld>
             <a:endParaRPr lang="en-US" dirty="0"/>
           </a:p>
@@ -32766,7 +35951,7 @@
             <a:fld id="{6739503E-9C75-484A-A764-D9D8121AAE05}" type="datetime1">
               <a:rPr lang="en-US" smtClean="0"/>
               <a:pPr/>
-              <a:t>7/27/2026</a:t>
+              <a:t>8/6/2026</a:t>
             </a:fld>
             <a:endParaRPr lang="en-US" dirty="0"/>
           </a:p>
@@ -33612,7 +36797,7 @@
           <p:cNvPr id="2" name="Title 1">
             <a:extLst>
               <a:ext uri="{FF2B5EF4-FFF2-40B4-BE49-F238E27FC236}">
-                <a16:creationId xmlns:a16="http://schemas.microsoft.com/office/drawing/2014/main" id="{286B1922-876E-5121-A1B1-09421CD101B6}"/>
+                <a16:creationId xmlns:a16="http://schemas.microsoft.com/office/drawing/2014/main" id="{B8EC085A-D7BE-6136-7F2E-5410A888566D}"/>
               </a:ext>
             </a:extLst>
           </p:cNvPr>
@@ -33626,7 +36811,7 @@
         <p:spPr>
           <a:xfrm>
             <a:off x="1255032" y="862335"/>
-            <a:ext cx="4389120" cy="5120640"/>
+            <a:ext cx="4389120" cy="5618978"/>
           </a:xfrm>
         </p:spPr>
         <p:txBody>
@@ -33637,7 +36822,7 @@
           <a:p>
             <a:r>
               <a:rPr lang="en-SG" dirty="0"/>
-              <a:t>DATABASE</a:t>
+              <a:t>DATA INGESTION</a:t>
             </a:r>
           </a:p>
         </p:txBody>
@@ -33647,7 +36832,7 @@
           <p:cNvPr id="3" name="Footer Placeholder 2">
             <a:extLst>
               <a:ext uri="{FF2B5EF4-FFF2-40B4-BE49-F238E27FC236}">
-                <a16:creationId xmlns:a16="http://schemas.microsoft.com/office/drawing/2014/main" id="{130300D0-5A97-A007-8822-C75A86BC135D}"/>
+                <a16:creationId xmlns:a16="http://schemas.microsoft.com/office/drawing/2014/main" id="{DDCBB3B8-6DED-E7E9-1A36-A0F263B4E7F5}"/>
               </a:ext>
             </a:extLst>
           </p:cNvPr>
@@ -33687,7 +36872,7 @@
           <p:cNvPr id="4" name="Content Placeholder 3">
             <a:extLst>
               <a:ext uri="{FF2B5EF4-FFF2-40B4-BE49-F238E27FC236}">
-                <a16:creationId xmlns:a16="http://schemas.microsoft.com/office/drawing/2014/main" id="{AF3B857A-83E3-2D2A-978B-032EBACA2376}"/>
+                <a16:creationId xmlns:a16="http://schemas.microsoft.com/office/drawing/2014/main" id="{49D1D6E6-BB52-24CA-7576-B7194F347DE7}"/>
               </a:ext>
             </a:extLst>
           </p:cNvPr>
@@ -33712,12 +36897,9 @@
           <a:p>
             <a:r>
               <a:rPr lang="en-SG" dirty="0"/>
-              <a:t>The Database Service stores the imported environmental monitoring dataset, anomaly prediction results, and historical records. The Backend API retrieves data from the database for preprocessing and machine learning analysis, while prediction results are stored for future reference and visualisation. This provides persistent and centralized data storage, enabling efficient data management and historical analysis.</a:t>
+              <a:t>The Data Ingestion Service collects real-time sensor data, such as temperature, humidity, CO₂, and air quality, from IoT sensors. It validates the data, stores it in the database, and sends it to the Machine Learning Service for analysis. Separating this function into its own microservice makes the system easier to scale, maintain, and expand.</a:t>
             </a:r>
           </a:p>
-          <a:p>
-            <a:endParaRPr lang="en-SG" dirty="0"/>
-          </a:p>
         </p:txBody>
       </p:sp>
       <p:sp>
@@ -33725,7 +36907,7 @@
           <p:cNvPr id="5" name="Date Placeholder 4">
             <a:extLst>
               <a:ext uri="{FF2B5EF4-FFF2-40B4-BE49-F238E27FC236}">
-                <a16:creationId xmlns:a16="http://schemas.microsoft.com/office/drawing/2014/main" id="{84920A6B-C20E-B038-D917-D179D6C31213}"/>
+                <a16:creationId xmlns:a16="http://schemas.microsoft.com/office/drawing/2014/main" id="{8F9AF1D9-FFF5-1F73-5E2B-9EF32E6D5DC7}"/>
               </a:ext>
             </a:extLst>
           </p:cNvPr>
@@ -33760,7 +36942,7 @@
                   <a:spcPts val="600"/>
                 </a:spcAft>
               </a:pPr>
-              <a:t>7/27/2026</a:t>
+              <a:t>8/6/2026</a:t>
             </a:fld>
             <a:endParaRPr lang="en-US"/>
           </a:p>
@@ -33771,7 +36953,7 @@
           <p:cNvPr id="6" name="Slide Number Placeholder 5">
             <a:extLst>
               <a:ext uri="{FF2B5EF4-FFF2-40B4-BE49-F238E27FC236}">
-                <a16:creationId xmlns:a16="http://schemas.microsoft.com/office/drawing/2014/main" id="{F5D522DE-ABA7-62B2-AAB9-C272B74D3EC1}"/>
+                <a16:creationId xmlns:a16="http://schemas.microsoft.com/office/drawing/2014/main" id="{4DA8EEF1-3820-1A48-D817-0DF67D8835B9}"/>
               </a:ext>
             </a:extLst>
           </p:cNvPr>
@@ -33815,7 +36997,7 @@
     </p:spTree>
     <p:extLst>
       <p:ext uri="{BB962C8B-B14F-4D97-AF65-F5344CB8AC3E}">
-        <p14:creationId xmlns:p14="http://schemas.microsoft.com/office/powerpoint/2010/main" val="2133928878"/>
+        <p14:creationId xmlns:p14="http://schemas.microsoft.com/office/powerpoint/2010/main" val="2014340193"/>
       </p:ext>
     </p:extLst>
   </p:cSld>
@@ -33847,7 +37029,7 @@
           <p:cNvPr id="2" name="Title 1">
             <a:extLst>
               <a:ext uri="{FF2B5EF4-FFF2-40B4-BE49-F238E27FC236}">
-                <a16:creationId xmlns:a16="http://schemas.microsoft.com/office/drawing/2014/main" id="{E3CD4FA5-0F16-9080-F2C4-2713CDB98D73}"/>
+                <a16:creationId xmlns:a16="http://schemas.microsoft.com/office/drawing/2014/main" id="{286B1922-876E-5121-A1B1-09421CD101B6}"/>
               </a:ext>
             </a:extLst>
           </p:cNvPr>
@@ -33872,7 +37054,7 @@
           <a:p>
             <a:r>
               <a:rPr lang="en-SG" dirty="0"/>
-              <a:t>BACKEND API</a:t>
+              <a:t>DATABASE</a:t>
             </a:r>
           </a:p>
         </p:txBody>
@@ -33882,7 +37064,7 @@
           <p:cNvPr id="3" name="Footer Placeholder 2">
             <a:extLst>
               <a:ext uri="{FF2B5EF4-FFF2-40B4-BE49-F238E27FC236}">
-                <a16:creationId xmlns:a16="http://schemas.microsoft.com/office/drawing/2014/main" id="{87D4288F-EF10-D916-115B-E02EBF709DBE}"/>
+                <a16:creationId xmlns:a16="http://schemas.microsoft.com/office/drawing/2014/main" id="{130300D0-5A97-A007-8822-C75A86BC135D}"/>
               </a:ext>
             </a:extLst>
           </p:cNvPr>
@@ -33922,7 +37104,7 @@
           <p:cNvPr id="4" name="Content Placeholder 3">
             <a:extLst>
               <a:ext uri="{FF2B5EF4-FFF2-40B4-BE49-F238E27FC236}">
-                <a16:creationId xmlns:a16="http://schemas.microsoft.com/office/drawing/2014/main" id="{8EBC3E0A-B721-E75C-D747-71415EBBE5BB}"/>
+                <a16:creationId xmlns:a16="http://schemas.microsoft.com/office/drawing/2014/main" id="{AF3B857A-83E3-2D2A-978B-032EBACA2376}"/>
               </a:ext>
             </a:extLst>
           </p:cNvPr>
@@ -33947,7 +37129,7 @@
           <a:p>
             <a:r>
               <a:rPr lang="en-SG" dirty="0"/>
-              <a:t>The Backend API Service acts as the communication layer between all microservices. It receives requests from the Frontend Dashboard, retrieves sensor data from the database, sends data to the Machine Learning Service for prediction, stores the prediction results, and returns the processed information to the user.</a:t>
+              <a:t>The Database Service stores the imported environmental monitoring dataset, anomaly prediction results, and historical records. The Backend API retrieves data from the database for preprocessing and machine learning analysis, while prediction results are stored for future reference and visualisation. This provides persistent and centralized data storage, enabling efficient data management and historical analysis.</a:t>
             </a:r>
           </a:p>
           <a:p>
@@ -33960,7 +37142,7 @@
           <p:cNvPr id="5" name="Date Placeholder 4">
             <a:extLst>
               <a:ext uri="{FF2B5EF4-FFF2-40B4-BE49-F238E27FC236}">
-                <a16:creationId xmlns:a16="http://schemas.microsoft.com/office/drawing/2014/main" id="{F346DFDA-D36A-641B-1086-9A4690C23E0E}"/>
+                <a16:creationId xmlns:a16="http://schemas.microsoft.com/office/drawing/2014/main" id="{84920A6B-C20E-B038-D917-D179D6C31213}"/>
               </a:ext>
             </a:extLst>
           </p:cNvPr>
@@ -33995,7 +37177,7 @@
                   <a:spcPts val="600"/>
                 </a:spcAft>
               </a:pPr>
-              <a:t>7/27/2026</a:t>
+              <a:t>8/6/2026</a:t>
             </a:fld>
             <a:endParaRPr lang="en-US"/>
           </a:p>
@@ -34006,7 +37188,7 @@
           <p:cNvPr id="6" name="Slide Number Placeholder 5">
             <a:extLst>
               <a:ext uri="{FF2B5EF4-FFF2-40B4-BE49-F238E27FC236}">
-                <a16:creationId xmlns:a16="http://schemas.microsoft.com/office/drawing/2014/main" id="{C127D931-F45C-2EE8-A41C-7C4E0A181684}"/>
+                <a16:creationId xmlns:a16="http://schemas.microsoft.com/office/drawing/2014/main" id="{F5D522DE-ABA7-62B2-AAB9-C272B74D3EC1}"/>
               </a:ext>
             </a:extLst>
           </p:cNvPr>
@@ -34050,7 +37232,7 @@
     </p:spTree>
     <p:extLst>
       <p:ext uri="{BB962C8B-B14F-4D97-AF65-F5344CB8AC3E}">
-        <p14:creationId xmlns:p14="http://schemas.microsoft.com/office/powerpoint/2010/main" val="2127768817"/>
+        <p14:creationId xmlns:p14="http://schemas.microsoft.com/office/powerpoint/2010/main" val="2133928878"/>
       </p:ext>
     </p:extLst>
   </p:cSld>
@@ -34082,7 +37264,7 @@
           <p:cNvPr id="2" name="Title 1">
             <a:extLst>
               <a:ext uri="{FF2B5EF4-FFF2-40B4-BE49-F238E27FC236}">
-                <a16:creationId xmlns:a16="http://schemas.microsoft.com/office/drawing/2014/main" id="{151996FA-5CDB-38EA-C314-20A7D3B73B1E}"/>
+                <a16:creationId xmlns:a16="http://schemas.microsoft.com/office/drawing/2014/main" id="{E3CD4FA5-0F16-9080-F2C4-2713CDB98D73}"/>
               </a:ext>
             </a:extLst>
           </p:cNvPr>
@@ -34107,7 +37289,7 @@
           <a:p>
             <a:r>
               <a:rPr lang="en-SG" dirty="0"/>
-              <a:t>MACHINE LEARNING</a:t>
+              <a:t>BACKEND API</a:t>
             </a:r>
           </a:p>
         </p:txBody>
@@ -34117,7 +37299,7 @@
           <p:cNvPr id="3" name="Footer Placeholder 2">
             <a:extLst>
               <a:ext uri="{FF2B5EF4-FFF2-40B4-BE49-F238E27FC236}">
-                <a16:creationId xmlns:a16="http://schemas.microsoft.com/office/drawing/2014/main" id="{32F2DFD3-85FB-CCD8-8239-D2725E65F67A}"/>
+                <a16:creationId xmlns:a16="http://schemas.microsoft.com/office/drawing/2014/main" id="{87D4288F-EF10-D916-115B-E02EBF709DBE}"/>
               </a:ext>
             </a:extLst>
           </p:cNvPr>
@@ -34157,7 +37339,7 @@
           <p:cNvPr id="4" name="Content Placeholder 3">
             <a:extLst>
               <a:ext uri="{FF2B5EF4-FFF2-40B4-BE49-F238E27FC236}">
-                <a16:creationId xmlns:a16="http://schemas.microsoft.com/office/drawing/2014/main" id="{711FD2D7-80AB-8915-426E-1B7BB86AD5FA}"/>
+                <a16:creationId xmlns:a16="http://schemas.microsoft.com/office/drawing/2014/main" id="{8EBC3E0A-B721-E75C-D747-71415EBBE5BB}"/>
               </a:ext>
             </a:extLst>
           </p:cNvPr>
@@ -34182,7 +37364,7 @@
           <a:p>
             <a:r>
               <a:rPr lang="en-SG" dirty="0"/>
-              <a:t>The Machine Learning Service receives validated sensor data from the Backend API, analyses it using the trained model, and returns prediction results. If an abnormal condition is detected, the Backend API stores the result in the database and triggers the Notification Service to send a Telegram alert.</a:t>
+              <a:t>The Backend API Service acts as the communication layer between all microservices. It receives requests from the Frontend Dashboard, retrieves sensor data from the database, sends data to the Machine Learning Service for prediction, stores the prediction results, and returns the processed information to the user.</a:t>
             </a:r>
           </a:p>
           <a:p>
@@ -34195,7 +37377,7 @@
           <p:cNvPr id="5" name="Date Placeholder 4">
             <a:extLst>
               <a:ext uri="{FF2B5EF4-FFF2-40B4-BE49-F238E27FC236}">
-                <a16:creationId xmlns:a16="http://schemas.microsoft.com/office/drawing/2014/main" id="{8A36F9D2-4C85-2A4E-4F02-F16819F34517}"/>
+                <a16:creationId xmlns:a16="http://schemas.microsoft.com/office/drawing/2014/main" id="{F346DFDA-D36A-641B-1086-9A4690C23E0E}"/>
               </a:ext>
             </a:extLst>
           </p:cNvPr>
@@ -34230,7 +37412,7 @@
                   <a:spcPts val="600"/>
                 </a:spcAft>
               </a:pPr>
-              <a:t>7/27/2026</a:t>
+              <a:t>8/6/2026</a:t>
             </a:fld>
             <a:endParaRPr lang="en-US"/>
           </a:p>
@@ -34241,7 +37423,7 @@
           <p:cNvPr id="6" name="Slide Number Placeholder 5">
             <a:extLst>
               <a:ext uri="{FF2B5EF4-FFF2-40B4-BE49-F238E27FC236}">
-                <a16:creationId xmlns:a16="http://schemas.microsoft.com/office/drawing/2014/main" id="{F89C23D6-8443-978E-F5FF-276AD0A7C93F}"/>
+                <a16:creationId xmlns:a16="http://schemas.microsoft.com/office/drawing/2014/main" id="{C127D931-F45C-2EE8-A41C-7C4E0A181684}"/>
               </a:ext>
             </a:extLst>
           </p:cNvPr>
@@ -34285,7 +37467,7 @@
     </p:spTree>
     <p:extLst>
       <p:ext uri="{BB962C8B-B14F-4D97-AF65-F5344CB8AC3E}">
-        <p14:creationId xmlns:p14="http://schemas.microsoft.com/office/powerpoint/2010/main" val="308232602"/>
+        <p14:creationId xmlns:p14="http://schemas.microsoft.com/office/powerpoint/2010/main" val="2127768817"/>
       </p:ext>
     </p:extLst>
   </p:cSld>
@@ -34317,7 +37499,7 @@
           <p:cNvPr id="2" name="Title 1">
             <a:extLst>
               <a:ext uri="{FF2B5EF4-FFF2-40B4-BE49-F238E27FC236}">
-                <a16:creationId xmlns:a16="http://schemas.microsoft.com/office/drawing/2014/main" id="{B25E0C94-20FB-C969-6C19-69419842B4E4}"/>
+                <a16:creationId xmlns:a16="http://schemas.microsoft.com/office/drawing/2014/main" id="{151996FA-5CDB-38EA-C314-20A7D3B73B1E}"/>
               </a:ext>
             </a:extLst>
           </p:cNvPr>
@@ -34342,7 +37524,7 @@
           <a:p>
             <a:r>
               <a:rPr lang="en-SG" dirty="0"/>
-              <a:t>NOTIFICATION SERVICE</a:t>
+              <a:t>MACHINE LEARNING</a:t>
             </a:r>
           </a:p>
         </p:txBody>
@@ -34352,7 +37534,7 @@
           <p:cNvPr id="3" name="Footer Placeholder 2">
             <a:extLst>
               <a:ext uri="{FF2B5EF4-FFF2-40B4-BE49-F238E27FC236}">
-                <a16:creationId xmlns:a16="http://schemas.microsoft.com/office/drawing/2014/main" id="{EB95D6F0-E4EC-52B6-2932-C1E90A398A61}"/>
+                <a16:creationId xmlns:a16="http://schemas.microsoft.com/office/drawing/2014/main" id="{32F2DFD3-85FB-CCD8-8239-D2725E65F67A}"/>
               </a:ext>
             </a:extLst>
           </p:cNvPr>
@@ -34392,7 +37574,7 @@
           <p:cNvPr id="4" name="Content Placeholder 3">
             <a:extLst>
               <a:ext uri="{FF2B5EF4-FFF2-40B4-BE49-F238E27FC236}">
-                <a16:creationId xmlns:a16="http://schemas.microsoft.com/office/drawing/2014/main" id="{5D1878C6-6400-093D-A46A-E042384F9F0D}"/>
+                <a16:creationId xmlns:a16="http://schemas.microsoft.com/office/drawing/2014/main" id="{711FD2D7-80AB-8915-426E-1B7BB86AD5FA}"/>
               </a:ext>
             </a:extLst>
           </p:cNvPr>
@@ -34417,9 +37599,12 @@
           <a:p>
             <a:r>
               <a:rPr lang="en-SG" dirty="0"/>
-              <a:t>The Notification Service monitors the AI prediction results and checks for abnormal environmental conditions. When a sensor reading exceeds the predefined threshold, it automatically sends an alert to users through a Telegram bot. This allows users to receive instant notifications on their phones and respond quickly. As a separate microservice, it is also easy to maintain, update, and scale independently.</a:t>
+              <a:t>The Machine Learning Service receives validated sensor data from the Backend API, analyses it using the trained model, and returns prediction results. If an abnormal condition is detected, the Backend API stores the result in the database and triggers the Notification Service to send a Telegram alert.</a:t>
             </a:r>
           </a:p>
+          <a:p>
+            <a:endParaRPr lang="en-SG" dirty="0"/>
+          </a:p>
         </p:txBody>
       </p:sp>
       <p:sp>
@@ -34427,7 +37612,7 @@
           <p:cNvPr id="5" name="Date Placeholder 4">
             <a:extLst>
               <a:ext uri="{FF2B5EF4-FFF2-40B4-BE49-F238E27FC236}">
-                <a16:creationId xmlns:a16="http://schemas.microsoft.com/office/drawing/2014/main" id="{CB2B7116-E05D-3935-AC39-ABEAF6B2F85D}"/>
+                <a16:creationId xmlns:a16="http://schemas.microsoft.com/office/drawing/2014/main" id="{8A36F9D2-4C85-2A4E-4F02-F16819F34517}"/>
               </a:ext>
             </a:extLst>
           </p:cNvPr>
@@ -34462,7 +37647,7 @@
                   <a:spcPts val="600"/>
                 </a:spcAft>
               </a:pPr>
-              <a:t>7/27/2026</a:t>
+              <a:t>8/6/2026</a:t>
             </a:fld>
             <a:endParaRPr lang="en-US"/>
           </a:p>
@@ -34473,7 +37658,7 @@
           <p:cNvPr id="6" name="Slide Number Placeholder 5">
             <a:extLst>
               <a:ext uri="{FF2B5EF4-FFF2-40B4-BE49-F238E27FC236}">
-                <a16:creationId xmlns:a16="http://schemas.microsoft.com/office/drawing/2014/main" id="{0AEC6833-AAF0-F134-A6A8-387E8CCD7F6F}"/>
+                <a16:creationId xmlns:a16="http://schemas.microsoft.com/office/drawing/2014/main" id="{F89C23D6-8443-978E-F5FF-276AD0A7C93F}"/>
               </a:ext>
             </a:extLst>
           </p:cNvPr>
@@ -34517,7 +37702,7 @@
     </p:spTree>
     <p:extLst>
       <p:ext uri="{BB962C8B-B14F-4D97-AF65-F5344CB8AC3E}">
-        <p14:creationId xmlns:p14="http://schemas.microsoft.com/office/powerpoint/2010/main" val="3055457452"/>
+        <p14:creationId xmlns:p14="http://schemas.microsoft.com/office/powerpoint/2010/main" val="308232602"/>
       </p:ext>
     </p:extLst>
   </p:cSld>
@@ -34549,7 +37734,7 @@
           <p:cNvPr id="2" name="Title 1">
             <a:extLst>
               <a:ext uri="{FF2B5EF4-FFF2-40B4-BE49-F238E27FC236}">
-                <a16:creationId xmlns:a16="http://schemas.microsoft.com/office/drawing/2014/main" id="{5C971468-309A-F249-8785-022D994B40F8}"/>
+                <a16:creationId xmlns:a16="http://schemas.microsoft.com/office/drawing/2014/main" id="{B25E0C94-20FB-C969-6C19-69419842B4E4}"/>
               </a:ext>
             </a:extLst>
           </p:cNvPr>
@@ -34574,7 +37759,7 @@
           <a:p>
             <a:r>
               <a:rPr lang="en-SG" dirty="0"/>
-              <a:t>FRONTEND DASHBOARD</a:t>
+              <a:t>NOTIFICATION SERVICE</a:t>
             </a:r>
           </a:p>
         </p:txBody>
@@ -34584,7 +37769,7 @@
           <p:cNvPr id="3" name="Footer Placeholder 2">
             <a:extLst>
               <a:ext uri="{FF2B5EF4-FFF2-40B4-BE49-F238E27FC236}">
-                <a16:creationId xmlns:a16="http://schemas.microsoft.com/office/drawing/2014/main" id="{67AF8A32-848F-6580-5D1D-863E7ACC1449}"/>
+                <a16:creationId xmlns:a16="http://schemas.microsoft.com/office/drawing/2014/main" id="{EB95D6F0-E4EC-52B6-2932-C1E90A398A61}"/>
               </a:ext>
             </a:extLst>
           </p:cNvPr>
@@ -34624,7 +37809,7 @@
           <p:cNvPr id="4" name="Content Placeholder 3">
             <a:extLst>
               <a:ext uri="{FF2B5EF4-FFF2-40B4-BE49-F238E27FC236}">
-                <a16:creationId xmlns:a16="http://schemas.microsoft.com/office/drawing/2014/main" id="{48189E54-8A42-FC2B-2617-0003B6CC127C}"/>
+                <a16:creationId xmlns:a16="http://schemas.microsoft.com/office/drawing/2014/main" id="{5D1878C6-6400-093D-A46A-E042384F9F0D}"/>
               </a:ext>
             </a:extLst>
           </p:cNvPr>
@@ -34649,12 +37834,9 @@
           <a:p>
             <a:r>
               <a:rPr lang="en-SG" dirty="0"/>
-              <a:t>The Frontend Dashboard provides a user-friendly interface for monitoring environmental conditions. It displays sensor data, anomaly detection results, and historical trends by sending REST API requests to the Backend API. Users can easily view environmental status and receive alerts without directly interacting with the database.</a:t>
+              <a:t>The Notification Service monitors the AI prediction results and checks for abnormal environmental conditions. When a sensor reading exceeds the predefined threshold, it automatically sends an alert to users through a Telegram bot. This allows users to receive instant notifications on their phones and respond quickly. As a separate microservice, it is also easy to maintain, update, and scale independently.</a:t>
             </a:r>
           </a:p>
-          <a:p>
-            <a:endParaRPr lang="en-SG" dirty="0"/>
-          </a:p>
         </p:txBody>
       </p:sp>
       <p:sp>
@@ -34662,7 +37844,7 @@
           <p:cNvPr id="5" name="Date Placeholder 4">
             <a:extLst>
               <a:ext uri="{FF2B5EF4-FFF2-40B4-BE49-F238E27FC236}">
-                <a16:creationId xmlns:a16="http://schemas.microsoft.com/office/drawing/2014/main" id="{38F89DBF-AAD8-E49E-2244-336A204599CC}"/>
+                <a16:creationId xmlns:a16="http://schemas.microsoft.com/office/drawing/2014/main" id="{CB2B7116-E05D-3935-AC39-ABEAF6B2F85D}"/>
               </a:ext>
             </a:extLst>
           </p:cNvPr>
@@ -34697,7 +37879,7 @@
                   <a:spcPts val="600"/>
                 </a:spcAft>
               </a:pPr>
-              <a:t>7/27/2026</a:t>
+              <a:t>8/6/2026</a:t>
             </a:fld>
             <a:endParaRPr lang="en-US"/>
           </a:p>
@@ -34708,7 +37890,7 @@
           <p:cNvPr id="6" name="Slide Number Placeholder 5">
             <a:extLst>
               <a:ext uri="{FF2B5EF4-FFF2-40B4-BE49-F238E27FC236}">
-                <a16:creationId xmlns:a16="http://schemas.microsoft.com/office/drawing/2014/main" id="{FFE04B86-3E7C-BF8A-4395-0323C52E4558}"/>
+                <a16:creationId xmlns:a16="http://schemas.microsoft.com/office/drawing/2014/main" id="{0AEC6833-AAF0-F134-A6A8-387E8CCD7F6F}"/>
               </a:ext>
             </a:extLst>
           </p:cNvPr>
@@ -34752,7 +37934,7 @@
     </p:spTree>
     <p:extLst>
       <p:ext uri="{BB962C8B-B14F-4D97-AF65-F5344CB8AC3E}">
-        <p14:creationId xmlns:p14="http://schemas.microsoft.com/office/powerpoint/2010/main" val="1382694037"/>
+        <p14:creationId xmlns:p14="http://schemas.microsoft.com/office/powerpoint/2010/main" val="3055457452"/>
       </p:ext>
     </p:extLst>
   </p:cSld>
@@ -34784,7 +37966,7 @@
           <p:cNvPr id="2" name="Title 1">
             <a:extLst>
               <a:ext uri="{FF2B5EF4-FFF2-40B4-BE49-F238E27FC236}">
-                <a16:creationId xmlns:a16="http://schemas.microsoft.com/office/drawing/2014/main" id="{DEFF6106-7A0A-48DF-A54A-1203136FE872}"/>
+                <a16:creationId xmlns:a16="http://schemas.microsoft.com/office/drawing/2014/main" id="{5C971468-309A-F249-8785-022D994B40F8}"/>
               </a:ext>
             </a:extLst>
           </p:cNvPr>
@@ -34792,17 +37974,24 @@
             <a:spLocks noGrp="1"/>
           </p:cNvSpPr>
           <p:nvPr>
-            <p:ph type="ctrTitle"/>
+            <p:ph type="title"/>
           </p:nvPr>
         </p:nvSpPr>
-        <p:spPr/>
-        <p:txBody>
-          <a:bodyPr/>
+        <p:spPr>
+          <a:xfrm>
+            <a:off x="1255032" y="862335"/>
+            <a:ext cx="4389120" cy="5120640"/>
+          </a:xfrm>
+        </p:spPr>
+        <p:txBody>
+          <a:bodyPr anchor="ctr">
+            <a:normAutofit/>
+          </a:bodyPr>
           <a:lstStyle/>
           <a:p>
             <a:r>
               <a:rPr lang="en-SG" dirty="0"/>
-              <a:t>Docker</a:t>
+              <a:t>FRONTEND DASHBOARD</a:t>
             </a:r>
           </a:p>
         </p:txBody>
@@ -34812,7 +38001,7 @@
           <p:cNvPr id="3" name="Footer Placeholder 2">
             <a:extLst>
               <a:ext uri="{FF2B5EF4-FFF2-40B4-BE49-F238E27FC236}">
-                <a16:creationId xmlns:a16="http://schemas.microsoft.com/office/drawing/2014/main" id="{B2BCAD1A-CFBC-A349-DD67-7349B93D3720}"/>
+                <a16:creationId xmlns:a16="http://schemas.microsoft.com/office/drawing/2014/main" id="{67AF8A32-848F-6580-5D1D-863E7ACC1449}"/>
               </a:ext>
             </a:extLst>
           </p:cNvPr>
@@ -34823,25 +38012,74 @@
             <p:ph type="ftr" sz="quarter" idx="11"/>
           </p:nvPr>
         </p:nvSpPr>
-        <p:spPr/>
-        <p:txBody>
-          <a:bodyPr/>
+        <p:spPr>
+          <a:xfrm rot="16200000">
+            <a:off x="-1005840" y="1525384"/>
+            <a:ext cx="2805405" cy="365125"/>
+          </a:xfrm>
+        </p:spPr>
+        <p:txBody>
+          <a:bodyPr anchor="ctr">
+            <a:normAutofit/>
+          </a:bodyPr>
           <a:lstStyle/>
           <a:p>
+            <a:pPr>
+              <a:spcAft>
+                <a:spcPts val="600"/>
+              </a:spcAft>
+            </a:pPr>
             <a:r>
               <a:rPr lang="en-US"/>
               <a:t>SAMPLE FOOTER TEXT</a:t>
             </a:r>
-            <a:endParaRPr lang="en-US" dirty="0"/>
-          </a:p>
-        </p:txBody>
-      </p:sp>
-      <p:sp>
-        <p:nvSpPr>
-          <p:cNvPr id="4" name="Date Placeholder 3">
-            <a:extLst>
-              <a:ext uri="{FF2B5EF4-FFF2-40B4-BE49-F238E27FC236}">
-                <a16:creationId xmlns:a16="http://schemas.microsoft.com/office/drawing/2014/main" id="{3BA4730D-F0FF-B752-323B-BE0157CA02F8}"/>
+          </a:p>
+        </p:txBody>
+      </p:sp>
+      <p:sp>
+        <p:nvSpPr>
+          <p:cNvPr id="4" name="Content Placeholder 3">
+            <a:extLst>
+              <a:ext uri="{FF2B5EF4-FFF2-40B4-BE49-F238E27FC236}">
+                <a16:creationId xmlns:a16="http://schemas.microsoft.com/office/drawing/2014/main" id="{48189E54-8A42-FC2B-2617-0003B6CC127C}"/>
+              </a:ext>
+            </a:extLst>
+          </p:cNvPr>
+          <p:cNvSpPr>
+            <a:spLocks noGrp="1"/>
+          </p:cNvSpPr>
+          <p:nvPr>
+            <p:ph sz="quarter" idx="13"/>
+          </p:nvPr>
+        </p:nvSpPr>
+        <p:spPr>
+          <a:xfrm>
+            <a:off x="6547100" y="816615"/>
+            <a:ext cx="4389120" cy="5212080"/>
+          </a:xfrm>
+        </p:spPr>
+        <p:txBody>
+          <a:bodyPr anchor="ctr">
+            <a:normAutofit/>
+          </a:bodyPr>
+          <a:lstStyle/>
+          <a:p>
+            <a:r>
+              <a:rPr lang="en-SG" dirty="0"/>
+              <a:t>The Frontend Dashboard provides a user-friendly interface for monitoring environmental conditions. It displays sensor data, anomaly detection results, and historical trends by sending REST API requests to the Backend API. Users can easily view environmental status and receive alerts without directly interacting with the database.</a:t>
+            </a:r>
+          </a:p>
+          <a:p>
+            <a:endParaRPr lang="en-SG" dirty="0"/>
+          </a:p>
+        </p:txBody>
+      </p:sp>
+      <p:sp>
+        <p:nvSpPr>
+          <p:cNvPr id="5" name="Date Placeholder 4">
+            <a:extLst>
+              <a:ext uri="{FF2B5EF4-FFF2-40B4-BE49-F238E27FC236}">
+                <a16:creationId xmlns:a16="http://schemas.microsoft.com/office/drawing/2014/main" id="{38F89DBF-AAD8-E49E-2244-336A204599CC}"/>
               </a:ext>
             </a:extLst>
           </p:cNvPr>
@@ -34852,25 +38090,42 @@
             <p:ph type="dt" sz="half" idx="10"/>
           </p:nvPr>
         </p:nvSpPr>
-        <p:spPr/>
-        <p:txBody>
-          <a:bodyPr/>
+        <p:spPr>
+          <a:xfrm rot="5400000">
+            <a:off x="10040831" y="4206240"/>
+            <a:ext cx="3494314" cy="365125"/>
+          </a:xfrm>
+        </p:spPr>
+        <p:txBody>
+          <a:bodyPr anchor="ctr">
+            <a:normAutofit/>
+          </a:bodyPr>
           <a:lstStyle/>
           <a:p>
-            <a:fld id="{010D0AB2-23BC-3043-AC30-5928E542C0CE}" type="datetime1">
+            <a:pPr>
+              <a:spcAft>
+                <a:spcPts val="600"/>
+              </a:spcAft>
+            </a:pPr>
+            <a:fld id="{927C0DEB-4AE1-EA4D-826D-E3C22802B942}" type="datetime1">
               <a:rPr lang="en-US" smtClean="0"/>
-              <a:t>7/27/2026</a:t>
+              <a:pPr>
+                <a:spcAft>
+                  <a:spcPts val="600"/>
+                </a:spcAft>
+              </a:pPr>
+              <a:t>8/6/2026</a:t>
             </a:fld>
-            <a:endParaRPr lang="en-US" dirty="0"/>
-          </a:p>
-        </p:txBody>
-      </p:sp>
-      <p:sp>
-        <p:nvSpPr>
-          <p:cNvPr id="5" name="Slide Number Placeholder 4">
-            <a:extLst>
-              <a:ext uri="{FF2B5EF4-FFF2-40B4-BE49-F238E27FC236}">
-                <a16:creationId xmlns:a16="http://schemas.microsoft.com/office/drawing/2014/main" id="{49E7DB59-C4F8-CDE1-61A4-49E42A74492A}"/>
+            <a:endParaRPr lang="en-US"/>
+          </a:p>
+        </p:txBody>
+      </p:sp>
+      <p:sp>
+        <p:nvSpPr>
+          <p:cNvPr id="6" name="Slide Number Placeholder 5">
+            <a:extLst>
+              <a:ext uri="{FF2B5EF4-FFF2-40B4-BE49-F238E27FC236}">
+                <a16:creationId xmlns:a16="http://schemas.microsoft.com/office/drawing/2014/main" id="{FFE04B86-3E7C-BF8A-4395-0323C52E4558}"/>
               </a:ext>
             </a:extLst>
           </p:cNvPr>
@@ -34881,24 +38136,40 @@
             <p:ph type="sldNum" sz="quarter" idx="12"/>
           </p:nvPr>
         </p:nvSpPr>
-        <p:spPr/>
-        <p:txBody>
-          <a:bodyPr/>
+        <p:spPr>
+          <a:xfrm>
+            <a:off x="11573385" y="6229552"/>
+            <a:ext cx="429207" cy="365125"/>
+          </a:xfrm>
+        </p:spPr>
+        <p:txBody>
+          <a:bodyPr anchor="ctr">
+            <a:normAutofit/>
+          </a:bodyPr>
           <a:lstStyle/>
           <a:p>
+            <a:pPr>
+              <a:spcAft>
+                <a:spcPts val="600"/>
+              </a:spcAft>
+            </a:pPr>
             <a:fld id="{CC057153-B650-4DEB-B370-79DDCFDCE934}" type="slidenum">
               <a:rPr lang="en-US" smtClean="0"/>
-              <a:pPr/>
+              <a:pPr>
+                <a:spcAft>
+                  <a:spcPts val="600"/>
+                </a:spcAft>
+              </a:pPr>
               <a:t>15</a:t>
             </a:fld>
-            <a:endParaRPr lang="en-US" dirty="0"/>
+            <a:endParaRPr lang="en-US"/>
           </a:p>
         </p:txBody>
       </p:sp>
     </p:spTree>
     <p:extLst>
       <p:ext uri="{BB962C8B-B14F-4D97-AF65-F5344CB8AC3E}">
-        <p14:creationId xmlns:p14="http://schemas.microsoft.com/office/powerpoint/2010/main" val="1662138044"/>
+        <p14:creationId xmlns:p14="http://schemas.microsoft.com/office/powerpoint/2010/main" val="1382694037"/>
       </p:ext>
     </p:extLst>
   </p:cSld>
@@ -34930,7 +38201,7 @@
           <p:cNvPr id="2" name="Title 1">
             <a:extLst>
               <a:ext uri="{FF2B5EF4-FFF2-40B4-BE49-F238E27FC236}">
-                <a16:creationId xmlns:a16="http://schemas.microsoft.com/office/drawing/2014/main" id="{F27EEF88-486E-52FF-3AF3-C50D322E6819}"/>
+                <a16:creationId xmlns:a16="http://schemas.microsoft.com/office/drawing/2014/main" id="{DF9B2810-2AEF-4E84-FF4A-44FD15DB251F}"/>
               </a:ext>
             </a:extLst>
           </p:cNvPr>
@@ -34938,7 +38209,7 @@
             <a:spLocks noGrp="1"/>
           </p:cNvSpPr>
           <p:nvPr>
-            <p:ph type="ctrTitle"/>
+            <p:ph type="title"/>
           </p:nvPr>
         </p:nvSpPr>
         <p:spPr/>
@@ -34948,7 +38219,7 @@
           <a:p>
             <a:r>
               <a:rPr lang="en-SG" dirty="0"/>
-              <a:t>KUBERNATES</a:t>
+              <a:t>DOCKER</a:t>
             </a:r>
           </a:p>
         </p:txBody>
@@ -34958,7 +38229,7 @@
           <p:cNvPr id="3" name="Footer Placeholder 2">
             <a:extLst>
               <a:ext uri="{FF2B5EF4-FFF2-40B4-BE49-F238E27FC236}">
-                <a16:creationId xmlns:a16="http://schemas.microsoft.com/office/drawing/2014/main" id="{D2F62700-C8BC-371F-E4A0-146018195E63}"/>
+                <a16:creationId xmlns:a16="http://schemas.microsoft.com/office/drawing/2014/main" id="{D48B66FE-A7B1-9E85-D36A-CC8995D05EF8}"/>
               </a:ext>
             </a:extLst>
           </p:cNvPr>
@@ -34984,10 +38255,35 @@
       </p:sp>
       <p:sp>
         <p:nvSpPr>
-          <p:cNvPr id="4" name="Date Placeholder 3">
-            <a:extLst>
-              <a:ext uri="{FF2B5EF4-FFF2-40B4-BE49-F238E27FC236}">
-                <a16:creationId xmlns:a16="http://schemas.microsoft.com/office/drawing/2014/main" id="{97386FD1-37AC-99FB-025F-EC72261EF737}"/>
+          <p:cNvPr id="4" name="Content Placeholder 3">
+            <a:extLst>
+              <a:ext uri="{FF2B5EF4-FFF2-40B4-BE49-F238E27FC236}">
+                <a16:creationId xmlns:a16="http://schemas.microsoft.com/office/drawing/2014/main" id="{F11611CC-2CF8-DBE0-F56C-CF37F7618842}"/>
+              </a:ext>
+            </a:extLst>
+          </p:cNvPr>
+          <p:cNvSpPr>
+            <a:spLocks noGrp="1"/>
+          </p:cNvSpPr>
+          <p:nvPr>
+            <p:ph sz="quarter" idx="13"/>
+          </p:nvPr>
+        </p:nvSpPr>
+        <p:spPr/>
+        <p:txBody>
+          <a:bodyPr/>
+          <a:lstStyle/>
+          <a:p>
+            <a:endParaRPr lang="en-SG"/>
+          </a:p>
+        </p:txBody>
+      </p:sp>
+      <p:sp>
+        <p:nvSpPr>
+          <p:cNvPr id="5" name="Date Placeholder 4">
+            <a:extLst>
+              <a:ext uri="{FF2B5EF4-FFF2-40B4-BE49-F238E27FC236}">
+                <a16:creationId xmlns:a16="http://schemas.microsoft.com/office/drawing/2014/main" id="{343AE12E-185A-DA37-7612-B8E738CD5160}"/>
               </a:ext>
             </a:extLst>
           </p:cNvPr>
@@ -35003,9 +38299,9 @@
           <a:bodyPr/>
           <a:lstStyle/>
           <a:p>
-            <a:fld id="{010D0AB2-23BC-3043-AC30-5928E542C0CE}" type="datetime1">
+            <a:fld id="{927C0DEB-4AE1-EA4D-826D-E3C22802B942}" type="datetime1">
               <a:rPr lang="en-US" smtClean="0"/>
-              <a:t>7/27/2026</a:t>
+              <a:t>8/6/2026</a:t>
             </a:fld>
             <a:endParaRPr lang="en-US" dirty="0"/>
           </a:p>
@@ -35013,10 +38309,10 @@
       </p:sp>
       <p:sp>
         <p:nvSpPr>
-          <p:cNvPr id="5" name="Slide Number Placeholder 4">
-            <a:extLst>
-              <a:ext uri="{FF2B5EF4-FFF2-40B4-BE49-F238E27FC236}">
-                <a16:creationId xmlns:a16="http://schemas.microsoft.com/office/drawing/2014/main" id="{D08F73AA-8FFF-4571-C0CF-0F21F722B187}"/>
+          <p:cNvPr id="6" name="Slide Number Placeholder 5">
+            <a:extLst>
+              <a:ext uri="{FF2B5EF4-FFF2-40B4-BE49-F238E27FC236}">
+                <a16:creationId xmlns:a16="http://schemas.microsoft.com/office/drawing/2014/main" id="{CC695A79-4450-29C3-1948-3B4ADA45F2FA}"/>
               </a:ext>
             </a:extLst>
           </p:cNvPr>
@@ -35044,7 +38340,7 @@
     </p:spTree>
     <p:extLst>
       <p:ext uri="{BB962C8B-B14F-4D97-AF65-F5344CB8AC3E}">
-        <p14:creationId xmlns:p14="http://schemas.microsoft.com/office/powerpoint/2010/main" val="2037361668"/>
+        <p14:creationId xmlns:p14="http://schemas.microsoft.com/office/powerpoint/2010/main" val="11241667"/>
       </p:ext>
     </p:extLst>
   </p:cSld>
@@ -35076,7 +38372,7 @@
           <p:cNvPr id="2" name="Title 1">
             <a:extLst>
               <a:ext uri="{FF2B5EF4-FFF2-40B4-BE49-F238E27FC236}">
-                <a16:creationId xmlns:a16="http://schemas.microsoft.com/office/drawing/2014/main" id="{EE58C531-7A30-5D0B-55FA-6704B085156E}"/>
+                <a16:creationId xmlns:a16="http://schemas.microsoft.com/office/drawing/2014/main" id="{D9DE965D-4090-473B-3ACB-1FF880252D53}"/>
               </a:ext>
             </a:extLst>
           </p:cNvPr>
@@ -35084,7 +38380,7 @@
             <a:spLocks noGrp="1"/>
           </p:cNvSpPr>
           <p:nvPr>
-            <p:ph type="ctrTitle"/>
+            <p:ph type="title"/>
           </p:nvPr>
         </p:nvSpPr>
         <p:spPr/>
@@ -35094,7 +38390,7 @@
           <a:p>
             <a:r>
               <a:rPr lang="en-SG" dirty="0"/>
-              <a:t>ISSUES AND LIMITATIONS</a:t>
+              <a:t>KUBERNATES</a:t>
             </a:r>
           </a:p>
         </p:txBody>
@@ -35104,7 +38400,7 @@
           <p:cNvPr id="3" name="Footer Placeholder 2">
             <a:extLst>
               <a:ext uri="{FF2B5EF4-FFF2-40B4-BE49-F238E27FC236}">
-                <a16:creationId xmlns:a16="http://schemas.microsoft.com/office/drawing/2014/main" id="{935A7A2C-0E66-E74E-6AAA-46749892E93F}"/>
+                <a16:creationId xmlns:a16="http://schemas.microsoft.com/office/drawing/2014/main" id="{CBFDBF2C-A9B0-8AA4-AC8D-62E91AFDA74F}"/>
               </a:ext>
             </a:extLst>
           </p:cNvPr>
@@ -35130,10 +38426,35 @@
       </p:sp>
       <p:sp>
         <p:nvSpPr>
-          <p:cNvPr id="4" name="Date Placeholder 3">
-            <a:extLst>
-              <a:ext uri="{FF2B5EF4-FFF2-40B4-BE49-F238E27FC236}">
-                <a16:creationId xmlns:a16="http://schemas.microsoft.com/office/drawing/2014/main" id="{406F36CD-8CAF-F2A3-0961-D2C12A048190}"/>
+          <p:cNvPr id="4" name="Content Placeholder 3">
+            <a:extLst>
+              <a:ext uri="{FF2B5EF4-FFF2-40B4-BE49-F238E27FC236}">
+                <a16:creationId xmlns:a16="http://schemas.microsoft.com/office/drawing/2014/main" id="{6AD87317-5933-0CAA-F79E-2D034BEDB7F1}"/>
+              </a:ext>
+            </a:extLst>
+          </p:cNvPr>
+          <p:cNvSpPr>
+            <a:spLocks noGrp="1"/>
+          </p:cNvSpPr>
+          <p:nvPr>
+            <p:ph sz="quarter" idx="13"/>
+          </p:nvPr>
+        </p:nvSpPr>
+        <p:spPr/>
+        <p:txBody>
+          <a:bodyPr/>
+          <a:lstStyle/>
+          <a:p>
+            <a:endParaRPr lang="en-SG"/>
+          </a:p>
+        </p:txBody>
+      </p:sp>
+      <p:sp>
+        <p:nvSpPr>
+          <p:cNvPr id="5" name="Date Placeholder 4">
+            <a:extLst>
+              <a:ext uri="{FF2B5EF4-FFF2-40B4-BE49-F238E27FC236}">
+                <a16:creationId xmlns:a16="http://schemas.microsoft.com/office/drawing/2014/main" id="{D7BA2CB4-5E1A-47C5-AF47-1670ED5E2786}"/>
               </a:ext>
             </a:extLst>
           </p:cNvPr>
@@ -35149,9 +38470,9 @@
           <a:bodyPr/>
           <a:lstStyle/>
           <a:p>
-            <a:fld id="{010D0AB2-23BC-3043-AC30-5928E542C0CE}" type="datetime1">
+            <a:fld id="{927C0DEB-4AE1-EA4D-826D-E3C22802B942}" type="datetime1">
               <a:rPr lang="en-US" smtClean="0"/>
-              <a:t>7/27/2026</a:t>
+              <a:t>8/6/2026</a:t>
             </a:fld>
             <a:endParaRPr lang="en-US" dirty="0"/>
           </a:p>
@@ -35159,10 +38480,10 @@
       </p:sp>
       <p:sp>
         <p:nvSpPr>
-          <p:cNvPr id="5" name="Slide Number Placeholder 4">
-            <a:extLst>
-              <a:ext uri="{FF2B5EF4-FFF2-40B4-BE49-F238E27FC236}">
-                <a16:creationId xmlns:a16="http://schemas.microsoft.com/office/drawing/2014/main" id="{C01ACBED-585F-43F1-E030-A9F82EDE5DEB}"/>
+          <p:cNvPr id="6" name="Slide Number Placeholder 5">
+            <a:extLst>
+              <a:ext uri="{FF2B5EF4-FFF2-40B4-BE49-F238E27FC236}">
+                <a16:creationId xmlns:a16="http://schemas.microsoft.com/office/drawing/2014/main" id="{7C657453-E11C-0613-6818-E8E2759F04E5}"/>
               </a:ext>
             </a:extLst>
           </p:cNvPr>
@@ -35190,7 +38511,7 @@
     </p:spTree>
     <p:extLst>
       <p:ext uri="{BB962C8B-B14F-4D97-AF65-F5344CB8AC3E}">
-        <p14:creationId xmlns:p14="http://schemas.microsoft.com/office/powerpoint/2010/main" val="3783924705"/>
+        <p14:creationId xmlns:p14="http://schemas.microsoft.com/office/powerpoint/2010/main" val="1329182984"/>
       </p:ext>
     </p:extLst>
   </p:cSld>
@@ -35201,6 +38522,268 @@
 </file>
 
 <file path=ppt/slides/slide18.xml><?xml version="1.0" encoding="utf-8"?>
+<p:sld xmlns:a="http://schemas.openxmlformats.org/drawingml/2006/main" xmlns:r="http://schemas.openxmlformats.org/officeDocument/2006/relationships" xmlns:p="http://schemas.openxmlformats.org/presentationml/2006/main">
+  <p:cSld>
+    <p:spTree>
+      <p:nvGrpSpPr>
+        <p:cNvPr id="1" name=""/>
+        <p:cNvGrpSpPr/>
+        <p:nvPr/>
+      </p:nvGrpSpPr>
+      <p:grpSpPr>
+        <a:xfrm>
+          <a:off x="0" y="0"/>
+          <a:ext cx="0" cy="0"/>
+          <a:chOff x="0" y="0"/>
+          <a:chExt cx="0" cy="0"/>
+        </a:xfrm>
+      </p:grpSpPr>
+      <p:sp>
+        <p:nvSpPr>
+          <p:cNvPr id="2" name="Title 1">
+            <a:extLst>
+              <a:ext uri="{FF2B5EF4-FFF2-40B4-BE49-F238E27FC236}">
+                <a16:creationId xmlns:a16="http://schemas.microsoft.com/office/drawing/2014/main" id="{FD113123-D6D5-2118-6D2A-D4FAB6B67135}"/>
+              </a:ext>
+            </a:extLst>
+          </p:cNvPr>
+          <p:cNvSpPr>
+            <a:spLocks noGrp="1"/>
+          </p:cNvSpPr>
+          <p:nvPr>
+            <p:ph type="title"/>
+          </p:nvPr>
+        </p:nvSpPr>
+        <p:spPr>
+          <a:xfrm>
+            <a:off x="3209388" y="786385"/>
+            <a:ext cx="7772400" cy="914400"/>
+          </a:xfrm>
+        </p:spPr>
+        <p:txBody>
+          <a:bodyPr anchor="b">
+            <a:normAutofit/>
+          </a:bodyPr>
+          <a:lstStyle/>
+          <a:p>
+            <a:r>
+              <a:rPr lang="en-SG" dirty="0"/>
+              <a:t>ISSUES AND LIMITATIONS</a:t>
+            </a:r>
+          </a:p>
+        </p:txBody>
+      </p:sp>
+      <p:sp>
+        <p:nvSpPr>
+          <p:cNvPr id="3" name="Footer Placeholder 2">
+            <a:extLst>
+              <a:ext uri="{FF2B5EF4-FFF2-40B4-BE49-F238E27FC236}">
+                <a16:creationId xmlns:a16="http://schemas.microsoft.com/office/drawing/2014/main" id="{0CF78CDB-3E14-1E16-5568-ECB80185EBC9}"/>
+              </a:ext>
+            </a:extLst>
+          </p:cNvPr>
+          <p:cNvSpPr>
+            <a:spLocks noGrp="1"/>
+          </p:cNvSpPr>
+          <p:nvPr>
+            <p:ph type="ftr" sz="quarter" idx="16"/>
+          </p:nvPr>
+        </p:nvSpPr>
+        <p:spPr>
+          <a:xfrm rot="16200000">
+            <a:off x="-1005840" y="1525384"/>
+            <a:ext cx="2805405" cy="365125"/>
+          </a:xfrm>
+        </p:spPr>
+        <p:txBody>
+          <a:bodyPr anchor="ctr">
+            <a:normAutofit/>
+          </a:bodyPr>
+          <a:lstStyle/>
+          <a:p>
+            <a:pPr>
+              <a:spcAft>
+                <a:spcPts val="600"/>
+              </a:spcAft>
+            </a:pPr>
+            <a:r>
+              <a:rPr lang="en-US"/>
+              <a:t>SAMPLE FOOTER TEXT</a:t>
+            </a:r>
+          </a:p>
+        </p:txBody>
+      </p:sp>
+      <p:sp>
+        <p:nvSpPr>
+          <p:cNvPr id="11" name="Picture Placeholder 3">
+            <a:extLst>
+              <a:ext uri="{FF2B5EF4-FFF2-40B4-BE49-F238E27FC236}">
+                <a16:creationId xmlns:a16="http://schemas.microsoft.com/office/drawing/2014/main" id="{734977EB-9290-F835-06DB-68F16DAEBFCE}"/>
+              </a:ext>
+            </a:extLst>
+          </p:cNvPr>
+          <p:cNvSpPr>
+            <a:spLocks noGrp="1"/>
+          </p:cNvSpPr>
+          <p:nvPr>
+            <p:ph type="pic" sz="quarter" idx="13"/>
+          </p:nvPr>
+        </p:nvSpPr>
+        <p:spPr>
+          <a:xfrm>
+            <a:off x="804673" y="393289"/>
+            <a:ext cx="2084255" cy="6051054"/>
+          </a:xfrm>
+        </p:spPr>
+        <p:txBody>
+          <a:bodyPr/>
+          <a:lstStyle/>
+          <a:p>
+            <a:endParaRPr lang="en-SG"/>
+          </a:p>
+        </p:txBody>
+      </p:sp>
+      <p:sp>
+        <p:nvSpPr>
+          <p:cNvPr id="4" name="Content Placeholder 3">
+            <a:extLst>
+              <a:ext uri="{FF2B5EF4-FFF2-40B4-BE49-F238E27FC236}">
+                <a16:creationId xmlns:a16="http://schemas.microsoft.com/office/drawing/2014/main" id="{4847B9FD-505C-45B2-0408-650832D381AF}"/>
+              </a:ext>
+            </a:extLst>
+          </p:cNvPr>
+          <p:cNvSpPr>
+            <a:spLocks noGrp="1"/>
+          </p:cNvSpPr>
+          <p:nvPr>
+            <p:ph sz="quarter" idx="14"/>
+          </p:nvPr>
+        </p:nvSpPr>
+        <p:spPr>
+          <a:xfrm>
+            <a:off x="3209388" y="1828800"/>
+            <a:ext cx="7772400" cy="4206240"/>
+          </a:xfrm>
+        </p:spPr>
+        <p:txBody>
+          <a:bodyPr>
+            <a:normAutofit/>
+          </a:bodyPr>
+          <a:lstStyle/>
+          <a:p>
+            <a:r>
+              <a:rPr lang="en-SG" dirty="0"/>
+              <a:t>The system uses a CSV dataset to simulate IoT sensor data instead of real sensors, so it may not fully represent real-world conditions. The machine learning model is also trained on a limited dataset, which may affect its accuracy when new or different data is used.</a:t>
+            </a:r>
+          </a:p>
+        </p:txBody>
+      </p:sp>
+      <p:sp>
+        <p:nvSpPr>
+          <p:cNvPr id="5" name="Date Placeholder 4">
+            <a:extLst>
+              <a:ext uri="{FF2B5EF4-FFF2-40B4-BE49-F238E27FC236}">
+                <a16:creationId xmlns:a16="http://schemas.microsoft.com/office/drawing/2014/main" id="{D8734F52-C312-ECE5-BC0C-4A88FC95D9A2}"/>
+              </a:ext>
+            </a:extLst>
+          </p:cNvPr>
+          <p:cNvSpPr>
+            <a:spLocks noGrp="1"/>
+          </p:cNvSpPr>
+          <p:nvPr>
+            <p:ph type="dt" sz="half" idx="15"/>
+          </p:nvPr>
+        </p:nvSpPr>
+        <p:spPr>
+          <a:xfrm rot="5400000">
+            <a:off x="10040831" y="4206240"/>
+            <a:ext cx="3494314" cy="365125"/>
+          </a:xfrm>
+        </p:spPr>
+        <p:txBody>
+          <a:bodyPr anchor="ctr">
+            <a:normAutofit/>
+          </a:bodyPr>
+          <a:lstStyle/>
+          <a:p>
+            <a:pPr>
+              <a:spcAft>
+                <a:spcPts val="600"/>
+              </a:spcAft>
+            </a:pPr>
+            <a:fld id="{927C0DEB-4AE1-EA4D-826D-E3C22802B942}" type="datetime1">
+              <a:rPr lang="en-US" smtClean="0"/>
+              <a:pPr>
+                <a:spcAft>
+                  <a:spcPts val="600"/>
+                </a:spcAft>
+              </a:pPr>
+              <a:t>8/6/2026</a:t>
+            </a:fld>
+            <a:endParaRPr lang="en-US"/>
+          </a:p>
+        </p:txBody>
+      </p:sp>
+      <p:sp>
+        <p:nvSpPr>
+          <p:cNvPr id="6" name="Slide Number Placeholder 5">
+            <a:extLst>
+              <a:ext uri="{FF2B5EF4-FFF2-40B4-BE49-F238E27FC236}">
+                <a16:creationId xmlns:a16="http://schemas.microsoft.com/office/drawing/2014/main" id="{980D874A-FE4E-78E2-37B6-DBCE0EBC7009}"/>
+              </a:ext>
+            </a:extLst>
+          </p:cNvPr>
+          <p:cNvSpPr>
+            <a:spLocks noGrp="1"/>
+          </p:cNvSpPr>
+          <p:nvPr>
+            <p:ph type="sldNum" sz="quarter" idx="17"/>
+          </p:nvPr>
+        </p:nvSpPr>
+        <p:spPr>
+          <a:xfrm>
+            <a:off x="11573385" y="6229552"/>
+            <a:ext cx="429207" cy="365125"/>
+          </a:xfrm>
+        </p:spPr>
+        <p:txBody>
+          <a:bodyPr anchor="ctr">
+            <a:normAutofit/>
+          </a:bodyPr>
+          <a:lstStyle/>
+          <a:p>
+            <a:pPr>
+              <a:spcAft>
+                <a:spcPts val="600"/>
+              </a:spcAft>
+            </a:pPr>
+            <a:fld id="{CC057153-B650-4DEB-B370-79DDCFDCE934}" type="slidenum">
+              <a:rPr lang="en-US" smtClean="0"/>
+              <a:pPr>
+                <a:spcAft>
+                  <a:spcPts val="600"/>
+                </a:spcAft>
+              </a:pPr>
+              <a:t>18</a:t>
+            </a:fld>
+            <a:endParaRPr lang="en-US"/>
+          </a:p>
+        </p:txBody>
+      </p:sp>
+    </p:spTree>
+    <p:extLst>
+      <p:ext uri="{BB962C8B-B14F-4D97-AF65-F5344CB8AC3E}">
+        <p14:creationId xmlns:p14="http://schemas.microsoft.com/office/powerpoint/2010/main" val="3321126801"/>
+      </p:ext>
+    </p:extLst>
+  </p:cSld>
+  <p:clrMapOvr>
+    <a:masterClrMapping/>
+  </p:clrMapOvr>
+</p:sld>
+</file>
+
+<file path=ppt/slides/slide19.xml><?xml version="1.0" encoding="utf-8"?>
 <p:sld xmlns:a="http://schemas.openxmlformats.org/drawingml/2006/main" xmlns:r="http://schemas.openxmlformats.org/officeDocument/2006/relationships" xmlns:p="http://schemas.openxmlformats.org/presentationml/2006/main">
   <p:cSld>
     <p:spTree>
@@ -35298,12 +38881,12 @@
         </p:nvSpPr>
         <p:spPr>
           <a:xfrm>
-            <a:off x="1255032" y="862335"/>
-            <a:ext cx="4389120" cy="5120640"/>
+            <a:off x="6600623" y="822960"/>
+            <a:ext cx="4342337" cy="2103120"/>
           </a:xfrm>
         </p:spPr>
         <p:txBody>
-          <a:bodyPr anchor="ctr">
+          <a:bodyPr anchor="t">
             <a:normAutofit/>
           </a:bodyPr>
           <a:lstStyle/>
@@ -35328,7 +38911,7 @@
             <a:spLocks noGrp="1"/>
           </p:cNvSpPr>
           <p:nvPr>
-            <p:ph type="ftr" sz="quarter" idx="11"/>
+            <p:ph type="ftr" sz="quarter" idx="16"/>
           </p:nvPr>
         </p:nvSpPr>
         <p:spPr>
@@ -35355,6 +38938,43 @@
           </a:p>
         </p:txBody>
       </p:sp>
+      <p:pic>
+        <p:nvPicPr>
+          <p:cNvPr id="7" name="Picture 6" descr="Picture">
+            <a:extLst>
+              <a:ext uri="{FF2B5EF4-FFF2-40B4-BE49-F238E27FC236}">
+                <a16:creationId xmlns:a16="http://schemas.microsoft.com/office/drawing/2014/main" id="{A9E72EB2-4A4E-6262-18FA-5B39E2DB68CA}"/>
+              </a:ext>
+            </a:extLst>
+          </p:cNvPr>
+          <p:cNvPicPr>
+            <a:picLocks noChangeAspect="1"/>
+          </p:cNvPicPr>
+          <p:nvPr/>
+        </p:nvPicPr>
+        <p:blipFill>
+          <a:blip r:embed="rId3"/>
+          <a:srcRect l="11558" r="30119" b="2"/>
+          <a:stretch>
+            <a:fillRect/>
+          </a:stretch>
+        </p:blipFill>
+        <p:spPr>
+          <a:xfrm>
+            <a:off x="804672" y="402336"/>
+            <a:ext cx="5289176" cy="6053328"/>
+          </a:xfrm>
+          <a:prstGeom prst="rect">
+            <a:avLst/>
+          </a:prstGeom>
+          <a:noFill/>
+          <a:ln w="6350">
+            <a:solidFill>
+              <a:schemeClr val="tx1"/>
+            </a:solidFill>
+          </a:ln>
+        </p:spPr>
+      </p:pic>
       <p:sp>
         <p:nvSpPr>
           <p:cNvPr id="4" name="Content Placeholder 3">
@@ -35373,23 +38993,20 @@
         </p:nvSpPr>
         <p:spPr>
           <a:xfrm>
-            <a:off x="6547100" y="816615"/>
-            <a:ext cx="4389120" cy="5212080"/>
+            <a:off x="6599560" y="3620018"/>
+            <a:ext cx="4343400" cy="2515941"/>
           </a:xfrm>
         </p:spPr>
         <p:txBody>
-          <a:bodyPr anchor="ctr">
-            <a:normAutofit/>
+          <a:bodyPr>
+            <a:noAutofit/>
           </a:bodyPr>
           <a:lstStyle/>
           <a:p>
             <a:r>
-              <a:rPr lang="en-SG"/>
-              <a:t>Current environmental monitoring systems rely on manual analysis of sensor data, which is inefficient and prone to delayed responses. This project proposes an AI-powered Smart Environmental Monitoring System that automatically detects anomalies using machine learning and is deployed with Docker and Kubernetes for scalable and reliable operation.</a:t>
+              <a:rPr lang="en-SG" sz="2000" dirty="0"/>
+              <a:t>Current environmental monitoring systems rely on manual analysis of sensor data, which is inefficient and prone to delayed responses. </a:t>
             </a:r>
-          </a:p>
-          <a:p>
-            <a:endParaRPr lang="en-SG" dirty="0"/>
           </a:p>
         </p:txBody>
       </p:sp>
@@ -35406,7 +39023,7 @@
             <a:spLocks noGrp="1"/>
           </p:cNvSpPr>
           <p:nvPr>
-            <p:ph type="dt" sz="half" idx="10"/>
+            <p:ph type="dt" sz="half" idx="15"/>
           </p:nvPr>
         </p:nvSpPr>
         <p:spPr>
@@ -35433,7 +39050,7 @@
                   <a:spcPts val="600"/>
                 </a:spcAft>
               </a:pPr>
-              <a:t>7/27/2026</a:t>
+              <a:t>8/6/2026</a:t>
             </a:fld>
             <a:endParaRPr lang="en-US"/>
           </a:p>
@@ -35452,7 +39069,7 @@
             <a:spLocks noGrp="1"/>
           </p:cNvSpPr>
           <p:nvPr>
-            <p:ph type="sldNum" sz="quarter" idx="12"/>
+            <p:ph type="sldNum" sz="quarter" idx="17"/>
           </p:nvPr>
         </p:nvSpPr>
         <p:spPr>
@@ -35520,7 +39137,7 @@
           <p:cNvPr id="2" name="Title 1">
             <a:extLst>
               <a:ext uri="{FF2B5EF4-FFF2-40B4-BE49-F238E27FC236}">
-                <a16:creationId xmlns:a16="http://schemas.microsoft.com/office/drawing/2014/main" id="{55246322-0B3D-4729-5132-3C4A130943A7}"/>
+                <a16:creationId xmlns:a16="http://schemas.microsoft.com/office/drawing/2014/main" id="{AC54325F-70DF-3923-AECD-D2B55B5DFE5A}"/>
               </a:ext>
             </a:extLst>
           </p:cNvPr>
@@ -35531,13 +39148,25 @@
             <p:ph type="title"/>
           </p:nvPr>
         </p:nvSpPr>
-        <p:spPr/>
-        <p:txBody>
-          <a:bodyPr/>
+        <p:spPr>
+          <a:xfrm>
+            <a:off x="5303520" y="786384"/>
+            <a:ext cx="5669280" cy="931580"/>
+          </a:xfrm>
+        </p:spPr>
+        <p:txBody>
+          <a:bodyPr anchor="b">
+            <a:normAutofit/>
+          </a:bodyPr>
           <a:lstStyle/>
           <a:p>
+            <a:pPr>
+              <a:lnSpc>
+                <a:spcPct val="90000"/>
+              </a:lnSpc>
+            </a:pPr>
             <a:r>
-              <a:rPr lang="en-SG" dirty="0"/>
+              <a:rPr lang="en-SG" sz="3000" dirty="0"/>
               <a:t>Relevance to the real world</a:t>
             </a:r>
           </a:p>
@@ -35548,7 +39177,7 @@
           <p:cNvPr id="3" name="Footer Placeholder 2">
             <a:extLst>
               <a:ext uri="{FF2B5EF4-FFF2-40B4-BE49-F238E27FC236}">
-                <a16:creationId xmlns:a16="http://schemas.microsoft.com/office/drawing/2014/main" id="{0E30E219-9D5F-7F72-FC83-20A688DEAC8D}"/>
+                <a16:creationId xmlns:a16="http://schemas.microsoft.com/office/drawing/2014/main" id="{25928AFC-E3E8-7117-16DB-B09FFD6726EF}"/>
               </a:ext>
             </a:extLst>
           </p:cNvPr>
@@ -35556,28 +39185,78 @@
             <a:spLocks noGrp="1"/>
           </p:cNvSpPr>
           <p:nvPr>
-            <p:ph type="ftr" sz="quarter" idx="11"/>
+            <p:ph type="ftr" sz="quarter" idx="16"/>
           </p:nvPr>
         </p:nvSpPr>
-        <p:spPr/>
-        <p:txBody>
-          <a:bodyPr/>
+        <p:spPr>
+          <a:xfrm rot="16200000">
+            <a:off x="-1005840" y="1525384"/>
+            <a:ext cx="2805405" cy="365125"/>
+          </a:xfrm>
+        </p:spPr>
+        <p:txBody>
+          <a:bodyPr anchor="ctr">
+            <a:normAutofit/>
+          </a:bodyPr>
           <a:lstStyle/>
           <a:p>
+            <a:pPr>
+              <a:spcAft>
+                <a:spcPts val="600"/>
+              </a:spcAft>
+            </a:pPr>
             <a:r>
               <a:rPr lang="en-US"/>
               <a:t>SAMPLE FOOTER TEXT</a:t>
             </a:r>
-            <a:endParaRPr lang="en-US" dirty="0"/>
-          </a:p>
-        </p:txBody>
-      </p:sp>
+          </a:p>
+        </p:txBody>
+      </p:sp>
+      <p:pic>
+        <p:nvPicPr>
+          <p:cNvPr id="10" name="Picture Placeholder 9">
+            <a:extLst>
+              <a:ext uri="{FF2B5EF4-FFF2-40B4-BE49-F238E27FC236}">
+                <a16:creationId xmlns:a16="http://schemas.microsoft.com/office/drawing/2014/main" id="{864E04B3-7C26-C99E-6274-23EDA54E63F2}"/>
+              </a:ext>
+            </a:extLst>
+          </p:cNvPr>
+          <p:cNvPicPr>
+            <a:picLocks noGrp="1" noChangeAspect="1"/>
+          </p:cNvPicPr>
+          <p:nvPr>
+            <p:ph type="pic" sz="quarter" idx="13"/>
+          </p:nvPr>
+        </p:nvPicPr>
+        <p:blipFill>
+          <a:blip r:embed="rId3"/>
+          <a:srcRect l="16485" r="24771" b="2"/>
+          <a:stretch>
+            <a:fillRect/>
+          </a:stretch>
+        </p:blipFill>
+        <p:spPr>
+          <a:xfrm>
+            <a:off x="805544" y="400051"/>
+            <a:ext cx="4098966" cy="6052952"/>
+          </a:xfrm>
+          <a:prstGeom prst="rect">
+            <a:avLst/>
+          </a:prstGeom>
+          <a:noFill/>
+          <a:ln w="6350">
+            <a:solidFill>
+              <a:srgbClr val="2C2F21"/>
+            </a:solidFill>
+          </a:ln>
+        </p:spPr>
+      </p:pic>
       <p:sp>
         <p:nvSpPr>
           <p:cNvPr id="4" name="Content Placeholder 3">
             <a:extLst>
               <a:ext uri="{FF2B5EF4-FFF2-40B4-BE49-F238E27FC236}">
-                <a16:creationId xmlns:a16="http://schemas.microsoft.com/office/drawing/2014/main" id="{ACB4BD60-8BD7-8099-D66F-D520E6307C4D}"/>
+                <a16:creationId xmlns:a16="http://schemas.microsoft.com/office/drawing/2014/main" id="{99A27A71-EE09-D46D-7D28-B7D563897E47}"/>
               </a:ext>
             </a:extLst>
           </p:cNvPr>
@@ -35585,114 +39264,37 @@
             <a:spLocks noGrp="1"/>
           </p:cNvSpPr>
           <p:nvPr>
-            <p:ph sz="quarter" idx="13"/>
+            <p:ph sz="quarter" idx="14"/>
           </p:nvPr>
         </p:nvSpPr>
-        <p:spPr/>
-        <p:txBody>
-          <a:bodyPr/>
+        <p:spPr>
+          <a:xfrm>
+            <a:off x="5303520" y="2445326"/>
+            <a:ext cx="5669280" cy="3589713"/>
+          </a:xfrm>
+        </p:spPr>
+        <p:txBody>
+          <a:bodyPr>
+            <a:normAutofit/>
+          </a:bodyPr>
           <a:lstStyle/>
           <a:p>
             <a:r>
-              <a:rPr lang="en-SG" dirty="0"/>
-              <a:t>Manual monitoring of large volumes of environmental data is </a:t>
+              <a:rPr lang="en-SG" sz="2400" dirty="0"/>
+              <a:t>In a nuclear plant, catching a sudden change in air quality is a race against an invisible hazard. </a:t>
             </a:r>
+          </a:p>
+          <a:p>
             <a:r>
-              <a:rPr lang="en-SG" b="1" dirty="0"/>
-              <a:t>time-consuming</a:t>
+              <a:rPr lang="en-SG" sz="2400" dirty="0"/>
+              <a:t>Human operators get tired and miss things. </a:t>
             </a:r>
+          </a:p>
+          <a:p>
             <a:r>
-              <a:rPr lang="en-SG" dirty="0"/>
-              <a:t> and prone to </a:t>
+              <a:rPr lang="en-SG" sz="2400" dirty="0"/>
+              <a:t>By using AI, the plant can predict emergencies instead of just reacting to them. </a:t>
             </a:r>
-            <a:r>
-              <a:rPr lang="en-SG" b="1" dirty="0"/>
-              <a:t>human error</a:t>
-            </a:r>
-            <a:r>
-              <a:rPr lang="en-SG" dirty="0"/>
-              <a:t>.</a:t>
-            </a:r>
-          </a:p>
-          <a:p>
-            <a:r>
-              <a:rPr lang="en-SG" dirty="0"/>
-              <a:t>Delayed detection of abnormal conditions can lead to </a:t>
-            </a:r>
-            <a:r>
-              <a:rPr lang="en-SG" b="1" dirty="0"/>
-              <a:t>equipment damage</a:t>
-            </a:r>
-            <a:r>
-              <a:rPr lang="en-SG" dirty="0"/>
-              <a:t>, </a:t>
-            </a:r>
-            <a:r>
-              <a:rPr lang="en-SG" b="1" dirty="0"/>
-              <a:t>safety risks</a:t>
-            </a:r>
-            <a:r>
-              <a:rPr lang="en-SG" dirty="0"/>
-              <a:t>, and </a:t>
-            </a:r>
-            <a:r>
-              <a:rPr lang="en-SG" b="1" dirty="0"/>
-              <a:t>operational downtime</a:t>
-            </a:r>
-            <a:r>
-              <a:rPr lang="en-SG" dirty="0"/>
-              <a:t>.</a:t>
-            </a:r>
-          </a:p>
-          <a:p>
-            <a:r>
-              <a:rPr lang="en-SG" b="1" dirty="0"/>
-              <a:t>Machine learning</a:t>
-            </a:r>
-            <a:r>
-              <a:rPr lang="en-SG" dirty="0"/>
-              <a:t> automatically analyses environmental data to detect anomalies early, enabling faster decision-making.</a:t>
-            </a:r>
-          </a:p>
-          <a:p>
-            <a:r>
-              <a:rPr lang="en-SG" b="1" dirty="0"/>
-              <a:t>Docker</a:t>
-            </a:r>
-            <a:r>
-              <a:rPr lang="en-SG" dirty="0"/>
-              <a:t> and </a:t>
-            </a:r>
-            <a:r>
-              <a:rPr lang="en-SG" b="1" dirty="0"/>
-              <a:t>Kubernetes</a:t>
-            </a:r>
-            <a:r>
-              <a:rPr lang="en-SG" dirty="0"/>
-              <a:t> provide a scalable and reliable microservices platform that can support increasing numbers of sensors and users.</a:t>
-            </a:r>
-          </a:p>
-          <a:p>
-            <a:r>
-              <a:rPr lang="en-SG" dirty="0"/>
-              <a:t>The system transforms environmental monitoring from </a:t>
-            </a:r>
-            <a:r>
-              <a:rPr lang="en-SG" b="1" dirty="0"/>
-              <a:t>reactive</a:t>
-            </a:r>
-            <a:r>
-              <a:rPr lang="en-SG" dirty="0"/>
-              <a:t> to </a:t>
-            </a:r>
-            <a:r>
-              <a:rPr lang="en-SG" b="1" dirty="0"/>
-              <a:t>proactive</a:t>
-            </a:r>
-            <a:r>
-              <a:rPr lang="en-SG" dirty="0"/>
-              <a:t>, improving efficiency and reliability.</a:t>
-            </a:r>
           </a:p>
         </p:txBody>
       </p:sp>
@@ -35701,7 +39303,7 @@
           <p:cNvPr id="5" name="Date Placeholder 4">
             <a:extLst>
               <a:ext uri="{FF2B5EF4-FFF2-40B4-BE49-F238E27FC236}">
-                <a16:creationId xmlns:a16="http://schemas.microsoft.com/office/drawing/2014/main" id="{B1CFFEBF-A7C8-0A3F-7105-B1C503C1B628}"/>
+                <a16:creationId xmlns:a16="http://schemas.microsoft.com/office/drawing/2014/main" id="{10E32BF8-70BE-4C6A-3E27-065CD075D64A}"/>
               </a:ext>
             </a:extLst>
           </p:cNvPr>
@@ -35709,19 +39311,36 @@
             <a:spLocks noGrp="1"/>
           </p:cNvSpPr>
           <p:nvPr>
-            <p:ph type="dt" sz="half" idx="10"/>
+            <p:ph type="dt" sz="half" idx="15"/>
           </p:nvPr>
         </p:nvSpPr>
-        <p:spPr/>
-        <p:txBody>
-          <a:bodyPr/>
+        <p:spPr>
+          <a:xfrm rot="5400000">
+            <a:off x="10040831" y="4206240"/>
+            <a:ext cx="3494314" cy="365125"/>
+          </a:xfrm>
+        </p:spPr>
+        <p:txBody>
+          <a:bodyPr anchor="ctr">
+            <a:normAutofit/>
+          </a:bodyPr>
           <a:lstStyle/>
           <a:p>
+            <a:pPr>
+              <a:spcAft>
+                <a:spcPts val="600"/>
+              </a:spcAft>
+            </a:pPr>
             <a:fld id="{927C0DEB-4AE1-EA4D-826D-E3C22802B942}" type="datetime1">
               <a:rPr lang="en-US" smtClean="0"/>
-              <a:t>7/27/2026</a:t>
+              <a:pPr>
+                <a:spcAft>
+                  <a:spcPts val="600"/>
+                </a:spcAft>
+              </a:pPr>
+              <a:t>8/6/2026</a:t>
             </a:fld>
-            <a:endParaRPr lang="en-US" dirty="0"/>
+            <a:endParaRPr lang="en-US"/>
           </a:p>
         </p:txBody>
       </p:sp>
@@ -35730,7 +39349,7 @@
           <p:cNvPr id="6" name="Slide Number Placeholder 5">
             <a:extLst>
               <a:ext uri="{FF2B5EF4-FFF2-40B4-BE49-F238E27FC236}">
-                <a16:creationId xmlns:a16="http://schemas.microsoft.com/office/drawing/2014/main" id="{A8BA9DB4-3C1C-F59A-B451-43E2C29B63CD}"/>
+                <a16:creationId xmlns:a16="http://schemas.microsoft.com/office/drawing/2014/main" id="{3A8E4CFF-69F8-14D3-A725-7020C7222B98}"/>
               </a:ext>
             </a:extLst>
           </p:cNvPr>
@@ -35738,27 +39357,43 @@
             <a:spLocks noGrp="1"/>
           </p:cNvSpPr>
           <p:nvPr>
-            <p:ph type="sldNum" sz="quarter" idx="12"/>
+            <p:ph type="sldNum" sz="quarter" idx="17"/>
           </p:nvPr>
         </p:nvSpPr>
-        <p:spPr/>
-        <p:txBody>
-          <a:bodyPr/>
+        <p:spPr>
+          <a:xfrm>
+            <a:off x="11573385" y="6229552"/>
+            <a:ext cx="429207" cy="365125"/>
+          </a:xfrm>
+        </p:spPr>
+        <p:txBody>
+          <a:bodyPr anchor="ctr">
+            <a:normAutofit/>
+          </a:bodyPr>
           <a:lstStyle/>
           <a:p>
+            <a:pPr>
+              <a:spcAft>
+                <a:spcPts val="600"/>
+              </a:spcAft>
+            </a:pPr>
             <a:fld id="{CC057153-B650-4DEB-B370-79DDCFDCE934}" type="slidenum">
               <a:rPr lang="en-US" smtClean="0"/>
-              <a:pPr/>
+              <a:pPr>
+                <a:spcAft>
+                  <a:spcPts val="600"/>
+                </a:spcAft>
+              </a:pPr>
               <a:t>3</a:t>
             </a:fld>
-            <a:endParaRPr lang="en-US" dirty="0"/>
+            <a:endParaRPr lang="en-US"/>
           </a:p>
         </p:txBody>
       </p:sp>
     </p:spTree>
     <p:extLst>
       <p:ext uri="{BB962C8B-B14F-4D97-AF65-F5344CB8AC3E}">
-        <p14:creationId xmlns:p14="http://schemas.microsoft.com/office/powerpoint/2010/main" val="2964319661"/>
+        <p14:creationId xmlns:p14="http://schemas.microsoft.com/office/powerpoint/2010/main" val="3027127035"/>
       </p:ext>
     </p:extLst>
   </p:cSld>
@@ -35803,18 +39438,18 @@
         </p:nvSpPr>
         <p:spPr>
           <a:xfrm>
-            <a:off x="1255032" y="862335"/>
-            <a:ext cx="4389120" cy="5120640"/>
+            <a:off x="6395601" y="793501"/>
+            <a:ext cx="4668639" cy="820554"/>
           </a:xfrm>
         </p:spPr>
         <p:txBody>
-          <a:bodyPr anchor="ctr">
-            <a:normAutofit/>
+          <a:bodyPr anchor="b">
+            <a:normAutofit fontScale="90000"/>
           </a:bodyPr>
           <a:lstStyle/>
           <a:p>
             <a:r>
-              <a:rPr lang="en-SG" dirty="0"/>
+              <a:rPr lang="en-SG"/>
               <a:t>objectives</a:t>
             </a:r>
           </a:p>
@@ -35833,7 +39468,7 @@
             <a:spLocks noGrp="1"/>
           </p:cNvSpPr>
           <p:nvPr>
-            <p:ph type="ftr" sz="quarter" idx="11"/>
+            <p:ph type="ftr" sz="quarter" idx="15"/>
           </p:nvPr>
         </p:nvSpPr>
         <p:spPr>
@@ -35873,49 +39508,94 @@
             <a:spLocks noGrp="1"/>
           </p:cNvSpPr>
           <p:nvPr>
-            <p:ph sz="quarter" idx="13"/>
+            <p:ph type="body" sz="quarter" idx="17"/>
           </p:nvPr>
         </p:nvSpPr>
         <p:spPr>
           <a:xfrm>
-            <a:off x="6547100" y="816615"/>
-            <a:ext cx="4389120" cy="5212080"/>
+            <a:off x="6395598" y="2064327"/>
+            <a:ext cx="4668642" cy="3860736"/>
           </a:xfrm>
         </p:spPr>
         <p:txBody>
-          <a:bodyPr anchor="ctr">
+          <a:bodyPr>
             <a:normAutofit/>
           </a:bodyPr>
           <a:lstStyle/>
           <a:p>
             <a:pPr marL="342900" indent="-342900">
+              <a:lnSpc>
+                <a:spcPct val="90000"/>
+              </a:lnSpc>
               <a:buFont typeface="+mj-lt"/>
               <a:buAutoNum type="arabicPeriod"/>
             </a:pPr>
             <a:r>
-              <a:rPr lang="en-SG" dirty="0"/>
+              <a:rPr lang="en-SG" sz="2400" dirty="0"/>
               <a:t>Automated Analysis: Use machine learning to interpret sensor data instead of relying solely on raw readings</a:t>
             </a:r>
             <a:br>
-              <a:rPr lang="en-SG" dirty="0"/>
+              <a:rPr lang="en-SG" sz="2400" dirty="0"/>
             </a:br>
-            <a:endParaRPr lang="en-SG" dirty="0"/>
+            <a:endParaRPr lang="en-SG" sz="2400" dirty="0"/>
           </a:p>
           <a:p>
             <a:pPr marL="342900" indent="-342900">
+              <a:lnSpc>
+                <a:spcPct val="90000"/>
+              </a:lnSpc>
               <a:buFont typeface="+mj-lt"/>
               <a:buAutoNum type="arabicPeriod"/>
             </a:pPr>
             <a:r>
-              <a:rPr lang="en-SG" dirty="0"/>
+              <a:rPr lang="en-SG" sz="2400" dirty="0"/>
               <a:t>Early Detection: Identify abnormal environmental conditions (e.g., pollution spikes, temperature anomalies) before they escalate.</a:t>
             </a:r>
           </a:p>
           <a:p>
-            <a:endParaRPr lang="en-SG" dirty="0"/>
-          </a:p>
-        </p:txBody>
-      </p:sp>
+            <a:pPr>
+              <a:lnSpc>
+                <a:spcPct val="90000"/>
+              </a:lnSpc>
+            </a:pPr>
+            <a:endParaRPr lang="en-SG" sz="2400" dirty="0"/>
+          </a:p>
+        </p:txBody>
+      </p:sp>
+      <p:pic>
+        <p:nvPicPr>
+          <p:cNvPr id="12" name="Picture Placeholder 11">
+            <a:extLst>
+              <a:ext uri="{FF2B5EF4-FFF2-40B4-BE49-F238E27FC236}">
+                <a16:creationId xmlns:a16="http://schemas.microsoft.com/office/drawing/2014/main" id="{E8B2DCCD-0ECD-6944-4C03-1D24C21835F5}"/>
+              </a:ext>
+            </a:extLst>
+          </p:cNvPr>
+          <p:cNvPicPr>
+            <a:picLocks noGrp="1" noChangeAspect="1"/>
+          </p:cNvPicPr>
+          <p:nvPr>
+            <p:ph type="pic" sz="quarter" idx="13"/>
+          </p:nvPr>
+        </p:nvPicPr>
+        <p:blipFill>
+          <a:blip r:embed="rId3"/>
+          <a:srcRect l="42688" r="13624" b="1"/>
+          <a:stretch>
+            <a:fillRect/>
+          </a:stretch>
+        </p:blipFill>
+        <p:spPr>
+          <a:xfrm>
+            <a:off x="804672" y="397791"/>
+            <a:ext cx="5289176" cy="6053328"/>
+          </a:xfrm>
+          <a:prstGeom prst="rect">
+            <a:avLst/>
+          </a:prstGeom>
+          <a:noFill/>
+        </p:spPr>
+      </p:pic>
       <p:sp>
         <p:nvSpPr>
           <p:cNvPr id="5" name="Date Placeholder 4">
@@ -35929,7 +39609,7 @@
             <a:spLocks noGrp="1"/>
           </p:cNvSpPr>
           <p:nvPr>
-            <p:ph type="dt" sz="half" idx="10"/>
+            <p:ph type="dt" sz="half" idx="14"/>
           </p:nvPr>
         </p:nvSpPr>
         <p:spPr>
@@ -35956,7 +39636,7 @@
                   <a:spcPts val="600"/>
                 </a:spcAft>
               </a:pPr>
-              <a:t>7/27/2026</a:t>
+              <a:t>8/6/2026</a:t>
             </a:fld>
             <a:endParaRPr lang="en-US"/>
           </a:p>
@@ -35975,7 +39655,7 @@
             <a:spLocks noGrp="1"/>
           </p:cNvSpPr>
           <p:nvPr>
-            <p:ph type="sldNum" sz="quarter" idx="12"/>
+            <p:ph type="sldNum" sz="quarter" idx="16"/>
           </p:nvPr>
         </p:nvSpPr>
         <p:spPr>
@@ -36056,12 +39736,12 @@
         </p:nvSpPr>
         <p:spPr>
           <a:xfrm>
-            <a:off x="1245108" y="786384"/>
-            <a:ext cx="4023360" cy="1280160"/>
+            <a:off x="1207008" y="786384"/>
+            <a:ext cx="7772400" cy="914400"/>
           </a:xfrm>
         </p:spPr>
         <p:txBody>
-          <a:bodyPr anchor="t">
+          <a:bodyPr anchor="b">
             <a:normAutofit/>
           </a:bodyPr>
           <a:lstStyle/>
@@ -36086,7 +39766,7 @@
             <a:spLocks noGrp="1"/>
           </p:cNvSpPr>
           <p:nvPr>
-            <p:ph type="ftr" sz="quarter" idx="11"/>
+            <p:ph type="ftr" sz="quarter" idx="16"/>
           </p:nvPr>
         </p:nvSpPr>
         <p:spPr>
@@ -36115,36 +39795,6 @@
       </p:sp>
       <p:sp>
         <p:nvSpPr>
-          <p:cNvPr id="11" name="Picture Placeholder 3">
-            <a:extLst>
-              <a:ext uri="{FF2B5EF4-FFF2-40B4-BE49-F238E27FC236}">
-                <a16:creationId xmlns:a16="http://schemas.microsoft.com/office/drawing/2014/main" id="{219EA569-FBDF-BD75-F62D-BCFC76D305F0}"/>
-              </a:ext>
-            </a:extLst>
-          </p:cNvPr>
-          <p:cNvSpPr>
-            <a:spLocks noGrp="1"/>
-          </p:cNvSpPr>
-          <p:nvPr>
-            <p:ph type="pic" sz="quarter" idx="13"/>
-          </p:nvPr>
-        </p:nvSpPr>
-        <p:spPr>
-          <a:xfrm>
-            <a:off x="1220455" y="2396086"/>
-            <a:ext cx="4070907" cy="3637825"/>
-          </a:xfrm>
-        </p:spPr>
-        <p:txBody>
-          <a:bodyPr/>
-          <a:lstStyle/>
-          <a:p>
-            <a:endParaRPr lang="en-SG"/>
-          </a:p>
-        </p:txBody>
-      </p:sp>
-      <p:sp>
-        <p:nvSpPr>
           <p:cNvPr id="4" name="Content Placeholder 3">
             <a:extLst>
               <a:ext uri="{FF2B5EF4-FFF2-40B4-BE49-F238E27FC236}">
@@ -36161,8 +39811,8 @@
         </p:nvSpPr>
         <p:spPr>
           <a:xfrm>
-            <a:off x="5669280" y="786384"/>
-            <a:ext cx="5303520" cy="5303520"/>
+            <a:off x="1207008" y="1828800"/>
+            <a:ext cx="7772400" cy="4206240"/>
           </a:xfrm>
         </p:spPr>
         <p:txBody>
@@ -36249,6 +39899,38 @@
           </a:p>
         </p:txBody>
       </p:sp>
+      <p:pic>
+        <p:nvPicPr>
+          <p:cNvPr id="13" name="Picture 12" descr="Digital financial graph">
+            <a:extLst>
+              <a:ext uri="{FF2B5EF4-FFF2-40B4-BE49-F238E27FC236}">
+                <a16:creationId xmlns:a16="http://schemas.microsoft.com/office/drawing/2014/main" id="{FC2DDB1C-24B4-F8A9-BD7F-FBFDF95E7CAF}"/>
+              </a:ext>
+            </a:extLst>
+          </p:cNvPr>
+          <p:cNvPicPr>
+            <a:picLocks noChangeAspect="1"/>
+          </p:cNvPicPr>
+          <p:nvPr/>
+        </p:nvPicPr>
+        <p:blipFill>
+          <a:blip r:embed="rId2"/>
+          <a:srcRect l="47955" r="32670" b="2"/>
+          <a:stretch>
+            <a:fillRect/>
+          </a:stretch>
+        </p:blipFill>
+        <p:spPr>
+          <a:xfrm>
+            <a:off x="9287478" y="393289"/>
+            <a:ext cx="2084255" cy="6051054"/>
+          </a:xfrm>
+          <a:prstGeom prst="rect">
+            <a:avLst/>
+          </a:prstGeom>
+          <a:noFill/>
+        </p:spPr>
+      </p:pic>
       <p:sp>
         <p:nvSpPr>
           <p:cNvPr id="5" name="Date Placeholder 4">
@@ -36262,7 +39944,7 @@
             <a:spLocks noGrp="1"/>
           </p:cNvSpPr>
           <p:nvPr>
-            <p:ph type="dt" sz="half" idx="10"/>
+            <p:ph type="dt" sz="half" idx="15"/>
           </p:nvPr>
         </p:nvSpPr>
         <p:spPr>
@@ -36289,7 +39971,7 @@
                   <a:spcPts val="600"/>
                 </a:spcAft>
               </a:pPr>
-              <a:t>7/27/2026</a:t>
+              <a:t>8/6/2026</a:t>
             </a:fld>
             <a:endParaRPr lang="en-US"/>
           </a:p>
@@ -36308,7 +39990,7 @@
             <a:spLocks noGrp="1"/>
           </p:cNvSpPr>
           <p:nvPr>
-            <p:ph type="sldNum" sz="quarter" idx="12"/>
+            <p:ph type="sldNum" sz="quarter" idx="17"/>
           </p:nvPr>
         </p:nvSpPr>
         <p:spPr>
@@ -36376,7 +40058,7 @@
           <p:cNvPr id="2" name="Title 1">
             <a:extLst>
               <a:ext uri="{FF2B5EF4-FFF2-40B4-BE49-F238E27FC236}">
-                <a16:creationId xmlns:a16="http://schemas.microsoft.com/office/drawing/2014/main" id="{2DFFA181-16A4-7A9A-470B-6E45C0622691}"/>
+                <a16:creationId xmlns:a16="http://schemas.microsoft.com/office/drawing/2014/main" id="{47B30B5F-DC3E-C839-86F2-88778AD50D44}"/>
               </a:ext>
             </a:extLst>
           </p:cNvPr>
@@ -36384,19 +40066,25 @@
             <a:spLocks noGrp="1"/>
           </p:cNvSpPr>
           <p:nvPr>
-            <p:ph type="ctrTitle"/>
+            <p:ph type="title"/>
           </p:nvPr>
         </p:nvSpPr>
-        <p:spPr/>
-        <p:txBody>
-          <a:bodyPr/>
+        <p:spPr>
+          <a:xfrm>
+            <a:off x="1255032" y="862335"/>
+            <a:ext cx="4389120" cy="5120640"/>
+          </a:xfrm>
+        </p:spPr>
+        <p:txBody>
+          <a:bodyPr anchor="ctr">
+            <a:normAutofit/>
+          </a:bodyPr>
           <a:lstStyle/>
           <a:p>
             <a:r>
-              <a:rPr lang="en-US" dirty="0"/>
-              <a:t>DATA SOURCES</a:t>
+              <a:rPr lang="en-SG" dirty="0"/>
+              <a:t>Data sources</a:t>
             </a:r>
-            <a:endParaRPr lang="en-SG" dirty="0"/>
           </a:p>
         </p:txBody>
       </p:sp>
@@ -36405,7 +40093,7 @@
           <p:cNvPr id="3" name="Footer Placeholder 2">
             <a:extLst>
               <a:ext uri="{FF2B5EF4-FFF2-40B4-BE49-F238E27FC236}">
-                <a16:creationId xmlns:a16="http://schemas.microsoft.com/office/drawing/2014/main" id="{EDA3C22C-23C6-3AD7-5E8D-02A5C12887BC}"/>
+                <a16:creationId xmlns:a16="http://schemas.microsoft.com/office/drawing/2014/main" id="{04A4F64C-5856-0BD6-5177-BB6B1F57ECC3}"/>
               </a:ext>
             </a:extLst>
           </p:cNvPr>
@@ -36416,25 +40104,71 @@
             <p:ph type="ftr" sz="quarter" idx="11"/>
           </p:nvPr>
         </p:nvSpPr>
-        <p:spPr/>
-        <p:txBody>
-          <a:bodyPr/>
+        <p:spPr>
+          <a:xfrm rot="16200000">
+            <a:off x="-1005840" y="1525384"/>
+            <a:ext cx="2805405" cy="365125"/>
+          </a:xfrm>
+        </p:spPr>
+        <p:txBody>
+          <a:bodyPr anchor="ctr">
+            <a:normAutofit/>
+          </a:bodyPr>
           <a:lstStyle/>
           <a:p>
+            <a:pPr>
+              <a:spcAft>
+                <a:spcPts val="600"/>
+              </a:spcAft>
+            </a:pPr>
             <a:r>
               <a:rPr lang="en-US"/>
               <a:t>SAMPLE FOOTER TEXT</a:t>
             </a:r>
-            <a:endParaRPr lang="en-US" dirty="0"/>
-          </a:p>
-        </p:txBody>
-      </p:sp>
-      <p:sp>
-        <p:nvSpPr>
-          <p:cNvPr id="4" name="Date Placeholder 3">
-            <a:extLst>
-              <a:ext uri="{FF2B5EF4-FFF2-40B4-BE49-F238E27FC236}">
-                <a16:creationId xmlns:a16="http://schemas.microsoft.com/office/drawing/2014/main" id="{D6152659-5563-EC41-26B2-E75502BC1D6E}"/>
+          </a:p>
+        </p:txBody>
+      </p:sp>
+      <p:sp>
+        <p:nvSpPr>
+          <p:cNvPr id="4" name="Content Placeholder 3">
+            <a:extLst>
+              <a:ext uri="{FF2B5EF4-FFF2-40B4-BE49-F238E27FC236}">
+                <a16:creationId xmlns:a16="http://schemas.microsoft.com/office/drawing/2014/main" id="{78E76031-8AF8-B309-4CFC-5113258500C7}"/>
+              </a:ext>
+            </a:extLst>
+          </p:cNvPr>
+          <p:cNvSpPr>
+            <a:spLocks noGrp="1"/>
+          </p:cNvSpPr>
+          <p:nvPr>
+            <p:ph sz="quarter" idx="13"/>
+          </p:nvPr>
+        </p:nvSpPr>
+        <p:spPr>
+          <a:xfrm>
+            <a:off x="6547100" y="816615"/>
+            <a:ext cx="4389120" cy="5212080"/>
+          </a:xfrm>
+        </p:spPr>
+        <p:txBody>
+          <a:bodyPr anchor="ctr">
+            <a:normAutofit/>
+          </a:bodyPr>
+          <a:lstStyle/>
+          <a:p>
+            <a:r>
+              <a:rPr lang="en-SG" dirty="0"/>
+              <a:t>Data is collected through sensors that is placed in a controlled environment. The controlled environment is meant to simulate work conditions in a dangerous environment such has a chemical or nuclear powerplants. The following features of the data are Temperature, Humidity and Air Quality.</a:t>
+            </a:r>
+          </a:p>
+        </p:txBody>
+      </p:sp>
+      <p:sp>
+        <p:nvSpPr>
+          <p:cNvPr id="5" name="Date Placeholder 4">
+            <a:extLst>
+              <a:ext uri="{FF2B5EF4-FFF2-40B4-BE49-F238E27FC236}">
+                <a16:creationId xmlns:a16="http://schemas.microsoft.com/office/drawing/2014/main" id="{845735E7-7169-251C-57A1-2C2426BA9C8D}"/>
               </a:ext>
             </a:extLst>
           </p:cNvPr>
@@ -36445,25 +40179,42 @@
             <p:ph type="dt" sz="half" idx="10"/>
           </p:nvPr>
         </p:nvSpPr>
-        <p:spPr/>
-        <p:txBody>
-          <a:bodyPr/>
+        <p:spPr>
+          <a:xfrm rot="5400000">
+            <a:off x="10040831" y="4206240"/>
+            <a:ext cx="3494314" cy="365125"/>
+          </a:xfrm>
+        </p:spPr>
+        <p:txBody>
+          <a:bodyPr anchor="ctr">
+            <a:normAutofit/>
+          </a:bodyPr>
           <a:lstStyle/>
           <a:p>
-            <a:fld id="{53D1C53B-D534-AA48-85B3-4F5B03DDCBA8}" type="datetime1">
+            <a:pPr>
+              <a:spcAft>
+                <a:spcPts val="600"/>
+              </a:spcAft>
+            </a:pPr>
+            <a:fld id="{927C0DEB-4AE1-EA4D-826D-E3C22802B942}" type="datetime1">
               <a:rPr lang="en-US" smtClean="0"/>
-              <a:t>7/27/2026</a:t>
+              <a:pPr>
+                <a:spcAft>
+                  <a:spcPts val="600"/>
+                </a:spcAft>
+              </a:pPr>
+              <a:t>8/6/2026</a:t>
             </a:fld>
-            <a:endParaRPr lang="en-US" dirty="0"/>
-          </a:p>
-        </p:txBody>
-      </p:sp>
-      <p:sp>
-        <p:nvSpPr>
-          <p:cNvPr id="5" name="Slide Number Placeholder 4">
-            <a:extLst>
-              <a:ext uri="{FF2B5EF4-FFF2-40B4-BE49-F238E27FC236}">
-                <a16:creationId xmlns:a16="http://schemas.microsoft.com/office/drawing/2014/main" id="{1460C55C-E9B4-3D3E-8062-271E6DBDB208}"/>
+            <a:endParaRPr lang="en-US"/>
+          </a:p>
+        </p:txBody>
+      </p:sp>
+      <p:sp>
+        <p:nvSpPr>
+          <p:cNvPr id="6" name="Slide Number Placeholder 5">
+            <a:extLst>
+              <a:ext uri="{FF2B5EF4-FFF2-40B4-BE49-F238E27FC236}">
+                <a16:creationId xmlns:a16="http://schemas.microsoft.com/office/drawing/2014/main" id="{F1E7D478-0849-3FE2-631B-D5A7012777CC}"/>
               </a:ext>
             </a:extLst>
           </p:cNvPr>
@@ -36474,24 +40225,40 @@
             <p:ph type="sldNum" sz="quarter" idx="12"/>
           </p:nvPr>
         </p:nvSpPr>
-        <p:spPr/>
-        <p:txBody>
-          <a:bodyPr/>
+        <p:spPr>
+          <a:xfrm>
+            <a:off x="11573385" y="6229552"/>
+            <a:ext cx="429207" cy="365125"/>
+          </a:xfrm>
+        </p:spPr>
+        <p:txBody>
+          <a:bodyPr anchor="ctr">
+            <a:normAutofit/>
+          </a:bodyPr>
           <a:lstStyle/>
           <a:p>
+            <a:pPr>
+              <a:spcAft>
+                <a:spcPts val="600"/>
+              </a:spcAft>
+            </a:pPr>
             <a:fld id="{CC057153-B650-4DEB-B370-79DDCFDCE934}" type="slidenum">
               <a:rPr lang="en-US" smtClean="0"/>
-              <a:pPr/>
+              <a:pPr>
+                <a:spcAft>
+                  <a:spcPts val="600"/>
+                </a:spcAft>
+              </a:pPr>
               <a:t>6</a:t>
             </a:fld>
-            <a:endParaRPr lang="en-US" dirty="0"/>
+            <a:endParaRPr lang="en-US"/>
           </a:p>
         </p:txBody>
       </p:sp>
     </p:spTree>
     <p:extLst>
       <p:ext uri="{BB962C8B-B14F-4D97-AF65-F5344CB8AC3E}">
-        <p14:creationId xmlns:p14="http://schemas.microsoft.com/office/powerpoint/2010/main" val="1755218782"/>
+        <p14:creationId xmlns:p14="http://schemas.microsoft.com/office/powerpoint/2010/main" val="1684626533"/>
       </p:ext>
     </p:extLst>
   </p:cSld>
@@ -36604,7 +40371,7 @@
           <a:p>
             <a:fld id="{53D1C53B-D534-AA48-85B3-4F5B03DDCBA8}" type="datetime1">
               <a:rPr lang="en-US" smtClean="0"/>
-              <a:t>7/27/2026</a:t>
+              <a:t>8/6/2026</a:t>
             </a:fld>
             <a:endParaRPr lang="en-US" dirty="0"/>
           </a:p>
@@ -36756,7 +40523,7 @@
           <a:p>
             <a:fld id="{927C0DEB-4AE1-EA4D-826D-E3C22802B942}" type="datetime1">
               <a:rPr lang="en-US" smtClean="0"/>
-              <a:t>7/27/2026</a:t>
+              <a:t>8/6/2026</a:t>
             </a:fld>
             <a:endParaRPr lang="en-US" dirty="0"/>
           </a:p>
@@ -37653,7 +41420,7 @@
           <p:cNvPr id="2" name="Title 1">
             <a:extLst>
               <a:ext uri="{FF2B5EF4-FFF2-40B4-BE49-F238E27FC236}">
-                <a16:creationId xmlns:a16="http://schemas.microsoft.com/office/drawing/2014/main" id="{B8EC085A-D7BE-6136-7F2E-5410A888566D}"/>
+                <a16:creationId xmlns:a16="http://schemas.microsoft.com/office/drawing/2014/main" id="{3A48C831-1047-9AFF-0FCB-3E67CFF1E453}"/>
               </a:ext>
             </a:extLst>
           </p:cNvPr>
@@ -37666,20 +41433,29 @@
         </p:nvSpPr>
         <p:spPr>
           <a:xfrm>
-            <a:off x="1255032" y="862335"/>
-            <a:ext cx="4389120" cy="5120640"/>
+            <a:off x="1245108" y="786384"/>
+            <a:ext cx="2834640" cy="1453896"/>
           </a:xfrm>
         </p:spPr>
         <p:txBody>
-          <a:bodyPr anchor="ctr">
+          <a:bodyPr anchor="t">
             <a:normAutofit/>
           </a:bodyPr>
           <a:lstStyle/>
           <a:p>
+            <a:pPr>
+              <a:lnSpc>
+                <a:spcPct val="90000"/>
+              </a:lnSpc>
+            </a:pPr>
             <a:r>
-              <a:rPr lang="en-SG" dirty="0"/>
-              <a:t>DATA INGESTION</a:t>
+              <a:rPr lang="en-SG" sz="2700" b="1"/>
+              <a:t>Sensor Architecture</a:t>
             </a:r>
+            <a:br>
+              <a:rPr lang="en-SG" sz="2700"/>
+            </a:br>
+            <a:endParaRPr lang="en-SG" sz="2700"/>
           </a:p>
         </p:txBody>
       </p:sp>
@@ -37688,7 +41464,7 @@
           <p:cNvPr id="3" name="Footer Placeholder 2">
             <a:extLst>
               <a:ext uri="{FF2B5EF4-FFF2-40B4-BE49-F238E27FC236}">
-                <a16:creationId xmlns:a16="http://schemas.microsoft.com/office/drawing/2014/main" id="{DDCBB3B8-6DED-E7E9-1A36-A0F263B4E7F5}"/>
+                <a16:creationId xmlns:a16="http://schemas.microsoft.com/office/drawing/2014/main" id="{BB80AED4-A613-E2F1-FC0A-2F4B91743229}"/>
               </a:ext>
             </a:extLst>
           </p:cNvPr>
@@ -37723,47 +41499,67 @@
           </a:p>
         </p:txBody>
       </p:sp>
-      <p:sp>
-        <p:nvSpPr>
-          <p:cNvPr id="4" name="Content Placeholder 3">
-            <a:extLst>
-              <a:ext uri="{FF2B5EF4-FFF2-40B4-BE49-F238E27FC236}">
-                <a16:creationId xmlns:a16="http://schemas.microsoft.com/office/drawing/2014/main" id="{49D1D6E6-BB52-24CA-7576-B7194F347DE7}"/>
-              </a:ext>
-            </a:extLst>
-          </p:cNvPr>
-          <p:cNvSpPr>
-            <a:spLocks noGrp="1"/>
-          </p:cNvSpPr>
+      <p:pic>
+        <p:nvPicPr>
+          <p:cNvPr id="9" name="Picture Placeholder 8">
+            <a:extLst>
+              <a:ext uri="{FF2B5EF4-FFF2-40B4-BE49-F238E27FC236}">
+                <a16:creationId xmlns:a16="http://schemas.microsoft.com/office/drawing/2014/main" id="{AF12DC60-064D-976A-CA80-6EF8EB83D9E2}"/>
+              </a:ext>
+            </a:extLst>
+          </p:cNvPr>
+          <p:cNvPicPr>
+            <a:picLocks noGrp="1" noChangeAspect="1"/>
+          </p:cNvPicPr>
           <p:nvPr>
-            <p:ph sz="quarter" idx="13"/>
+            <p:ph type="pic" sz="quarter" idx="13"/>
           </p:nvPr>
-        </p:nvSpPr>
+        </p:nvPicPr>
+        <p:blipFill>
+          <a:blip r:embed="rId2"/>
+          <a:srcRect l="10780" r="10780"/>
+          <a:stretch/>
+        </p:blipFill>
         <p:spPr>
-          <a:xfrm>
-            <a:off x="6547100" y="816615"/>
-            <a:ext cx="4389120" cy="5212080"/>
-          </a:xfrm>
+          <a:prstGeom prst="rect">
+            <a:avLst/>
+          </a:prstGeom>
+          <a:blipFill dpi="0" rotWithShape="1">
+            <a:blip r:embed="rId3">
+              <a:alphaModFix amt="20000"/>
+              <a:extLst>
+                <a:ext uri="{BEBA8EAE-BF5A-486C-A8C5-ECC9F3942E4B}">
+                  <a14:imgProps xmlns:a14="http://schemas.microsoft.com/office/drawing/2010/main">
+                    <a14:imgLayer r:embed="rId4">
+                      <a14:imgEffect>
+                        <a14:saturation sat="0"/>
+                      </a14:imgEffect>
+                      <a14:imgEffect>
+                        <a14:brightnessContrast bright="-27000" contrast="59000"/>
+                      </a14:imgEffect>
+                    </a14:imgLayer>
+                  </a14:imgProps>
+                </a:ext>
+              </a:extLst>
+            </a:blip>
+            <a:srcRect/>
+            <a:stretch>
+              <a:fillRect t="-1" b="-10882"/>
+            </a:stretch>
+          </a:blipFill>
+          <a:ln w="6350">
+            <a:solidFill>
+              <a:srgbClr val="2C2F21"/>
+            </a:solidFill>
+          </a:ln>
         </p:spPr>
-        <p:txBody>
-          <a:bodyPr anchor="ctr">
-            <a:normAutofit/>
-          </a:bodyPr>
-          <a:lstStyle/>
-          <a:p>
-            <a:r>
-              <a:rPr lang="en-SG" dirty="0"/>
-              <a:t>The Data Ingestion Service collects real-time sensor data, such as temperature, humidity, CO₂, and air quality, from IoT sensors. It validates the data, stores it in the database, and sends it to the Machine Learning Service for analysis. Separating this function into its own microservice makes the system easier to scale, maintain, and expand.</a:t>
-            </a:r>
-          </a:p>
-        </p:txBody>
-      </p:sp>
+      </p:pic>
       <p:sp>
         <p:nvSpPr>
           <p:cNvPr id="5" name="Date Placeholder 4">
             <a:extLst>
               <a:ext uri="{FF2B5EF4-FFF2-40B4-BE49-F238E27FC236}">
-                <a16:creationId xmlns:a16="http://schemas.microsoft.com/office/drawing/2014/main" id="{8F9AF1D9-FFF5-1F73-5E2B-9EF32E6D5DC7}"/>
+                <a16:creationId xmlns:a16="http://schemas.microsoft.com/office/drawing/2014/main" id="{4326730E-ABF9-33B8-3CB1-A9D3790BD2E1}"/>
               </a:ext>
             </a:extLst>
           </p:cNvPr>
@@ -37798,7 +41594,7 @@
                   <a:spcPts val="600"/>
                 </a:spcAft>
               </a:pPr>
-              <a:t>7/27/2026</a:t>
+              <a:t>8/6/2026</a:t>
             </a:fld>
             <a:endParaRPr lang="en-US"/>
           </a:p>
@@ -37809,7 +41605,7 @@
           <p:cNvPr id="6" name="Slide Number Placeholder 5">
             <a:extLst>
               <a:ext uri="{FF2B5EF4-FFF2-40B4-BE49-F238E27FC236}">
-                <a16:creationId xmlns:a16="http://schemas.microsoft.com/office/drawing/2014/main" id="{4DA8EEF1-3820-1A48-D817-0DF67D8835B9}"/>
+                <a16:creationId xmlns:a16="http://schemas.microsoft.com/office/drawing/2014/main" id="{20D8CC46-1D39-AFCF-5732-339A213F2CEB}"/>
               </a:ext>
             </a:extLst>
           </p:cNvPr>
@@ -37850,10 +41646,41 @@
           </a:p>
         </p:txBody>
       </p:sp>
+      <p:graphicFrame>
+        <p:nvGraphicFramePr>
+          <p:cNvPr id="8" name="Content Placeholder 3">
+            <a:extLst>
+              <a:ext uri="{FF2B5EF4-FFF2-40B4-BE49-F238E27FC236}">
+                <a16:creationId xmlns:a16="http://schemas.microsoft.com/office/drawing/2014/main" id="{3153A1D7-C632-F994-BD82-444622FA6DAC}"/>
+              </a:ext>
+            </a:extLst>
+          </p:cNvPr>
+          <p:cNvGraphicFramePr>
+            <a:graphicFrameLocks noGrp="1"/>
+          </p:cNvGraphicFramePr>
+          <p:nvPr>
+            <p:ph sz="quarter" idx="14"/>
+            <p:extLst>
+              <p:ext uri="{D42A27DB-BD31-4B8C-83A1-F6EECF244321}">
+                <p14:modId xmlns:p14="http://schemas.microsoft.com/office/powerpoint/2010/main" val="1200259212"/>
+              </p:ext>
+            </p:extLst>
+          </p:nvPr>
+        </p:nvGraphicFramePr>
+        <p:xfrm>
+          <a:off x="4480560" y="786384"/>
+          <a:ext cx="6492240" cy="5486400"/>
+        </p:xfrm>
+        <a:graphic>
+          <a:graphicData uri="http://schemas.openxmlformats.org/drawingml/2006/diagram">
+            <dgm:relIds xmlns:dgm="http://schemas.openxmlformats.org/drawingml/2006/diagram" xmlns:r="http://schemas.openxmlformats.org/officeDocument/2006/relationships" r:dm="rId5" r:lo="rId6" r:qs="rId7" r:cs="rId8"/>
+          </a:graphicData>
+        </a:graphic>
+      </p:graphicFrame>
     </p:spTree>
     <p:extLst>
       <p:ext uri="{BB962C8B-B14F-4D97-AF65-F5344CB8AC3E}">
-        <p14:creationId xmlns:p14="http://schemas.microsoft.com/office/powerpoint/2010/main" val="2014340193"/>
+        <p14:creationId xmlns:p14="http://schemas.microsoft.com/office/powerpoint/2010/main" val="2302930651"/>
       </p:ext>
     </p:extLst>
   </p:cSld>
